--- a/docs/plots/carbo/jx_carbo_linsubhr_ratio_hosp7.pptx
+++ b/docs/plots/carbo/jx_carbo_linsubhr_ratio_hosp7.pptx
@@ -3003,524 +3003,530 @@
           <p:spPr>
             <a:xfrm>
               <a:off x="817517" y="1896563"/>
-              <a:ext cx="7370972" cy="3621635"/>
+              <a:ext cx="7370972" cy="3609015"/>
             </a:xfrm>
             <a:custGeom>
               <a:avLst/>
               <a:pathLst>
-                <a:path w="7370972" h="3621635">
+                <a:path w="7370972" h="3609015">
                   <a:moveTo>
-                    <a:pt x="1671471" y="0"/>
+                    <a:pt x="1475269" y="0"/>
                   </a:moveTo>
                   <a:lnTo>
-                    <a:pt x="1703687" y="98961"/>
-                  </a:lnTo>
-                  <a:lnTo>
-                    <a:pt x="1781321" y="322442"/>
-                  </a:lnTo>
-                  <a:lnTo>
-                    <a:pt x="1858955" y="531869"/>
-                  </a:lnTo>
-                  <a:lnTo>
-                    <a:pt x="1936589" y="728126"/>
-                  </a:lnTo>
-                  <a:lnTo>
-                    <a:pt x="2014223" y="912041"/>
-                  </a:lnTo>
-                  <a:lnTo>
-                    <a:pt x="2091857" y="1084390"/>
-                  </a:lnTo>
-                  <a:lnTo>
-                    <a:pt x="2169491" y="1245900"/>
-                  </a:lnTo>
-                  <a:lnTo>
-                    <a:pt x="2247125" y="1397253"/>
-                  </a:lnTo>
-                  <a:lnTo>
-                    <a:pt x="2324759" y="1539089"/>
-                  </a:lnTo>
-                  <a:lnTo>
-                    <a:pt x="2402393" y="1672004"/>
-                  </a:lnTo>
-                  <a:lnTo>
-                    <a:pt x="2480027" y="1796561"/>
-                  </a:lnTo>
-                  <a:lnTo>
-                    <a:pt x="2557661" y="1913285"/>
-                  </a:lnTo>
-                  <a:lnTo>
-                    <a:pt x="2635295" y="2022668"/>
-                  </a:lnTo>
-                  <a:lnTo>
-                    <a:pt x="2712930" y="2125173"/>
-                  </a:lnTo>
-                  <a:lnTo>
-                    <a:pt x="2790564" y="2221231"/>
-                  </a:lnTo>
-                  <a:lnTo>
-                    <a:pt x="2868198" y="2311249"/>
-                  </a:lnTo>
-                  <a:lnTo>
-                    <a:pt x="2945832" y="2395605"/>
-                  </a:lnTo>
-                  <a:lnTo>
-                    <a:pt x="3023466" y="2474657"/>
-                  </a:lnTo>
-                  <a:lnTo>
-                    <a:pt x="3101100" y="2548737"/>
-                  </a:lnTo>
-                  <a:lnTo>
-                    <a:pt x="3178734" y="2618159"/>
-                  </a:lnTo>
-                  <a:lnTo>
-                    <a:pt x="3256368" y="2683215"/>
-                  </a:lnTo>
-                  <a:lnTo>
-                    <a:pt x="3334002" y="2744179"/>
-                  </a:lnTo>
-                  <a:lnTo>
-                    <a:pt x="3411636" y="2786381"/>
-                  </a:lnTo>
-                  <a:lnTo>
-                    <a:pt x="3489270" y="2796701"/>
-                  </a:lnTo>
-                  <a:lnTo>
-                    <a:pt x="3566904" y="2806899"/>
-                  </a:lnTo>
-                  <a:lnTo>
-                    <a:pt x="3644538" y="2816974"/>
-                  </a:lnTo>
-                  <a:lnTo>
-                    <a:pt x="3722172" y="2826930"/>
-                  </a:lnTo>
-                  <a:lnTo>
-                    <a:pt x="3799806" y="2836768"/>
-                  </a:lnTo>
-                  <a:lnTo>
-                    <a:pt x="3877440" y="2846488"/>
-                  </a:lnTo>
-                  <a:lnTo>
-                    <a:pt x="3955074" y="2856092"/>
-                  </a:lnTo>
-                  <a:lnTo>
-                    <a:pt x="4032708" y="2865582"/>
-                  </a:lnTo>
-                  <a:lnTo>
-                    <a:pt x="4110342" y="2874959"/>
-                  </a:lnTo>
-                  <a:lnTo>
-                    <a:pt x="4187976" y="2884224"/>
-                  </a:lnTo>
-                  <a:lnTo>
-                    <a:pt x="4265610" y="2893379"/>
-                  </a:lnTo>
-                  <a:lnTo>
-                    <a:pt x="4343244" y="2902424"/>
-                  </a:lnTo>
-                  <a:lnTo>
-                    <a:pt x="4420879" y="2911362"/>
-                  </a:lnTo>
-                  <a:lnTo>
-                    <a:pt x="4498513" y="2920194"/>
-                  </a:lnTo>
-                  <a:lnTo>
-                    <a:pt x="4576147" y="2928920"/>
-                  </a:lnTo>
-                  <a:lnTo>
-                    <a:pt x="4653781" y="2937542"/>
-                  </a:lnTo>
-                  <a:lnTo>
-                    <a:pt x="4731415" y="2946062"/>
-                  </a:lnTo>
-                  <a:lnTo>
-                    <a:pt x="4809049" y="2954480"/>
-                  </a:lnTo>
-                  <a:lnTo>
-                    <a:pt x="4886683" y="2962797"/>
-                  </a:lnTo>
-                  <a:lnTo>
-                    <a:pt x="4964317" y="2971016"/>
-                  </a:lnTo>
-                  <a:lnTo>
-                    <a:pt x="5041951" y="2979137"/>
-                  </a:lnTo>
-                  <a:lnTo>
-                    <a:pt x="5119585" y="2987161"/>
-                  </a:lnTo>
-                  <a:lnTo>
-                    <a:pt x="5197219" y="2995089"/>
-                  </a:lnTo>
-                  <a:lnTo>
-                    <a:pt x="5274853" y="3002923"/>
-                  </a:lnTo>
-                  <a:lnTo>
-                    <a:pt x="5352487" y="3010664"/>
-                  </a:lnTo>
-                  <a:lnTo>
-                    <a:pt x="5430121" y="3018312"/>
-                  </a:lnTo>
-                  <a:lnTo>
-                    <a:pt x="5507755" y="3025869"/>
-                  </a:lnTo>
-                  <a:lnTo>
-                    <a:pt x="5585389" y="3033336"/>
-                  </a:lnTo>
-                  <a:lnTo>
-                    <a:pt x="5663023" y="3040715"/>
-                  </a:lnTo>
-                  <a:lnTo>
-                    <a:pt x="5740657" y="3048005"/>
-                  </a:lnTo>
-                  <a:lnTo>
-                    <a:pt x="5818291" y="3055209"/>
-                  </a:lnTo>
-                  <a:lnTo>
-                    <a:pt x="5895925" y="3062326"/>
-                  </a:lnTo>
-                  <a:lnTo>
-                    <a:pt x="5973559" y="3069359"/>
-                  </a:lnTo>
-                  <a:lnTo>
-                    <a:pt x="6051193" y="3076308"/>
-                  </a:lnTo>
-                  <a:lnTo>
-                    <a:pt x="6128827" y="3083174"/>
-                  </a:lnTo>
-                  <a:lnTo>
-                    <a:pt x="6206462" y="3089959"/>
-                  </a:lnTo>
-                  <a:lnTo>
-                    <a:pt x="6284096" y="3096663"/>
-                  </a:lnTo>
-                  <a:lnTo>
-                    <a:pt x="6361730" y="3103286"/>
-                  </a:lnTo>
-                  <a:lnTo>
-                    <a:pt x="6439364" y="3109831"/>
-                  </a:lnTo>
-                  <a:lnTo>
-                    <a:pt x="6516998" y="3116298"/>
-                  </a:lnTo>
-                  <a:lnTo>
-                    <a:pt x="6594632" y="3122688"/>
-                  </a:lnTo>
-                  <a:lnTo>
-                    <a:pt x="6672266" y="3129002"/>
-                  </a:lnTo>
-                  <a:lnTo>
-                    <a:pt x="6749900" y="3135240"/>
-                  </a:lnTo>
-                  <a:lnTo>
-                    <a:pt x="6827534" y="3141405"/>
-                  </a:lnTo>
-                  <a:lnTo>
-                    <a:pt x="6905168" y="3147495"/>
-                  </a:lnTo>
-                  <a:lnTo>
-                    <a:pt x="6982802" y="3153514"/>
-                  </a:lnTo>
-                  <a:lnTo>
-                    <a:pt x="7060436" y="3159460"/>
-                  </a:lnTo>
-                  <a:lnTo>
-                    <a:pt x="7138070" y="3165336"/>
-                  </a:lnTo>
-                  <a:lnTo>
-                    <a:pt x="7215704" y="3171141"/>
-                  </a:lnTo>
-                  <a:lnTo>
-                    <a:pt x="7293338" y="3176878"/>
-                  </a:lnTo>
-                  <a:lnTo>
-                    <a:pt x="7370972" y="3182546"/>
-                  </a:lnTo>
-                  <a:lnTo>
-                    <a:pt x="7370972" y="3621635"/>
-                  </a:lnTo>
-                  <a:lnTo>
-                    <a:pt x="7293338" y="3619554"/>
-                  </a:lnTo>
-                  <a:lnTo>
-                    <a:pt x="7215704" y="3617333"/>
-                  </a:lnTo>
-                  <a:lnTo>
-                    <a:pt x="7138070" y="3614963"/>
-                  </a:lnTo>
-                  <a:lnTo>
-                    <a:pt x="7060436" y="3612435"/>
-                  </a:lnTo>
-                  <a:lnTo>
-                    <a:pt x="6982802" y="3609737"/>
-                  </a:lnTo>
-                  <a:lnTo>
-                    <a:pt x="6905168" y="3606857"/>
-                  </a:lnTo>
-                  <a:lnTo>
-                    <a:pt x="6827534" y="3603785"/>
-                  </a:lnTo>
-                  <a:lnTo>
-                    <a:pt x="6749900" y="3600506"/>
-                  </a:lnTo>
-                  <a:lnTo>
-                    <a:pt x="6672266" y="3597007"/>
-                  </a:lnTo>
-                  <a:lnTo>
-                    <a:pt x="6594632" y="3593273"/>
-                  </a:lnTo>
-                  <a:lnTo>
-                    <a:pt x="6516998" y="3589289"/>
-                  </a:lnTo>
-                  <a:lnTo>
-                    <a:pt x="6439364" y="3585038"/>
-                  </a:lnTo>
-                  <a:lnTo>
-                    <a:pt x="6361730" y="3580501"/>
-                  </a:lnTo>
-                  <a:lnTo>
-                    <a:pt x="6284096" y="3575660"/>
-                  </a:lnTo>
-                  <a:lnTo>
-                    <a:pt x="6206462" y="3570494"/>
-                  </a:lnTo>
-                  <a:lnTo>
-                    <a:pt x="6128827" y="3564981"/>
-                  </a:lnTo>
-                  <a:lnTo>
-                    <a:pt x="6051193" y="3559098"/>
-                  </a:lnTo>
-                  <a:lnTo>
-                    <a:pt x="5973559" y="3552820"/>
-                  </a:lnTo>
-                  <a:lnTo>
-                    <a:pt x="5895925" y="3546121"/>
-                  </a:lnTo>
-                  <a:lnTo>
-                    <a:pt x="5818291" y="3538973"/>
-                  </a:lnTo>
-                  <a:lnTo>
-                    <a:pt x="5740657" y="3531345"/>
-                  </a:lnTo>
-                  <a:lnTo>
-                    <a:pt x="5663023" y="3523205"/>
-                  </a:lnTo>
-                  <a:lnTo>
-                    <a:pt x="5585389" y="3514519"/>
-                  </a:lnTo>
-                  <a:lnTo>
-                    <a:pt x="5507755" y="3505249"/>
-                  </a:lnTo>
-                  <a:lnTo>
-                    <a:pt x="5430121" y="3495358"/>
-                  </a:lnTo>
-                  <a:lnTo>
-                    <a:pt x="5352487" y="3484803"/>
-                  </a:lnTo>
-                  <a:lnTo>
-                    <a:pt x="5274853" y="3473540"/>
-                  </a:lnTo>
-                  <a:lnTo>
-                    <a:pt x="5197219" y="3461521"/>
-                  </a:lnTo>
-                  <a:lnTo>
-                    <a:pt x="5119585" y="3448695"/>
-                  </a:lnTo>
-                  <a:lnTo>
-                    <a:pt x="5041951" y="3435008"/>
-                  </a:lnTo>
-                  <a:lnTo>
-                    <a:pt x="4964317" y="3420403"/>
-                  </a:lnTo>
-                  <a:lnTo>
-                    <a:pt x="4886683" y="3404818"/>
-                  </a:lnTo>
-                  <a:lnTo>
-                    <a:pt x="4809049" y="3388188"/>
-                  </a:lnTo>
-                  <a:lnTo>
-                    <a:pt x="4731415" y="3370441"/>
-                  </a:lnTo>
-                  <a:lnTo>
-                    <a:pt x="4653781" y="3351503"/>
-                  </a:lnTo>
-                  <a:lnTo>
-                    <a:pt x="4576147" y="3331294"/>
-                  </a:lnTo>
-                  <a:lnTo>
-                    <a:pt x="4498513" y="3309729"/>
-                  </a:lnTo>
-                  <a:lnTo>
-                    <a:pt x="4420879" y="3286717"/>
-                  </a:lnTo>
-                  <a:lnTo>
-                    <a:pt x="4343244" y="3262161"/>
-                  </a:lnTo>
-                  <a:lnTo>
-                    <a:pt x="4265610" y="3235956"/>
-                  </a:lnTo>
-                  <a:lnTo>
-                    <a:pt x="4187976" y="3207993"/>
-                  </a:lnTo>
-                  <a:lnTo>
-                    <a:pt x="4110342" y="3178154"/>
-                  </a:lnTo>
-                  <a:lnTo>
-                    <a:pt x="4032708" y="3146312"/>
-                  </a:lnTo>
-                  <a:lnTo>
-                    <a:pt x="3955074" y="3112334"/>
-                  </a:lnTo>
-                  <a:lnTo>
-                    <a:pt x="3877440" y="3076075"/>
-                  </a:lnTo>
-                  <a:lnTo>
-                    <a:pt x="3799806" y="3037383"/>
-                  </a:lnTo>
-                  <a:lnTo>
-                    <a:pt x="3722172" y="2996095"/>
-                  </a:lnTo>
-                  <a:lnTo>
-                    <a:pt x="3644538" y="2952035"/>
-                  </a:lnTo>
-                  <a:lnTo>
-                    <a:pt x="3566904" y="2905019"/>
-                  </a:lnTo>
-                  <a:lnTo>
-                    <a:pt x="3489270" y="2854848"/>
-                  </a:lnTo>
-                  <a:lnTo>
-                    <a:pt x="3411636" y="2801310"/>
-                  </a:lnTo>
-                  <a:lnTo>
-                    <a:pt x="3334002" y="2775936"/>
-                  </a:lnTo>
-                  <a:lnTo>
-                    <a:pt x="3256368" y="2765365"/>
-                  </a:lnTo>
-                  <a:lnTo>
-                    <a:pt x="3178734" y="2754667"/>
-                  </a:lnTo>
-                  <a:lnTo>
-                    <a:pt x="3101100" y="2743840"/>
-                  </a:lnTo>
-                  <a:lnTo>
-                    <a:pt x="3023466" y="2732882"/>
-                  </a:lnTo>
-                  <a:lnTo>
-                    <a:pt x="2945832" y="2721792"/>
-                  </a:lnTo>
-                  <a:lnTo>
-                    <a:pt x="2868198" y="2710568"/>
-                  </a:lnTo>
-                  <a:lnTo>
-                    <a:pt x="2790564" y="2699209"/>
-                  </a:lnTo>
-                  <a:lnTo>
-                    <a:pt x="2712930" y="2687713"/>
-                  </a:lnTo>
-                  <a:lnTo>
-                    <a:pt x="2635295" y="2676079"/>
-                  </a:lnTo>
-                  <a:lnTo>
-                    <a:pt x="2557661" y="2664304"/>
-                  </a:lnTo>
-                  <a:lnTo>
-                    <a:pt x="2480027" y="2652387"/>
-                  </a:lnTo>
-                  <a:lnTo>
-                    <a:pt x="2402393" y="2640327"/>
-                  </a:lnTo>
-                  <a:lnTo>
-                    <a:pt x="2324759" y="2628121"/>
-                  </a:lnTo>
-                  <a:lnTo>
-                    <a:pt x="2247125" y="2615768"/>
-                  </a:lnTo>
-                  <a:lnTo>
-                    <a:pt x="2169491" y="2603266"/>
-                  </a:lnTo>
-                  <a:lnTo>
-                    <a:pt x="2091857" y="2590613"/>
-                  </a:lnTo>
-                  <a:lnTo>
-                    <a:pt x="2014223" y="2577808"/>
-                  </a:lnTo>
-                  <a:lnTo>
-                    <a:pt x="1936589" y="2564848"/>
-                  </a:lnTo>
-                  <a:lnTo>
-                    <a:pt x="1858955" y="2551732"/>
-                  </a:lnTo>
-                  <a:lnTo>
-                    <a:pt x="1781321" y="2538458"/>
-                  </a:lnTo>
-                  <a:lnTo>
-                    <a:pt x="1703687" y="2525024"/>
-                  </a:lnTo>
-                  <a:lnTo>
-                    <a:pt x="1626053" y="2511428"/>
-                  </a:lnTo>
-                  <a:lnTo>
-                    <a:pt x="1548419" y="2497668"/>
-                  </a:lnTo>
-                  <a:lnTo>
-                    <a:pt x="1470785" y="2483742"/>
-                  </a:lnTo>
-                  <a:lnTo>
-                    <a:pt x="1393151" y="2469648"/>
-                  </a:lnTo>
-                  <a:lnTo>
-                    <a:pt x="1315517" y="2455384"/>
-                  </a:lnTo>
-                  <a:lnTo>
-                    <a:pt x="1237883" y="2440948"/>
-                  </a:lnTo>
-                  <a:lnTo>
-                    <a:pt x="1160249" y="2426338"/>
-                  </a:lnTo>
-                  <a:lnTo>
-                    <a:pt x="1082615" y="2411552"/>
-                  </a:lnTo>
-                  <a:lnTo>
-                    <a:pt x="1004981" y="2396588"/>
-                  </a:lnTo>
-                  <a:lnTo>
-                    <a:pt x="927346" y="2381443"/>
-                  </a:lnTo>
-                  <a:lnTo>
-                    <a:pt x="849712" y="2366116"/>
-                  </a:lnTo>
-                  <a:lnTo>
-                    <a:pt x="772078" y="2350604"/>
-                  </a:lnTo>
-                  <a:lnTo>
-                    <a:pt x="694444" y="2334905"/>
-                  </a:lnTo>
-                  <a:lnTo>
-                    <a:pt x="616810" y="2319016"/>
-                  </a:lnTo>
-                  <a:lnTo>
-                    <a:pt x="539176" y="2302936"/>
-                  </a:lnTo>
-                  <a:lnTo>
-                    <a:pt x="461542" y="2286662"/>
-                  </a:lnTo>
-                  <a:lnTo>
-                    <a:pt x="383908" y="2270192"/>
-                  </a:lnTo>
-                  <a:lnTo>
-                    <a:pt x="306274" y="2253523"/>
-                  </a:lnTo>
-                  <a:lnTo>
-                    <a:pt x="228640" y="2236654"/>
-                  </a:lnTo>
-                  <a:lnTo>
-                    <a:pt x="151006" y="2219581"/>
-                  </a:lnTo>
-                  <a:lnTo>
-                    <a:pt x="73372" y="2202302"/>
-                  </a:lnTo>
-                  <a:lnTo>
-                    <a:pt x="0" y="2185774"/>
+                    <a:pt x="1548419" y="195552"/>
+                  </a:lnTo>
+                  <a:lnTo>
+                    <a:pt x="1626053" y="391337"/>
+                  </a:lnTo>
+                  <a:lnTo>
+                    <a:pt x="1703687" y="576035"/>
+                  </a:lnTo>
+                  <a:lnTo>
+                    <a:pt x="1781321" y="750272"/>
+                  </a:lnTo>
+                  <a:lnTo>
+                    <a:pt x="1858955" y="914642"/>
+                  </a:lnTo>
+                  <a:lnTo>
+                    <a:pt x="1936589" y="1069703"/>
+                  </a:lnTo>
+                  <a:lnTo>
+                    <a:pt x="2014223" y="1215983"/>
+                  </a:lnTo>
+                  <a:lnTo>
+                    <a:pt x="2091857" y="1353978"/>
+                  </a:lnTo>
+                  <a:lnTo>
+                    <a:pt x="2169491" y="1484158"/>
+                  </a:lnTo>
+                  <a:lnTo>
+                    <a:pt x="2247125" y="1606966"/>
+                  </a:lnTo>
+                  <a:lnTo>
+                    <a:pt x="2324759" y="1722819"/>
+                  </a:lnTo>
+                  <a:lnTo>
+                    <a:pt x="2402393" y="1832110"/>
+                  </a:lnTo>
+                  <a:lnTo>
+                    <a:pt x="2480027" y="1935212"/>
+                  </a:lnTo>
+                  <a:lnTo>
+                    <a:pt x="2557661" y="2032476"/>
+                  </a:lnTo>
+                  <a:lnTo>
+                    <a:pt x="2635295" y="2124230"/>
+                  </a:lnTo>
+                  <a:lnTo>
+                    <a:pt x="2712930" y="2210789"/>
+                  </a:lnTo>
+                  <a:lnTo>
+                    <a:pt x="2790564" y="2292445"/>
+                  </a:lnTo>
+                  <a:lnTo>
+                    <a:pt x="2868198" y="2369477"/>
+                  </a:lnTo>
+                  <a:lnTo>
+                    <a:pt x="2945832" y="2442147"/>
+                  </a:lnTo>
+                  <a:lnTo>
+                    <a:pt x="3023466" y="2510701"/>
+                  </a:lnTo>
+                  <a:lnTo>
+                    <a:pt x="3101100" y="2575372"/>
+                  </a:lnTo>
+                  <a:lnTo>
+                    <a:pt x="3178734" y="2636381"/>
+                  </a:lnTo>
+                  <a:lnTo>
+                    <a:pt x="3256368" y="2693935"/>
+                  </a:lnTo>
+                  <a:lnTo>
+                    <a:pt x="3334002" y="2748230"/>
+                  </a:lnTo>
+                  <a:lnTo>
+                    <a:pt x="3411636" y="2785445"/>
+                  </a:lnTo>
+                  <a:lnTo>
+                    <a:pt x="3489270" y="2792952"/>
+                  </a:lnTo>
+                  <a:lnTo>
+                    <a:pt x="3566904" y="2800395"/>
+                  </a:lnTo>
+                  <a:lnTo>
+                    <a:pt x="3644538" y="2807773"/>
+                  </a:lnTo>
+                  <a:lnTo>
+                    <a:pt x="3722172" y="2815088"/>
+                  </a:lnTo>
+                  <a:lnTo>
+                    <a:pt x="3799806" y="2822339"/>
+                  </a:lnTo>
+                  <a:lnTo>
+                    <a:pt x="3877440" y="2829527"/>
+                  </a:lnTo>
+                  <a:lnTo>
+                    <a:pt x="3955074" y="2836653"/>
+                  </a:lnTo>
+                  <a:lnTo>
+                    <a:pt x="4032708" y="2843718"/>
+                  </a:lnTo>
+                  <a:lnTo>
+                    <a:pt x="4110342" y="2850721"/>
+                  </a:lnTo>
+                  <a:lnTo>
+                    <a:pt x="4187976" y="2857663"/>
+                  </a:lnTo>
+                  <a:lnTo>
+                    <a:pt x="4265610" y="2864546"/>
+                  </a:lnTo>
+                  <a:lnTo>
+                    <a:pt x="4343244" y="2871369"/>
+                  </a:lnTo>
+                  <a:lnTo>
+                    <a:pt x="4420879" y="2878133"/>
+                  </a:lnTo>
+                  <a:lnTo>
+                    <a:pt x="4498513" y="2884838"/>
+                  </a:lnTo>
+                  <a:lnTo>
+                    <a:pt x="4576147" y="2891485"/>
+                  </a:lnTo>
+                  <a:lnTo>
+                    <a:pt x="4653781" y="2898075"/>
+                  </a:lnTo>
+                  <a:lnTo>
+                    <a:pt x="4731415" y="2904607"/>
+                  </a:lnTo>
+                  <a:lnTo>
+                    <a:pt x="4809049" y="2911083"/>
+                  </a:lnTo>
+                  <a:lnTo>
+                    <a:pt x="4886683" y="2917503"/>
+                  </a:lnTo>
+                  <a:lnTo>
+                    <a:pt x="4964317" y="2923868"/>
+                  </a:lnTo>
+                  <a:lnTo>
+                    <a:pt x="5041951" y="2930177"/>
+                  </a:lnTo>
+                  <a:lnTo>
+                    <a:pt x="5119585" y="2936432"/>
+                  </a:lnTo>
+                  <a:lnTo>
+                    <a:pt x="5197219" y="2942632"/>
+                  </a:lnTo>
+                  <a:lnTo>
+                    <a:pt x="5274853" y="2948779"/>
+                  </a:lnTo>
+                  <a:lnTo>
+                    <a:pt x="5352487" y="2954873"/>
+                  </a:lnTo>
+                  <a:lnTo>
+                    <a:pt x="5430121" y="2960914"/>
+                  </a:lnTo>
+                  <a:lnTo>
+                    <a:pt x="5507755" y="2966903"/>
+                  </a:lnTo>
+                  <a:lnTo>
+                    <a:pt x="5585389" y="2972839"/>
+                  </a:lnTo>
+                  <a:lnTo>
+                    <a:pt x="5663023" y="2978725"/>
+                  </a:lnTo>
+                  <a:lnTo>
+                    <a:pt x="5740657" y="2984559"/>
+                  </a:lnTo>
+                  <a:lnTo>
+                    <a:pt x="5818291" y="2990343"/>
+                  </a:lnTo>
+                  <a:lnTo>
+                    <a:pt x="5895925" y="2996077"/>
+                  </a:lnTo>
+                  <a:lnTo>
+                    <a:pt x="5973559" y="3001761"/>
+                  </a:lnTo>
+                  <a:lnTo>
+                    <a:pt x="6051193" y="3007396"/>
+                  </a:lnTo>
+                  <a:lnTo>
+                    <a:pt x="6128827" y="3012982"/>
+                  </a:lnTo>
+                  <a:lnTo>
+                    <a:pt x="6206462" y="3018520"/>
+                  </a:lnTo>
+                  <a:lnTo>
+                    <a:pt x="6284096" y="3024010"/>
+                  </a:lnTo>
+                  <a:lnTo>
+                    <a:pt x="6361730" y="3029452"/>
+                  </a:lnTo>
+                  <a:lnTo>
+                    <a:pt x="6439364" y="3034847"/>
+                  </a:lnTo>
+                  <a:lnTo>
+                    <a:pt x="6516998" y="3040196"/>
+                  </a:lnTo>
+                  <a:lnTo>
+                    <a:pt x="6594632" y="3045498"/>
+                  </a:lnTo>
+                  <a:lnTo>
+                    <a:pt x="6672266" y="3050754"/>
+                  </a:lnTo>
+                  <a:lnTo>
+                    <a:pt x="6749900" y="3055965"/>
+                  </a:lnTo>
+                  <a:lnTo>
+                    <a:pt x="6827534" y="3061131"/>
+                  </a:lnTo>
+                  <a:lnTo>
+                    <a:pt x="6905168" y="3066252"/>
+                  </a:lnTo>
+                  <a:lnTo>
+                    <a:pt x="6982802" y="3071329"/>
+                  </a:lnTo>
+                  <a:lnTo>
+                    <a:pt x="7060436" y="3076361"/>
+                  </a:lnTo>
+                  <a:lnTo>
+                    <a:pt x="7138070" y="3081350"/>
+                  </a:lnTo>
+                  <a:lnTo>
+                    <a:pt x="7215704" y="3086296"/>
+                  </a:lnTo>
+                  <a:lnTo>
+                    <a:pt x="7293338" y="3091199"/>
+                  </a:lnTo>
+                  <a:lnTo>
+                    <a:pt x="7370972" y="3096060"/>
+                  </a:lnTo>
+                  <a:lnTo>
+                    <a:pt x="7370972" y="3609015"/>
+                  </a:lnTo>
+                  <a:lnTo>
+                    <a:pt x="7293338" y="3606396"/>
+                  </a:lnTo>
+                  <a:lnTo>
+                    <a:pt x="7215704" y="3603620"/>
+                  </a:lnTo>
+                  <a:lnTo>
+                    <a:pt x="7138070" y="3600677"/>
+                  </a:lnTo>
+                  <a:lnTo>
+                    <a:pt x="7060436" y="3597557"/>
+                  </a:lnTo>
+                  <a:lnTo>
+                    <a:pt x="6982802" y="3594250"/>
+                  </a:lnTo>
+                  <a:lnTo>
+                    <a:pt x="6905168" y="3590745"/>
+                  </a:lnTo>
+                  <a:lnTo>
+                    <a:pt x="6827534" y="3587029"/>
+                  </a:lnTo>
+                  <a:lnTo>
+                    <a:pt x="6749900" y="3583090"/>
+                  </a:lnTo>
+                  <a:lnTo>
+                    <a:pt x="6672266" y="3578914"/>
+                  </a:lnTo>
+                  <a:lnTo>
+                    <a:pt x="6594632" y="3574488"/>
+                  </a:lnTo>
+                  <a:lnTo>
+                    <a:pt x="6516998" y="3569796"/>
+                  </a:lnTo>
+                  <a:lnTo>
+                    <a:pt x="6439364" y="3564823"/>
+                  </a:lnTo>
+                  <a:lnTo>
+                    <a:pt x="6361730" y="3559551"/>
+                  </a:lnTo>
+                  <a:lnTo>
+                    <a:pt x="6284096" y="3553962"/>
+                  </a:lnTo>
+                  <a:lnTo>
+                    <a:pt x="6206462" y="3548038"/>
+                  </a:lnTo>
+                  <a:lnTo>
+                    <a:pt x="6128827" y="3541758"/>
+                  </a:lnTo>
+                  <a:lnTo>
+                    <a:pt x="6051193" y="3535102"/>
+                  </a:lnTo>
+                  <a:lnTo>
+                    <a:pt x="5973559" y="3528045"/>
+                  </a:lnTo>
+                  <a:lnTo>
+                    <a:pt x="5895925" y="3520565"/>
+                  </a:lnTo>
+                  <a:lnTo>
+                    <a:pt x="5818291" y="3512636"/>
+                  </a:lnTo>
+                  <a:lnTo>
+                    <a:pt x="5740657" y="3504231"/>
+                  </a:lnTo>
+                  <a:lnTo>
+                    <a:pt x="5663023" y="3495322"/>
+                  </a:lnTo>
+                  <a:lnTo>
+                    <a:pt x="5585389" y="3485877"/>
+                  </a:lnTo>
+                  <a:lnTo>
+                    <a:pt x="5507755" y="3475866"/>
+                  </a:lnTo>
+                  <a:lnTo>
+                    <a:pt x="5430121" y="3465253"/>
+                  </a:lnTo>
+                  <a:lnTo>
+                    <a:pt x="5352487" y="3454004"/>
+                  </a:lnTo>
+                  <a:lnTo>
+                    <a:pt x="5274853" y="3442079"/>
+                  </a:lnTo>
+                  <a:lnTo>
+                    <a:pt x="5197219" y="3429438"/>
+                  </a:lnTo>
+                  <a:lnTo>
+                    <a:pt x="5119585" y="3416039"/>
+                  </a:lnTo>
+                  <a:lnTo>
+                    <a:pt x="5041951" y="3401835"/>
+                  </a:lnTo>
+                  <a:lnTo>
+                    <a:pt x="4964317" y="3386778"/>
+                  </a:lnTo>
+                  <a:lnTo>
+                    <a:pt x="4886683" y="3370817"/>
+                  </a:lnTo>
+                  <a:lnTo>
+                    <a:pt x="4809049" y="3353899"/>
+                  </a:lnTo>
+                  <a:lnTo>
+                    <a:pt x="4731415" y="3335964"/>
+                  </a:lnTo>
+                  <a:lnTo>
+                    <a:pt x="4653781" y="3316953"/>
+                  </a:lnTo>
+                  <a:lnTo>
+                    <a:pt x="4576147" y="3296800"/>
+                  </a:lnTo>
+                  <a:lnTo>
+                    <a:pt x="4498513" y="3275438"/>
+                  </a:lnTo>
+                  <a:lnTo>
+                    <a:pt x="4420879" y="3252794"/>
+                  </a:lnTo>
+                  <a:lnTo>
+                    <a:pt x="4343244" y="3228789"/>
+                  </a:lnTo>
+                  <a:lnTo>
+                    <a:pt x="4265610" y="3203344"/>
+                  </a:lnTo>
+                  <a:lnTo>
+                    <a:pt x="4187976" y="3176372"/>
+                  </a:lnTo>
+                  <a:lnTo>
+                    <a:pt x="4110342" y="3147780"/>
+                  </a:lnTo>
+                  <a:lnTo>
+                    <a:pt x="4032708" y="3117471"/>
+                  </a:lnTo>
+                  <a:lnTo>
+                    <a:pt x="3955074" y="3085344"/>
+                  </a:lnTo>
+                  <a:lnTo>
+                    <a:pt x="3877440" y="3051287"/>
+                  </a:lnTo>
+                  <a:lnTo>
+                    <a:pt x="3799806" y="3015186"/>
+                  </a:lnTo>
+                  <a:lnTo>
+                    <a:pt x="3722172" y="2976917"/>
+                  </a:lnTo>
+                  <a:lnTo>
+                    <a:pt x="3644538" y="2936352"/>
+                  </a:lnTo>
+                  <a:lnTo>
+                    <a:pt x="3566904" y="2893351"/>
+                  </a:lnTo>
+                  <a:lnTo>
+                    <a:pt x="3489270" y="2847768"/>
+                  </a:lnTo>
+                  <a:lnTo>
+                    <a:pt x="3411636" y="2799449"/>
+                  </a:lnTo>
+                  <a:lnTo>
+                    <a:pt x="3334002" y="2777871"/>
+                  </a:lnTo>
+                  <a:lnTo>
+                    <a:pt x="3256368" y="2770232"/>
+                  </a:lnTo>
+                  <a:lnTo>
+                    <a:pt x="3178734" y="2762526"/>
+                  </a:lnTo>
+                  <a:lnTo>
+                    <a:pt x="3101100" y="2754752"/>
+                  </a:lnTo>
+                  <a:lnTo>
+                    <a:pt x="3023466" y="2746911"/>
+                  </a:lnTo>
+                  <a:lnTo>
+                    <a:pt x="2945832" y="2739001"/>
+                  </a:lnTo>
+                  <a:lnTo>
+                    <a:pt x="2868198" y="2731022"/>
+                  </a:lnTo>
+                  <a:lnTo>
+                    <a:pt x="2790564" y="2722974"/>
+                  </a:lnTo>
+                  <a:lnTo>
+                    <a:pt x="2712930" y="2714855"/>
+                  </a:lnTo>
+                  <a:lnTo>
+                    <a:pt x="2635295" y="2706665"/>
+                  </a:lnTo>
+                  <a:lnTo>
+                    <a:pt x="2557661" y="2698404"/>
+                  </a:lnTo>
+                  <a:lnTo>
+                    <a:pt x="2480027" y="2690071"/>
+                  </a:lnTo>
+                  <a:lnTo>
+                    <a:pt x="2402393" y="2681664"/>
+                  </a:lnTo>
+                  <a:lnTo>
+                    <a:pt x="2324759" y="2673185"/>
+                  </a:lnTo>
+                  <a:lnTo>
+                    <a:pt x="2247125" y="2664631"/>
+                  </a:lnTo>
+                  <a:lnTo>
+                    <a:pt x="2169491" y="2656003"/>
+                  </a:lnTo>
+                  <a:lnTo>
+                    <a:pt x="2091857" y="2647299"/>
+                  </a:lnTo>
+                  <a:lnTo>
+                    <a:pt x="2014223" y="2638519"/>
+                  </a:lnTo>
+                  <a:lnTo>
+                    <a:pt x="1936589" y="2629663"/>
+                  </a:lnTo>
+                  <a:lnTo>
+                    <a:pt x="1858955" y="2620729"/>
+                  </a:lnTo>
+                  <a:lnTo>
+                    <a:pt x="1781321" y="2611718"/>
+                  </a:lnTo>
+                  <a:lnTo>
+                    <a:pt x="1703687" y="2602627"/>
+                  </a:lnTo>
+                  <a:lnTo>
+                    <a:pt x="1626053" y="2593457"/>
+                  </a:lnTo>
+                  <a:lnTo>
+                    <a:pt x="1548419" y="2584207"/>
+                  </a:lnTo>
+                  <a:lnTo>
+                    <a:pt x="1470785" y="2574877"/>
+                  </a:lnTo>
+                  <a:lnTo>
+                    <a:pt x="1393151" y="2565465"/>
+                  </a:lnTo>
+                  <a:lnTo>
+                    <a:pt x="1315517" y="2555970"/>
+                  </a:lnTo>
+                  <a:lnTo>
+                    <a:pt x="1237883" y="2546393"/>
+                  </a:lnTo>
+                  <a:lnTo>
+                    <a:pt x="1160249" y="2536732"/>
+                  </a:lnTo>
+                  <a:lnTo>
+                    <a:pt x="1082615" y="2526987"/>
+                  </a:lnTo>
+                  <a:lnTo>
+                    <a:pt x="1004981" y="2517156"/>
+                  </a:lnTo>
+                  <a:lnTo>
+                    <a:pt x="927346" y="2507240"/>
+                  </a:lnTo>
+                  <a:lnTo>
+                    <a:pt x="849712" y="2497237"/>
+                  </a:lnTo>
+                  <a:lnTo>
+                    <a:pt x="772078" y="2487147"/>
+                  </a:lnTo>
+                  <a:lnTo>
+                    <a:pt x="694444" y="2476969"/>
+                  </a:lnTo>
+                  <a:lnTo>
+                    <a:pt x="616810" y="2466701"/>
+                  </a:lnTo>
+                  <a:lnTo>
+                    <a:pt x="539176" y="2456345"/>
+                  </a:lnTo>
+                  <a:lnTo>
+                    <a:pt x="461542" y="2445897"/>
+                  </a:lnTo>
+                  <a:lnTo>
+                    <a:pt x="383908" y="2435359"/>
+                  </a:lnTo>
+                  <a:lnTo>
+                    <a:pt x="306274" y="2424728"/>
+                  </a:lnTo>
+                  <a:lnTo>
+                    <a:pt x="228640" y="2414005"/>
+                  </a:lnTo>
+                  <a:lnTo>
+                    <a:pt x="151006" y="2403188"/>
+                  </a:lnTo>
+                  <a:lnTo>
+                    <a:pt x="73372" y="2392276"/>
+                  </a:lnTo>
+                  <a:lnTo>
+                    <a:pt x="0" y="2381873"/>
                   </a:lnTo>
                   <a:close/>
                 </a:path>
@@ -3546,237 +3552,243 @@
           </p:nvSpPr>
           <p:spPr>
             <a:xfrm>
-              <a:off x="2488989" y="1896563"/>
-              <a:ext cx="5699501" cy="3182546"/>
+              <a:off x="2292786" y="1896563"/>
+              <a:ext cx="5895703" cy="3096060"/>
             </a:xfrm>
             <a:custGeom>
               <a:avLst/>
               <a:pathLst>
-                <a:path w="5699501" h="3182546">
+                <a:path w="5895703" h="3096060">
                   <a:moveTo>
                     <a:pt x="0" y="0"/>
                   </a:moveTo>
                   <a:lnTo>
-                    <a:pt x="32215" y="98961"/>
-                  </a:lnTo>
-                  <a:lnTo>
-                    <a:pt x="109849" y="322442"/>
-                  </a:lnTo>
-                  <a:lnTo>
-                    <a:pt x="187483" y="531869"/>
-                  </a:lnTo>
-                  <a:lnTo>
-                    <a:pt x="265117" y="728126"/>
-                  </a:lnTo>
-                  <a:lnTo>
-                    <a:pt x="342751" y="912041"/>
-                  </a:lnTo>
-                  <a:lnTo>
-                    <a:pt x="420385" y="1084390"/>
-                  </a:lnTo>
-                  <a:lnTo>
-                    <a:pt x="498019" y="1245900"/>
-                  </a:lnTo>
-                  <a:lnTo>
-                    <a:pt x="575654" y="1397253"/>
-                  </a:lnTo>
-                  <a:lnTo>
-                    <a:pt x="653288" y="1539089"/>
-                  </a:lnTo>
-                  <a:lnTo>
-                    <a:pt x="730922" y="1672004"/>
-                  </a:lnTo>
-                  <a:lnTo>
-                    <a:pt x="808556" y="1796561"/>
-                  </a:lnTo>
-                  <a:lnTo>
-                    <a:pt x="886190" y="1913285"/>
-                  </a:lnTo>
-                  <a:lnTo>
-                    <a:pt x="963824" y="2022668"/>
-                  </a:lnTo>
-                  <a:lnTo>
-                    <a:pt x="1041458" y="2125173"/>
-                  </a:lnTo>
-                  <a:lnTo>
-                    <a:pt x="1119092" y="2221231"/>
-                  </a:lnTo>
-                  <a:lnTo>
-                    <a:pt x="1196726" y="2311249"/>
-                  </a:lnTo>
-                  <a:lnTo>
-                    <a:pt x="1274360" y="2395605"/>
-                  </a:lnTo>
-                  <a:lnTo>
-                    <a:pt x="1351994" y="2474657"/>
-                  </a:lnTo>
-                  <a:lnTo>
-                    <a:pt x="1429628" y="2548737"/>
-                  </a:lnTo>
-                  <a:lnTo>
-                    <a:pt x="1507262" y="2618159"/>
-                  </a:lnTo>
-                  <a:lnTo>
-                    <a:pt x="1584896" y="2683215"/>
-                  </a:lnTo>
-                  <a:lnTo>
-                    <a:pt x="1662530" y="2744179"/>
-                  </a:lnTo>
-                  <a:lnTo>
-                    <a:pt x="1740164" y="2786381"/>
-                  </a:lnTo>
-                  <a:lnTo>
-                    <a:pt x="1817798" y="2796701"/>
-                  </a:lnTo>
-                  <a:lnTo>
-                    <a:pt x="1895432" y="2806899"/>
-                  </a:lnTo>
-                  <a:lnTo>
-                    <a:pt x="1973066" y="2816974"/>
-                  </a:lnTo>
-                  <a:lnTo>
-                    <a:pt x="2050700" y="2826930"/>
-                  </a:lnTo>
-                  <a:lnTo>
-                    <a:pt x="2128334" y="2836768"/>
-                  </a:lnTo>
-                  <a:lnTo>
-                    <a:pt x="2205968" y="2846488"/>
-                  </a:lnTo>
-                  <a:lnTo>
-                    <a:pt x="2283603" y="2856092"/>
-                  </a:lnTo>
-                  <a:lnTo>
-                    <a:pt x="2361237" y="2865582"/>
-                  </a:lnTo>
-                  <a:lnTo>
-                    <a:pt x="2438871" y="2874959"/>
-                  </a:lnTo>
-                  <a:lnTo>
-                    <a:pt x="2516505" y="2884224"/>
-                  </a:lnTo>
-                  <a:lnTo>
-                    <a:pt x="2594139" y="2893379"/>
-                  </a:lnTo>
-                  <a:lnTo>
-                    <a:pt x="2671773" y="2902424"/>
-                  </a:lnTo>
-                  <a:lnTo>
-                    <a:pt x="2749407" y="2911362"/>
-                  </a:lnTo>
-                  <a:lnTo>
-                    <a:pt x="2827041" y="2920194"/>
-                  </a:lnTo>
-                  <a:lnTo>
-                    <a:pt x="2904675" y="2928920"/>
-                  </a:lnTo>
-                  <a:lnTo>
-                    <a:pt x="2982309" y="2937542"/>
-                  </a:lnTo>
-                  <a:lnTo>
-                    <a:pt x="3059943" y="2946062"/>
-                  </a:lnTo>
-                  <a:lnTo>
-                    <a:pt x="3137577" y="2954480"/>
-                  </a:lnTo>
-                  <a:lnTo>
-                    <a:pt x="3215211" y="2962797"/>
-                  </a:lnTo>
-                  <a:lnTo>
-                    <a:pt x="3292845" y="2971016"/>
-                  </a:lnTo>
-                  <a:lnTo>
-                    <a:pt x="3370479" y="2979137"/>
-                  </a:lnTo>
-                  <a:lnTo>
-                    <a:pt x="3448113" y="2987161"/>
-                  </a:lnTo>
-                  <a:lnTo>
-                    <a:pt x="3525747" y="2995089"/>
-                  </a:lnTo>
-                  <a:lnTo>
-                    <a:pt x="3603381" y="3002923"/>
-                  </a:lnTo>
-                  <a:lnTo>
-                    <a:pt x="3681015" y="3010664"/>
-                  </a:lnTo>
-                  <a:lnTo>
-                    <a:pt x="3758649" y="3018312"/>
-                  </a:lnTo>
-                  <a:lnTo>
-                    <a:pt x="3836283" y="3025869"/>
-                  </a:lnTo>
-                  <a:lnTo>
-                    <a:pt x="3913917" y="3033336"/>
-                  </a:lnTo>
-                  <a:lnTo>
-                    <a:pt x="3991552" y="3040715"/>
-                  </a:lnTo>
-                  <a:lnTo>
-                    <a:pt x="4069186" y="3048005"/>
-                  </a:lnTo>
-                  <a:lnTo>
-                    <a:pt x="4146820" y="3055209"/>
-                  </a:lnTo>
-                  <a:lnTo>
-                    <a:pt x="4224454" y="3062326"/>
-                  </a:lnTo>
-                  <a:lnTo>
-                    <a:pt x="4302088" y="3069359"/>
-                  </a:lnTo>
-                  <a:lnTo>
-                    <a:pt x="4379722" y="3076308"/>
-                  </a:lnTo>
-                  <a:lnTo>
-                    <a:pt x="4457356" y="3083174"/>
-                  </a:lnTo>
-                  <a:lnTo>
-                    <a:pt x="4534990" y="3089959"/>
-                  </a:lnTo>
-                  <a:lnTo>
-                    <a:pt x="4612624" y="3096663"/>
-                  </a:lnTo>
-                  <a:lnTo>
-                    <a:pt x="4690258" y="3103286"/>
-                  </a:lnTo>
-                  <a:lnTo>
-                    <a:pt x="4767892" y="3109831"/>
-                  </a:lnTo>
-                  <a:lnTo>
-                    <a:pt x="4845526" y="3116298"/>
-                  </a:lnTo>
-                  <a:lnTo>
-                    <a:pt x="4923160" y="3122688"/>
-                  </a:lnTo>
-                  <a:lnTo>
-                    <a:pt x="5000794" y="3129002"/>
-                  </a:lnTo>
-                  <a:lnTo>
-                    <a:pt x="5078428" y="3135240"/>
-                  </a:lnTo>
-                  <a:lnTo>
-                    <a:pt x="5156062" y="3141405"/>
-                  </a:lnTo>
-                  <a:lnTo>
-                    <a:pt x="5233696" y="3147495"/>
-                  </a:lnTo>
-                  <a:lnTo>
-                    <a:pt x="5311330" y="3153514"/>
-                  </a:lnTo>
-                  <a:lnTo>
-                    <a:pt x="5388964" y="3159460"/>
-                  </a:lnTo>
-                  <a:lnTo>
-                    <a:pt x="5466598" y="3165336"/>
-                  </a:lnTo>
-                  <a:lnTo>
-                    <a:pt x="5544232" y="3171141"/>
-                  </a:lnTo>
-                  <a:lnTo>
-                    <a:pt x="5621866" y="3176878"/>
-                  </a:lnTo>
-                  <a:lnTo>
-                    <a:pt x="5699501" y="3182546"/>
+                    <a:pt x="73150" y="195552"/>
+                  </a:lnTo>
+                  <a:lnTo>
+                    <a:pt x="150784" y="391337"/>
+                  </a:lnTo>
+                  <a:lnTo>
+                    <a:pt x="228418" y="576035"/>
+                  </a:lnTo>
+                  <a:lnTo>
+                    <a:pt x="306052" y="750272"/>
+                  </a:lnTo>
+                  <a:lnTo>
+                    <a:pt x="383686" y="914642"/>
+                  </a:lnTo>
+                  <a:lnTo>
+                    <a:pt x="461320" y="1069703"/>
+                  </a:lnTo>
+                  <a:lnTo>
+                    <a:pt x="538954" y="1215983"/>
+                  </a:lnTo>
+                  <a:lnTo>
+                    <a:pt x="616588" y="1353978"/>
+                  </a:lnTo>
+                  <a:lnTo>
+                    <a:pt x="694222" y="1484158"/>
+                  </a:lnTo>
+                  <a:lnTo>
+                    <a:pt x="771856" y="1606966"/>
+                  </a:lnTo>
+                  <a:lnTo>
+                    <a:pt x="849490" y="1722819"/>
+                  </a:lnTo>
+                  <a:lnTo>
+                    <a:pt x="927124" y="1832110"/>
+                  </a:lnTo>
+                  <a:lnTo>
+                    <a:pt x="1004758" y="1935212"/>
+                  </a:lnTo>
+                  <a:lnTo>
+                    <a:pt x="1082392" y="2032476"/>
+                  </a:lnTo>
+                  <a:lnTo>
+                    <a:pt x="1160026" y="2124230"/>
+                  </a:lnTo>
+                  <a:lnTo>
+                    <a:pt x="1237660" y="2210789"/>
+                  </a:lnTo>
+                  <a:lnTo>
+                    <a:pt x="1315295" y="2292445"/>
+                  </a:lnTo>
+                  <a:lnTo>
+                    <a:pt x="1392929" y="2369477"/>
+                  </a:lnTo>
+                  <a:lnTo>
+                    <a:pt x="1470563" y="2442147"/>
+                  </a:lnTo>
+                  <a:lnTo>
+                    <a:pt x="1548197" y="2510701"/>
+                  </a:lnTo>
+                  <a:lnTo>
+                    <a:pt x="1625831" y="2575372"/>
+                  </a:lnTo>
+                  <a:lnTo>
+                    <a:pt x="1703465" y="2636381"/>
+                  </a:lnTo>
+                  <a:lnTo>
+                    <a:pt x="1781099" y="2693935"/>
+                  </a:lnTo>
+                  <a:lnTo>
+                    <a:pt x="1858733" y="2748230"/>
+                  </a:lnTo>
+                  <a:lnTo>
+                    <a:pt x="1936367" y="2785445"/>
+                  </a:lnTo>
+                  <a:lnTo>
+                    <a:pt x="2014001" y="2792952"/>
+                  </a:lnTo>
+                  <a:lnTo>
+                    <a:pt x="2091635" y="2800395"/>
+                  </a:lnTo>
+                  <a:lnTo>
+                    <a:pt x="2169269" y="2807773"/>
+                  </a:lnTo>
+                  <a:lnTo>
+                    <a:pt x="2246903" y="2815088"/>
+                  </a:lnTo>
+                  <a:lnTo>
+                    <a:pt x="2324537" y="2822339"/>
+                  </a:lnTo>
+                  <a:lnTo>
+                    <a:pt x="2402171" y="2829527"/>
+                  </a:lnTo>
+                  <a:lnTo>
+                    <a:pt x="2479805" y="2836653"/>
+                  </a:lnTo>
+                  <a:lnTo>
+                    <a:pt x="2557439" y="2843718"/>
+                  </a:lnTo>
+                  <a:lnTo>
+                    <a:pt x="2635073" y="2850721"/>
+                  </a:lnTo>
+                  <a:lnTo>
+                    <a:pt x="2712707" y="2857663"/>
+                  </a:lnTo>
+                  <a:lnTo>
+                    <a:pt x="2790341" y="2864546"/>
+                  </a:lnTo>
+                  <a:lnTo>
+                    <a:pt x="2867975" y="2871369"/>
+                  </a:lnTo>
+                  <a:lnTo>
+                    <a:pt x="2945609" y="2878133"/>
+                  </a:lnTo>
+                  <a:lnTo>
+                    <a:pt x="3023243" y="2884838"/>
+                  </a:lnTo>
+                  <a:lnTo>
+                    <a:pt x="3100878" y="2891485"/>
+                  </a:lnTo>
+                  <a:lnTo>
+                    <a:pt x="3178512" y="2898075"/>
+                  </a:lnTo>
+                  <a:lnTo>
+                    <a:pt x="3256146" y="2904607"/>
+                  </a:lnTo>
+                  <a:lnTo>
+                    <a:pt x="3333780" y="2911083"/>
+                  </a:lnTo>
+                  <a:lnTo>
+                    <a:pt x="3411414" y="2917503"/>
+                  </a:lnTo>
+                  <a:lnTo>
+                    <a:pt x="3489048" y="2923868"/>
+                  </a:lnTo>
+                  <a:lnTo>
+                    <a:pt x="3566682" y="2930177"/>
+                  </a:lnTo>
+                  <a:lnTo>
+                    <a:pt x="3644316" y="2936432"/>
+                  </a:lnTo>
+                  <a:lnTo>
+                    <a:pt x="3721950" y="2942632"/>
+                  </a:lnTo>
+                  <a:lnTo>
+                    <a:pt x="3799584" y="2948779"/>
+                  </a:lnTo>
+                  <a:lnTo>
+                    <a:pt x="3877218" y="2954873"/>
+                  </a:lnTo>
+                  <a:lnTo>
+                    <a:pt x="3954852" y="2960914"/>
+                  </a:lnTo>
+                  <a:lnTo>
+                    <a:pt x="4032486" y="2966903"/>
+                  </a:lnTo>
+                  <a:lnTo>
+                    <a:pt x="4110120" y="2972839"/>
+                  </a:lnTo>
+                  <a:lnTo>
+                    <a:pt x="4187754" y="2978725"/>
+                  </a:lnTo>
+                  <a:lnTo>
+                    <a:pt x="4265388" y="2984559"/>
+                  </a:lnTo>
+                  <a:lnTo>
+                    <a:pt x="4343022" y="2990343"/>
+                  </a:lnTo>
+                  <a:lnTo>
+                    <a:pt x="4420656" y="2996077"/>
+                  </a:lnTo>
+                  <a:lnTo>
+                    <a:pt x="4498290" y="3001761"/>
+                  </a:lnTo>
+                  <a:lnTo>
+                    <a:pt x="4575924" y="3007396"/>
+                  </a:lnTo>
+                  <a:lnTo>
+                    <a:pt x="4653558" y="3012982"/>
+                  </a:lnTo>
+                  <a:lnTo>
+                    <a:pt x="4731192" y="3018520"/>
+                  </a:lnTo>
+                  <a:lnTo>
+                    <a:pt x="4808827" y="3024010"/>
+                  </a:lnTo>
+                  <a:lnTo>
+                    <a:pt x="4886461" y="3029452"/>
+                  </a:lnTo>
+                  <a:lnTo>
+                    <a:pt x="4964095" y="3034847"/>
+                  </a:lnTo>
+                  <a:lnTo>
+                    <a:pt x="5041729" y="3040196"/>
+                  </a:lnTo>
+                  <a:lnTo>
+                    <a:pt x="5119363" y="3045498"/>
+                  </a:lnTo>
+                  <a:lnTo>
+                    <a:pt x="5196997" y="3050754"/>
+                  </a:lnTo>
+                  <a:lnTo>
+                    <a:pt x="5274631" y="3055965"/>
+                  </a:lnTo>
+                  <a:lnTo>
+                    <a:pt x="5352265" y="3061131"/>
+                  </a:lnTo>
+                  <a:lnTo>
+                    <a:pt x="5429899" y="3066252"/>
+                  </a:lnTo>
+                  <a:lnTo>
+                    <a:pt x="5507533" y="3071329"/>
+                  </a:lnTo>
+                  <a:lnTo>
+                    <a:pt x="5585167" y="3076361"/>
+                  </a:lnTo>
+                  <a:lnTo>
+                    <a:pt x="5662801" y="3081350"/>
+                  </a:lnTo>
+                  <a:lnTo>
+                    <a:pt x="5740435" y="3086296"/>
+                  </a:lnTo>
+                  <a:lnTo>
+                    <a:pt x="5818069" y="3091199"/>
+                  </a:lnTo>
+                  <a:lnTo>
+                    <a:pt x="5895703" y="3096060"/>
                   </a:lnTo>
                 </a:path>
               </a:pathLst>
@@ -3796,297 +3808,297 @@
           </p:nvSpPr>
           <p:spPr>
             <a:xfrm>
-              <a:off x="817517" y="4082338"/>
-              <a:ext cx="7370972" cy="1435860"/>
+              <a:off x="817517" y="4278437"/>
+              <a:ext cx="7370972" cy="1227142"/>
             </a:xfrm>
             <a:custGeom>
               <a:avLst/>
               <a:pathLst>
-                <a:path w="7370972" h="1435860">
+                <a:path w="7370972" h="1227142">
                   <a:moveTo>
-                    <a:pt x="7370972" y="1435860"/>
+                    <a:pt x="7370972" y="1227142"/>
                   </a:moveTo>
                   <a:lnTo>
-                    <a:pt x="7293338" y="1433779"/>
-                  </a:lnTo>
-                  <a:lnTo>
-                    <a:pt x="7215704" y="1431558"/>
-                  </a:lnTo>
-                  <a:lnTo>
-                    <a:pt x="7138070" y="1429189"/>
-                  </a:lnTo>
-                  <a:lnTo>
-                    <a:pt x="7060436" y="1426660"/>
-                  </a:lnTo>
-                  <a:lnTo>
-                    <a:pt x="6982802" y="1423962"/>
-                  </a:lnTo>
-                  <a:lnTo>
-                    <a:pt x="6905168" y="1421082"/>
-                  </a:lnTo>
-                  <a:lnTo>
-                    <a:pt x="6827534" y="1418010"/>
-                  </a:lnTo>
-                  <a:lnTo>
-                    <a:pt x="6749900" y="1414731"/>
-                  </a:lnTo>
-                  <a:lnTo>
-                    <a:pt x="6672266" y="1411232"/>
-                  </a:lnTo>
-                  <a:lnTo>
-                    <a:pt x="6594632" y="1407499"/>
-                  </a:lnTo>
-                  <a:lnTo>
-                    <a:pt x="6516998" y="1403514"/>
-                  </a:lnTo>
-                  <a:lnTo>
-                    <a:pt x="6439364" y="1399263"/>
-                  </a:lnTo>
-                  <a:lnTo>
-                    <a:pt x="6361730" y="1394726"/>
-                  </a:lnTo>
-                  <a:lnTo>
-                    <a:pt x="6284096" y="1389885"/>
-                  </a:lnTo>
-                  <a:lnTo>
-                    <a:pt x="6206462" y="1384719"/>
-                  </a:lnTo>
-                  <a:lnTo>
-                    <a:pt x="6128827" y="1379206"/>
-                  </a:lnTo>
-                  <a:lnTo>
-                    <a:pt x="6051193" y="1373323"/>
-                  </a:lnTo>
-                  <a:lnTo>
-                    <a:pt x="5973559" y="1367045"/>
-                  </a:lnTo>
-                  <a:lnTo>
-                    <a:pt x="5895925" y="1360347"/>
-                  </a:lnTo>
-                  <a:lnTo>
-                    <a:pt x="5818291" y="1353198"/>
-                  </a:lnTo>
-                  <a:lnTo>
-                    <a:pt x="5740657" y="1345570"/>
-                  </a:lnTo>
-                  <a:lnTo>
-                    <a:pt x="5663023" y="1337430"/>
-                  </a:lnTo>
-                  <a:lnTo>
-                    <a:pt x="5585389" y="1328744"/>
-                  </a:lnTo>
-                  <a:lnTo>
-                    <a:pt x="5507755" y="1319475"/>
-                  </a:lnTo>
-                  <a:lnTo>
-                    <a:pt x="5430121" y="1309583"/>
-                  </a:lnTo>
-                  <a:lnTo>
-                    <a:pt x="5352487" y="1299028"/>
-                  </a:lnTo>
-                  <a:lnTo>
-                    <a:pt x="5274853" y="1287765"/>
-                  </a:lnTo>
-                  <a:lnTo>
-                    <a:pt x="5197219" y="1275746"/>
-                  </a:lnTo>
-                  <a:lnTo>
-                    <a:pt x="5119585" y="1262920"/>
-                  </a:lnTo>
-                  <a:lnTo>
-                    <a:pt x="5041951" y="1249234"/>
-                  </a:lnTo>
-                  <a:lnTo>
-                    <a:pt x="4964317" y="1234629"/>
-                  </a:lnTo>
-                  <a:lnTo>
-                    <a:pt x="4886683" y="1219044"/>
-                  </a:lnTo>
-                  <a:lnTo>
-                    <a:pt x="4809049" y="1202413"/>
-                  </a:lnTo>
-                  <a:lnTo>
-                    <a:pt x="4731415" y="1184666"/>
-                  </a:lnTo>
-                  <a:lnTo>
-                    <a:pt x="4653781" y="1165728"/>
-                  </a:lnTo>
-                  <a:lnTo>
-                    <a:pt x="4576147" y="1145519"/>
-                  </a:lnTo>
-                  <a:lnTo>
-                    <a:pt x="4498513" y="1123954"/>
-                  </a:lnTo>
-                  <a:lnTo>
-                    <a:pt x="4420879" y="1100942"/>
-                  </a:lnTo>
-                  <a:lnTo>
-                    <a:pt x="4343244" y="1076386"/>
-                  </a:lnTo>
-                  <a:lnTo>
-                    <a:pt x="4265610" y="1050181"/>
-                  </a:lnTo>
-                  <a:lnTo>
-                    <a:pt x="4187976" y="1022219"/>
-                  </a:lnTo>
-                  <a:lnTo>
-                    <a:pt x="4110342" y="992379"/>
-                  </a:lnTo>
-                  <a:lnTo>
-                    <a:pt x="4032708" y="960538"/>
-                  </a:lnTo>
-                  <a:lnTo>
-                    <a:pt x="3955074" y="926559"/>
-                  </a:lnTo>
-                  <a:lnTo>
-                    <a:pt x="3877440" y="890300"/>
-                  </a:lnTo>
-                  <a:lnTo>
-                    <a:pt x="3799806" y="851608"/>
-                  </a:lnTo>
-                  <a:lnTo>
-                    <a:pt x="3722172" y="810320"/>
-                  </a:lnTo>
-                  <a:lnTo>
-                    <a:pt x="3644538" y="766260"/>
-                  </a:lnTo>
-                  <a:lnTo>
-                    <a:pt x="3566904" y="719244"/>
-                  </a:lnTo>
-                  <a:lnTo>
-                    <a:pt x="3489270" y="669073"/>
-                  </a:lnTo>
-                  <a:lnTo>
-                    <a:pt x="3411636" y="615535"/>
-                  </a:lnTo>
-                  <a:lnTo>
-                    <a:pt x="3334002" y="590161"/>
-                  </a:lnTo>
-                  <a:lnTo>
-                    <a:pt x="3256368" y="579590"/>
-                  </a:lnTo>
-                  <a:lnTo>
-                    <a:pt x="3178734" y="568892"/>
-                  </a:lnTo>
-                  <a:lnTo>
-                    <a:pt x="3101100" y="558065"/>
-                  </a:lnTo>
-                  <a:lnTo>
-                    <a:pt x="3023466" y="547107"/>
-                  </a:lnTo>
-                  <a:lnTo>
-                    <a:pt x="2945832" y="536017"/>
-                  </a:lnTo>
-                  <a:lnTo>
-                    <a:pt x="2868198" y="524793"/>
-                  </a:lnTo>
-                  <a:lnTo>
-                    <a:pt x="2790564" y="513434"/>
-                  </a:lnTo>
-                  <a:lnTo>
-                    <a:pt x="2712930" y="501939"/>
-                  </a:lnTo>
-                  <a:lnTo>
-                    <a:pt x="2635295" y="490304"/>
-                  </a:lnTo>
-                  <a:lnTo>
-                    <a:pt x="2557661" y="478529"/>
-                  </a:lnTo>
-                  <a:lnTo>
-                    <a:pt x="2480027" y="466612"/>
-                  </a:lnTo>
-                  <a:lnTo>
-                    <a:pt x="2402393" y="454552"/>
-                  </a:lnTo>
-                  <a:lnTo>
-                    <a:pt x="2324759" y="442346"/>
-                  </a:lnTo>
-                  <a:lnTo>
-                    <a:pt x="2247125" y="429993"/>
-                  </a:lnTo>
-                  <a:lnTo>
-                    <a:pt x="2169491" y="417491"/>
-                  </a:lnTo>
-                  <a:lnTo>
-                    <a:pt x="2091857" y="404838"/>
-                  </a:lnTo>
-                  <a:lnTo>
-                    <a:pt x="2014223" y="392033"/>
-                  </a:lnTo>
-                  <a:lnTo>
-                    <a:pt x="1936589" y="379073"/>
-                  </a:lnTo>
-                  <a:lnTo>
-                    <a:pt x="1858955" y="365957"/>
-                  </a:lnTo>
-                  <a:lnTo>
-                    <a:pt x="1781321" y="352683"/>
-                  </a:lnTo>
-                  <a:lnTo>
-                    <a:pt x="1703687" y="339249"/>
-                  </a:lnTo>
-                  <a:lnTo>
-                    <a:pt x="1626053" y="325653"/>
-                  </a:lnTo>
-                  <a:lnTo>
-                    <a:pt x="1548419" y="311893"/>
-                  </a:lnTo>
-                  <a:lnTo>
-                    <a:pt x="1470785" y="297967"/>
-                  </a:lnTo>
-                  <a:lnTo>
-                    <a:pt x="1393151" y="283873"/>
-                  </a:lnTo>
-                  <a:lnTo>
-                    <a:pt x="1315517" y="269609"/>
-                  </a:lnTo>
-                  <a:lnTo>
-                    <a:pt x="1237883" y="255173"/>
-                  </a:lnTo>
-                  <a:lnTo>
-                    <a:pt x="1160249" y="240564"/>
-                  </a:lnTo>
-                  <a:lnTo>
-                    <a:pt x="1082615" y="225778"/>
-                  </a:lnTo>
-                  <a:lnTo>
-                    <a:pt x="1004981" y="210813"/>
-                  </a:lnTo>
-                  <a:lnTo>
-                    <a:pt x="927346" y="195669"/>
-                  </a:lnTo>
-                  <a:lnTo>
-                    <a:pt x="849712" y="180341"/>
-                  </a:lnTo>
-                  <a:lnTo>
-                    <a:pt x="772078" y="164829"/>
-                  </a:lnTo>
-                  <a:lnTo>
-                    <a:pt x="694444" y="149130"/>
-                  </a:lnTo>
-                  <a:lnTo>
-                    <a:pt x="616810" y="133241"/>
-                  </a:lnTo>
-                  <a:lnTo>
-                    <a:pt x="539176" y="117161"/>
-                  </a:lnTo>
-                  <a:lnTo>
-                    <a:pt x="461542" y="100888"/>
-                  </a:lnTo>
-                  <a:lnTo>
-                    <a:pt x="383908" y="84417"/>
-                  </a:lnTo>
-                  <a:lnTo>
-                    <a:pt x="306274" y="67749"/>
-                  </a:lnTo>
-                  <a:lnTo>
-                    <a:pt x="228640" y="50879"/>
-                  </a:lnTo>
-                  <a:lnTo>
-                    <a:pt x="151006" y="33806"/>
-                  </a:lnTo>
-                  <a:lnTo>
-                    <a:pt x="73372" y="16527"/>
+                    <a:pt x="7293338" y="1224522"/>
+                  </a:lnTo>
+                  <a:lnTo>
+                    <a:pt x="7215704" y="1221746"/>
+                  </a:lnTo>
+                  <a:lnTo>
+                    <a:pt x="7138070" y="1218803"/>
+                  </a:lnTo>
+                  <a:lnTo>
+                    <a:pt x="7060436" y="1215683"/>
+                  </a:lnTo>
+                  <a:lnTo>
+                    <a:pt x="6982802" y="1212377"/>
+                  </a:lnTo>
+                  <a:lnTo>
+                    <a:pt x="6905168" y="1208871"/>
+                  </a:lnTo>
+                  <a:lnTo>
+                    <a:pt x="6827534" y="1205155"/>
+                  </a:lnTo>
+                  <a:lnTo>
+                    <a:pt x="6749900" y="1201216"/>
+                  </a:lnTo>
+                  <a:lnTo>
+                    <a:pt x="6672266" y="1197041"/>
+                  </a:lnTo>
+                  <a:lnTo>
+                    <a:pt x="6594632" y="1192614"/>
+                  </a:lnTo>
+                  <a:lnTo>
+                    <a:pt x="6516998" y="1187923"/>
+                  </a:lnTo>
+                  <a:lnTo>
+                    <a:pt x="6439364" y="1182949"/>
+                  </a:lnTo>
+                  <a:lnTo>
+                    <a:pt x="6361730" y="1177677"/>
+                  </a:lnTo>
+                  <a:lnTo>
+                    <a:pt x="6284096" y="1172088"/>
+                  </a:lnTo>
+                  <a:lnTo>
+                    <a:pt x="6206462" y="1166164"/>
+                  </a:lnTo>
+                  <a:lnTo>
+                    <a:pt x="6128827" y="1159885"/>
+                  </a:lnTo>
+                  <a:lnTo>
+                    <a:pt x="6051193" y="1153228"/>
+                  </a:lnTo>
+                  <a:lnTo>
+                    <a:pt x="5973559" y="1146171"/>
+                  </a:lnTo>
+                  <a:lnTo>
+                    <a:pt x="5895925" y="1138691"/>
+                  </a:lnTo>
+                  <a:lnTo>
+                    <a:pt x="5818291" y="1130762"/>
+                  </a:lnTo>
+                  <a:lnTo>
+                    <a:pt x="5740657" y="1122357"/>
+                  </a:lnTo>
+                  <a:lnTo>
+                    <a:pt x="5663023" y="1113448"/>
+                  </a:lnTo>
+                  <a:lnTo>
+                    <a:pt x="5585389" y="1104003"/>
+                  </a:lnTo>
+                  <a:lnTo>
+                    <a:pt x="5507755" y="1093992"/>
+                  </a:lnTo>
+                  <a:lnTo>
+                    <a:pt x="5430121" y="1083380"/>
+                  </a:lnTo>
+                  <a:lnTo>
+                    <a:pt x="5352487" y="1072130"/>
+                  </a:lnTo>
+                  <a:lnTo>
+                    <a:pt x="5274853" y="1060205"/>
+                  </a:lnTo>
+                  <a:lnTo>
+                    <a:pt x="5197219" y="1047564"/>
+                  </a:lnTo>
+                  <a:lnTo>
+                    <a:pt x="5119585" y="1034165"/>
+                  </a:lnTo>
+                  <a:lnTo>
+                    <a:pt x="5041951" y="1019961"/>
+                  </a:lnTo>
+                  <a:lnTo>
+                    <a:pt x="4964317" y="1004904"/>
+                  </a:lnTo>
+                  <a:lnTo>
+                    <a:pt x="4886683" y="988943"/>
+                  </a:lnTo>
+                  <a:lnTo>
+                    <a:pt x="4809049" y="972025"/>
+                  </a:lnTo>
+                  <a:lnTo>
+                    <a:pt x="4731415" y="954090"/>
+                  </a:lnTo>
+                  <a:lnTo>
+                    <a:pt x="4653781" y="935079"/>
+                  </a:lnTo>
+                  <a:lnTo>
+                    <a:pt x="4576147" y="914927"/>
+                  </a:lnTo>
+                  <a:lnTo>
+                    <a:pt x="4498513" y="893564"/>
+                  </a:lnTo>
+                  <a:lnTo>
+                    <a:pt x="4420879" y="870920"/>
+                  </a:lnTo>
+                  <a:lnTo>
+                    <a:pt x="4343244" y="846916"/>
+                  </a:lnTo>
+                  <a:lnTo>
+                    <a:pt x="4265610" y="821470"/>
+                  </a:lnTo>
+                  <a:lnTo>
+                    <a:pt x="4187976" y="794498"/>
+                  </a:lnTo>
+                  <a:lnTo>
+                    <a:pt x="4110342" y="765906"/>
+                  </a:lnTo>
+                  <a:lnTo>
+                    <a:pt x="4032708" y="735597"/>
+                  </a:lnTo>
+                  <a:lnTo>
+                    <a:pt x="3955074" y="703470"/>
+                  </a:lnTo>
+                  <a:lnTo>
+                    <a:pt x="3877440" y="669413"/>
+                  </a:lnTo>
+                  <a:lnTo>
+                    <a:pt x="3799806" y="633312"/>
+                  </a:lnTo>
+                  <a:lnTo>
+                    <a:pt x="3722172" y="595044"/>
+                  </a:lnTo>
+                  <a:lnTo>
+                    <a:pt x="3644538" y="554478"/>
+                  </a:lnTo>
+                  <a:lnTo>
+                    <a:pt x="3566904" y="511477"/>
+                  </a:lnTo>
+                  <a:lnTo>
+                    <a:pt x="3489270" y="465894"/>
+                  </a:lnTo>
+                  <a:lnTo>
+                    <a:pt x="3411636" y="417576"/>
+                  </a:lnTo>
+                  <a:lnTo>
+                    <a:pt x="3334002" y="395997"/>
+                  </a:lnTo>
+                  <a:lnTo>
+                    <a:pt x="3256368" y="388358"/>
+                  </a:lnTo>
+                  <a:lnTo>
+                    <a:pt x="3178734" y="380652"/>
+                  </a:lnTo>
+                  <a:lnTo>
+                    <a:pt x="3101100" y="372879"/>
+                  </a:lnTo>
+                  <a:lnTo>
+                    <a:pt x="3023466" y="365037"/>
+                  </a:lnTo>
+                  <a:lnTo>
+                    <a:pt x="2945832" y="357127"/>
+                  </a:lnTo>
+                  <a:lnTo>
+                    <a:pt x="2868198" y="349149"/>
+                  </a:lnTo>
+                  <a:lnTo>
+                    <a:pt x="2790564" y="341100"/>
+                  </a:lnTo>
+                  <a:lnTo>
+                    <a:pt x="2712930" y="332981"/>
+                  </a:lnTo>
+                  <a:lnTo>
+                    <a:pt x="2635295" y="324791"/>
+                  </a:lnTo>
+                  <a:lnTo>
+                    <a:pt x="2557661" y="316530"/>
+                  </a:lnTo>
+                  <a:lnTo>
+                    <a:pt x="2480027" y="308197"/>
+                  </a:lnTo>
+                  <a:lnTo>
+                    <a:pt x="2402393" y="299791"/>
+                  </a:lnTo>
+                  <a:lnTo>
+                    <a:pt x="2324759" y="291311"/>
+                  </a:lnTo>
+                  <a:lnTo>
+                    <a:pt x="2247125" y="282757"/>
+                  </a:lnTo>
+                  <a:lnTo>
+                    <a:pt x="2169491" y="274129"/>
+                  </a:lnTo>
+                  <a:lnTo>
+                    <a:pt x="2091857" y="265425"/>
+                  </a:lnTo>
+                  <a:lnTo>
+                    <a:pt x="2014223" y="256646"/>
+                  </a:lnTo>
+                  <a:lnTo>
+                    <a:pt x="1936589" y="247789"/>
+                  </a:lnTo>
+                  <a:lnTo>
+                    <a:pt x="1858955" y="238855"/>
+                  </a:lnTo>
+                  <a:lnTo>
+                    <a:pt x="1781321" y="229844"/>
+                  </a:lnTo>
+                  <a:lnTo>
+                    <a:pt x="1703687" y="220753"/>
+                  </a:lnTo>
+                  <a:lnTo>
+                    <a:pt x="1626053" y="211583"/>
+                  </a:lnTo>
+                  <a:lnTo>
+                    <a:pt x="1548419" y="202334"/>
+                  </a:lnTo>
+                  <a:lnTo>
+                    <a:pt x="1470785" y="193003"/>
+                  </a:lnTo>
+                  <a:lnTo>
+                    <a:pt x="1393151" y="183591"/>
+                  </a:lnTo>
+                  <a:lnTo>
+                    <a:pt x="1315517" y="174096"/>
+                  </a:lnTo>
+                  <a:lnTo>
+                    <a:pt x="1237883" y="164519"/>
+                  </a:lnTo>
+                  <a:lnTo>
+                    <a:pt x="1160249" y="154858"/>
+                  </a:lnTo>
+                  <a:lnTo>
+                    <a:pt x="1082615" y="145113"/>
+                  </a:lnTo>
+                  <a:lnTo>
+                    <a:pt x="1004981" y="135282"/>
+                  </a:lnTo>
+                  <a:lnTo>
+                    <a:pt x="927346" y="125366"/>
+                  </a:lnTo>
+                  <a:lnTo>
+                    <a:pt x="849712" y="115363"/>
+                  </a:lnTo>
+                  <a:lnTo>
+                    <a:pt x="772078" y="105273"/>
+                  </a:lnTo>
+                  <a:lnTo>
+                    <a:pt x="694444" y="95095"/>
+                  </a:lnTo>
+                  <a:lnTo>
+                    <a:pt x="616810" y="84828"/>
+                  </a:lnTo>
+                  <a:lnTo>
+                    <a:pt x="539176" y="74471"/>
+                  </a:lnTo>
+                  <a:lnTo>
+                    <a:pt x="461542" y="64023"/>
+                  </a:lnTo>
+                  <a:lnTo>
+                    <a:pt x="383908" y="53485"/>
+                  </a:lnTo>
+                  <a:lnTo>
+                    <a:pt x="306274" y="42854"/>
+                  </a:lnTo>
+                  <a:lnTo>
+                    <a:pt x="228640" y="32131"/>
+                  </a:lnTo>
+                  <a:lnTo>
+                    <a:pt x="151006" y="21314"/>
+                  </a:lnTo>
+                  <a:lnTo>
+                    <a:pt x="73372" y="10402"/>
                   </a:lnTo>
                   <a:lnTo>
                     <a:pt x="0" y="0"/>
@@ -4109,282 +4121,300 @@
           </p:nvSpPr>
           <p:spPr>
             <a:xfrm>
-              <a:off x="1307844" y="1896563"/>
-              <a:ext cx="6880646" cy="3531907"/>
+              <a:off x="877891" y="1896563"/>
+              <a:ext cx="7310598" cy="3496815"/>
             </a:xfrm>
             <a:custGeom>
               <a:avLst/>
               <a:pathLst>
-                <a:path w="6880646" h="3531907">
+                <a:path w="7310598" h="3496815">
                   <a:moveTo>
                     <a:pt x="0" y="0"/>
                   </a:moveTo>
                   <a:lnTo>
-                    <a:pt x="48850" y="87967"/>
-                  </a:lnTo>
-                  <a:lnTo>
-                    <a:pt x="126484" y="222490"/>
-                  </a:lnTo>
-                  <a:lnTo>
-                    <a:pt x="204118" y="351937"/>
-                  </a:lnTo>
-                  <a:lnTo>
-                    <a:pt x="281752" y="476499"/>
-                  </a:lnTo>
-                  <a:lnTo>
-                    <a:pt x="359386" y="596360"/>
-                  </a:lnTo>
-                  <a:lnTo>
-                    <a:pt x="437020" y="711698"/>
-                  </a:lnTo>
-                  <a:lnTo>
-                    <a:pt x="514654" y="822683"/>
-                  </a:lnTo>
-                  <a:lnTo>
-                    <a:pt x="592288" y="929480"/>
-                  </a:lnTo>
-                  <a:lnTo>
-                    <a:pt x="669922" y="1032247"/>
-                  </a:lnTo>
-                  <a:lnTo>
-                    <a:pt x="747556" y="1131135"/>
-                  </a:lnTo>
-                  <a:lnTo>
-                    <a:pt x="825190" y="1226292"/>
-                  </a:lnTo>
-                  <a:lnTo>
-                    <a:pt x="902824" y="1317857"/>
-                  </a:lnTo>
-                  <a:lnTo>
-                    <a:pt x="980458" y="1405967"/>
-                  </a:lnTo>
-                  <a:lnTo>
-                    <a:pt x="1058092" y="1490752"/>
-                  </a:lnTo>
-                  <a:lnTo>
-                    <a:pt x="1135727" y="1572337"/>
-                  </a:lnTo>
-                  <a:lnTo>
-                    <a:pt x="1213361" y="1650844"/>
-                  </a:lnTo>
-                  <a:lnTo>
-                    <a:pt x="1290995" y="1726388"/>
-                  </a:lnTo>
-                  <a:lnTo>
-                    <a:pt x="1368629" y="1799081"/>
-                  </a:lnTo>
-                  <a:lnTo>
-                    <a:pt x="1446263" y="1869030"/>
-                  </a:lnTo>
-                  <a:lnTo>
-                    <a:pt x="1523897" y="1936340"/>
-                  </a:lnTo>
-                  <a:lnTo>
-                    <a:pt x="1601531" y="2001110"/>
-                  </a:lnTo>
-                  <a:lnTo>
-                    <a:pt x="1679165" y="2063435"/>
-                  </a:lnTo>
-                  <a:lnTo>
-                    <a:pt x="1756799" y="2123409"/>
-                  </a:lnTo>
-                  <a:lnTo>
-                    <a:pt x="1834433" y="2181119"/>
-                  </a:lnTo>
-                  <a:lnTo>
-                    <a:pt x="1912067" y="2236651"/>
-                  </a:lnTo>
-                  <a:lnTo>
-                    <a:pt x="1989701" y="2290088"/>
-                  </a:lnTo>
-                  <a:lnTo>
-                    <a:pt x="2067335" y="2341508"/>
-                  </a:lnTo>
-                  <a:lnTo>
-                    <a:pt x="2144969" y="2390987"/>
-                  </a:lnTo>
-                  <a:lnTo>
-                    <a:pt x="2222603" y="2438600"/>
-                  </a:lnTo>
-                  <a:lnTo>
-                    <a:pt x="2300237" y="2484415"/>
-                  </a:lnTo>
-                  <a:lnTo>
-                    <a:pt x="2377871" y="2528502"/>
-                  </a:lnTo>
-                  <a:lnTo>
-                    <a:pt x="2455505" y="2570924"/>
-                  </a:lnTo>
-                  <a:lnTo>
-                    <a:pt x="2533139" y="2611746"/>
-                  </a:lnTo>
-                  <a:lnTo>
-                    <a:pt x="2610773" y="2651028"/>
-                  </a:lnTo>
-                  <a:lnTo>
-                    <a:pt x="2688407" y="2688827"/>
-                  </a:lnTo>
-                  <a:lnTo>
-                    <a:pt x="2766041" y="2725199"/>
-                  </a:lnTo>
-                  <a:lnTo>
-                    <a:pt x="2843676" y="2760199"/>
-                  </a:lnTo>
-                  <a:lnTo>
-                    <a:pt x="2921310" y="2793878"/>
-                  </a:lnTo>
-                  <a:lnTo>
-                    <a:pt x="2998944" y="2826286"/>
-                  </a:lnTo>
-                  <a:lnTo>
-                    <a:pt x="3076578" y="2857471"/>
-                  </a:lnTo>
-                  <a:lnTo>
-                    <a:pt x="3154212" y="2887479"/>
-                  </a:lnTo>
-                  <a:lnTo>
-                    <a:pt x="3231846" y="2916355"/>
-                  </a:lnTo>
-                  <a:lnTo>
-                    <a:pt x="3309480" y="2944141"/>
-                  </a:lnTo>
-                  <a:lnTo>
-                    <a:pt x="3387114" y="2970878"/>
-                  </a:lnTo>
-                  <a:lnTo>
-                    <a:pt x="3464748" y="2996607"/>
-                  </a:lnTo>
-                  <a:lnTo>
-                    <a:pt x="3542382" y="3021364"/>
-                  </a:lnTo>
-                  <a:lnTo>
-                    <a:pt x="3620016" y="3045187"/>
-                  </a:lnTo>
-                  <a:lnTo>
-                    <a:pt x="3697650" y="3068111"/>
-                  </a:lnTo>
-                  <a:lnTo>
-                    <a:pt x="3775284" y="3090170"/>
-                  </a:lnTo>
-                  <a:lnTo>
-                    <a:pt x="3852918" y="3111397"/>
-                  </a:lnTo>
-                  <a:lnTo>
-                    <a:pt x="3930552" y="3131823"/>
-                  </a:lnTo>
-                  <a:lnTo>
-                    <a:pt x="4008186" y="3151477"/>
-                  </a:lnTo>
-                  <a:lnTo>
-                    <a:pt x="4085820" y="3170390"/>
-                  </a:lnTo>
-                  <a:lnTo>
-                    <a:pt x="4163454" y="3188589"/>
-                  </a:lnTo>
-                  <a:lnTo>
-                    <a:pt x="4241088" y="3206102"/>
-                  </a:lnTo>
-                  <a:lnTo>
-                    <a:pt x="4318722" y="3222953"/>
-                  </a:lnTo>
-                  <a:lnTo>
-                    <a:pt x="4396356" y="3239169"/>
-                  </a:lnTo>
-                  <a:lnTo>
-                    <a:pt x="4473990" y="3254773"/>
-                  </a:lnTo>
-                  <a:lnTo>
-                    <a:pt x="4551625" y="3269788"/>
-                  </a:lnTo>
-                  <a:lnTo>
-                    <a:pt x="4629259" y="3284236"/>
-                  </a:lnTo>
-                  <a:lnTo>
-                    <a:pt x="4706893" y="3298139"/>
-                  </a:lnTo>
-                  <a:lnTo>
-                    <a:pt x="4784527" y="3311517"/>
-                  </a:lnTo>
-                  <a:lnTo>
-                    <a:pt x="4862161" y="3324390"/>
-                  </a:lnTo>
-                  <a:lnTo>
-                    <a:pt x="4939795" y="3336778"/>
-                  </a:lnTo>
-                  <a:lnTo>
-                    <a:pt x="5017429" y="3348698"/>
-                  </a:lnTo>
-                  <a:lnTo>
-                    <a:pt x="5095063" y="3360168"/>
-                  </a:lnTo>
-                  <a:lnTo>
-                    <a:pt x="5172697" y="3371206"/>
-                  </a:lnTo>
-                  <a:lnTo>
-                    <a:pt x="5250331" y="3381827"/>
-                  </a:lnTo>
-                  <a:lnTo>
-                    <a:pt x="5327965" y="3392047"/>
-                  </a:lnTo>
-                  <a:lnTo>
-                    <a:pt x="5405599" y="3401881"/>
-                  </a:lnTo>
-                  <a:lnTo>
-                    <a:pt x="5483233" y="3411344"/>
-                  </a:lnTo>
-                  <a:lnTo>
-                    <a:pt x="5560867" y="3420450"/>
-                  </a:lnTo>
-                  <a:lnTo>
-                    <a:pt x="5638501" y="3429213"/>
-                  </a:lnTo>
-                  <a:lnTo>
-                    <a:pt x="5716135" y="3437645"/>
-                  </a:lnTo>
-                  <a:lnTo>
-                    <a:pt x="5793769" y="3445758"/>
-                  </a:lnTo>
-                  <a:lnTo>
-                    <a:pt x="5871403" y="3453566"/>
-                  </a:lnTo>
-                  <a:lnTo>
-                    <a:pt x="5949037" y="3461078"/>
-                  </a:lnTo>
-                  <a:lnTo>
-                    <a:pt x="6026671" y="3468308"/>
-                  </a:lnTo>
-                  <a:lnTo>
-                    <a:pt x="6104305" y="3475264"/>
-                  </a:lnTo>
-                  <a:lnTo>
-                    <a:pt x="6181939" y="3481958"/>
-                  </a:lnTo>
-                  <a:lnTo>
-                    <a:pt x="6259574" y="3488399"/>
-                  </a:lnTo>
-                  <a:lnTo>
-                    <a:pt x="6337208" y="3494598"/>
-                  </a:lnTo>
-                  <a:lnTo>
-                    <a:pt x="6414842" y="3500562"/>
-                  </a:lnTo>
-                  <a:lnTo>
-                    <a:pt x="6492476" y="3506301"/>
-                  </a:lnTo>
-                  <a:lnTo>
-                    <a:pt x="6570110" y="3511824"/>
-                  </a:lnTo>
-                  <a:lnTo>
-                    <a:pt x="6647744" y="3517138"/>
-                  </a:lnTo>
-                  <a:lnTo>
-                    <a:pt x="6725378" y="3522252"/>
-                  </a:lnTo>
-                  <a:lnTo>
-                    <a:pt x="6803012" y="3527172"/>
-                  </a:lnTo>
-                  <a:lnTo>
-                    <a:pt x="6880646" y="3531907"/>
+                    <a:pt x="12998" y="20715"/>
+                  </a:lnTo>
+                  <a:lnTo>
+                    <a:pt x="90632" y="140360"/>
+                  </a:lnTo>
+                  <a:lnTo>
+                    <a:pt x="168266" y="256064"/>
+                  </a:lnTo>
+                  <a:lnTo>
+                    <a:pt x="245900" y="367956"/>
+                  </a:lnTo>
+                  <a:lnTo>
+                    <a:pt x="323534" y="476163"/>
+                  </a:lnTo>
+                  <a:lnTo>
+                    <a:pt x="401168" y="580804"/>
+                  </a:lnTo>
+                  <a:lnTo>
+                    <a:pt x="478802" y="681999"/>
+                  </a:lnTo>
+                  <a:lnTo>
+                    <a:pt x="556436" y="779860"/>
+                  </a:lnTo>
+                  <a:lnTo>
+                    <a:pt x="634070" y="874497"/>
+                  </a:lnTo>
+                  <a:lnTo>
+                    <a:pt x="711704" y="966016"/>
+                  </a:lnTo>
+                  <a:lnTo>
+                    <a:pt x="789339" y="1054521"/>
+                  </a:lnTo>
+                  <a:lnTo>
+                    <a:pt x="866973" y="1140110"/>
+                  </a:lnTo>
+                  <a:lnTo>
+                    <a:pt x="944607" y="1222879"/>
+                  </a:lnTo>
+                  <a:lnTo>
+                    <a:pt x="1022241" y="1302922"/>
+                  </a:lnTo>
+                  <a:lnTo>
+                    <a:pt x="1099875" y="1380328"/>
+                  </a:lnTo>
+                  <a:lnTo>
+                    <a:pt x="1177509" y="1455184"/>
+                  </a:lnTo>
+                  <a:lnTo>
+                    <a:pt x="1255143" y="1527575"/>
+                  </a:lnTo>
+                  <a:lnTo>
+                    <a:pt x="1332777" y="1597580"/>
+                  </a:lnTo>
+                  <a:lnTo>
+                    <a:pt x="1410411" y="1665279"/>
+                  </a:lnTo>
+                  <a:lnTo>
+                    <a:pt x="1488045" y="1730748"/>
+                  </a:lnTo>
+                  <a:lnTo>
+                    <a:pt x="1565679" y="1794061"/>
+                  </a:lnTo>
+                  <a:lnTo>
+                    <a:pt x="1643313" y="1855287"/>
+                  </a:lnTo>
+                  <a:lnTo>
+                    <a:pt x="1720947" y="1914497"/>
+                  </a:lnTo>
+                  <a:lnTo>
+                    <a:pt x="1798581" y="1971756"/>
+                  </a:lnTo>
+                  <a:lnTo>
+                    <a:pt x="1876215" y="2027129"/>
+                  </a:lnTo>
+                  <a:lnTo>
+                    <a:pt x="1953849" y="2080678"/>
+                  </a:lnTo>
+                  <a:lnTo>
+                    <a:pt x="2031483" y="2132462"/>
+                  </a:lnTo>
+                  <a:lnTo>
+                    <a:pt x="2109117" y="2182541"/>
+                  </a:lnTo>
+                  <a:lnTo>
+                    <a:pt x="2186751" y="2230970"/>
+                  </a:lnTo>
+                  <a:lnTo>
+                    <a:pt x="2264385" y="2277804"/>
+                  </a:lnTo>
+                  <a:lnTo>
+                    <a:pt x="2342019" y="2323095"/>
+                  </a:lnTo>
+                  <a:lnTo>
+                    <a:pt x="2419653" y="2366894"/>
+                  </a:lnTo>
+                  <a:lnTo>
+                    <a:pt x="2497287" y="2409250"/>
+                  </a:lnTo>
+                  <a:lnTo>
+                    <a:pt x="2574922" y="2450210"/>
+                  </a:lnTo>
+                  <a:lnTo>
+                    <a:pt x="2652556" y="2489822"/>
+                  </a:lnTo>
+                  <a:lnTo>
+                    <a:pt x="2730190" y="2528128"/>
+                  </a:lnTo>
+                  <a:lnTo>
+                    <a:pt x="2807824" y="2565173"/>
+                  </a:lnTo>
+                  <a:lnTo>
+                    <a:pt x="2885458" y="2600997"/>
+                  </a:lnTo>
+                  <a:lnTo>
+                    <a:pt x="2963092" y="2635641"/>
+                  </a:lnTo>
+                  <a:lnTo>
+                    <a:pt x="3040726" y="2669144"/>
+                  </a:lnTo>
+                  <a:lnTo>
+                    <a:pt x="3118360" y="2701543"/>
+                  </a:lnTo>
+                  <a:lnTo>
+                    <a:pt x="3195994" y="2732874"/>
+                  </a:lnTo>
+                  <a:lnTo>
+                    <a:pt x="3273628" y="2763174"/>
+                  </a:lnTo>
+                  <a:lnTo>
+                    <a:pt x="3351262" y="2792476"/>
+                  </a:lnTo>
+                  <a:lnTo>
+                    <a:pt x="3428896" y="2820812"/>
+                  </a:lnTo>
+                  <a:lnTo>
+                    <a:pt x="3506530" y="2848215"/>
+                  </a:lnTo>
+                  <a:lnTo>
+                    <a:pt x="3584164" y="2874715"/>
+                  </a:lnTo>
+                  <a:lnTo>
+                    <a:pt x="3661798" y="2900342"/>
+                  </a:lnTo>
+                  <a:lnTo>
+                    <a:pt x="3739432" y="2925124"/>
+                  </a:lnTo>
+                  <a:lnTo>
+                    <a:pt x="3817066" y="2949091"/>
+                  </a:lnTo>
+                  <a:lnTo>
+                    <a:pt x="3894700" y="2972268"/>
+                  </a:lnTo>
+                  <a:lnTo>
+                    <a:pt x="3972334" y="2994681"/>
+                  </a:lnTo>
+                  <a:lnTo>
+                    <a:pt x="4049968" y="3016356"/>
+                  </a:lnTo>
+                  <a:lnTo>
+                    <a:pt x="4127602" y="3037317"/>
+                  </a:lnTo>
+                  <a:lnTo>
+                    <a:pt x="4205236" y="3057588"/>
+                  </a:lnTo>
+                  <a:lnTo>
+                    <a:pt x="4282871" y="3077190"/>
+                  </a:lnTo>
+                  <a:lnTo>
+                    <a:pt x="4360505" y="3096147"/>
+                  </a:lnTo>
+                  <a:lnTo>
+                    <a:pt x="4438139" y="3114480"/>
+                  </a:lnTo>
+                  <a:lnTo>
+                    <a:pt x="4515773" y="3132208"/>
+                  </a:lnTo>
+                  <a:lnTo>
+                    <a:pt x="4593407" y="3149353"/>
+                  </a:lnTo>
+                  <a:lnTo>
+                    <a:pt x="4671041" y="3165932"/>
+                  </a:lnTo>
+                  <a:lnTo>
+                    <a:pt x="4748675" y="3181966"/>
+                  </a:lnTo>
+                  <a:lnTo>
+                    <a:pt x="4826309" y="3197471"/>
+                  </a:lnTo>
+                  <a:lnTo>
+                    <a:pt x="4903943" y="3212466"/>
+                  </a:lnTo>
+                  <a:lnTo>
+                    <a:pt x="4981577" y="3226967"/>
+                  </a:lnTo>
+                  <a:lnTo>
+                    <a:pt x="5059211" y="3240989"/>
+                  </a:lnTo>
+                  <a:lnTo>
+                    <a:pt x="5136845" y="3254550"/>
+                  </a:lnTo>
+                  <a:lnTo>
+                    <a:pt x="5214479" y="3267665"/>
+                  </a:lnTo>
+                  <a:lnTo>
+                    <a:pt x="5292113" y="3280347"/>
+                  </a:lnTo>
+                  <a:lnTo>
+                    <a:pt x="5369747" y="3292611"/>
+                  </a:lnTo>
+                  <a:lnTo>
+                    <a:pt x="5447381" y="3304472"/>
+                  </a:lnTo>
+                  <a:lnTo>
+                    <a:pt x="5525015" y="3315941"/>
+                  </a:lnTo>
+                  <a:lnTo>
+                    <a:pt x="5602649" y="3327033"/>
+                  </a:lnTo>
+                  <a:lnTo>
+                    <a:pt x="5680283" y="3337760"/>
+                  </a:lnTo>
+                  <a:lnTo>
+                    <a:pt x="5757917" y="3348133"/>
+                  </a:lnTo>
+                  <a:lnTo>
+                    <a:pt x="5835551" y="3358164"/>
+                  </a:lnTo>
+                  <a:lnTo>
+                    <a:pt x="5913185" y="3367865"/>
+                  </a:lnTo>
+                  <a:lnTo>
+                    <a:pt x="5990820" y="3377246"/>
+                  </a:lnTo>
+                  <a:lnTo>
+                    <a:pt x="6068454" y="3386319"/>
+                  </a:lnTo>
+                  <a:lnTo>
+                    <a:pt x="6146088" y="3395092"/>
+                  </a:lnTo>
+                  <a:lnTo>
+                    <a:pt x="6223722" y="3403577"/>
+                  </a:lnTo>
+                  <a:lnTo>
+                    <a:pt x="6301356" y="3411782"/>
+                  </a:lnTo>
+                  <a:lnTo>
+                    <a:pt x="6378990" y="3419716"/>
+                  </a:lnTo>
+                  <a:lnTo>
+                    <a:pt x="6456624" y="3427389"/>
+                  </a:lnTo>
+                  <a:lnTo>
+                    <a:pt x="6534258" y="3434810"/>
+                  </a:lnTo>
+                  <a:lnTo>
+                    <a:pt x="6611892" y="3441986"/>
+                  </a:lnTo>
+                  <a:lnTo>
+                    <a:pt x="6689526" y="3448925"/>
+                  </a:lnTo>
+                  <a:lnTo>
+                    <a:pt x="6767160" y="3455637"/>
+                  </a:lnTo>
+                  <a:lnTo>
+                    <a:pt x="6844794" y="3462126"/>
+                  </a:lnTo>
+                  <a:lnTo>
+                    <a:pt x="6922428" y="3468403"/>
+                  </a:lnTo>
+                  <a:lnTo>
+                    <a:pt x="7000062" y="3474472"/>
+                  </a:lnTo>
+                  <a:lnTo>
+                    <a:pt x="7077696" y="3480341"/>
+                  </a:lnTo>
+                  <a:lnTo>
+                    <a:pt x="7155330" y="3486017"/>
+                  </a:lnTo>
+                  <a:lnTo>
+                    <a:pt x="7232964" y="3491507"/>
+                  </a:lnTo>
+                  <a:lnTo>
+                    <a:pt x="7310598" y="3496815"/>
                   </a:lnTo>
                 </a:path>
               </a:pathLst>

--- a/docs/plots/carbo/jx_carbo_linsubhr_ratio_hosp7.pptx
+++ b/docs/plots/carbo/jx_carbo_linsubhr_ratio_hosp7.pptx
@@ -3003,530 +3003,533 @@
           <p:spPr>
             <a:xfrm>
               <a:off x="817517" y="1896563"/>
-              <a:ext cx="7370972" cy="3609015"/>
+              <a:ext cx="7370972" cy="3607722"/>
             </a:xfrm>
             <a:custGeom>
               <a:avLst/>
               <a:pathLst>
-                <a:path w="7370972" h="3609015">
+                <a:path w="7370972" h="3607722">
                   <a:moveTo>
-                    <a:pt x="1475269" y="0"/>
+                    <a:pt x="1456644" y="0"/>
                   </a:moveTo>
                   <a:lnTo>
-                    <a:pt x="1548419" y="195552"/>
-                  </a:lnTo>
-                  <a:lnTo>
-                    <a:pt x="1626053" y="391337"/>
-                  </a:lnTo>
-                  <a:lnTo>
-                    <a:pt x="1703687" y="576035"/>
-                  </a:lnTo>
-                  <a:lnTo>
-                    <a:pt x="1781321" y="750272"/>
-                  </a:lnTo>
-                  <a:lnTo>
-                    <a:pt x="1858955" y="914642"/>
-                  </a:lnTo>
-                  <a:lnTo>
-                    <a:pt x="1936589" y="1069703"/>
-                  </a:lnTo>
-                  <a:lnTo>
-                    <a:pt x="2014223" y="1215983"/>
-                  </a:lnTo>
-                  <a:lnTo>
-                    <a:pt x="2091857" y="1353978"/>
-                  </a:lnTo>
-                  <a:lnTo>
-                    <a:pt x="2169491" y="1484158"/>
-                  </a:lnTo>
-                  <a:lnTo>
-                    <a:pt x="2247125" y="1606966"/>
-                  </a:lnTo>
-                  <a:lnTo>
-                    <a:pt x="2324759" y="1722819"/>
-                  </a:lnTo>
-                  <a:lnTo>
-                    <a:pt x="2402393" y="1832110"/>
-                  </a:lnTo>
-                  <a:lnTo>
-                    <a:pt x="2480027" y="1935212"/>
-                  </a:lnTo>
-                  <a:lnTo>
-                    <a:pt x="2557661" y="2032476"/>
-                  </a:lnTo>
-                  <a:lnTo>
-                    <a:pt x="2635295" y="2124230"/>
-                  </a:lnTo>
-                  <a:lnTo>
-                    <a:pt x="2712930" y="2210789"/>
-                  </a:lnTo>
-                  <a:lnTo>
-                    <a:pt x="2790564" y="2292445"/>
-                  </a:lnTo>
-                  <a:lnTo>
-                    <a:pt x="2868198" y="2369477"/>
-                  </a:lnTo>
-                  <a:lnTo>
-                    <a:pt x="2945832" y="2442147"/>
-                  </a:lnTo>
-                  <a:lnTo>
-                    <a:pt x="3023466" y="2510701"/>
-                  </a:lnTo>
-                  <a:lnTo>
-                    <a:pt x="3101100" y="2575372"/>
-                  </a:lnTo>
-                  <a:lnTo>
-                    <a:pt x="3178734" y="2636381"/>
-                  </a:lnTo>
-                  <a:lnTo>
-                    <a:pt x="3256368" y="2693935"/>
-                  </a:lnTo>
-                  <a:lnTo>
-                    <a:pt x="3334002" y="2748230"/>
-                  </a:lnTo>
-                  <a:lnTo>
-                    <a:pt x="3411636" y="2785445"/>
-                  </a:lnTo>
-                  <a:lnTo>
-                    <a:pt x="3489270" y="2792952"/>
-                  </a:lnTo>
-                  <a:lnTo>
-                    <a:pt x="3566904" y="2800395"/>
-                  </a:lnTo>
-                  <a:lnTo>
-                    <a:pt x="3644538" y="2807773"/>
-                  </a:lnTo>
-                  <a:lnTo>
-                    <a:pt x="3722172" y="2815088"/>
-                  </a:lnTo>
-                  <a:lnTo>
-                    <a:pt x="3799806" y="2822339"/>
-                  </a:lnTo>
-                  <a:lnTo>
-                    <a:pt x="3877440" y="2829527"/>
-                  </a:lnTo>
-                  <a:lnTo>
-                    <a:pt x="3955074" y="2836653"/>
-                  </a:lnTo>
-                  <a:lnTo>
-                    <a:pt x="4032708" y="2843718"/>
-                  </a:lnTo>
-                  <a:lnTo>
-                    <a:pt x="4110342" y="2850721"/>
-                  </a:lnTo>
-                  <a:lnTo>
-                    <a:pt x="4187976" y="2857663"/>
-                  </a:lnTo>
-                  <a:lnTo>
-                    <a:pt x="4265610" y="2864546"/>
-                  </a:lnTo>
-                  <a:lnTo>
-                    <a:pt x="4343244" y="2871369"/>
-                  </a:lnTo>
-                  <a:lnTo>
-                    <a:pt x="4420879" y="2878133"/>
-                  </a:lnTo>
-                  <a:lnTo>
-                    <a:pt x="4498513" y="2884838"/>
-                  </a:lnTo>
-                  <a:lnTo>
-                    <a:pt x="4576147" y="2891485"/>
-                  </a:lnTo>
-                  <a:lnTo>
-                    <a:pt x="4653781" y="2898075"/>
-                  </a:lnTo>
-                  <a:lnTo>
-                    <a:pt x="4731415" y="2904607"/>
-                  </a:lnTo>
-                  <a:lnTo>
-                    <a:pt x="4809049" y="2911083"/>
-                  </a:lnTo>
-                  <a:lnTo>
-                    <a:pt x="4886683" y="2917503"/>
-                  </a:lnTo>
-                  <a:lnTo>
-                    <a:pt x="4964317" y="2923868"/>
-                  </a:lnTo>
-                  <a:lnTo>
-                    <a:pt x="5041951" y="2930177"/>
-                  </a:lnTo>
-                  <a:lnTo>
-                    <a:pt x="5119585" y="2936432"/>
-                  </a:lnTo>
-                  <a:lnTo>
-                    <a:pt x="5197219" y="2942632"/>
-                  </a:lnTo>
-                  <a:lnTo>
-                    <a:pt x="5274853" y="2948779"/>
-                  </a:lnTo>
-                  <a:lnTo>
-                    <a:pt x="5352487" y="2954873"/>
-                  </a:lnTo>
-                  <a:lnTo>
-                    <a:pt x="5430121" y="2960914"/>
-                  </a:lnTo>
-                  <a:lnTo>
-                    <a:pt x="5507755" y="2966903"/>
-                  </a:lnTo>
-                  <a:lnTo>
-                    <a:pt x="5585389" y="2972839"/>
-                  </a:lnTo>
-                  <a:lnTo>
-                    <a:pt x="5663023" y="2978725"/>
-                  </a:lnTo>
-                  <a:lnTo>
-                    <a:pt x="5740657" y="2984559"/>
-                  </a:lnTo>
-                  <a:lnTo>
-                    <a:pt x="5818291" y="2990343"/>
-                  </a:lnTo>
-                  <a:lnTo>
-                    <a:pt x="5895925" y="2996077"/>
-                  </a:lnTo>
-                  <a:lnTo>
-                    <a:pt x="5973559" y="3001761"/>
-                  </a:lnTo>
-                  <a:lnTo>
-                    <a:pt x="6051193" y="3007396"/>
-                  </a:lnTo>
-                  <a:lnTo>
-                    <a:pt x="6128827" y="3012982"/>
-                  </a:lnTo>
-                  <a:lnTo>
-                    <a:pt x="6206462" y="3018520"/>
-                  </a:lnTo>
-                  <a:lnTo>
-                    <a:pt x="6284096" y="3024010"/>
-                  </a:lnTo>
-                  <a:lnTo>
-                    <a:pt x="6361730" y="3029452"/>
-                  </a:lnTo>
-                  <a:lnTo>
-                    <a:pt x="6439364" y="3034847"/>
-                  </a:lnTo>
-                  <a:lnTo>
-                    <a:pt x="6516998" y="3040196"/>
-                  </a:lnTo>
-                  <a:lnTo>
-                    <a:pt x="6594632" y="3045498"/>
-                  </a:lnTo>
-                  <a:lnTo>
-                    <a:pt x="6672266" y="3050754"/>
-                  </a:lnTo>
-                  <a:lnTo>
-                    <a:pt x="6749900" y="3055965"/>
-                  </a:lnTo>
-                  <a:lnTo>
-                    <a:pt x="6827534" y="3061131"/>
-                  </a:lnTo>
-                  <a:lnTo>
-                    <a:pt x="6905168" y="3066252"/>
-                  </a:lnTo>
-                  <a:lnTo>
-                    <a:pt x="6982802" y="3071329"/>
-                  </a:lnTo>
-                  <a:lnTo>
-                    <a:pt x="7060436" y="3076361"/>
-                  </a:lnTo>
-                  <a:lnTo>
-                    <a:pt x="7138070" y="3081350"/>
-                  </a:lnTo>
-                  <a:lnTo>
-                    <a:pt x="7215704" y="3086296"/>
-                  </a:lnTo>
-                  <a:lnTo>
-                    <a:pt x="7293338" y="3091199"/>
-                  </a:lnTo>
-                  <a:lnTo>
-                    <a:pt x="7370972" y="3096060"/>
-                  </a:lnTo>
-                  <a:lnTo>
-                    <a:pt x="7370972" y="3609015"/>
-                  </a:lnTo>
-                  <a:lnTo>
-                    <a:pt x="7293338" y="3606396"/>
-                  </a:lnTo>
-                  <a:lnTo>
-                    <a:pt x="7215704" y="3603620"/>
-                  </a:lnTo>
-                  <a:lnTo>
-                    <a:pt x="7138070" y="3600677"/>
-                  </a:lnTo>
-                  <a:lnTo>
-                    <a:pt x="7060436" y="3597557"/>
-                  </a:lnTo>
-                  <a:lnTo>
-                    <a:pt x="6982802" y="3594250"/>
-                  </a:lnTo>
-                  <a:lnTo>
-                    <a:pt x="6905168" y="3590745"/>
-                  </a:lnTo>
-                  <a:lnTo>
-                    <a:pt x="6827534" y="3587029"/>
-                  </a:lnTo>
-                  <a:lnTo>
-                    <a:pt x="6749900" y="3583090"/>
-                  </a:lnTo>
-                  <a:lnTo>
-                    <a:pt x="6672266" y="3578914"/>
-                  </a:lnTo>
-                  <a:lnTo>
-                    <a:pt x="6594632" y="3574488"/>
-                  </a:lnTo>
-                  <a:lnTo>
-                    <a:pt x="6516998" y="3569796"/>
-                  </a:lnTo>
-                  <a:lnTo>
-                    <a:pt x="6439364" y="3564823"/>
-                  </a:lnTo>
-                  <a:lnTo>
-                    <a:pt x="6361730" y="3559551"/>
-                  </a:lnTo>
-                  <a:lnTo>
-                    <a:pt x="6284096" y="3553962"/>
-                  </a:lnTo>
-                  <a:lnTo>
-                    <a:pt x="6206462" y="3548038"/>
-                  </a:lnTo>
-                  <a:lnTo>
-                    <a:pt x="6128827" y="3541758"/>
-                  </a:lnTo>
-                  <a:lnTo>
-                    <a:pt x="6051193" y="3535102"/>
-                  </a:lnTo>
-                  <a:lnTo>
-                    <a:pt x="5973559" y="3528045"/>
-                  </a:lnTo>
-                  <a:lnTo>
-                    <a:pt x="5895925" y="3520565"/>
-                  </a:lnTo>
-                  <a:lnTo>
-                    <a:pt x="5818291" y="3512636"/>
-                  </a:lnTo>
-                  <a:lnTo>
-                    <a:pt x="5740657" y="3504231"/>
-                  </a:lnTo>
-                  <a:lnTo>
-                    <a:pt x="5663023" y="3495322"/>
-                  </a:lnTo>
-                  <a:lnTo>
-                    <a:pt x="5585389" y="3485877"/>
-                  </a:lnTo>
-                  <a:lnTo>
-                    <a:pt x="5507755" y="3475866"/>
-                  </a:lnTo>
-                  <a:lnTo>
-                    <a:pt x="5430121" y="3465253"/>
-                  </a:lnTo>
-                  <a:lnTo>
-                    <a:pt x="5352487" y="3454004"/>
-                  </a:lnTo>
-                  <a:lnTo>
-                    <a:pt x="5274853" y="3442079"/>
-                  </a:lnTo>
-                  <a:lnTo>
-                    <a:pt x="5197219" y="3429438"/>
-                  </a:lnTo>
-                  <a:lnTo>
-                    <a:pt x="5119585" y="3416039"/>
-                  </a:lnTo>
-                  <a:lnTo>
-                    <a:pt x="5041951" y="3401835"/>
-                  </a:lnTo>
-                  <a:lnTo>
-                    <a:pt x="4964317" y="3386778"/>
-                  </a:lnTo>
-                  <a:lnTo>
-                    <a:pt x="4886683" y="3370817"/>
-                  </a:lnTo>
-                  <a:lnTo>
-                    <a:pt x="4809049" y="3353899"/>
-                  </a:lnTo>
-                  <a:lnTo>
-                    <a:pt x="4731415" y="3335964"/>
-                  </a:lnTo>
-                  <a:lnTo>
-                    <a:pt x="4653781" y="3316953"/>
-                  </a:lnTo>
-                  <a:lnTo>
-                    <a:pt x="4576147" y="3296800"/>
-                  </a:lnTo>
-                  <a:lnTo>
-                    <a:pt x="4498513" y="3275438"/>
-                  </a:lnTo>
-                  <a:lnTo>
-                    <a:pt x="4420879" y="3252794"/>
-                  </a:lnTo>
-                  <a:lnTo>
-                    <a:pt x="4343244" y="3228789"/>
-                  </a:lnTo>
-                  <a:lnTo>
-                    <a:pt x="4265610" y="3203344"/>
-                  </a:lnTo>
-                  <a:lnTo>
-                    <a:pt x="4187976" y="3176372"/>
-                  </a:lnTo>
-                  <a:lnTo>
-                    <a:pt x="4110342" y="3147780"/>
-                  </a:lnTo>
-                  <a:lnTo>
-                    <a:pt x="4032708" y="3117471"/>
-                  </a:lnTo>
-                  <a:lnTo>
-                    <a:pt x="3955074" y="3085344"/>
-                  </a:lnTo>
-                  <a:lnTo>
-                    <a:pt x="3877440" y="3051287"/>
-                  </a:lnTo>
-                  <a:lnTo>
-                    <a:pt x="3799806" y="3015186"/>
-                  </a:lnTo>
-                  <a:lnTo>
-                    <a:pt x="3722172" y="2976917"/>
-                  </a:lnTo>
-                  <a:lnTo>
-                    <a:pt x="3644538" y="2936352"/>
-                  </a:lnTo>
-                  <a:lnTo>
-                    <a:pt x="3566904" y="2893351"/>
-                  </a:lnTo>
-                  <a:lnTo>
-                    <a:pt x="3489270" y="2847768"/>
-                  </a:lnTo>
-                  <a:lnTo>
-                    <a:pt x="3411636" y="2799449"/>
-                  </a:lnTo>
-                  <a:lnTo>
-                    <a:pt x="3334002" y="2777871"/>
-                  </a:lnTo>
-                  <a:lnTo>
-                    <a:pt x="3256368" y="2770232"/>
-                  </a:lnTo>
-                  <a:lnTo>
-                    <a:pt x="3178734" y="2762526"/>
-                  </a:lnTo>
-                  <a:lnTo>
-                    <a:pt x="3101100" y="2754752"/>
-                  </a:lnTo>
-                  <a:lnTo>
-                    <a:pt x="3023466" y="2746911"/>
-                  </a:lnTo>
-                  <a:lnTo>
-                    <a:pt x="2945832" y="2739001"/>
-                  </a:lnTo>
-                  <a:lnTo>
-                    <a:pt x="2868198" y="2731022"/>
-                  </a:lnTo>
-                  <a:lnTo>
-                    <a:pt x="2790564" y="2722974"/>
-                  </a:lnTo>
-                  <a:lnTo>
-                    <a:pt x="2712930" y="2714855"/>
-                  </a:lnTo>
-                  <a:lnTo>
-                    <a:pt x="2635295" y="2706665"/>
-                  </a:lnTo>
-                  <a:lnTo>
-                    <a:pt x="2557661" y="2698404"/>
-                  </a:lnTo>
-                  <a:lnTo>
-                    <a:pt x="2480027" y="2690071"/>
-                  </a:lnTo>
-                  <a:lnTo>
-                    <a:pt x="2402393" y="2681664"/>
-                  </a:lnTo>
-                  <a:lnTo>
-                    <a:pt x="2324759" y="2673185"/>
-                  </a:lnTo>
-                  <a:lnTo>
-                    <a:pt x="2247125" y="2664631"/>
-                  </a:lnTo>
-                  <a:lnTo>
-                    <a:pt x="2169491" y="2656003"/>
-                  </a:lnTo>
-                  <a:lnTo>
-                    <a:pt x="2091857" y="2647299"/>
-                  </a:lnTo>
-                  <a:lnTo>
-                    <a:pt x="2014223" y="2638519"/>
-                  </a:lnTo>
-                  <a:lnTo>
-                    <a:pt x="1936589" y="2629663"/>
-                  </a:lnTo>
-                  <a:lnTo>
-                    <a:pt x="1858955" y="2620729"/>
-                  </a:lnTo>
-                  <a:lnTo>
-                    <a:pt x="1781321" y="2611718"/>
-                  </a:lnTo>
-                  <a:lnTo>
-                    <a:pt x="1703687" y="2602627"/>
-                  </a:lnTo>
-                  <a:lnTo>
-                    <a:pt x="1626053" y="2593457"/>
-                  </a:lnTo>
-                  <a:lnTo>
-                    <a:pt x="1548419" y="2584207"/>
-                  </a:lnTo>
-                  <a:lnTo>
-                    <a:pt x="1470785" y="2574877"/>
-                  </a:lnTo>
-                  <a:lnTo>
-                    <a:pt x="1393151" y="2565465"/>
-                  </a:lnTo>
-                  <a:lnTo>
-                    <a:pt x="1315517" y="2555970"/>
-                  </a:lnTo>
-                  <a:lnTo>
-                    <a:pt x="1237883" y="2546393"/>
-                  </a:lnTo>
-                  <a:lnTo>
-                    <a:pt x="1160249" y="2536732"/>
-                  </a:lnTo>
-                  <a:lnTo>
-                    <a:pt x="1082615" y="2526987"/>
-                  </a:lnTo>
-                  <a:lnTo>
-                    <a:pt x="1004981" y="2517156"/>
-                  </a:lnTo>
-                  <a:lnTo>
-                    <a:pt x="927346" y="2507240"/>
-                  </a:lnTo>
-                  <a:lnTo>
-                    <a:pt x="849712" y="2497237"/>
-                  </a:lnTo>
-                  <a:lnTo>
-                    <a:pt x="772078" y="2487147"/>
-                  </a:lnTo>
-                  <a:lnTo>
-                    <a:pt x="694444" y="2476969"/>
-                  </a:lnTo>
-                  <a:lnTo>
-                    <a:pt x="616810" y="2466701"/>
-                  </a:lnTo>
-                  <a:lnTo>
-                    <a:pt x="539176" y="2456345"/>
-                  </a:lnTo>
-                  <a:lnTo>
-                    <a:pt x="461542" y="2445897"/>
-                  </a:lnTo>
-                  <a:lnTo>
-                    <a:pt x="383908" y="2435359"/>
-                  </a:lnTo>
-                  <a:lnTo>
-                    <a:pt x="306274" y="2424728"/>
-                  </a:lnTo>
-                  <a:lnTo>
-                    <a:pt x="228640" y="2414005"/>
-                  </a:lnTo>
-                  <a:lnTo>
-                    <a:pt x="151006" y="2403188"/>
-                  </a:lnTo>
-                  <a:lnTo>
-                    <a:pt x="73372" y="2392276"/>
-                  </a:lnTo>
-                  <a:lnTo>
-                    <a:pt x="0" y="2381873"/>
+                    <a:pt x="1470785" y="39117"/>
+                  </a:lnTo>
+                  <a:lnTo>
+                    <a:pt x="1548419" y="241821"/>
+                  </a:lnTo>
+                  <a:lnTo>
+                    <a:pt x="1626053" y="433153"/>
+                  </a:lnTo>
+                  <a:lnTo>
+                    <a:pt x="1703687" y="613753"/>
+                  </a:lnTo>
+                  <a:lnTo>
+                    <a:pt x="1781321" y="784222"/>
+                  </a:lnTo>
+                  <a:lnTo>
+                    <a:pt x="1858955" y="945129"/>
+                  </a:lnTo>
+                  <a:lnTo>
+                    <a:pt x="1936589" y="1097009"/>
+                  </a:lnTo>
+                  <a:lnTo>
+                    <a:pt x="2014223" y="1240370"/>
+                  </a:lnTo>
+                  <a:lnTo>
+                    <a:pt x="2091857" y="1375688"/>
+                  </a:lnTo>
+                  <a:lnTo>
+                    <a:pt x="2169491" y="1503416"/>
+                  </a:lnTo>
+                  <a:lnTo>
+                    <a:pt x="2247125" y="1623979"/>
+                  </a:lnTo>
+                  <a:lnTo>
+                    <a:pt x="2324759" y="1737778"/>
+                  </a:lnTo>
+                  <a:lnTo>
+                    <a:pt x="2402393" y="1845194"/>
+                  </a:lnTo>
+                  <a:lnTo>
+                    <a:pt x="2480027" y="1946584"/>
+                  </a:lnTo>
+                  <a:lnTo>
+                    <a:pt x="2557661" y="2042287"/>
+                  </a:lnTo>
+                  <a:lnTo>
+                    <a:pt x="2635295" y="2132622"/>
+                  </a:lnTo>
+                  <a:lnTo>
+                    <a:pt x="2712930" y="2217888"/>
+                  </a:lnTo>
+                  <a:lnTo>
+                    <a:pt x="2790564" y="2298372"/>
+                  </a:lnTo>
+                  <a:lnTo>
+                    <a:pt x="2868198" y="2374341"/>
+                  </a:lnTo>
+                  <a:lnTo>
+                    <a:pt x="2945832" y="2446049"/>
+                  </a:lnTo>
+                  <a:lnTo>
+                    <a:pt x="3023466" y="2513734"/>
+                  </a:lnTo>
+                  <a:lnTo>
+                    <a:pt x="3101100" y="2577622"/>
+                  </a:lnTo>
+                  <a:lnTo>
+                    <a:pt x="3178734" y="2637926"/>
+                  </a:lnTo>
+                  <a:lnTo>
+                    <a:pt x="3256368" y="2694847"/>
+                  </a:lnTo>
+                  <a:lnTo>
+                    <a:pt x="3334002" y="2748576"/>
+                  </a:lnTo>
+                  <a:lnTo>
+                    <a:pt x="3411636" y="2785419"/>
+                  </a:lnTo>
+                  <a:lnTo>
+                    <a:pt x="3489270" y="2792848"/>
+                  </a:lnTo>
+                  <a:lnTo>
+                    <a:pt x="3566904" y="2800214"/>
+                  </a:lnTo>
+                  <a:lnTo>
+                    <a:pt x="3644538" y="2807517"/>
+                  </a:lnTo>
+                  <a:lnTo>
+                    <a:pt x="3722172" y="2814758"/>
+                  </a:lnTo>
+                  <a:lnTo>
+                    <a:pt x="3799806" y="2821936"/>
+                  </a:lnTo>
+                  <a:lnTo>
+                    <a:pt x="3877440" y="2829053"/>
+                  </a:lnTo>
+                  <a:lnTo>
+                    <a:pt x="3955074" y="2836109"/>
+                  </a:lnTo>
+                  <a:lnTo>
+                    <a:pt x="4032708" y="2843104"/>
+                  </a:lnTo>
+                  <a:lnTo>
+                    <a:pt x="4110342" y="2850040"/>
+                  </a:lnTo>
+                  <a:lnTo>
+                    <a:pt x="4187976" y="2856916"/>
+                  </a:lnTo>
+                  <a:lnTo>
+                    <a:pt x="4265610" y="2863733"/>
+                  </a:lnTo>
+                  <a:lnTo>
+                    <a:pt x="4343244" y="2870492"/>
+                  </a:lnTo>
+                  <a:lnTo>
+                    <a:pt x="4420879" y="2877192"/>
+                  </a:lnTo>
+                  <a:lnTo>
+                    <a:pt x="4498513" y="2883836"/>
+                  </a:lnTo>
+                  <a:lnTo>
+                    <a:pt x="4576147" y="2890422"/>
+                  </a:lnTo>
+                  <a:lnTo>
+                    <a:pt x="4653781" y="2896952"/>
+                  </a:lnTo>
+                  <a:lnTo>
+                    <a:pt x="4731415" y="2903427"/>
+                  </a:lnTo>
+                  <a:lnTo>
+                    <a:pt x="4809049" y="2909845"/>
+                  </a:lnTo>
+                  <a:lnTo>
+                    <a:pt x="4886683" y="2916209"/>
+                  </a:lnTo>
+                  <a:lnTo>
+                    <a:pt x="4964317" y="2922518"/>
+                  </a:lnTo>
+                  <a:lnTo>
+                    <a:pt x="5041951" y="2928773"/>
+                  </a:lnTo>
+                  <a:lnTo>
+                    <a:pt x="5119585" y="2934975"/>
+                  </a:lnTo>
+                  <a:lnTo>
+                    <a:pt x="5197219" y="2941123"/>
+                  </a:lnTo>
+                  <a:lnTo>
+                    <a:pt x="5274853" y="2947219"/>
+                  </a:lnTo>
+                  <a:lnTo>
+                    <a:pt x="5352487" y="2953262"/>
+                  </a:lnTo>
+                  <a:lnTo>
+                    <a:pt x="5430121" y="2959254"/>
+                  </a:lnTo>
+                  <a:lnTo>
+                    <a:pt x="5507755" y="2965194"/>
+                  </a:lnTo>
+                  <a:lnTo>
+                    <a:pt x="5585389" y="2971084"/>
+                  </a:lnTo>
+                  <a:lnTo>
+                    <a:pt x="5663023" y="2976923"/>
+                  </a:lnTo>
+                  <a:lnTo>
+                    <a:pt x="5740657" y="2982712"/>
+                  </a:lnTo>
+                  <a:lnTo>
+                    <a:pt x="5818291" y="2988451"/>
+                  </a:lnTo>
+                  <a:lnTo>
+                    <a:pt x="5895925" y="2994142"/>
+                  </a:lnTo>
+                  <a:lnTo>
+                    <a:pt x="5973559" y="2999783"/>
+                  </a:lnTo>
+                  <a:lnTo>
+                    <a:pt x="6051193" y="3005376"/>
+                  </a:lnTo>
+                  <a:lnTo>
+                    <a:pt x="6128827" y="3010922"/>
+                  </a:lnTo>
+                  <a:lnTo>
+                    <a:pt x="6206462" y="3016419"/>
+                  </a:lnTo>
+                  <a:lnTo>
+                    <a:pt x="6284096" y="3021870"/>
+                  </a:lnTo>
+                  <a:lnTo>
+                    <a:pt x="6361730" y="3027274"/>
+                  </a:lnTo>
+                  <a:lnTo>
+                    <a:pt x="6439364" y="3032632"/>
+                  </a:lnTo>
+                  <a:lnTo>
+                    <a:pt x="6516998" y="3037943"/>
+                  </a:lnTo>
+                  <a:lnTo>
+                    <a:pt x="6594632" y="3043210"/>
+                  </a:lnTo>
+                  <a:lnTo>
+                    <a:pt x="6672266" y="3048431"/>
+                  </a:lnTo>
+                  <a:lnTo>
+                    <a:pt x="6749900" y="3053607"/>
+                  </a:lnTo>
+                  <a:lnTo>
+                    <a:pt x="6827534" y="3058739"/>
+                  </a:lnTo>
+                  <a:lnTo>
+                    <a:pt x="6905168" y="3063827"/>
+                  </a:lnTo>
+                  <a:lnTo>
+                    <a:pt x="6982802" y="3068872"/>
+                  </a:lnTo>
+                  <a:lnTo>
+                    <a:pt x="7060436" y="3073873"/>
+                  </a:lnTo>
+                  <a:lnTo>
+                    <a:pt x="7138070" y="3078831"/>
+                  </a:lnTo>
+                  <a:lnTo>
+                    <a:pt x="7215704" y="3083747"/>
+                  </a:lnTo>
+                  <a:lnTo>
+                    <a:pt x="7293338" y="3088621"/>
+                  </a:lnTo>
+                  <a:lnTo>
+                    <a:pt x="7370972" y="3093453"/>
+                  </a:lnTo>
+                  <a:lnTo>
+                    <a:pt x="7370972" y="3607722"/>
+                  </a:lnTo>
+                  <a:lnTo>
+                    <a:pt x="7293338" y="3605052"/>
+                  </a:lnTo>
+                  <a:lnTo>
+                    <a:pt x="7215704" y="3602224"/>
+                  </a:lnTo>
+                  <a:lnTo>
+                    <a:pt x="7138070" y="3599228"/>
+                  </a:lnTo>
+                  <a:lnTo>
+                    <a:pt x="7060436" y="3596053"/>
+                  </a:lnTo>
+                  <a:lnTo>
+                    <a:pt x="6982802" y="3592690"/>
+                  </a:lnTo>
+                  <a:lnTo>
+                    <a:pt x="6905168" y="3589127"/>
+                  </a:lnTo>
+                  <a:lnTo>
+                    <a:pt x="6827534" y="3585352"/>
+                  </a:lnTo>
+                  <a:lnTo>
+                    <a:pt x="6749900" y="3581353"/>
+                  </a:lnTo>
+                  <a:lnTo>
+                    <a:pt x="6672266" y="3577117"/>
+                  </a:lnTo>
+                  <a:lnTo>
+                    <a:pt x="6594632" y="3572628"/>
+                  </a:lnTo>
+                  <a:lnTo>
+                    <a:pt x="6516998" y="3567873"/>
+                  </a:lnTo>
+                  <a:lnTo>
+                    <a:pt x="6439364" y="3562835"/>
+                  </a:lnTo>
+                  <a:lnTo>
+                    <a:pt x="6361730" y="3557498"/>
+                  </a:lnTo>
+                  <a:lnTo>
+                    <a:pt x="6284096" y="3551843"/>
+                  </a:lnTo>
+                  <a:lnTo>
+                    <a:pt x="6206462" y="3545853"/>
+                  </a:lnTo>
+                  <a:lnTo>
+                    <a:pt x="6128827" y="3539506"/>
+                  </a:lnTo>
+                  <a:lnTo>
+                    <a:pt x="6051193" y="3532782"/>
+                  </a:lnTo>
+                  <a:lnTo>
+                    <a:pt x="5973559" y="3525659"/>
+                  </a:lnTo>
+                  <a:lnTo>
+                    <a:pt x="5895925" y="3518112"/>
+                  </a:lnTo>
+                  <a:lnTo>
+                    <a:pt x="5818291" y="3510117"/>
+                  </a:lnTo>
+                  <a:lnTo>
+                    <a:pt x="5740657" y="3501647"/>
+                  </a:lnTo>
+                  <a:lnTo>
+                    <a:pt x="5663023" y="3492673"/>
+                  </a:lnTo>
+                  <a:lnTo>
+                    <a:pt x="5585389" y="3483167"/>
+                  </a:lnTo>
+                  <a:lnTo>
+                    <a:pt x="5507755" y="3473095"/>
+                  </a:lnTo>
+                  <a:lnTo>
+                    <a:pt x="5430121" y="3462424"/>
+                  </a:lnTo>
+                  <a:lnTo>
+                    <a:pt x="5352487" y="3451119"/>
+                  </a:lnTo>
+                  <a:lnTo>
+                    <a:pt x="5274853" y="3439143"/>
+                  </a:lnTo>
+                  <a:lnTo>
+                    <a:pt x="5197219" y="3426455"/>
+                  </a:lnTo>
+                  <a:lnTo>
+                    <a:pt x="5119585" y="3413012"/>
+                  </a:lnTo>
+                  <a:lnTo>
+                    <a:pt x="5041951" y="3398771"/>
+                  </a:lnTo>
+                  <a:lnTo>
+                    <a:pt x="4964317" y="3383684"/>
+                  </a:lnTo>
+                  <a:lnTo>
+                    <a:pt x="4886683" y="3367700"/>
+                  </a:lnTo>
+                  <a:lnTo>
+                    <a:pt x="4809049" y="3350766"/>
+                  </a:lnTo>
+                  <a:lnTo>
+                    <a:pt x="4731415" y="3332825"/>
+                  </a:lnTo>
+                  <a:lnTo>
+                    <a:pt x="4653781" y="3313818"/>
+                  </a:lnTo>
+                  <a:lnTo>
+                    <a:pt x="4576147" y="3293682"/>
+                  </a:lnTo>
+                  <a:lnTo>
+                    <a:pt x="4498513" y="3272349"/>
+                  </a:lnTo>
+                  <a:lnTo>
+                    <a:pt x="4420879" y="3249749"/>
+                  </a:lnTo>
+                  <a:lnTo>
+                    <a:pt x="4343244" y="3225805"/>
+                  </a:lnTo>
+                  <a:lnTo>
+                    <a:pt x="4265610" y="3200438"/>
+                  </a:lnTo>
+                  <a:lnTo>
+                    <a:pt x="4187976" y="3173563"/>
+                  </a:lnTo>
+                  <a:lnTo>
+                    <a:pt x="4110342" y="3145092"/>
+                  </a:lnTo>
+                  <a:lnTo>
+                    <a:pt x="4032708" y="3114928"/>
+                  </a:lnTo>
+                  <a:lnTo>
+                    <a:pt x="3955074" y="3082972"/>
+                  </a:lnTo>
+                  <a:lnTo>
+                    <a:pt x="3877440" y="3049117"/>
+                  </a:lnTo>
+                  <a:lnTo>
+                    <a:pt x="3799806" y="3013250"/>
+                  </a:lnTo>
+                  <a:lnTo>
+                    <a:pt x="3722172" y="2975251"/>
+                  </a:lnTo>
+                  <a:lnTo>
+                    <a:pt x="3644538" y="2934994"/>
+                  </a:lnTo>
+                  <a:lnTo>
+                    <a:pt x="3566904" y="2892344"/>
+                  </a:lnTo>
+                  <a:lnTo>
+                    <a:pt x="3489270" y="2847160"/>
+                  </a:lnTo>
+                  <a:lnTo>
+                    <a:pt x="3411636" y="2799290"/>
+                  </a:lnTo>
+                  <a:lnTo>
+                    <a:pt x="3334002" y="2777925"/>
+                  </a:lnTo>
+                  <a:lnTo>
+                    <a:pt x="3256368" y="2770366"/>
+                  </a:lnTo>
+                  <a:lnTo>
+                    <a:pt x="3178734" y="2762742"/>
+                  </a:lnTo>
+                  <a:lnTo>
+                    <a:pt x="3101100" y="2755052"/>
+                  </a:lnTo>
+                  <a:lnTo>
+                    <a:pt x="3023466" y="2747296"/>
+                  </a:lnTo>
+                  <a:lnTo>
+                    <a:pt x="2945832" y="2739473"/>
+                  </a:lnTo>
+                  <a:lnTo>
+                    <a:pt x="2868198" y="2731582"/>
+                  </a:lnTo>
+                  <a:lnTo>
+                    <a:pt x="2790564" y="2723623"/>
+                  </a:lnTo>
+                  <a:lnTo>
+                    <a:pt x="2712930" y="2715595"/>
+                  </a:lnTo>
+                  <a:lnTo>
+                    <a:pt x="2635295" y="2707498"/>
+                  </a:lnTo>
+                  <a:lnTo>
+                    <a:pt x="2557661" y="2699331"/>
+                  </a:lnTo>
+                  <a:lnTo>
+                    <a:pt x="2480027" y="2691093"/>
+                  </a:lnTo>
+                  <a:lnTo>
+                    <a:pt x="2402393" y="2682784"/>
+                  </a:lnTo>
+                  <a:lnTo>
+                    <a:pt x="2324759" y="2674403"/>
+                  </a:lnTo>
+                  <a:lnTo>
+                    <a:pt x="2247125" y="2665950"/>
+                  </a:lnTo>
+                  <a:lnTo>
+                    <a:pt x="2169491" y="2657424"/>
+                  </a:lnTo>
+                  <a:lnTo>
+                    <a:pt x="2091857" y="2648824"/>
+                  </a:lnTo>
+                  <a:lnTo>
+                    <a:pt x="2014223" y="2640150"/>
+                  </a:lnTo>
+                  <a:lnTo>
+                    <a:pt x="1936589" y="2631400"/>
+                  </a:lnTo>
+                  <a:lnTo>
+                    <a:pt x="1858955" y="2622576"/>
+                  </a:lnTo>
+                  <a:lnTo>
+                    <a:pt x="1781321" y="2613675"/>
+                  </a:lnTo>
+                  <a:lnTo>
+                    <a:pt x="1703687" y="2604697"/>
+                  </a:lnTo>
+                  <a:lnTo>
+                    <a:pt x="1626053" y="2595641"/>
+                  </a:lnTo>
+                  <a:lnTo>
+                    <a:pt x="1548419" y="2586507"/>
+                  </a:lnTo>
+                  <a:lnTo>
+                    <a:pt x="1470785" y="2577295"/>
+                  </a:lnTo>
+                  <a:lnTo>
+                    <a:pt x="1393151" y="2568002"/>
+                  </a:lnTo>
+                  <a:lnTo>
+                    <a:pt x="1315517" y="2558630"/>
+                  </a:lnTo>
+                  <a:lnTo>
+                    <a:pt x="1237883" y="2549176"/>
+                  </a:lnTo>
+                  <a:lnTo>
+                    <a:pt x="1160249" y="2539641"/>
+                  </a:lnTo>
+                  <a:lnTo>
+                    <a:pt x="1082615" y="2530023"/>
+                  </a:lnTo>
+                  <a:lnTo>
+                    <a:pt x="1004981" y="2520322"/>
+                  </a:lnTo>
+                  <a:lnTo>
+                    <a:pt x="927346" y="2510538"/>
+                  </a:lnTo>
+                  <a:lnTo>
+                    <a:pt x="849712" y="2500668"/>
+                  </a:lnTo>
+                  <a:lnTo>
+                    <a:pt x="772078" y="2490714"/>
+                  </a:lnTo>
+                  <a:lnTo>
+                    <a:pt x="694444" y="2480674"/>
+                  </a:lnTo>
+                  <a:lnTo>
+                    <a:pt x="616810" y="2470546"/>
+                  </a:lnTo>
+                  <a:lnTo>
+                    <a:pt x="539176" y="2460332"/>
+                  </a:lnTo>
+                  <a:lnTo>
+                    <a:pt x="461542" y="2450029"/>
+                  </a:lnTo>
+                  <a:lnTo>
+                    <a:pt x="383908" y="2439636"/>
+                  </a:lnTo>
+                  <a:lnTo>
+                    <a:pt x="306274" y="2429155"/>
+                  </a:lnTo>
+                  <a:lnTo>
+                    <a:pt x="228640" y="2418582"/>
+                  </a:lnTo>
+                  <a:lnTo>
+                    <a:pt x="151006" y="2407918"/>
+                  </a:lnTo>
+                  <a:lnTo>
+                    <a:pt x="73372" y="2397162"/>
+                  </a:lnTo>
+                  <a:lnTo>
+                    <a:pt x="0" y="2386909"/>
                   </a:lnTo>
                   <a:close/>
                 </a:path>
@@ -3552,243 +3555,246 @@
           </p:nvSpPr>
           <p:spPr>
             <a:xfrm>
-              <a:off x="2292786" y="1896563"/>
-              <a:ext cx="5895703" cy="3096060"/>
+              <a:off x="2274161" y="1896563"/>
+              <a:ext cx="5914328" cy="3093453"/>
             </a:xfrm>
             <a:custGeom>
               <a:avLst/>
               <a:pathLst>
-                <a:path w="5895703" h="3096060">
+                <a:path w="5914328" h="3093453">
                   <a:moveTo>
                     <a:pt x="0" y="0"/>
                   </a:moveTo>
                   <a:lnTo>
-                    <a:pt x="73150" y="195552"/>
-                  </a:lnTo>
-                  <a:lnTo>
-                    <a:pt x="150784" y="391337"/>
-                  </a:lnTo>
-                  <a:lnTo>
-                    <a:pt x="228418" y="576035"/>
-                  </a:lnTo>
-                  <a:lnTo>
-                    <a:pt x="306052" y="750272"/>
-                  </a:lnTo>
-                  <a:lnTo>
-                    <a:pt x="383686" y="914642"/>
-                  </a:lnTo>
-                  <a:lnTo>
-                    <a:pt x="461320" y="1069703"/>
-                  </a:lnTo>
-                  <a:lnTo>
-                    <a:pt x="538954" y="1215983"/>
-                  </a:lnTo>
-                  <a:lnTo>
-                    <a:pt x="616588" y="1353978"/>
-                  </a:lnTo>
-                  <a:lnTo>
-                    <a:pt x="694222" y="1484158"/>
-                  </a:lnTo>
-                  <a:lnTo>
-                    <a:pt x="771856" y="1606966"/>
-                  </a:lnTo>
-                  <a:lnTo>
-                    <a:pt x="849490" y="1722819"/>
-                  </a:lnTo>
-                  <a:lnTo>
-                    <a:pt x="927124" y="1832110"/>
-                  </a:lnTo>
-                  <a:lnTo>
-                    <a:pt x="1004758" y="1935212"/>
-                  </a:lnTo>
-                  <a:lnTo>
-                    <a:pt x="1082392" y="2032476"/>
-                  </a:lnTo>
-                  <a:lnTo>
-                    <a:pt x="1160026" y="2124230"/>
-                  </a:lnTo>
-                  <a:lnTo>
-                    <a:pt x="1237660" y="2210789"/>
-                  </a:lnTo>
-                  <a:lnTo>
-                    <a:pt x="1315295" y="2292445"/>
-                  </a:lnTo>
-                  <a:lnTo>
-                    <a:pt x="1392929" y="2369477"/>
-                  </a:lnTo>
-                  <a:lnTo>
-                    <a:pt x="1470563" y="2442147"/>
-                  </a:lnTo>
-                  <a:lnTo>
-                    <a:pt x="1548197" y="2510701"/>
-                  </a:lnTo>
-                  <a:lnTo>
-                    <a:pt x="1625831" y="2575372"/>
-                  </a:lnTo>
-                  <a:lnTo>
-                    <a:pt x="1703465" y="2636381"/>
-                  </a:lnTo>
-                  <a:lnTo>
-                    <a:pt x="1781099" y="2693935"/>
-                  </a:lnTo>
-                  <a:lnTo>
-                    <a:pt x="1858733" y="2748230"/>
-                  </a:lnTo>
-                  <a:lnTo>
-                    <a:pt x="1936367" y="2785445"/>
-                  </a:lnTo>
-                  <a:lnTo>
-                    <a:pt x="2014001" y="2792952"/>
-                  </a:lnTo>
-                  <a:lnTo>
-                    <a:pt x="2091635" y="2800395"/>
-                  </a:lnTo>
-                  <a:lnTo>
-                    <a:pt x="2169269" y="2807773"/>
-                  </a:lnTo>
-                  <a:lnTo>
-                    <a:pt x="2246903" y="2815088"/>
-                  </a:lnTo>
-                  <a:lnTo>
-                    <a:pt x="2324537" y="2822339"/>
-                  </a:lnTo>
-                  <a:lnTo>
-                    <a:pt x="2402171" y="2829527"/>
-                  </a:lnTo>
-                  <a:lnTo>
-                    <a:pt x="2479805" y="2836653"/>
-                  </a:lnTo>
-                  <a:lnTo>
-                    <a:pt x="2557439" y="2843718"/>
-                  </a:lnTo>
-                  <a:lnTo>
-                    <a:pt x="2635073" y="2850721"/>
-                  </a:lnTo>
-                  <a:lnTo>
-                    <a:pt x="2712707" y="2857663"/>
-                  </a:lnTo>
-                  <a:lnTo>
-                    <a:pt x="2790341" y="2864546"/>
-                  </a:lnTo>
-                  <a:lnTo>
-                    <a:pt x="2867975" y="2871369"/>
-                  </a:lnTo>
-                  <a:lnTo>
-                    <a:pt x="2945609" y="2878133"/>
-                  </a:lnTo>
-                  <a:lnTo>
-                    <a:pt x="3023243" y="2884838"/>
-                  </a:lnTo>
-                  <a:lnTo>
-                    <a:pt x="3100878" y="2891485"/>
-                  </a:lnTo>
-                  <a:lnTo>
-                    <a:pt x="3178512" y="2898075"/>
-                  </a:lnTo>
-                  <a:lnTo>
-                    <a:pt x="3256146" y="2904607"/>
-                  </a:lnTo>
-                  <a:lnTo>
-                    <a:pt x="3333780" y="2911083"/>
-                  </a:lnTo>
-                  <a:lnTo>
-                    <a:pt x="3411414" y="2917503"/>
-                  </a:lnTo>
-                  <a:lnTo>
-                    <a:pt x="3489048" y="2923868"/>
-                  </a:lnTo>
-                  <a:lnTo>
-                    <a:pt x="3566682" y="2930177"/>
-                  </a:lnTo>
-                  <a:lnTo>
-                    <a:pt x="3644316" y="2936432"/>
-                  </a:lnTo>
-                  <a:lnTo>
-                    <a:pt x="3721950" y="2942632"/>
-                  </a:lnTo>
-                  <a:lnTo>
-                    <a:pt x="3799584" y="2948779"/>
-                  </a:lnTo>
-                  <a:lnTo>
-                    <a:pt x="3877218" y="2954873"/>
-                  </a:lnTo>
-                  <a:lnTo>
-                    <a:pt x="3954852" y="2960914"/>
-                  </a:lnTo>
-                  <a:lnTo>
-                    <a:pt x="4032486" y="2966903"/>
-                  </a:lnTo>
-                  <a:lnTo>
-                    <a:pt x="4110120" y="2972839"/>
-                  </a:lnTo>
-                  <a:lnTo>
-                    <a:pt x="4187754" y="2978725"/>
-                  </a:lnTo>
-                  <a:lnTo>
-                    <a:pt x="4265388" y="2984559"/>
-                  </a:lnTo>
-                  <a:lnTo>
-                    <a:pt x="4343022" y="2990343"/>
-                  </a:lnTo>
-                  <a:lnTo>
-                    <a:pt x="4420656" y="2996077"/>
-                  </a:lnTo>
-                  <a:lnTo>
-                    <a:pt x="4498290" y="3001761"/>
-                  </a:lnTo>
-                  <a:lnTo>
-                    <a:pt x="4575924" y="3007396"/>
-                  </a:lnTo>
-                  <a:lnTo>
-                    <a:pt x="4653558" y="3012982"/>
-                  </a:lnTo>
-                  <a:lnTo>
-                    <a:pt x="4731192" y="3018520"/>
-                  </a:lnTo>
-                  <a:lnTo>
-                    <a:pt x="4808827" y="3024010"/>
-                  </a:lnTo>
-                  <a:lnTo>
-                    <a:pt x="4886461" y="3029452"/>
-                  </a:lnTo>
-                  <a:lnTo>
-                    <a:pt x="4964095" y="3034847"/>
-                  </a:lnTo>
-                  <a:lnTo>
-                    <a:pt x="5041729" y="3040196"/>
-                  </a:lnTo>
-                  <a:lnTo>
-                    <a:pt x="5119363" y="3045498"/>
-                  </a:lnTo>
-                  <a:lnTo>
-                    <a:pt x="5196997" y="3050754"/>
-                  </a:lnTo>
-                  <a:lnTo>
-                    <a:pt x="5274631" y="3055965"/>
-                  </a:lnTo>
-                  <a:lnTo>
-                    <a:pt x="5352265" y="3061131"/>
-                  </a:lnTo>
-                  <a:lnTo>
-                    <a:pt x="5429899" y="3066252"/>
-                  </a:lnTo>
-                  <a:lnTo>
-                    <a:pt x="5507533" y="3071329"/>
-                  </a:lnTo>
-                  <a:lnTo>
-                    <a:pt x="5585167" y="3076361"/>
-                  </a:lnTo>
-                  <a:lnTo>
-                    <a:pt x="5662801" y="3081350"/>
-                  </a:lnTo>
-                  <a:lnTo>
-                    <a:pt x="5740435" y="3086296"/>
-                  </a:lnTo>
-                  <a:lnTo>
-                    <a:pt x="5818069" y="3091199"/>
-                  </a:lnTo>
-                  <a:lnTo>
-                    <a:pt x="5895703" y="3096060"/>
+                    <a:pt x="14141" y="39117"/>
+                  </a:lnTo>
+                  <a:lnTo>
+                    <a:pt x="91775" y="241821"/>
+                  </a:lnTo>
+                  <a:lnTo>
+                    <a:pt x="169409" y="433153"/>
+                  </a:lnTo>
+                  <a:lnTo>
+                    <a:pt x="247043" y="613753"/>
+                  </a:lnTo>
+                  <a:lnTo>
+                    <a:pt x="324677" y="784222"/>
+                  </a:lnTo>
+                  <a:lnTo>
+                    <a:pt x="402311" y="945129"/>
+                  </a:lnTo>
+                  <a:lnTo>
+                    <a:pt x="479945" y="1097009"/>
+                  </a:lnTo>
+                  <a:lnTo>
+                    <a:pt x="557579" y="1240370"/>
+                  </a:lnTo>
+                  <a:lnTo>
+                    <a:pt x="635213" y="1375688"/>
+                  </a:lnTo>
+                  <a:lnTo>
+                    <a:pt x="712847" y="1503416"/>
+                  </a:lnTo>
+                  <a:lnTo>
+                    <a:pt x="790481" y="1623979"/>
+                  </a:lnTo>
+                  <a:lnTo>
+                    <a:pt x="868115" y="1737778"/>
+                  </a:lnTo>
+                  <a:lnTo>
+                    <a:pt x="945749" y="1845194"/>
+                  </a:lnTo>
+                  <a:lnTo>
+                    <a:pt x="1023383" y="1946584"/>
+                  </a:lnTo>
+                  <a:lnTo>
+                    <a:pt x="1101017" y="2042287"/>
+                  </a:lnTo>
+                  <a:lnTo>
+                    <a:pt x="1178651" y="2132622"/>
+                  </a:lnTo>
+                  <a:lnTo>
+                    <a:pt x="1256285" y="2217888"/>
+                  </a:lnTo>
+                  <a:lnTo>
+                    <a:pt x="1333919" y="2298372"/>
+                  </a:lnTo>
+                  <a:lnTo>
+                    <a:pt x="1411554" y="2374341"/>
+                  </a:lnTo>
+                  <a:lnTo>
+                    <a:pt x="1489188" y="2446049"/>
+                  </a:lnTo>
+                  <a:lnTo>
+                    <a:pt x="1566822" y="2513734"/>
+                  </a:lnTo>
+                  <a:lnTo>
+                    <a:pt x="1644456" y="2577622"/>
+                  </a:lnTo>
+                  <a:lnTo>
+                    <a:pt x="1722090" y="2637926"/>
+                  </a:lnTo>
+                  <a:lnTo>
+                    <a:pt x="1799724" y="2694847"/>
+                  </a:lnTo>
+                  <a:lnTo>
+                    <a:pt x="1877358" y="2748576"/>
+                  </a:lnTo>
+                  <a:lnTo>
+                    <a:pt x="1954992" y="2785419"/>
+                  </a:lnTo>
+                  <a:lnTo>
+                    <a:pt x="2032626" y="2792848"/>
+                  </a:lnTo>
+                  <a:lnTo>
+                    <a:pt x="2110260" y="2800214"/>
+                  </a:lnTo>
+                  <a:lnTo>
+                    <a:pt x="2187894" y="2807517"/>
+                  </a:lnTo>
+                  <a:lnTo>
+                    <a:pt x="2265528" y="2814758"/>
+                  </a:lnTo>
+                  <a:lnTo>
+                    <a:pt x="2343162" y="2821936"/>
+                  </a:lnTo>
+                  <a:lnTo>
+                    <a:pt x="2420796" y="2829053"/>
+                  </a:lnTo>
+                  <a:lnTo>
+                    <a:pt x="2498430" y="2836109"/>
+                  </a:lnTo>
+                  <a:lnTo>
+                    <a:pt x="2576064" y="2843104"/>
+                  </a:lnTo>
+                  <a:lnTo>
+                    <a:pt x="2653698" y="2850040"/>
+                  </a:lnTo>
+                  <a:lnTo>
+                    <a:pt x="2731332" y="2856916"/>
+                  </a:lnTo>
+                  <a:lnTo>
+                    <a:pt x="2808966" y="2863733"/>
+                  </a:lnTo>
+                  <a:lnTo>
+                    <a:pt x="2886600" y="2870492"/>
+                  </a:lnTo>
+                  <a:lnTo>
+                    <a:pt x="2964234" y="2877192"/>
+                  </a:lnTo>
+                  <a:lnTo>
+                    <a:pt x="3041868" y="2883836"/>
+                  </a:lnTo>
+                  <a:lnTo>
+                    <a:pt x="3119503" y="2890422"/>
+                  </a:lnTo>
+                  <a:lnTo>
+                    <a:pt x="3197137" y="2896952"/>
+                  </a:lnTo>
+                  <a:lnTo>
+                    <a:pt x="3274771" y="2903427"/>
+                  </a:lnTo>
+                  <a:lnTo>
+                    <a:pt x="3352405" y="2909845"/>
+                  </a:lnTo>
+                  <a:lnTo>
+                    <a:pt x="3430039" y="2916209"/>
+                  </a:lnTo>
+                  <a:lnTo>
+                    <a:pt x="3507673" y="2922518"/>
+                  </a:lnTo>
+                  <a:lnTo>
+                    <a:pt x="3585307" y="2928773"/>
+                  </a:lnTo>
+                  <a:lnTo>
+                    <a:pt x="3662941" y="2934975"/>
+                  </a:lnTo>
+                  <a:lnTo>
+                    <a:pt x="3740575" y="2941123"/>
+                  </a:lnTo>
+                  <a:lnTo>
+                    <a:pt x="3818209" y="2947219"/>
+                  </a:lnTo>
+                  <a:lnTo>
+                    <a:pt x="3895843" y="2953262"/>
+                  </a:lnTo>
+                  <a:lnTo>
+                    <a:pt x="3973477" y="2959254"/>
+                  </a:lnTo>
+                  <a:lnTo>
+                    <a:pt x="4051111" y="2965194"/>
+                  </a:lnTo>
+                  <a:lnTo>
+                    <a:pt x="4128745" y="2971084"/>
+                  </a:lnTo>
+                  <a:lnTo>
+                    <a:pt x="4206379" y="2976923"/>
+                  </a:lnTo>
+                  <a:lnTo>
+                    <a:pt x="4284013" y="2982712"/>
+                  </a:lnTo>
+                  <a:lnTo>
+                    <a:pt x="4361647" y="2988451"/>
+                  </a:lnTo>
+                  <a:lnTo>
+                    <a:pt x="4439281" y="2994142"/>
+                  </a:lnTo>
+                  <a:lnTo>
+                    <a:pt x="4516915" y="2999783"/>
+                  </a:lnTo>
+                  <a:lnTo>
+                    <a:pt x="4594549" y="3005376"/>
+                  </a:lnTo>
+                  <a:lnTo>
+                    <a:pt x="4672183" y="3010922"/>
+                  </a:lnTo>
+                  <a:lnTo>
+                    <a:pt x="4749817" y="3016419"/>
+                  </a:lnTo>
+                  <a:lnTo>
+                    <a:pt x="4827451" y="3021870"/>
+                  </a:lnTo>
+                  <a:lnTo>
+                    <a:pt x="4905086" y="3027274"/>
+                  </a:lnTo>
+                  <a:lnTo>
+                    <a:pt x="4982720" y="3032632"/>
+                  </a:lnTo>
+                  <a:lnTo>
+                    <a:pt x="5060354" y="3037943"/>
+                  </a:lnTo>
+                  <a:lnTo>
+                    <a:pt x="5137988" y="3043210"/>
+                  </a:lnTo>
+                  <a:lnTo>
+                    <a:pt x="5215622" y="3048431"/>
+                  </a:lnTo>
+                  <a:lnTo>
+                    <a:pt x="5293256" y="3053607"/>
+                  </a:lnTo>
+                  <a:lnTo>
+                    <a:pt x="5370890" y="3058739"/>
+                  </a:lnTo>
+                  <a:lnTo>
+                    <a:pt x="5448524" y="3063827"/>
+                  </a:lnTo>
+                  <a:lnTo>
+                    <a:pt x="5526158" y="3068872"/>
+                  </a:lnTo>
+                  <a:lnTo>
+                    <a:pt x="5603792" y="3073873"/>
+                  </a:lnTo>
+                  <a:lnTo>
+                    <a:pt x="5681426" y="3078831"/>
+                  </a:lnTo>
+                  <a:lnTo>
+                    <a:pt x="5759060" y="3083747"/>
+                  </a:lnTo>
+                  <a:lnTo>
+                    <a:pt x="5836694" y="3088621"/>
+                  </a:lnTo>
+                  <a:lnTo>
+                    <a:pt x="5914328" y="3093453"/>
                   </a:lnTo>
                 </a:path>
               </a:pathLst>
@@ -3808,297 +3814,297 @@
           </p:nvSpPr>
           <p:spPr>
             <a:xfrm>
-              <a:off x="817517" y="4278437"/>
-              <a:ext cx="7370972" cy="1227142"/>
+              <a:off x="817517" y="4283473"/>
+              <a:ext cx="7370972" cy="1220812"/>
             </a:xfrm>
             <a:custGeom>
               <a:avLst/>
               <a:pathLst>
-                <a:path w="7370972" h="1227142">
+                <a:path w="7370972" h="1220812">
                   <a:moveTo>
-                    <a:pt x="7370972" y="1227142"/>
+                    <a:pt x="7370972" y="1220812"/>
                   </a:moveTo>
                   <a:lnTo>
-                    <a:pt x="7293338" y="1224522"/>
-                  </a:lnTo>
-                  <a:lnTo>
-                    <a:pt x="7215704" y="1221746"/>
-                  </a:lnTo>
-                  <a:lnTo>
-                    <a:pt x="7138070" y="1218803"/>
-                  </a:lnTo>
-                  <a:lnTo>
-                    <a:pt x="7060436" y="1215683"/>
-                  </a:lnTo>
-                  <a:lnTo>
-                    <a:pt x="6982802" y="1212377"/>
-                  </a:lnTo>
-                  <a:lnTo>
-                    <a:pt x="6905168" y="1208871"/>
-                  </a:lnTo>
-                  <a:lnTo>
-                    <a:pt x="6827534" y="1205155"/>
-                  </a:lnTo>
-                  <a:lnTo>
-                    <a:pt x="6749900" y="1201216"/>
-                  </a:lnTo>
-                  <a:lnTo>
-                    <a:pt x="6672266" y="1197041"/>
-                  </a:lnTo>
-                  <a:lnTo>
-                    <a:pt x="6594632" y="1192614"/>
-                  </a:lnTo>
-                  <a:lnTo>
-                    <a:pt x="6516998" y="1187923"/>
-                  </a:lnTo>
-                  <a:lnTo>
-                    <a:pt x="6439364" y="1182949"/>
-                  </a:lnTo>
-                  <a:lnTo>
-                    <a:pt x="6361730" y="1177677"/>
-                  </a:lnTo>
-                  <a:lnTo>
-                    <a:pt x="6284096" y="1172088"/>
-                  </a:lnTo>
-                  <a:lnTo>
-                    <a:pt x="6206462" y="1166164"/>
-                  </a:lnTo>
-                  <a:lnTo>
-                    <a:pt x="6128827" y="1159885"/>
-                  </a:lnTo>
-                  <a:lnTo>
-                    <a:pt x="6051193" y="1153228"/>
-                  </a:lnTo>
-                  <a:lnTo>
-                    <a:pt x="5973559" y="1146171"/>
-                  </a:lnTo>
-                  <a:lnTo>
-                    <a:pt x="5895925" y="1138691"/>
-                  </a:lnTo>
-                  <a:lnTo>
-                    <a:pt x="5818291" y="1130762"/>
-                  </a:lnTo>
-                  <a:lnTo>
-                    <a:pt x="5740657" y="1122357"/>
-                  </a:lnTo>
-                  <a:lnTo>
-                    <a:pt x="5663023" y="1113448"/>
-                  </a:lnTo>
-                  <a:lnTo>
-                    <a:pt x="5585389" y="1104003"/>
-                  </a:lnTo>
-                  <a:lnTo>
-                    <a:pt x="5507755" y="1093992"/>
-                  </a:lnTo>
-                  <a:lnTo>
-                    <a:pt x="5430121" y="1083380"/>
-                  </a:lnTo>
-                  <a:lnTo>
-                    <a:pt x="5352487" y="1072130"/>
-                  </a:lnTo>
-                  <a:lnTo>
-                    <a:pt x="5274853" y="1060205"/>
-                  </a:lnTo>
-                  <a:lnTo>
-                    <a:pt x="5197219" y="1047564"/>
-                  </a:lnTo>
-                  <a:lnTo>
-                    <a:pt x="5119585" y="1034165"/>
-                  </a:lnTo>
-                  <a:lnTo>
-                    <a:pt x="5041951" y="1019961"/>
-                  </a:lnTo>
-                  <a:lnTo>
-                    <a:pt x="4964317" y="1004904"/>
-                  </a:lnTo>
-                  <a:lnTo>
-                    <a:pt x="4886683" y="988943"/>
-                  </a:lnTo>
-                  <a:lnTo>
-                    <a:pt x="4809049" y="972025"/>
-                  </a:lnTo>
-                  <a:lnTo>
-                    <a:pt x="4731415" y="954090"/>
-                  </a:lnTo>
-                  <a:lnTo>
-                    <a:pt x="4653781" y="935079"/>
-                  </a:lnTo>
-                  <a:lnTo>
-                    <a:pt x="4576147" y="914927"/>
-                  </a:lnTo>
-                  <a:lnTo>
-                    <a:pt x="4498513" y="893564"/>
-                  </a:lnTo>
-                  <a:lnTo>
-                    <a:pt x="4420879" y="870920"/>
-                  </a:lnTo>
-                  <a:lnTo>
-                    <a:pt x="4343244" y="846916"/>
-                  </a:lnTo>
-                  <a:lnTo>
-                    <a:pt x="4265610" y="821470"/>
-                  </a:lnTo>
-                  <a:lnTo>
-                    <a:pt x="4187976" y="794498"/>
-                  </a:lnTo>
-                  <a:lnTo>
-                    <a:pt x="4110342" y="765906"/>
-                  </a:lnTo>
-                  <a:lnTo>
-                    <a:pt x="4032708" y="735597"/>
-                  </a:lnTo>
-                  <a:lnTo>
-                    <a:pt x="3955074" y="703470"/>
-                  </a:lnTo>
-                  <a:lnTo>
-                    <a:pt x="3877440" y="669413"/>
-                  </a:lnTo>
-                  <a:lnTo>
-                    <a:pt x="3799806" y="633312"/>
-                  </a:lnTo>
-                  <a:lnTo>
-                    <a:pt x="3722172" y="595044"/>
-                  </a:lnTo>
-                  <a:lnTo>
-                    <a:pt x="3644538" y="554478"/>
-                  </a:lnTo>
-                  <a:lnTo>
-                    <a:pt x="3566904" y="511477"/>
-                  </a:lnTo>
-                  <a:lnTo>
-                    <a:pt x="3489270" y="465894"/>
-                  </a:lnTo>
-                  <a:lnTo>
-                    <a:pt x="3411636" y="417576"/>
-                  </a:lnTo>
-                  <a:lnTo>
-                    <a:pt x="3334002" y="395997"/>
-                  </a:lnTo>
-                  <a:lnTo>
-                    <a:pt x="3256368" y="388358"/>
-                  </a:lnTo>
-                  <a:lnTo>
-                    <a:pt x="3178734" y="380652"/>
-                  </a:lnTo>
-                  <a:lnTo>
-                    <a:pt x="3101100" y="372879"/>
-                  </a:lnTo>
-                  <a:lnTo>
-                    <a:pt x="3023466" y="365037"/>
-                  </a:lnTo>
-                  <a:lnTo>
-                    <a:pt x="2945832" y="357127"/>
-                  </a:lnTo>
-                  <a:lnTo>
-                    <a:pt x="2868198" y="349149"/>
-                  </a:lnTo>
-                  <a:lnTo>
-                    <a:pt x="2790564" y="341100"/>
-                  </a:lnTo>
-                  <a:lnTo>
-                    <a:pt x="2712930" y="332981"/>
-                  </a:lnTo>
-                  <a:lnTo>
-                    <a:pt x="2635295" y="324791"/>
-                  </a:lnTo>
-                  <a:lnTo>
-                    <a:pt x="2557661" y="316530"/>
-                  </a:lnTo>
-                  <a:lnTo>
-                    <a:pt x="2480027" y="308197"/>
-                  </a:lnTo>
-                  <a:lnTo>
-                    <a:pt x="2402393" y="299791"/>
-                  </a:lnTo>
-                  <a:lnTo>
-                    <a:pt x="2324759" y="291311"/>
-                  </a:lnTo>
-                  <a:lnTo>
-                    <a:pt x="2247125" y="282757"/>
-                  </a:lnTo>
-                  <a:lnTo>
-                    <a:pt x="2169491" y="274129"/>
-                  </a:lnTo>
-                  <a:lnTo>
-                    <a:pt x="2091857" y="265425"/>
-                  </a:lnTo>
-                  <a:lnTo>
-                    <a:pt x="2014223" y="256646"/>
-                  </a:lnTo>
-                  <a:lnTo>
-                    <a:pt x="1936589" y="247789"/>
-                  </a:lnTo>
-                  <a:lnTo>
-                    <a:pt x="1858955" y="238855"/>
-                  </a:lnTo>
-                  <a:lnTo>
-                    <a:pt x="1781321" y="229844"/>
-                  </a:lnTo>
-                  <a:lnTo>
-                    <a:pt x="1703687" y="220753"/>
-                  </a:lnTo>
-                  <a:lnTo>
-                    <a:pt x="1626053" y="211583"/>
-                  </a:lnTo>
-                  <a:lnTo>
-                    <a:pt x="1548419" y="202334"/>
-                  </a:lnTo>
-                  <a:lnTo>
-                    <a:pt x="1470785" y="193003"/>
-                  </a:lnTo>
-                  <a:lnTo>
-                    <a:pt x="1393151" y="183591"/>
-                  </a:lnTo>
-                  <a:lnTo>
-                    <a:pt x="1315517" y="174096"/>
-                  </a:lnTo>
-                  <a:lnTo>
-                    <a:pt x="1237883" y="164519"/>
-                  </a:lnTo>
-                  <a:lnTo>
-                    <a:pt x="1160249" y="154858"/>
-                  </a:lnTo>
-                  <a:lnTo>
-                    <a:pt x="1082615" y="145113"/>
-                  </a:lnTo>
-                  <a:lnTo>
-                    <a:pt x="1004981" y="135282"/>
-                  </a:lnTo>
-                  <a:lnTo>
-                    <a:pt x="927346" y="125366"/>
-                  </a:lnTo>
-                  <a:lnTo>
-                    <a:pt x="849712" y="115363"/>
-                  </a:lnTo>
-                  <a:lnTo>
-                    <a:pt x="772078" y="105273"/>
-                  </a:lnTo>
-                  <a:lnTo>
-                    <a:pt x="694444" y="95095"/>
-                  </a:lnTo>
-                  <a:lnTo>
-                    <a:pt x="616810" y="84828"/>
-                  </a:lnTo>
-                  <a:lnTo>
-                    <a:pt x="539176" y="74471"/>
-                  </a:lnTo>
-                  <a:lnTo>
-                    <a:pt x="461542" y="64023"/>
-                  </a:lnTo>
-                  <a:lnTo>
-                    <a:pt x="383908" y="53485"/>
-                  </a:lnTo>
-                  <a:lnTo>
-                    <a:pt x="306274" y="42854"/>
-                  </a:lnTo>
-                  <a:lnTo>
-                    <a:pt x="228640" y="32131"/>
-                  </a:lnTo>
-                  <a:lnTo>
-                    <a:pt x="151006" y="21314"/>
-                  </a:lnTo>
-                  <a:lnTo>
-                    <a:pt x="73372" y="10402"/>
+                    <a:pt x="7293338" y="1218143"/>
+                  </a:lnTo>
+                  <a:lnTo>
+                    <a:pt x="7215704" y="1215314"/>
+                  </a:lnTo>
+                  <a:lnTo>
+                    <a:pt x="7138070" y="1212318"/>
+                  </a:lnTo>
+                  <a:lnTo>
+                    <a:pt x="7060436" y="1209144"/>
+                  </a:lnTo>
+                  <a:lnTo>
+                    <a:pt x="6982802" y="1205780"/>
+                  </a:lnTo>
+                  <a:lnTo>
+                    <a:pt x="6905168" y="1202217"/>
+                  </a:lnTo>
+                  <a:lnTo>
+                    <a:pt x="6827534" y="1198443"/>
+                  </a:lnTo>
+                  <a:lnTo>
+                    <a:pt x="6749900" y="1194444"/>
+                  </a:lnTo>
+                  <a:lnTo>
+                    <a:pt x="6672266" y="1190207"/>
+                  </a:lnTo>
+                  <a:lnTo>
+                    <a:pt x="6594632" y="1185718"/>
+                  </a:lnTo>
+                  <a:lnTo>
+                    <a:pt x="6516998" y="1180963"/>
+                  </a:lnTo>
+                  <a:lnTo>
+                    <a:pt x="6439364" y="1175925"/>
+                  </a:lnTo>
+                  <a:lnTo>
+                    <a:pt x="6361730" y="1170588"/>
+                  </a:lnTo>
+                  <a:lnTo>
+                    <a:pt x="6284096" y="1164934"/>
+                  </a:lnTo>
+                  <a:lnTo>
+                    <a:pt x="6206462" y="1158943"/>
+                  </a:lnTo>
+                  <a:lnTo>
+                    <a:pt x="6128827" y="1152596"/>
+                  </a:lnTo>
+                  <a:lnTo>
+                    <a:pt x="6051193" y="1145873"/>
+                  </a:lnTo>
+                  <a:lnTo>
+                    <a:pt x="5973559" y="1138750"/>
+                  </a:lnTo>
+                  <a:lnTo>
+                    <a:pt x="5895925" y="1131203"/>
+                  </a:lnTo>
+                  <a:lnTo>
+                    <a:pt x="5818291" y="1123208"/>
+                  </a:lnTo>
+                  <a:lnTo>
+                    <a:pt x="5740657" y="1114738"/>
+                  </a:lnTo>
+                  <a:lnTo>
+                    <a:pt x="5663023" y="1105764"/>
+                  </a:lnTo>
+                  <a:lnTo>
+                    <a:pt x="5585389" y="1096257"/>
+                  </a:lnTo>
+                  <a:lnTo>
+                    <a:pt x="5507755" y="1086185"/>
+                  </a:lnTo>
+                  <a:lnTo>
+                    <a:pt x="5430121" y="1075514"/>
+                  </a:lnTo>
+                  <a:lnTo>
+                    <a:pt x="5352487" y="1064210"/>
+                  </a:lnTo>
+                  <a:lnTo>
+                    <a:pt x="5274853" y="1052233"/>
+                  </a:lnTo>
+                  <a:lnTo>
+                    <a:pt x="5197219" y="1039545"/>
+                  </a:lnTo>
+                  <a:lnTo>
+                    <a:pt x="5119585" y="1026103"/>
+                  </a:lnTo>
+                  <a:lnTo>
+                    <a:pt x="5041951" y="1011862"/>
+                  </a:lnTo>
+                  <a:lnTo>
+                    <a:pt x="4964317" y="996774"/>
+                  </a:lnTo>
+                  <a:lnTo>
+                    <a:pt x="4886683" y="980790"/>
+                  </a:lnTo>
+                  <a:lnTo>
+                    <a:pt x="4809049" y="963856"/>
+                  </a:lnTo>
+                  <a:lnTo>
+                    <a:pt x="4731415" y="945915"/>
+                  </a:lnTo>
+                  <a:lnTo>
+                    <a:pt x="4653781" y="926909"/>
+                  </a:lnTo>
+                  <a:lnTo>
+                    <a:pt x="4576147" y="906773"/>
+                  </a:lnTo>
+                  <a:lnTo>
+                    <a:pt x="4498513" y="885440"/>
+                  </a:lnTo>
+                  <a:lnTo>
+                    <a:pt x="4420879" y="862839"/>
+                  </a:lnTo>
+                  <a:lnTo>
+                    <a:pt x="4343244" y="838895"/>
+                  </a:lnTo>
+                  <a:lnTo>
+                    <a:pt x="4265610" y="813528"/>
+                  </a:lnTo>
+                  <a:lnTo>
+                    <a:pt x="4187976" y="786654"/>
+                  </a:lnTo>
+                  <a:lnTo>
+                    <a:pt x="4110342" y="758182"/>
+                  </a:lnTo>
+                  <a:lnTo>
+                    <a:pt x="4032708" y="728019"/>
+                  </a:lnTo>
+                  <a:lnTo>
+                    <a:pt x="3955074" y="696063"/>
+                  </a:lnTo>
+                  <a:lnTo>
+                    <a:pt x="3877440" y="662207"/>
+                  </a:lnTo>
+                  <a:lnTo>
+                    <a:pt x="3799806" y="626340"/>
+                  </a:lnTo>
+                  <a:lnTo>
+                    <a:pt x="3722172" y="588341"/>
+                  </a:lnTo>
+                  <a:lnTo>
+                    <a:pt x="3644538" y="548084"/>
+                  </a:lnTo>
+                  <a:lnTo>
+                    <a:pt x="3566904" y="505434"/>
+                  </a:lnTo>
+                  <a:lnTo>
+                    <a:pt x="3489270" y="460250"/>
+                  </a:lnTo>
+                  <a:lnTo>
+                    <a:pt x="3411636" y="412380"/>
+                  </a:lnTo>
+                  <a:lnTo>
+                    <a:pt x="3334002" y="391015"/>
+                  </a:lnTo>
+                  <a:lnTo>
+                    <a:pt x="3256368" y="383457"/>
+                  </a:lnTo>
+                  <a:lnTo>
+                    <a:pt x="3178734" y="375833"/>
+                  </a:lnTo>
+                  <a:lnTo>
+                    <a:pt x="3101100" y="368143"/>
+                  </a:lnTo>
+                  <a:lnTo>
+                    <a:pt x="3023466" y="360387"/>
+                  </a:lnTo>
+                  <a:lnTo>
+                    <a:pt x="2945832" y="352563"/>
+                  </a:lnTo>
+                  <a:lnTo>
+                    <a:pt x="2868198" y="344672"/>
+                  </a:lnTo>
+                  <a:lnTo>
+                    <a:pt x="2790564" y="336713"/>
+                  </a:lnTo>
+                  <a:lnTo>
+                    <a:pt x="2712930" y="328685"/>
+                  </a:lnTo>
+                  <a:lnTo>
+                    <a:pt x="2635295" y="320588"/>
+                  </a:lnTo>
+                  <a:lnTo>
+                    <a:pt x="2557661" y="312421"/>
+                  </a:lnTo>
+                  <a:lnTo>
+                    <a:pt x="2480027" y="304183"/>
+                  </a:lnTo>
+                  <a:lnTo>
+                    <a:pt x="2402393" y="295874"/>
+                  </a:lnTo>
+                  <a:lnTo>
+                    <a:pt x="2324759" y="287494"/>
+                  </a:lnTo>
+                  <a:lnTo>
+                    <a:pt x="2247125" y="279040"/>
+                  </a:lnTo>
+                  <a:lnTo>
+                    <a:pt x="2169491" y="270514"/>
+                  </a:lnTo>
+                  <a:lnTo>
+                    <a:pt x="2091857" y="261914"/>
+                  </a:lnTo>
+                  <a:lnTo>
+                    <a:pt x="2014223" y="253240"/>
+                  </a:lnTo>
+                  <a:lnTo>
+                    <a:pt x="1936589" y="244491"/>
+                  </a:lnTo>
+                  <a:lnTo>
+                    <a:pt x="1858955" y="235666"/>
+                  </a:lnTo>
+                  <a:lnTo>
+                    <a:pt x="1781321" y="226765"/>
+                  </a:lnTo>
+                  <a:lnTo>
+                    <a:pt x="1703687" y="217787"/>
+                  </a:lnTo>
+                  <a:lnTo>
+                    <a:pt x="1626053" y="208731"/>
+                  </a:lnTo>
+                  <a:lnTo>
+                    <a:pt x="1548419" y="199598"/>
+                  </a:lnTo>
+                  <a:lnTo>
+                    <a:pt x="1470785" y="190385"/>
+                  </a:lnTo>
+                  <a:lnTo>
+                    <a:pt x="1393151" y="181093"/>
+                  </a:lnTo>
+                  <a:lnTo>
+                    <a:pt x="1315517" y="171720"/>
+                  </a:lnTo>
+                  <a:lnTo>
+                    <a:pt x="1237883" y="162266"/>
+                  </a:lnTo>
+                  <a:lnTo>
+                    <a:pt x="1160249" y="152731"/>
+                  </a:lnTo>
+                  <a:lnTo>
+                    <a:pt x="1082615" y="143113"/>
+                  </a:lnTo>
+                  <a:lnTo>
+                    <a:pt x="1004981" y="133413"/>
+                  </a:lnTo>
+                  <a:lnTo>
+                    <a:pt x="927346" y="123628"/>
+                  </a:lnTo>
+                  <a:lnTo>
+                    <a:pt x="849712" y="113759"/>
+                  </a:lnTo>
+                  <a:lnTo>
+                    <a:pt x="772078" y="103804"/>
+                  </a:lnTo>
+                  <a:lnTo>
+                    <a:pt x="694444" y="93764"/>
+                  </a:lnTo>
+                  <a:lnTo>
+                    <a:pt x="616810" y="83637"/>
+                  </a:lnTo>
+                  <a:lnTo>
+                    <a:pt x="539176" y="73422"/>
+                  </a:lnTo>
+                  <a:lnTo>
+                    <a:pt x="461542" y="63119"/>
+                  </a:lnTo>
+                  <a:lnTo>
+                    <a:pt x="383908" y="52727"/>
+                  </a:lnTo>
+                  <a:lnTo>
+                    <a:pt x="306274" y="42245"/>
+                  </a:lnTo>
+                  <a:lnTo>
+                    <a:pt x="228640" y="31673"/>
+                  </a:lnTo>
+                  <a:lnTo>
+                    <a:pt x="151006" y="21009"/>
+                  </a:lnTo>
+                  <a:lnTo>
+                    <a:pt x="73372" y="10253"/>
                   </a:lnTo>
                   <a:lnTo>
                     <a:pt x="0" y="0"/>
@@ -4121,300 +4127,300 @@
           </p:nvSpPr>
           <p:spPr>
             <a:xfrm>
-              <a:off x="877891" y="1896563"/>
-              <a:ext cx="7310598" cy="3496815"/>
+              <a:off x="844915" y="1896563"/>
+              <a:ext cx="7343574" cy="3494152"/>
             </a:xfrm>
             <a:custGeom>
               <a:avLst/>
               <a:pathLst>
-                <a:path w="7310598" h="3496815">
+                <a:path w="7343574" h="3494152">
                   <a:moveTo>
                     <a:pt x="0" y="0"/>
                   </a:moveTo>
                   <a:lnTo>
-                    <a:pt x="12998" y="20715"/>
-                  </a:lnTo>
-                  <a:lnTo>
-                    <a:pt x="90632" y="140360"/>
-                  </a:lnTo>
-                  <a:lnTo>
-                    <a:pt x="168266" y="256064"/>
-                  </a:lnTo>
-                  <a:lnTo>
-                    <a:pt x="245900" y="367956"/>
-                  </a:lnTo>
-                  <a:lnTo>
-                    <a:pt x="323534" y="476163"/>
-                  </a:lnTo>
-                  <a:lnTo>
-                    <a:pt x="401168" y="580804"/>
-                  </a:lnTo>
-                  <a:lnTo>
-                    <a:pt x="478802" y="681999"/>
-                  </a:lnTo>
-                  <a:lnTo>
-                    <a:pt x="556436" y="779860"/>
-                  </a:lnTo>
-                  <a:lnTo>
-                    <a:pt x="634070" y="874497"/>
-                  </a:lnTo>
-                  <a:lnTo>
-                    <a:pt x="711704" y="966016"/>
-                  </a:lnTo>
-                  <a:lnTo>
-                    <a:pt x="789339" y="1054521"/>
-                  </a:lnTo>
-                  <a:lnTo>
-                    <a:pt x="866973" y="1140110"/>
-                  </a:lnTo>
-                  <a:lnTo>
-                    <a:pt x="944607" y="1222879"/>
-                  </a:lnTo>
-                  <a:lnTo>
-                    <a:pt x="1022241" y="1302922"/>
-                  </a:lnTo>
-                  <a:lnTo>
-                    <a:pt x="1099875" y="1380328"/>
-                  </a:lnTo>
-                  <a:lnTo>
-                    <a:pt x="1177509" y="1455184"/>
-                  </a:lnTo>
-                  <a:lnTo>
-                    <a:pt x="1255143" y="1527575"/>
-                  </a:lnTo>
-                  <a:lnTo>
-                    <a:pt x="1332777" y="1597580"/>
-                  </a:lnTo>
-                  <a:lnTo>
-                    <a:pt x="1410411" y="1665279"/>
-                  </a:lnTo>
-                  <a:lnTo>
-                    <a:pt x="1488045" y="1730748"/>
-                  </a:lnTo>
-                  <a:lnTo>
-                    <a:pt x="1565679" y="1794061"/>
-                  </a:lnTo>
-                  <a:lnTo>
-                    <a:pt x="1643313" y="1855287"/>
-                  </a:lnTo>
-                  <a:lnTo>
-                    <a:pt x="1720947" y="1914497"/>
-                  </a:lnTo>
-                  <a:lnTo>
-                    <a:pt x="1798581" y="1971756"/>
-                  </a:lnTo>
-                  <a:lnTo>
-                    <a:pt x="1876215" y="2027129"/>
-                  </a:lnTo>
-                  <a:lnTo>
-                    <a:pt x="1953849" y="2080678"/>
-                  </a:lnTo>
-                  <a:lnTo>
-                    <a:pt x="2031483" y="2132462"/>
-                  </a:lnTo>
-                  <a:lnTo>
-                    <a:pt x="2109117" y="2182541"/>
-                  </a:lnTo>
-                  <a:lnTo>
-                    <a:pt x="2186751" y="2230970"/>
-                  </a:lnTo>
-                  <a:lnTo>
-                    <a:pt x="2264385" y="2277804"/>
-                  </a:lnTo>
-                  <a:lnTo>
-                    <a:pt x="2342019" y="2323095"/>
-                  </a:lnTo>
-                  <a:lnTo>
-                    <a:pt x="2419653" y="2366894"/>
-                  </a:lnTo>
-                  <a:lnTo>
-                    <a:pt x="2497287" y="2409250"/>
-                  </a:lnTo>
-                  <a:lnTo>
-                    <a:pt x="2574922" y="2450210"/>
-                  </a:lnTo>
-                  <a:lnTo>
-                    <a:pt x="2652556" y="2489822"/>
-                  </a:lnTo>
-                  <a:lnTo>
-                    <a:pt x="2730190" y="2528128"/>
-                  </a:lnTo>
-                  <a:lnTo>
-                    <a:pt x="2807824" y="2565173"/>
-                  </a:lnTo>
-                  <a:lnTo>
-                    <a:pt x="2885458" y="2600997"/>
-                  </a:lnTo>
-                  <a:lnTo>
-                    <a:pt x="2963092" y="2635641"/>
-                  </a:lnTo>
-                  <a:lnTo>
-                    <a:pt x="3040726" y="2669144"/>
-                  </a:lnTo>
-                  <a:lnTo>
-                    <a:pt x="3118360" y="2701543"/>
-                  </a:lnTo>
-                  <a:lnTo>
-                    <a:pt x="3195994" y="2732874"/>
-                  </a:lnTo>
-                  <a:lnTo>
-                    <a:pt x="3273628" y="2763174"/>
-                  </a:lnTo>
-                  <a:lnTo>
-                    <a:pt x="3351262" y="2792476"/>
-                  </a:lnTo>
-                  <a:lnTo>
-                    <a:pt x="3428896" y="2820812"/>
-                  </a:lnTo>
-                  <a:lnTo>
-                    <a:pt x="3506530" y="2848215"/>
-                  </a:lnTo>
-                  <a:lnTo>
-                    <a:pt x="3584164" y="2874715"/>
-                  </a:lnTo>
-                  <a:lnTo>
-                    <a:pt x="3661798" y="2900342"/>
-                  </a:lnTo>
-                  <a:lnTo>
-                    <a:pt x="3739432" y="2925124"/>
-                  </a:lnTo>
-                  <a:lnTo>
-                    <a:pt x="3817066" y="2949091"/>
-                  </a:lnTo>
-                  <a:lnTo>
-                    <a:pt x="3894700" y="2972268"/>
-                  </a:lnTo>
-                  <a:lnTo>
-                    <a:pt x="3972334" y="2994681"/>
-                  </a:lnTo>
-                  <a:lnTo>
-                    <a:pt x="4049968" y="3016356"/>
-                  </a:lnTo>
-                  <a:lnTo>
-                    <a:pt x="4127602" y="3037317"/>
-                  </a:lnTo>
-                  <a:lnTo>
-                    <a:pt x="4205236" y="3057588"/>
-                  </a:lnTo>
-                  <a:lnTo>
-                    <a:pt x="4282871" y="3077190"/>
-                  </a:lnTo>
-                  <a:lnTo>
-                    <a:pt x="4360505" y="3096147"/>
-                  </a:lnTo>
-                  <a:lnTo>
-                    <a:pt x="4438139" y="3114480"/>
-                  </a:lnTo>
-                  <a:lnTo>
-                    <a:pt x="4515773" y="3132208"/>
-                  </a:lnTo>
-                  <a:lnTo>
-                    <a:pt x="4593407" y="3149353"/>
-                  </a:lnTo>
-                  <a:lnTo>
-                    <a:pt x="4671041" y="3165932"/>
-                  </a:lnTo>
-                  <a:lnTo>
-                    <a:pt x="4748675" y="3181966"/>
-                  </a:lnTo>
-                  <a:lnTo>
-                    <a:pt x="4826309" y="3197471"/>
-                  </a:lnTo>
-                  <a:lnTo>
-                    <a:pt x="4903943" y="3212466"/>
-                  </a:lnTo>
-                  <a:lnTo>
-                    <a:pt x="4981577" y="3226967"/>
-                  </a:lnTo>
-                  <a:lnTo>
-                    <a:pt x="5059211" y="3240989"/>
-                  </a:lnTo>
-                  <a:lnTo>
-                    <a:pt x="5136845" y="3254550"/>
-                  </a:lnTo>
-                  <a:lnTo>
-                    <a:pt x="5214479" y="3267665"/>
-                  </a:lnTo>
-                  <a:lnTo>
-                    <a:pt x="5292113" y="3280347"/>
-                  </a:lnTo>
-                  <a:lnTo>
-                    <a:pt x="5369747" y="3292611"/>
-                  </a:lnTo>
-                  <a:lnTo>
-                    <a:pt x="5447381" y="3304472"/>
-                  </a:lnTo>
-                  <a:lnTo>
-                    <a:pt x="5525015" y="3315941"/>
-                  </a:lnTo>
-                  <a:lnTo>
-                    <a:pt x="5602649" y="3327033"/>
-                  </a:lnTo>
-                  <a:lnTo>
-                    <a:pt x="5680283" y="3337760"/>
-                  </a:lnTo>
-                  <a:lnTo>
-                    <a:pt x="5757917" y="3348133"/>
-                  </a:lnTo>
-                  <a:lnTo>
-                    <a:pt x="5835551" y="3358164"/>
-                  </a:lnTo>
-                  <a:lnTo>
-                    <a:pt x="5913185" y="3367865"/>
-                  </a:lnTo>
-                  <a:lnTo>
-                    <a:pt x="5990820" y="3377246"/>
-                  </a:lnTo>
-                  <a:lnTo>
-                    <a:pt x="6068454" y="3386319"/>
-                  </a:lnTo>
-                  <a:lnTo>
-                    <a:pt x="6146088" y="3395092"/>
-                  </a:lnTo>
-                  <a:lnTo>
-                    <a:pt x="6223722" y="3403577"/>
-                  </a:lnTo>
-                  <a:lnTo>
-                    <a:pt x="6301356" y="3411782"/>
-                  </a:lnTo>
-                  <a:lnTo>
-                    <a:pt x="6378990" y="3419716"/>
-                  </a:lnTo>
-                  <a:lnTo>
-                    <a:pt x="6456624" y="3427389"/>
-                  </a:lnTo>
-                  <a:lnTo>
-                    <a:pt x="6534258" y="3434810"/>
-                  </a:lnTo>
-                  <a:lnTo>
-                    <a:pt x="6611892" y="3441986"/>
-                  </a:lnTo>
-                  <a:lnTo>
-                    <a:pt x="6689526" y="3448925"/>
-                  </a:lnTo>
-                  <a:lnTo>
-                    <a:pt x="6767160" y="3455637"/>
-                  </a:lnTo>
-                  <a:lnTo>
-                    <a:pt x="6844794" y="3462126"/>
-                  </a:lnTo>
-                  <a:lnTo>
-                    <a:pt x="6922428" y="3468403"/>
-                  </a:lnTo>
-                  <a:lnTo>
-                    <a:pt x="7000062" y="3474472"/>
-                  </a:lnTo>
-                  <a:lnTo>
-                    <a:pt x="7077696" y="3480341"/>
-                  </a:lnTo>
-                  <a:lnTo>
-                    <a:pt x="7155330" y="3486017"/>
-                  </a:lnTo>
-                  <a:lnTo>
-                    <a:pt x="7232964" y="3491507"/>
-                  </a:lnTo>
-                  <a:lnTo>
-                    <a:pt x="7310598" y="3496815"/>
+                    <a:pt x="45974" y="71518"/>
+                  </a:lnTo>
+                  <a:lnTo>
+                    <a:pt x="123608" y="188346"/>
+                  </a:lnTo>
+                  <a:lnTo>
+                    <a:pt x="201242" y="301363"/>
+                  </a:lnTo>
+                  <a:lnTo>
+                    <a:pt x="278876" y="410693"/>
+                  </a:lnTo>
+                  <a:lnTo>
+                    <a:pt x="356510" y="516456"/>
+                  </a:lnTo>
+                  <a:lnTo>
+                    <a:pt x="434144" y="618769"/>
+                  </a:lnTo>
+                  <a:lnTo>
+                    <a:pt x="511778" y="717745"/>
+                  </a:lnTo>
+                  <a:lnTo>
+                    <a:pt x="589412" y="813491"/>
+                  </a:lnTo>
+                  <a:lnTo>
+                    <a:pt x="667046" y="906114"/>
+                  </a:lnTo>
+                  <a:lnTo>
+                    <a:pt x="744680" y="995715"/>
+                  </a:lnTo>
+                  <a:lnTo>
+                    <a:pt x="822314" y="1082392"/>
+                  </a:lnTo>
+                  <a:lnTo>
+                    <a:pt x="899948" y="1166243"/>
+                  </a:lnTo>
+                  <a:lnTo>
+                    <a:pt x="977583" y="1247357"/>
+                  </a:lnTo>
+                  <a:lnTo>
+                    <a:pt x="1055217" y="1325826"/>
+                  </a:lnTo>
+                  <a:lnTo>
+                    <a:pt x="1132851" y="1401735"/>
+                  </a:lnTo>
+                  <a:lnTo>
+                    <a:pt x="1210485" y="1475167"/>
+                  </a:lnTo>
+                  <a:lnTo>
+                    <a:pt x="1288119" y="1546203"/>
+                  </a:lnTo>
+                  <a:lnTo>
+                    <a:pt x="1365753" y="1614922"/>
+                  </a:lnTo>
+                  <a:lnTo>
+                    <a:pt x="1443387" y="1681400"/>
+                  </a:lnTo>
+                  <a:lnTo>
+                    <a:pt x="1521021" y="1745708"/>
+                  </a:lnTo>
+                  <a:lnTo>
+                    <a:pt x="1598655" y="1807919"/>
+                  </a:lnTo>
+                  <a:lnTo>
+                    <a:pt x="1676289" y="1868100"/>
+                  </a:lnTo>
+                  <a:lnTo>
+                    <a:pt x="1753923" y="1926318"/>
+                  </a:lnTo>
+                  <a:lnTo>
+                    <a:pt x="1831557" y="1982636"/>
+                  </a:lnTo>
+                  <a:lnTo>
+                    <a:pt x="1909191" y="2037118"/>
+                  </a:lnTo>
+                  <a:lnTo>
+                    <a:pt x="1986825" y="2089821"/>
+                  </a:lnTo>
+                  <a:lnTo>
+                    <a:pt x="2064459" y="2140806"/>
+                  </a:lnTo>
+                  <a:lnTo>
+                    <a:pt x="2142093" y="2190127"/>
+                  </a:lnTo>
+                  <a:lnTo>
+                    <a:pt x="2219727" y="2237839"/>
+                  </a:lnTo>
+                  <a:lnTo>
+                    <a:pt x="2297361" y="2283995"/>
+                  </a:lnTo>
+                  <a:lnTo>
+                    <a:pt x="2374995" y="2328645"/>
+                  </a:lnTo>
+                  <a:lnTo>
+                    <a:pt x="2452629" y="2371838"/>
+                  </a:lnTo>
+                  <a:lnTo>
+                    <a:pt x="2530263" y="2413622"/>
+                  </a:lnTo>
+                  <a:lnTo>
+                    <a:pt x="2607897" y="2454043"/>
+                  </a:lnTo>
+                  <a:lnTo>
+                    <a:pt x="2685532" y="2493146"/>
+                  </a:lnTo>
+                  <a:lnTo>
+                    <a:pt x="2763166" y="2530972"/>
+                  </a:lnTo>
+                  <a:lnTo>
+                    <a:pt x="2840800" y="2567565"/>
+                  </a:lnTo>
+                  <a:lnTo>
+                    <a:pt x="2918434" y="2602964"/>
+                  </a:lnTo>
+                  <a:lnTo>
+                    <a:pt x="2996068" y="2637208"/>
+                  </a:lnTo>
+                  <a:lnTo>
+                    <a:pt x="3073702" y="2670335"/>
+                  </a:lnTo>
+                  <a:lnTo>
+                    <a:pt x="3151336" y="2702381"/>
+                  </a:lnTo>
+                  <a:lnTo>
+                    <a:pt x="3228970" y="2733382"/>
+                  </a:lnTo>
+                  <a:lnTo>
+                    <a:pt x="3306604" y="2763371"/>
+                  </a:lnTo>
+                  <a:lnTo>
+                    <a:pt x="3384238" y="2792382"/>
+                  </a:lnTo>
+                  <a:lnTo>
+                    <a:pt x="3461872" y="2820447"/>
+                  </a:lnTo>
+                  <a:lnTo>
+                    <a:pt x="3539506" y="2847596"/>
+                  </a:lnTo>
+                  <a:lnTo>
+                    <a:pt x="3617140" y="2873859"/>
+                  </a:lnTo>
+                  <a:lnTo>
+                    <a:pt x="3694774" y="2899266"/>
+                  </a:lnTo>
+                  <a:lnTo>
+                    <a:pt x="3772408" y="2923844"/>
+                  </a:lnTo>
+                  <a:lnTo>
+                    <a:pt x="3850042" y="2947619"/>
+                  </a:lnTo>
+                  <a:lnTo>
+                    <a:pt x="3927676" y="2970620"/>
+                  </a:lnTo>
+                  <a:lnTo>
+                    <a:pt x="4005310" y="2992870"/>
+                  </a:lnTo>
+                  <a:lnTo>
+                    <a:pt x="4082944" y="3014394"/>
+                  </a:lnTo>
+                  <a:lnTo>
+                    <a:pt x="4160578" y="3035216"/>
+                  </a:lnTo>
+                  <a:lnTo>
+                    <a:pt x="4238212" y="3055358"/>
+                  </a:lnTo>
+                  <a:lnTo>
+                    <a:pt x="4315846" y="3074844"/>
+                  </a:lnTo>
+                  <a:lnTo>
+                    <a:pt x="4393481" y="3093693"/>
+                  </a:lnTo>
+                  <a:lnTo>
+                    <a:pt x="4471115" y="3111928"/>
+                  </a:lnTo>
+                  <a:lnTo>
+                    <a:pt x="4548749" y="3129568"/>
+                  </a:lnTo>
+                  <a:lnTo>
+                    <a:pt x="4626383" y="3146633"/>
+                  </a:lnTo>
+                  <a:lnTo>
+                    <a:pt x="4704017" y="3163140"/>
+                  </a:lnTo>
+                  <a:lnTo>
+                    <a:pt x="4781651" y="3179110"/>
+                  </a:lnTo>
+                  <a:lnTo>
+                    <a:pt x="4859285" y="3194558"/>
+                  </a:lnTo>
+                  <a:lnTo>
+                    <a:pt x="4936919" y="3209502"/>
+                  </a:lnTo>
+                  <a:lnTo>
+                    <a:pt x="5014553" y="3223959"/>
+                  </a:lnTo>
+                  <a:lnTo>
+                    <a:pt x="5092187" y="3237944"/>
+                  </a:lnTo>
+                  <a:lnTo>
+                    <a:pt x="5169821" y="3251473"/>
+                  </a:lnTo>
+                  <a:lnTo>
+                    <a:pt x="5247455" y="3264560"/>
+                  </a:lnTo>
+                  <a:lnTo>
+                    <a:pt x="5325089" y="3277221"/>
+                  </a:lnTo>
+                  <a:lnTo>
+                    <a:pt x="5402723" y="3289468"/>
+                  </a:lnTo>
+                  <a:lnTo>
+                    <a:pt x="5480357" y="3301316"/>
+                  </a:lnTo>
+                  <a:lnTo>
+                    <a:pt x="5557991" y="3312778"/>
+                  </a:lnTo>
+                  <a:lnTo>
+                    <a:pt x="5635625" y="3323865"/>
+                  </a:lnTo>
+                  <a:lnTo>
+                    <a:pt x="5713259" y="3334591"/>
+                  </a:lnTo>
+                  <a:lnTo>
+                    <a:pt x="5790893" y="3344967"/>
+                  </a:lnTo>
+                  <a:lnTo>
+                    <a:pt x="5868527" y="3355005"/>
+                  </a:lnTo>
+                  <a:lnTo>
+                    <a:pt x="5946161" y="3364715"/>
+                  </a:lnTo>
+                  <a:lnTo>
+                    <a:pt x="6023795" y="3374108"/>
+                  </a:lnTo>
+                  <a:lnTo>
+                    <a:pt x="6101430" y="3383195"/>
+                  </a:lnTo>
+                  <a:lnTo>
+                    <a:pt x="6179064" y="3391985"/>
+                  </a:lnTo>
+                  <a:lnTo>
+                    <a:pt x="6256698" y="3400488"/>
+                  </a:lnTo>
+                  <a:lnTo>
+                    <a:pt x="6334332" y="3408715"/>
+                  </a:lnTo>
+                  <a:lnTo>
+                    <a:pt x="6411966" y="3416672"/>
+                  </a:lnTo>
+                  <a:lnTo>
+                    <a:pt x="6489600" y="3424371"/>
+                  </a:lnTo>
+                  <a:lnTo>
+                    <a:pt x="6567234" y="3431818"/>
+                  </a:lnTo>
+                  <a:lnTo>
+                    <a:pt x="6644868" y="3439022"/>
+                  </a:lnTo>
+                  <a:lnTo>
+                    <a:pt x="6722502" y="3445991"/>
+                  </a:lnTo>
+                  <a:lnTo>
+                    <a:pt x="6800136" y="3452732"/>
+                  </a:lnTo>
+                  <a:lnTo>
+                    <a:pt x="6877770" y="3459254"/>
+                  </a:lnTo>
+                  <a:lnTo>
+                    <a:pt x="6955404" y="3465563"/>
+                  </a:lnTo>
+                  <a:lnTo>
+                    <a:pt x="7033038" y="3471666"/>
+                  </a:lnTo>
+                  <a:lnTo>
+                    <a:pt x="7110672" y="3477570"/>
+                  </a:lnTo>
+                  <a:lnTo>
+                    <a:pt x="7188306" y="3483282"/>
+                  </a:lnTo>
+                  <a:lnTo>
+                    <a:pt x="7265940" y="3488807"/>
+                  </a:lnTo>
+                  <a:lnTo>
+                    <a:pt x="7343574" y="3494152"/>
                   </a:lnTo>
                 </a:path>
               </a:pathLst>

--- a/docs/plots/carbo/jx_carbo_linsubhr_ratio_hosp7.pptx
+++ b/docs/plots/carbo/jx_carbo_linsubhr_ratio_hosp7.pptx
@@ -3003,533 +3003,530 @@
           <p:spPr>
             <a:xfrm>
               <a:off x="817517" y="1896563"/>
-              <a:ext cx="7370972" cy="3607722"/>
+              <a:ext cx="7370972" cy="3609015"/>
             </a:xfrm>
             <a:custGeom>
               <a:avLst/>
               <a:pathLst>
-                <a:path w="7370972" h="3607722">
+                <a:path w="7370972" h="3609015">
                   <a:moveTo>
-                    <a:pt x="1456644" y="0"/>
+                    <a:pt x="1475269" y="0"/>
                   </a:moveTo>
                   <a:lnTo>
-                    <a:pt x="1470785" y="39117"/>
-                  </a:lnTo>
-                  <a:lnTo>
-                    <a:pt x="1548419" y="241821"/>
-                  </a:lnTo>
-                  <a:lnTo>
-                    <a:pt x="1626053" y="433153"/>
-                  </a:lnTo>
-                  <a:lnTo>
-                    <a:pt x="1703687" y="613753"/>
-                  </a:lnTo>
-                  <a:lnTo>
-                    <a:pt x="1781321" y="784222"/>
-                  </a:lnTo>
-                  <a:lnTo>
-                    <a:pt x="1858955" y="945129"/>
-                  </a:lnTo>
-                  <a:lnTo>
-                    <a:pt x="1936589" y="1097009"/>
-                  </a:lnTo>
-                  <a:lnTo>
-                    <a:pt x="2014223" y="1240370"/>
-                  </a:lnTo>
-                  <a:lnTo>
-                    <a:pt x="2091857" y="1375688"/>
-                  </a:lnTo>
-                  <a:lnTo>
-                    <a:pt x="2169491" y="1503416"/>
-                  </a:lnTo>
-                  <a:lnTo>
-                    <a:pt x="2247125" y="1623979"/>
-                  </a:lnTo>
-                  <a:lnTo>
-                    <a:pt x="2324759" y="1737778"/>
-                  </a:lnTo>
-                  <a:lnTo>
-                    <a:pt x="2402393" y="1845194"/>
-                  </a:lnTo>
-                  <a:lnTo>
-                    <a:pt x="2480027" y="1946584"/>
-                  </a:lnTo>
-                  <a:lnTo>
-                    <a:pt x="2557661" y="2042287"/>
-                  </a:lnTo>
-                  <a:lnTo>
-                    <a:pt x="2635295" y="2132622"/>
-                  </a:lnTo>
-                  <a:lnTo>
-                    <a:pt x="2712930" y="2217888"/>
-                  </a:lnTo>
-                  <a:lnTo>
-                    <a:pt x="2790564" y="2298372"/>
-                  </a:lnTo>
-                  <a:lnTo>
-                    <a:pt x="2868198" y="2374341"/>
-                  </a:lnTo>
-                  <a:lnTo>
-                    <a:pt x="2945832" y="2446049"/>
-                  </a:lnTo>
-                  <a:lnTo>
-                    <a:pt x="3023466" y="2513734"/>
-                  </a:lnTo>
-                  <a:lnTo>
-                    <a:pt x="3101100" y="2577622"/>
-                  </a:lnTo>
-                  <a:lnTo>
-                    <a:pt x="3178734" y="2637926"/>
-                  </a:lnTo>
-                  <a:lnTo>
-                    <a:pt x="3256368" y="2694847"/>
-                  </a:lnTo>
-                  <a:lnTo>
-                    <a:pt x="3334002" y="2748576"/>
-                  </a:lnTo>
-                  <a:lnTo>
-                    <a:pt x="3411636" y="2785419"/>
-                  </a:lnTo>
-                  <a:lnTo>
-                    <a:pt x="3489270" y="2792848"/>
-                  </a:lnTo>
-                  <a:lnTo>
-                    <a:pt x="3566904" y="2800214"/>
-                  </a:lnTo>
-                  <a:lnTo>
-                    <a:pt x="3644538" y="2807517"/>
-                  </a:lnTo>
-                  <a:lnTo>
-                    <a:pt x="3722172" y="2814758"/>
-                  </a:lnTo>
-                  <a:lnTo>
-                    <a:pt x="3799806" y="2821936"/>
-                  </a:lnTo>
-                  <a:lnTo>
-                    <a:pt x="3877440" y="2829053"/>
-                  </a:lnTo>
-                  <a:lnTo>
-                    <a:pt x="3955074" y="2836109"/>
-                  </a:lnTo>
-                  <a:lnTo>
-                    <a:pt x="4032708" y="2843104"/>
-                  </a:lnTo>
-                  <a:lnTo>
-                    <a:pt x="4110342" y="2850040"/>
-                  </a:lnTo>
-                  <a:lnTo>
-                    <a:pt x="4187976" y="2856916"/>
-                  </a:lnTo>
-                  <a:lnTo>
-                    <a:pt x="4265610" y="2863733"/>
-                  </a:lnTo>
-                  <a:lnTo>
-                    <a:pt x="4343244" y="2870492"/>
-                  </a:lnTo>
-                  <a:lnTo>
-                    <a:pt x="4420879" y="2877192"/>
-                  </a:lnTo>
-                  <a:lnTo>
-                    <a:pt x="4498513" y="2883836"/>
-                  </a:lnTo>
-                  <a:lnTo>
-                    <a:pt x="4576147" y="2890422"/>
-                  </a:lnTo>
-                  <a:lnTo>
-                    <a:pt x="4653781" y="2896952"/>
-                  </a:lnTo>
-                  <a:lnTo>
-                    <a:pt x="4731415" y="2903427"/>
-                  </a:lnTo>
-                  <a:lnTo>
-                    <a:pt x="4809049" y="2909845"/>
-                  </a:lnTo>
-                  <a:lnTo>
-                    <a:pt x="4886683" y="2916209"/>
-                  </a:lnTo>
-                  <a:lnTo>
-                    <a:pt x="4964317" y="2922518"/>
-                  </a:lnTo>
-                  <a:lnTo>
-                    <a:pt x="5041951" y="2928773"/>
-                  </a:lnTo>
-                  <a:lnTo>
-                    <a:pt x="5119585" y="2934975"/>
-                  </a:lnTo>
-                  <a:lnTo>
-                    <a:pt x="5197219" y="2941123"/>
-                  </a:lnTo>
-                  <a:lnTo>
-                    <a:pt x="5274853" y="2947219"/>
-                  </a:lnTo>
-                  <a:lnTo>
-                    <a:pt x="5352487" y="2953262"/>
-                  </a:lnTo>
-                  <a:lnTo>
-                    <a:pt x="5430121" y="2959254"/>
-                  </a:lnTo>
-                  <a:lnTo>
-                    <a:pt x="5507755" y="2965194"/>
-                  </a:lnTo>
-                  <a:lnTo>
-                    <a:pt x="5585389" y="2971084"/>
-                  </a:lnTo>
-                  <a:lnTo>
-                    <a:pt x="5663023" y="2976923"/>
-                  </a:lnTo>
-                  <a:lnTo>
-                    <a:pt x="5740657" y="2982712"/>
-                  </a:lnTo>
-                  <a:lnTo>
-                    <a:pt x="5818291" y="2988451"/>
-                  </a:lnTo>
-                  <a:lnTo>
-                    <a:pt x="5895925" y="2994142"/>
-                  </a:lnTo>
-                  <a:lnTo>
-                    <a:pt x="5973559" y="2999783"/>
-                  </a:lnTo>
-                  <a:lnTo>
-                    <a:pt x="6051193" y="3005376"/>
-                  </a:lnTo>
-                  <a:lnTo>
-                    <a:pt x="6128827" y="3010922"/>
-                  </a:lnTo>
-                  <a:lnTo>
-                    <a:pt x="6206462" y="3016419"/>
-                  </a:lnTo>
-                  <a:lnTo>
-                    <a:pt x="6284096" y="3021870"/>
-                  </a:lnTo>
-                  <a:lnTo>
-                    <a:pt x="6361730" y="3027274"/>
-                  </a:lnTo>
-                  <a:lnTo>
-                    <a:pt x="6439364" y="3032632"/>
-                  </a:lnTo>
-                  <a:lnTo>
-                    <a:pt x="6516998" y="3037943"/>
-                  </a:lnTo>
-                  <a:lnTo>
-                    <a:pt x="6594632" y="3043210"/>
-                  </a:lnTo>
-                  <a:lnTo>
-                    <a:pt x="6672266" y="3048431"/>
-                  </a:lnTo>
-                  <a:lnTo>
-                    <a:pt x="6749900" y="3053607"/>
-                  </a:lnTo>
-                  <a:lnTo>
-                    <a:pt x="6827534" y="3058739"/>
-                  </a:lnTo>
-                  <a:lnTo>
-                    <a:pt x="6905168" y="3063827"/>
-                  </a:lnTo>
-                  <a:lnTo>
-                    <a:pt x="6982802" y="3068872"/>
-                  </a:lnTo>
-                  <a:lnTo>
-                    <a:pt x="7060436" y="3073873"/>
-                  </a:lnTo>
-                  <a:lnTo>
-                    <a:pt x="7138070" y="3078831"/>
-                  </a:lnTo>
-                  <a:lnTo>
-                    <a:pt x="7215704" y="3083747"/>
-                  </a:lnTo>
-                  <a:lnTo>
-                    <a:pt x="7293338" y="3088621"/>
-                  </a:lnTo>
-                  <a:lnTo>
-                    <a:pt x="7370972" y="3093453"/>
-                  </a:lnTo>
-                  <a:lnTo>
-                    <a:pt x="7370972" y="3607722"/>
-                  </a:lnTo>
-                  <a:lnTo>
-                    <a:pt x="7293338" y="3605052"/>
-                  </a:lnTo>
-                  <a:lnTo>
-                    <a:pt x="7215704" y="3602224"/>
-                  </a:lnTo>
-                  <a:lnTo>
-                    <a:pt x="7138070" y="3599228"/>
-                  </a:lnTo>
-                  <a:lnTo>
-                    <a:pt x="7060436" y="3596053"/>
-                  </a:lnTo>
-                  <a:lnTo>
-                    <a:pt x="6982802" y="3592690"/>
-                  </a:lnTo>
-                  <a:lnTo>
-                    <a:pt x="6905168" y="3589127"/>
-                  </a:lnTo>
-                  <a:lnTo>
-                    <a:pt x="6827534" y="3585352"/>
-                  </a:lnTo>
-                  <a:lnTo>
-                    <a:pt x="6749900" y="3581353"/>
-                  </a:lnTo>
-                  <a:lnTo>
-                    <a:pt x="6672266" y="3577117"/>
-                  </a:lnTo>
-                  <a:lnTo>
-                    <a:pt x="6594632" y="3572628"/>
-                  </a:lnTo>
-                  <a:lnTo>
-                    <a:pt x="6516998" y="3567873"/>
-                  </a:lnTo>
-                  <a:lnTo>
-                    <a:pt x="6439364" y="3562835"/>
-                  </a:lnTo>
-                  <a:lnTo>
-                    <a:pt x="6361730" y="3557498"/>
-                  </a:lnTo>
-                  <a:lnTo>
-                    <a:pt x="6284096" y="3551843"/>
-                  </a:lnTo>
-                  <a:lnTo>
-                    <a:pt x="6206462" y="3545853"/>
-                  </a:lnTo>
-                  <a:lnTo>
-                    <a:pt x="6128827" y="3539506"/>
-                  </a:lnTo>
-                  <a:lnTo>
-                    <a:pt x="6051193" y="3532782"/>
-                  </a:lnTo>
-                  <a:lnTo>
-                    <a:pt x="5973559" y="3525659"/>
-                  </a:lnTo>
-                  <a:lnTo>
-                    <a:pt x="5895925" y="3518112"/>
-                  </a:lnTo>
-                  <a:lnTo>
-                    <a:pt x="5818291" y="3510117"/>
-                  </a:lnTo>
-                  <a:lnTo>
-                    <a:pt x="5740657" y="3501647"/>
-                  </a:lnTo>
-                  <a:lnTo>
-                    <a:pt x="5663023" y="3492673"/>
-                  </a:lnTo>
-                  <a:lnTo>
-                    <a:pt x="5585389" y="3483167"/>
-                  </a:lnTo>
-                  <a:lnTo>
-                    <a:pt x="5507755" y="3473095"/>
-                  </a:lnTo>
-                  <a:lnTo>
-                    <a:pt x="5430121" y="3462424"/>
-                  </a:lnTo>
-                  <a:lnTo>
-                    <a:pt x="5352487" y="3451119"/>
-                  </a:lnTo>
-                  <a:lnTo>
-                    <a:pt x="5274853" y="3439143"/>
-                  </a:lnTo>
-                  <a:lnTo>
-                    <a:pt x="5197219" y="3426455"/>
-                  </a:lnTo>
-                  <a:lnTo>
-                    <a:pt x="5119585" y="3413012"/>
-                  </a:lnTo>
-                  <a:lnTo>
-                    <a:pt x="5041951" y="3398771"/>
-                  </a:lnTo>
-                  <a:lnTo>
-                    <a:pt x="4964317" y="3383684"/>
-                  </a:lnTo>
-                  <a:lnTo>
-                    <a:pt x="4886683" y="3367700"/>
-                  </a:lnTo>
-                  <a:lnTo>
-                    <a:pt x="4809049" y="3350766"/>
-                  </a:lnTo>
-                  <a:lnTo>
-                    <a:pt x="4731415" y="3332825"/>
-                  </a:lnTo>
-                  <a:lnTo>
-                    <a:pt x="4653781" y="3313818"/>
-                  </a:lnTo>
-                  <a:lnTo>
-                    <a:pt x="4576147" y="3293682"/>
-                  </a:lnTo>
-                  <a:lnTo>
-                    <a:pt x="4498513" y="3272349"/>
-                  </a:lnTo>
-                  <a:lnTo>
-                    <a:pt x="4420879" y="3249749"/>
-                  </a:lnTo>
-                  <a:lnTo>
-                    <a:pt x="4343244" y="3225805"/>
-                  </a:lnTo>
-                  <a:lnTo>
-                    <a:pt x="4265610" y="3200438"/>
-                  </a:lnTo>
-                  <a:lnTo>
-                    <a:pt x="4187976" y="3173563"/>
-                  </a:lnTo>
-                  <a:lnTo>
-                    <a:pt x="4110342" y="3145092"/>
-                  </a:lnTo>
-                  <a:lnTo>
-                    <a:pt x="4032708" y="3114928"/>
-                  </a:lnTo>
-                  <a:lnTo>
-                    <a:pt x="3955074" y="3082972"/>
-                  </a:lnTo>
-                  <a:lnTo>
-                    <a:pt x="3877440" y="3049117"/>
-                  </a:lnTo>
-                  <a:lnTo>
-                    <a:pt x="3799806" y="3013250"/>
-                  </a:lnTo>
-                  <a:lnTo>
-                    <a:pt x="3722172" y="2975251"/>
-                  </a:lnTo>
-                  <a:lnTo>
-                    <a:pt x="3644538" y="2934994"/>
-                  </a:lnTo>
-                  <a:lnTo>
-                    <a:pt x="3566904" y="2892344"/>
-                  </a:lnTo>
-                  <a:lnTo>
-                    <a:pt x="3489270" y="2847160"/>
-                  </a:lnTo>
-                  <a:lnTo>
-                    <a:pt x="3411636" y="2799290"/>
-                  </a:lnTo>
-                  <a:lnTo>
-                    <a:pt x="3334002" y="2777925"/>
-                  </a:lnTo>
-                  <a:lnTo>
-                    <a:pt x="3256368" y="2770366"/>
-                  </a:lnTo>
-                  <a:lnTo>
-                    <a:pt x="3178734" y="2762742"/>
-                  </a:lnTo>
-                  <a:lnTo>
-                    <a:pt x="3101100" y="2755052"/>
-                  </a:lnTo>
-                  <a:lnTo>
-                    <a:pt x="3023466" y="2747296"/>
-                  </a:lnTo>
-                  <a:lnTo>
-                    <a:pt x="2945832" y="2739473"/>
-                  </a:lnTo>
-                  <a:lnTo>
-                    <a:pt x="2868198" y="2731582"/>
-                  </a:lnTo>
-                  <a:lnTo>
-                    <a:pt x="2790564" y="2723623"/>
-                  </a:lnTo>
-                  <a:lnTo>
-                    <a:pt x="2712930" y="2715595"/>
-                  </a:lnTo>
-                  <a:lnTo>
-                    <a:pt x="2635295" y="2707498"/>
-                  </a:lnTo>
-                  <a:lnTo>
-                    <a:pt x="2557661" y="2699331"/>
-                  </a:lnTo>
-                  <a:lnTo>
-                    <a:pt x="2480027" y="2691093"/>
-                  </a:lnTo>
-                  <a:lnTo>
-                    <a:pt x="2402393" y="2682784"/>
-                  </a:lnTo>
-                  <a:lnTo>
-                    <a:pt x="2324759" y="2674403"/>
-                  </a:lnTo>
-                  <a:lnTo>
-                    <a:pt x="2247125" y="2665950"/>
-                  </a:lnTo>
-                  <a:lnTo>
-                    <a:pt x="2169491" y="2657424"/>
-                  </a:lnTo>
-                  <a:lnTo>
-                    <a:pt x="2091857" y="2648824"/>
-                  </a:lnTo>
-                  <a:lnTo>
-                    <a:pt x="2014223" y="2640150"/>
-                  </a:lnTo>
-                  <a:lnTo>
-                    <a:pt x="1936589" y="2631400"/>
-                  </a:lnTo>
-                  <a:lnTo>
-                    <a:pt x="1858955" y="2622576"/>
-                  </a:lnTo>
-                  <a:lnTo>
-                    <a:pt x="1781321" y="2613675"/>
-                  </a:lnTo>
-                  <a:lnTo>
-                    <a:pt x="1703687" y="2604697"/>
-                  </a:lnTo>
-                  <a:lnTo>
-                    <a:pt x="1626053" y="2595641"/>
-                  </a:lnTo>
-                  <a:lnTo>
-                    <a:pt x="1548419" y="2586507"/>
-                  </a:lnTo>
-                  <a:lnTo>
-                    <a:pt x="1470785" y="2577295"/>
-                  </a:lnTo>
-                  <a:lnTo>
-                    <a:pt x="1393151" y="2568002"/>
-                  </a:lnTo>
-                  <a:lnTo>
-                    <a:pt x="1315517" y="2558630"/>
-                  </a:lnTo>
-                  <a:lnTo>
-                    <a:pt x="1237883" y="2549176"/>
-                  </a:lnTo>
-                  <a:lnTo>
-                    <a:pt x="1160249" y="2539641"/>
-                  </a:lnTo>
-                  <a:lnTo>
-                    <a:pt x="1082615" y="2530023"/>
-                  </a:lnTo>
-                  <a:lnTo>
-                    <a:pt x="1004981" y="2520322"/>
-                  </a:lnTo>
-                  <a:lnTo>
-                    <a:pt x="927346" y="2510538"/>
-                  </a:lnTo>
-                  <a:lnTo>
-                    <a:pt x="849712" y="2500668"/>
-                  </a:lnTo>
-                  <a:lnTo>
-                    <a:pt x="772078" y="2490714"/>
-                  </a:lnTo>
-                  <a:lnTo>
-                    <a:pt x="694444" y="2480674"/>
-                  </a:lnTo>
-                  <a:lnTo>
-                    <a:pt x="616810" y="2470546"/>
-                  </a:lnTo>
-                  <a:lnTo>
-                    <a:pt x="539176" y="2460332"/>
-                  </a:lnTo>
-                  <a:lnTo>
-                    <a:pt x="461542" y="2450029"/>
-                  </a:lnTo>
-                  <a:lnTo>
-                    <a:pt x="383908" y="2439636"/>
-                  </a:lnTo>
-                  <a:lnTo>
-                    <a:pt x="306274" y="2429155"/>
-                  </a:lnTo>
-                  <a:lnTo>
-                    <a:pt x="228640" y="2418582"/>
-                  </a:lnTo>
-                  <a:lnTo>
-                    <a:pt x="151006" y="2407918"/>
-                  </a:lnTo>
-                  <a:lnTo>
-                    <a:pt x="73372" y="2397162"/>
-                  </a:lnTo>
-                  <a:lnTo>
-                    <a:pt x="0" y="2386909"/>
+                    <a:pt x="1548419" y="195552"/>
+                  </a:lnTo>
+                  <a:lnTo>
+                    <a:pt x="1626053" y="391337"/>
+                  </a:lnTo>
+                  <a:lnTo>
+                    <a:pt x="1703687" y="576035"/>
+                  </a:lnTo>
+                  <a:lnTo>
+                    <a:pt x="1781321" y="750272"/>
+                  </a:lnTo>
+                  <a:lnTo>
+                    <a:pt x="1858955" y="914642"/>
+                  </a:lnTo>
+                  <a:lnTo>
+                    <a:pt x="1936589" y="1069703"/>
+                  </a:lnTo>
+                  <a:lnTo>
+                    <a:pt x="2014223" y="1215983"/>
+                  </a:lnTo>
+                  <a:lnTo>
+                    <a:pt x="2091857" y="1353978"/>
+                  </a:lnTo>
+                  <a:lnTo>
+                    <a:pt x="2169491" y="1484158"/>
+                  </a:lnTo>
+                  <a:lnTo>
+                    <a:pt x="2247125" y="1606966"/>
+                  </a:lnTo>
+                  <a:lnTo>
+                    <a:pt x="2324759" y="1722819"/>
+                  </a:lnTo>
+                  <a:lnTo>
+                    <a:pt x="2402393" y="1832110"/>
+                  </a:lnTo>
+                  <a:lnTo>
+                    <a:pt x="2480027" y="1935212"/>
+                  </a:lnTo>
+                  <a:lnTo>
+                    <a:pt x="2557661" y="2032476"/>
+                  </a:lnTo>
+                  <a:lnTo>
+                    <a:pt x="2635295" y="2124230"/>
+                  </a:lnTo>
+                  <a:lnTo>
+                    <a:pt x="2712930" y="2210789"/>
+                  </a:lnTo>
+                  <a:lnTo>
+                    <a:pt x="2790564" y="2292445"/>
+                  </a:lnTo>
+                  <a:lnTo>
+                    <a:pt x="2868198" y="2369477"/>
+                  </a:lnTo>
+                  <a:lnTo>
+                    <a:pt x="2945832" y="2442147"/>
+                  </a:lnTo>
+                  <a:lnTo>
+                    <a:pt x="3023466" y="2510701"/>
+                  </a:lnTo>
+                  <a:lnTo>
+                    <a:pt x="3101100" y="2575372"/>
+                  </a:lnTo>
+                  <a:lnTo>
+                    <a:pt x="3178734" y="2636381"/>
+                  </a:lnTo>
+                  <a:lnTo>
+                    <a:pt x="3256368" y="2693935"/>
+                  </a:lnTo>
+                  <a:lnTo>
+                    <a:pt x="3334002" y="2748230"/>
+                  </a:lnTo>
+                  <a:lnTo>
+                    <a:pt x="3411636" y="2785445"/>
+                  </a:lnTo>
+                  <a:lnTo>
+                    <a:pt x="3489270" y="2792952"/>
+                  </a:lnTo>
+                  <a:lnTo>
+                    <a:pt x="3566904" y="2800395"/>
+                  </a:lnTo>
+                  <a:lnTo>
+                    <a:pt x="3644538" y="2807773"/>
+                  </a:lnTo>
+                  <a:lnTo>
+                    <a:pt x="3722172" y="2815088"/>
+                  </a:lnTo>
+                  <a:lnTo>
+                    <a:pt x="3799806" y="2822339"/>
+                  </a:lnTo>
+                  <a:lnTo>
+                    <a:pt x="3877440" y="2829527"/>
+                  </a:lnTo>
+                  <a:lnTo>
+                    <a:pt x="3955074" y="2836653"/>
+                  </a:lnTo>
+                  <a:lnTo>
+                    <a:pt x="4032708" y="2843718"/>
+                  </a:lnTo>
+                  <a:lnTo>
+                    <a:pt x="4110342" y="2850721"/>
+                  </a:lnTo>
+                  <a:lnTo>
+                    <a:pt x="4187976" y="2857663"/>
+                  </a:lnTo>
+                  <a:lnTo>
+                    <a:pt x="4265610" y="2864546"/>
+                  </a:lnTo>
+                  <a:lnTo>
+                    <a:pt x="4343244" y="2871369"/>
+                  </a:lnTo>
+                  <a:lnTo>
+                    <a:pt x="4420879" y="2878133"/>
+                  </a:lnTo>
+                  <a:lnTo>
+                    <a:pt x="4498513" y="2884838"/>
+                  </a:lnTo>
+                  <a:lnTo>
+                    <a:pt x="4576147" y="2891485"/>
+                  </a:lnTo>
+                  <a:lnTo>
+                    <a:pt x="4653781" y="2898075"/>
+                  </a:lnTo>
+                  <a:lnTo>
+                    <a:pt x="4731415" y="2904607"/>
+                  </a:lnTo>
+                  <a:lnTo>
+                    <a:pt x="4809049" y="2911083"/>
+                  </a:lnTo>
+                  <a:lnTo>
+                    <a:pt x="4886683" y="2917503"/>
+                  </a:lnTo>
+                  <a:lnTo>
+                    <a:pt x="4964317" y="2923868"/>
+                  </a:lnTo>
+                  <a:lnTo>
+                    <a:pt x="5041951" y="2930177"/>
+                  </a:lnTo>
+                  <a:lnTo>
+                    <a:pt x="5119585" y="2936432"/>
+                  </a:lnTo>
+                  <a:lnTo>
+                    <a:pt x="5197219" y="2942632"/>
+                  </a:lnTo>
+                  <a:lnTo>
+                    <a:pt x="5274853" y="2948779"/>
+                  </a:lnTo>
+                  <a:lnTo>
+                    <a:pt x="5352487" y="2954873"/>
+                  </a:lnTo>
+                  <a:lnTo>
+                    <a:pt x="5430121" y="2960914"/>
+                  </a:lnTo>
+                  <a:lnTo>
+                    <a:pt x="5507755" y="2966903"/>
+                  </a:lnTo>
+                  <a:lnTo>
+                    <a:pt x="5585389" y="2972839"/>
+                  </a:lnTo>
+                  <a:lnTo>
+                    <a:pt x="5663023" y="2978725"/>
+                  </a:lnTo>
+                  <a:lnTo>
+                    <a:pt x="5740657" y="2984559"/>
+                  </a:lnTo>
+                  <a:lnTo>
+                    <a:pt x="5818291" y="2990343"/>
+                  </a:lnTo>
+                  <a:lnTo>
+                    <a:pt x="5895925" y="2996077"/>
+                  </a:lnTo>
+                  <a:lnTo>
+                    <a:pt x="5973559" y="3001761"/>
+                  </a:lnTo>
+                  <a:lnTo>
+                    <a:pt x="6051193" y="3007396"/>
+                  </a:lnTo>
+                  <a:lnTo>
+                    <a:pt x="6128827" y="3012982"/>
+                  </a:lnTo>
+                  <a:lnTo>
+                    <a:pt x="6206462" y="3018520"/>
+                  </a:lnTo>
+                  <a:lnTo>
+                    <a:pt x="6284096" y="3024010"/>
+                  </a:lnTo>
+                  <a:lnTo>
+                    <a:pt x="6361730" y="3029452"/>
+                  </a:lnTo>
+                  <a:lnTo>
+                    <a:pt x="6439364" y="3034847"/>
+                  </a:lnTo>
+                  <a:lnTo>
+                    <a:pt x="6516998" y="3040196"/>
+                  </a:lnTo>
+                  <a:lnTo>
+                    <a:pt x="6594632" y="3045498"/>
+                  </a:lnTo>
+                  <a:lnTo>
+                    <a:pt x="6672266" y="3050754"/>
+                  </a:lnTo>
+                  <a:lnTo>
+                    <a:pt x="6749900" y="3055965"/>
+                  </a:lnTo>
+                  <a:lnTo>
+                    <a:pt x="6827534" y="3061131"/>
+                  </a:lnTo>
+                  <a:lnTo>
+                    <a:pt x="6905168" y="3066252"/>
+                  </a:lnTo>
+                  <a:lnTo>
+                    <a:pt x="6982802" y="3071329"/>
+                  </a:lnTo>
+                  <a:lnTo>
+                    <a:pt x="7060436" y="3076361"/>
+                  </a:lnTo>
+                  <a:lnTo>
+                    <a:pt x="7138070" y="3081350"/>
+                  </a:lnTo>
+                  <a:lnTo>
+                    <a:pt x="7215704" y="3086296"/>
+                  </a:lnTo>
+                  <a:lnTo>
+                    <a:pt x="7293338" y="3091199"/>
+                  </a:lnTo>
+                  <a:lnTo>
+                    <a:pt x="7370972" y="3096060"/>
+                  </a:lnTo>
+                  <a:lnTo>
+                    <a:pt x="7370972" y="3609015"/>
+                  </a:lnTo>
+                  <a:lnTo>
+                    <a:pt x="7293338" y="3606396"/>
+                  </a:lnTo>
+                  <a:lnTo>
+                    <a:pt x="7215704" y="3603620"/>
+                  </a:lnTo>
+                  <a:lnTo>
+                    <a:pt x="7138070" y="3600677"/>
+                  </a:lnTo>
+                  <a:lnTo>
+                    <a:pt x="7060436" y="3597557"/>
+                  </a:lnTo>
+                  <a:lnTo>
+                    <a:pt x="6982802" y="3594250"/>
+                  </a:lnTo>
+                  <a:lnTo>
+                    <a:pt x="6905168" y="3590745"/>
+                  </a:lnTo>
+                  <a:lnTo>
+                    <a:pt x="6827534" y="3587029"/>
+                  </a:lnTo>
+                  <a:lnTo>
+                    <a:pt x="6749900" y="3583090"/>
+                  </a:lnTo>
+                  <a:lnTo>
+                    <a:pt x="6672266" y="3578914"/>
+                  </a:lnTo>
+                  <a:lnTo>
+                    <a:pt x="6594632" y="3574488"/>
+                  </a:lnTo>
+                  <a:lnTo>
+                    <a:pt x="6516998" y="3569796"/>
+                  </a:lnTo>
+                  <a:lnTo>
+                    <a:pt x="6439364" y="3564823"/>
+                  </a:lnTo>
+                  <a:lnTo>
+                    <a:pt x="6361730" y="3559551"/>
+                  </a:lnTo>
+                  <a:lnTo>
+                    <a:pt x="6284096" y="3553962"/>
+                  </a:lnTo>
+                  <a:lnTo>
+                    <a:pt x="6206462" y="3548038"/>
+                  </a:lnTo>
+                  <a:lnTo>
+                    <a:pt x="6128827" y="3541758"/>
+                  </a:lnTo>
+                  <a:lnTo>
+                    <a:pt x="6051193" y="3535102"/>
+                  </a:lnTo>
+                  <a:lnTo>
+                    <a:pt x="5973559" y="3528045"/>
+                  </a:lnTo>
+                  <a:lnTo>
+                    <a:pt x="5895925" y="3520565"/>
+                  </a:lnTo>
+                  <a:lnTo>
+                    <a:pt x="5818291" y="3512636"/>
+                  </a:lnTo>
+                  <a:lnTo>
+                    <a:pt x="5740657" y="3504231"/>
+                  </a:lnTo>
+                  <a:lnTo>
+                    <a:pt x="5663023" y="3495322"/>
+                  </a:lnTo>
+                  <a:lnTo>
+                    <a:pt x="5585389" y="3485877"/>
+                  </a:lnTo>
+                  <a:lnTo>
+                    <a:pt x="5507755" y="3475866"/>
+                  </a:lnTo>
+                  <a:lnTo>
+                    <a:pt x="5430121" y="3465253"/>
+                  </a:lnTo>
+                  <a:lnTo>
+                    <a:pt x="5352487" y="3454004"/>
+                  </a:lnTo>
+                  <a:lnTo>
+                    <a:pt x="5274853" y="3442079"/>
+                  </a:lnTo>
+                  <a:lnTo>
+                    <a:pt x="5197219" y="3429438"/>
+                  </a:lnTo>
+                  <a:lnTo>
+                    <a:pt x="5119585" y="3416039"/>
+                  </a:lnTo>
+                  <a:lnTo>
+                    <a:pt x="5041951" y="3401835"/>
+                  </a:lnTo>
+                  <a:lnTo>
+                    <a:pt x="4964317" y="3386778"/>
+                  </a:lnTo>
+                  <a:lnTo>
+                    <a:pt x="4886683" y="3370817"/>
+                  </a:lnTo>
+                  <a:lnTo>
+                    <a:pt x="4809049" y="3353899"/>
+                  </a:lnTo>
+                  <a:lnTo>
+                    <a:pt x="4731415" y="3335964"/>
+                  </a:lnTo>
+                  <a:lnTo>
+                    <a:pt x="4653781" y="3316953"/>
+                  </a:lnTo>
+                  <a:lnTo>
+                    <a:pt x="4576147" y="3296800"/>
+                  </a:lnTo>
+                  <a:lnTo>
+                    <a:pt x="4498513" y="3275438"/>
+                  </a:lnTo>
+                  <a:lnTo>
+                    <a:pt x="4420879" y="3252794"/>
+                  </a:lnTo>
+                  <a:lnTo>
+                    <a:pt x="4343244" y="3228789"/>
+                  </a:lnTo>
+                  <a:lnTo>
+                    <a:pt x="4265610" y="3203344"/>
+                  </a:lnTo>
+                  <a:lnTo>
+                    <a:pt x="4187976" y="3176372"/>
+                  </a:lnTo>
+                  <a:lnTo>
+                    <a:pt x="4110342" y="3147780"/>
+                  </a:lnTo>
+                  <a:lnTo>
+                    <a:pt x="4032708" y="3117471"/>
+                  </a:lnTo>
+                  <a:lnTo>
+                    <a:pt x="3955074" y="3085344"/>
+                  </a:lnTo>
+                  <a:lnTo>
+                    <a:pt x="3877440" y="3051287"/>
+                  </a:lnTo>
+                  <a:lnTo>
+                    <a:pt x="3799806" y="3015186"/>
+                  </a:lnTo>
+                  <a:lnTo>
+                    <a:pt x="3722172" y="2976917"/>
+                  </a:lnTo>
+                  <a:lnTo>
+                    <a:pt x="3644538" y="2936352"/>
+                  </a:lnTo>
+                  <a:lnTo>
+                    <a:pt x="3566904" y="2893351"/>
+                  </a:lnTo>
+                  <a:lnTo>
+                    <a:pt x="3489270" y="2847768"/>
+                  </a:lnTo>
+                  <a:lnTo>
+                    <a:pt x="3411636" y="2799449"/>
+                  </a:lnTo>
+                  <a:lnTo>
+                    <a:pt x="3334002" y="2777871"/>
+                  </a:lnTo>
+                  <a:lnTo>
+                    <a:pt x="3256368" y="2770232"/>
+                  </a:lnTo>
+                  <a:lnTo>
+                    <a:pt x="3178734" y="2762526"/>
+                  </a:lnTo>
+                  <a:lnTo>
+                    <a:pt x="3101100" y="2754752"/>
+                  </a:lnTo>
+                  <a:lnTo>
+                    <a:pt x="3023466" y="2746911"/>
+                  </a:lnTo>
+                  <a:lnTo>
+                    <a:pt x="2945832" y="2739001"/>
+                  </a:lnTo>
+                  <a:lnTo>
+                    <a:pt x="2868198" y="2731022"/>
+                  </a:lnTo>
+                  <a:lnTo>
+                    <a:pt x="2790564" y="2722974"/>
+                  </a:lnTo>
+                  <a:lnTo>
+                    <a:pt x="2712930" y="2714855"/>
+                  </a:lnTo>
+                  <a:lnTo>
+                    <a:pt x="2635295" y="2706665"/>
+                  </a:lnTo>
+                  <a:lnTo>
+                    <a:pt x="2557661" y="2698404"/>
+                  </a:lnTo>
+                  <a:lnTo>
+                    <a:pt x="2480027" y="2690071"/>
+                  </a:lnTo>
+                  <a:lnTo>
+                    <a:pt x="2402393" y="2681664"/>
+                  </a:lnTo>
+                  <a:lnTo>
+                    <a:pt x="2324759" y="2673185"/>
+                  </a:lnTo>
+                  <a:lnTo>
+                    <a:pt x="2247125" y="2664631"/>
+                  </a:lnTo>
+                  <a:lnTo>
+                    <a:pt x="2169491" y="2656003"/>
+                  </a:lnTo>
+                  <a:lnTo>
+                    <a:pt x="2091857" y="2647299"/>
+                  </a:lnTo>
+                  <a:lnTo>
+                    <a:pt x="2014223" y="2638519"/>
+                  </a:lnTo>
+                  <a:lnTo>
+                    <a:pt x="1936589" y="2629663"/>
+                  </a:lnTo>
+                  <a:lnTo>
+                    <a:pt x="1858955" y="2620729"/>
+                  </a:lnTo>
+                  <a:lnTo>
+                    <a:pt x="1781321" y="2611718"/>
+                  </a:lnTo>
+                  <a:lnTo>
+                    <a:pt x="1703687" y="2602627"/>
+                  </a:lnTo>
+                  <a:lnTo>
+                    <a:pt x="1626053" y="2593457"/>
+                  </a:lnTo>
+                  <a:lnTo>
+                    <a:pt x="1548419" y="2584207"/>
+                  </a:lnTo>
+                  <a:lnTo>
+                    <a:pt x="1470785" y="2574877"/>
+                  </a:lnTo>
+                  <a:lnTo>
+                    <a:pt x="1393151" y="2565465"/>
+                  </a:lnTo>
+                  <a:lnTo>
+                    <a:pt x="1315517" y="2555970"/>
+                  </a:lnTo>
+                  <a:lnTo>
+                    <a:pt x="1237883" y="2546393"/>
+                  </a:lnTo>
+                  <a:lnTo>
+                    <a:pt x="1160249" y="2536732"/>
+                  </a:lnTo>
+                  <a:lnTo>
+                    <a:pt x="1082615" y="2526987"/>
+                  </a:lnTo>
+                  <a:lnTo>
+                    <a:pt x="1004981" y="2517156"/>
+                  </a:lnTo>
+                  <a:lnTo>
+                    <a:pt x="927346" y="2507240"/>
+                  </a:lnTo>
+                  <a:lnTo>
+                    <a:pt x="849712" y="2497237"/>
+                  </a:lnTo>
+                  <a:lnTo>
+                    <a:pt x="772078" y="2487147"/>
+                  </a:lnTo>
+                  <a:lnTo>
+                    <a:pt x="694444" y="2476969"/>
+                  </a:lnTo>
+                  <a:lnTo>
+                    <a:pt x="616810" y="2466701"/>
+                  </a:lnTo>
+                  <a:lnTo>
+                    <a:pt x="539176" y="2456345"/>
+                  </a:lnTo>
+                  <a:lnTo>
+                    <a:pt x="461542" y="2445897"/>
+                  </a:lnTo>
+                  <a:lnTo>
+                    <a:pt x="383908" y="2435359"/>
+                  </a:lnTo>
+                  <a:lnTo>
+                    <a:pt x="306274" y="2424728"/>
+                  </a:lnTo>
+                  <a:lnTo>
+                    <a:pt x="228640" y="2414005"/>
+                  </a:lnTo>
+                  <a:lnTo>
+                    <a:pt x="151006" y="2403188"/>
+                  </a:lnTo>
+                  <a:lnTo>
+                    <a:pt x="73372" y="2392276"/>
+                  </a:lnTo>
+                  <a:lnTo>
+                    <a:pt x="0" y="2381873"/>
                   </a:lnTo>
                   <a:close/>
                 </a:path>
@@ -3555,246 +3552,243 @@
           </p:nvSpPr>
           <p:spPr>
             <a:xfrm>
-              <a:off x="2274161" y="1896563"/>
-              <a:ext cx="5914328" cy="3093453"/>
+              <a:off x="2292786" y="1896563"/>
+              <a:ext cx="5895703" cy="3096060"/>
             </a:xfrm>
             <a:custGeom>
               <a:avLst/>
               <a:pathLst>
-                <a:path w="5914328" h="3093453">
+                <a:path w="5895703" h="3096060">
                   <a:moveTo>
                     <a:pt x="0" y="0"/>
                   </a:moveTo>
                   <a:lnTo>
-                    <a:pt x="14141" y="39117"/>
-                  </a:lnTo>
-                  <a:lnTo>
-                    <a:pt x="91775" y="241821"/>
-                  </a:lnTo>
-                  <a:lnTo>
-                    <a:pt x="169409" y="433153"/>
-                  </a:lnTo>
-                  <a:lnTo>
-                    <a:pt x="247043" y="613753"/>
-                  </a:lnTo>
-                  <a:lnTo>
-                    <a:pt x="324677" y="784222"/>
-                  </a:lnTo>
-                  <a:lnTo>
-                    <a:pt x="402311" y="945129"/>
-                  </a:lnTo>
-                  <a:lnTo>
-                    <a:pt x="479945" y="1097009"/>
-                  </a:lnTo>
-                  <a:lnTo>
-                    <a:pt x="557579" y="1240370"/>
-                  </a:lnTo>
-                  <a:lnTo>
-                    <a:pt x="635213" y="1375688"/>
-                  </a:lnTo>
-                  <a:lnTo>
-                    <a:pt x="712847" y="1503416"/>
-                  </a:lnTo>
-                  <a:lnTo>
-                    <a:pt x="790481" y="1623979"/>
-                  </a:lnTo>
-                  <a:lnTo>
-                    <a:pt x="868115" y="1737778"/>
-                  </a:lnTo>
-                  <a:lnTo>
-                    <a:pt x="945749" y="1845194"/>
-                  </a:lnTo>
-                  <a:lnTo>
-                    <a:pt x="1023383" y="1946584"/>
-                  </a:lnTo>
-                  <a:lnTo>
-                    <a:pt x="1101017" y="2042287"/>
-                  </a:lnTo>
-                  <a:lnTo>
-                    <a:pt x="1178651" y="2132622"/>
-                  </a:lnTo>
-                  <a:lnTo>
-                    <a:pt x="1256285" y="2217888"/>
-                  </a:lnTo>
-                  <a:lnTo>
-                    <a:pt x="1333919" y="2298372"/>
-                  </a:lnTo>
-                  <a:lnTo>
-                    <a:pt x="1411554" y="2374341"/>
-                  </a:lnTo>
-                  <a:lnTo>
-                    <a:pt x="1489188" y="2446049"/>
-                  </a:lnTo>
-                  <a:lnTo>
-                    <a:pt x="1566822" y="2513734"/>
-                  </a:lnTo>
-                  <a:lnTo>
-                    <a:pt x="1644456" y="2577622"/>
-                  </a:lnTo>
-                  <a:lnTo>
-                    <a:pt x="1722090" y="2637926"/>
-                  </a:lnTo>
-                  <a:lnTo>
-                    <a:pt x="1799724" y="2694847"/>
-                  </a:lnTo>
-                  <a:lnTo>
-                    <a:pt x="1877358" y="2748576"/>
-                  </a:lnTo>
-                  <a:lnTo>
-                    <a:pt x="1954992" y="2785419"/>
-                  </a:lnTo>
-                  <a:lnTo>
-                    <a:pt x="2032626" y="2792848"/>
-                  </a:lnTo>
-                  <a:lnTo>
-                    <a:pt x="2110260" y="2800214"/>
-                  </a:lnTo>
-                  <a:lnTo>
-                    <a:pt x="2187894" y="2807517"/>
-                  </a:lnTo>
-                  <a:lnTo>
-                    <a:pt x="2265528" y="2814758"/>
-                  </a:lnTo>
-                  <a:lnTo>
-                    <a:pt x="2343162" y="2821936"/>
-                  </a:lnTo>
-                  <a:lnTo>
-                    <a:pt x="2420796" y="2829053"/>
-                  </a:lnTo>
-                  <a:lnTo>
-                    <a:pt x="2498430" y="2836109"/>
-                  </a:lnTo>
-                  <a:lnTo>
-                    <a:pt x="2576064" y="2843104"/>
-                  </a:lnTo>
-                  <a:lnTo>
-                    <a:pt x="2653698" y="2850040"/>
-                  </a:lnTo>
-                  <a:lnTo>
-                    <a:pt x="2731332" y="2856916"/>
-                  </a:lnTo>
-                  <a:lnTo>
-                    <a:pt x="2808966" y="2863733"/>
-                  </a:lnTo>
-                  <a:lnTo>
-                    <a:pt x="2886600" y="2870492"/>
-                  </a:lnTo>
-                  <a:lnTo>
-                    <a:pt x="2964234" y="2877192"/>
-                  </a:lnTo>
-                  <a:lnTo>
-                    <a:pt x="3041868" y="2883836"/>
-                  </a:lnTo>
-                  <a:lnTo>
-                    <a:pt x="3119503" y="2890422"/>
-                  </a:lnTo>
-                  <a:lnTo>
-                    <a:pt x="3197137" y="2896952"/>
-                  </a:lnTo>
-                  <a:lnTo>
-                    <a:pt x="3274771" y="2903427"/>
-                  </a:lnTo>
-                  <a:lnTo>
-                    <a:pt x="3352405" y="2909845"/>
-                  </a:lnTo>
-                  <a:lnTo>
-                    <a:pt x="3430039" y="2916209"/>
-                  </a:lnTo>
-                  <a:lnTo>
-                    <a:pt x="3507673" y="2922518"/>
-                  </a:lnTo>
-                  <a:lnTo>
-                    <a:pt x="3585307" y="2928773"/>
-                  </a:lnTo>
-                  <a:lnTo>
-                    <a:pt x="3662941" y="2934975"/>
-                  </a:lnTo>
-                  <a:lnTo>
-                    <a:pt x="3740575" y="2941123"/>
-                  </a:lnTo>
-                  <a:lnTo>
-                    <a:pt x="3818209" y="2947219"/>
-                  </a:lnTo>
-                  <a:lnTo>
-                    <a:pt x="3895843" y="2953262"/>
-                  </a:lnTo>
-                  <a:lnTo>
-                    <a:pt x="3973477" y="2959254"/>
-                  </a:lnTo>
-                  <a:lnTo>
-                    <a:pt x="4051111" y="2965194"/>
-                  </a:lnTo>
-                  <a:lnTo>
-                    <a:pt x="4128745" y="2971084"/>
-                  </a:lnTo>
-                  <a:lnTo>
-                    <a:pt x="4206379" y="2976923"/>
-                  </a:lnTo>
-                  <a:lnTo>
-                    <a:pt x="4284013" y="2982712"/>
-                  </a:lnTo>
-                  <a:lnTo>
-                    <a:pt x="4361647" y="2988451"/>
-                  </a:lnTo>
-                  <a:lnTo>
-                    <a:pt x="4439281" y="2994142"/>
-                  </a:lnTo>
-                  <a:lnTo>
-                    <a:pt x="4516915" y="2999783"/>
-                  </a:lnTo>
-                  <a:lnTo>
-                    <a:pt x="4594549" y="3005376"/>
-                  </a:lnTo>
-                  <a:lnTo>
-                    <a:pt x="4672183" y="3010922"/>
-                  </a:lnTo>
-                  <a:lnTo>
-                    <a:pt x="4749817" y="3016419"/>
-                  </a:lnTo>
-                  <a:lnTo>
-                    <a:pt x="4827451" y="3021870"/>
-                  </a:lnTo>
-                  <a:lnTo>
-                    <a:pt x="4905086" y="3027274"/>
-                  </a:lnTo>
-                  <a:lnTo>
-                    <a:pt x="4982720" y="3032632"/>
-                  </a:lnTo>
-                  <a:lnTo>
-                    <a:pt x="5060354" y="3037943"/>
-                  </a:lnTo>
-                  <a:lnTo>
-                    <a:pt x="5137988" y="3043210"/>
-                  </a:lnTo>
-                  <a:lnTo>
-                    <a:pt x="5215622" y="3048431"/>
-                  </a:lnTo>
-                  <a:lnTo>
-                    <a:pt x="5293256" y="3053607"/>
-                  </a:lnTo>
-                  <a:lnTo>
-                    <a:pt x="5370890" y="3058739"/>
-                  </a:lnTo>
-                  <a:lnTo>
-                    <a:pt x="5448524" y="3063827"/>
-                  </a:lnTo>
-                  <a:lnTo>
-                    <a:pt x="5526158" y="3068872"/>
-                  </a:lnTo>
-                  <a:lnTo>
-                    <a:pt x="5603792" y="3073873"/>
-                  </a:lnTo>
-                  <a:lnTo>
-                    <a:pt x="5681426" y="3078831"/>
-                  </a:lnTo>
-                  <a:lnTo>
-                    <a:pt x="5759060" y="3083747"/>
-                  </a:lnTo>
-                  <a:lnTo>
-                    <a:pt x="5836694" y="3088621"/>
-                  </a:lnTo>
-                  <a:lnTo>
-                    <a:pt x="5914328" y="3093453"/>
+                    <a:pt x="73150" y="195552"/>
+                  </a:lnTo>
+                  <a:lnTo>
+                    <a:pt x="150784" y="391337"/>
+                  </a:lnTo>
+                  <a:lnTo>
+                    <a:pt x="228418" y="576035"/>
+                  </a:lnTo>
+                  <a:lnTo>
+                    <a:pt x="306052" y="750272"/>
+                  </a:lnTo>
+                  <a:lnTo>
+                    <a:pt x="383686" y="914642"/>
+                  </a:lnTo>
+                  <a:lnTo>
+                    <a:pt x="461320" y="1069703"/>
+                  </a:lnTo>
+                  <a:lnTo>
+                    <a:pt x="538954" y="1215983"/>
+                  </a:lnTo>
+                  <a:lnTo>
+                    <a:pt x="616588" y="1353978"/>
+                  </a:lnTo>
+                  <a:lnTo>
+                    <a:pt x="694222" y="1484158"/>
+                  </a:lnTo>
+                  <a:lnTo>
+                    <a:pt x="771856" y="1606966"/>
+                  </a:lnTo>
+                  <a:lnTo>
+                    <a:pt x="849490" y="1722819"/>
+                  </a:lnTo>
+                  <a:lnTo>
+                    <a:pt x="927124" y="1832110"/>
+                  </a:lnTo>
+                  <a:lnTo>
+                    <a:pt x="1004758" y="1935212"/>
+                  </a:lnTo>
+                  <a:lnTo>
+                    <a:pt x="1082392" y="2032476"/>
+                  </a:lnTo>
+                  <a:lnTo>
+                    <a:pt x="1160026" y="2124230"/>
+                  </a:lnTo>
+                  <a:lnTo>
+                    <a:pt x="1237660" y="2210789"/>
+                  </a:lnTo>
+                  <a:lnTo>
+                    <a:pt x="1315295" y="2292445"/>
+                  </a:lnTo>
+                  <a:lnTo>
+                    <a:pt x="1392929" y="2369477"/>
+                  </a:lnTo>
+                  <a:lnTo>
+                    <a:pt x="1470563" y="2442147"/>
+                  </a:lnTo>
+                  <a:lnTo>
+                    <a:pt x="1548197" y="2510701"/>
+                  </a:lnTo>
+                  <a:lnTo>
+                    <a:pt x="1625831" y="2575372"/>
+                  </a:lnTo>
+                  <a:lnTo>
+                    <a:pt x="1703465" y="2636381"/>
+                  </a:lnTo>
+                  <a:lnTo>
+                    <a:pt x="1781099" y="2693935"/>
+                  </a:lnTo>
+                  <a:lnTo>
+                    <a:pt x="1858733" y="2748230"/>
+                  </a:lnTo>
+                  <a:lnTo>
+                    <a:pt x="1936367" y="2785445"/>
+                  </a:lnTo>
+                  <a:lnTo>
+                    <a:pt x="2014001" y="2792952"/>
+                  </a:lnTo>
+                  <a:lnTo>
+                    <a:pt x="2091635" y="2800395"/>
+                  </a:lnTo>
+                  <a:lnTo>
+                    <a:pt x="2169269" y="2807773"/>
+                  </a:lnTo>
+                  <a:lnTo>
+                    <a:pt x="2246903" y="2815088"/>
+                  </a:lnTo>
+                  <a:lnTo>
+                    <a:pt x="2324537" y="2822339"/>
+                  </a:lnTo>
+                  <a:lnTo>
+                    <a:pt x="2402171" y="2829527"/>
+                  </a:lnTo>
+                  <a:lnTo>
+                    <a:pt x="2479805" y="2836653"/>
+                  </a:lnTo>
+                  <a:lnTo>
+                    <a:pt x="2557439" y="2843718"/>
+                  </a:lnTo>
+                  <a:lnTo>
+                    <a:pt x="2635073" y="2850721"/>
+                  </a:lnTo>
+                  <a:lnTo>
+                    <a:pt x="2712707" y="2857663"/>
+                  </a:lnTo>
+                  <a:lnTo>
+                    <a:pt x="2790341" y="2864546"/>
+                  </a:lnTo>
+                  <a:lnTo>
+                    <a:pt x="2867975" y="2871369"/>
+                  </a:lnTo>
+                  <a:lnTo>
+                    <a:pt x="2945609" y="2878133"/>
+                  </a:lnTo>
+                  <a:lnTo>
+                    <a:pt x="3023243" y="2884838"/>
+                  </a:lnTo>
+                  <a:lnTo>
+                    <a:pt x="3100878" y="2891485"/>
+                  </a:lnTo>
+                  <a:lnTo>
+                    <a:pt x="3178512" y="2898075"/>
+                  </a:lnTo>
+                  <a:lnTo>
+                    <a:pt x="3256146" y="2904607"/>
+                  </a:lnTo>
+                  <a:lnTo>
+                    <a:pt x="3333780" y="2911083"/>
+                  </a:lnTo>
+                  <a:lnTo>
+                    <a:pt x="3411414" y="2917503"/>
+                  </a:lnTo>
+                  <a:lnTo>
+                    <a:pt x="3489048" y="2923868"/>
+                  </a:lnTo>
+                  <a:lnTo>
+                    <a:pt x="3566682" y="2930177"/>
+                  </a:lnTo>
+                  <a:lnTo>
+                    <a:pt x="3644316" y="2936432"/>
+                  </a:lnTo>
+                  <a:lnTo>
+                    <a:pt x="3721950" y="2942632"/>
+                  </a:lnTo>
+                  <a:lnTo>
+                    <a:pt x="3799584" y="2948779"/>
+                  </a:lnTo>
+                  <a:lnTo>
+                    <a:pt x="3877218" y="2954873"/>
+                  </a:lnTo>
+                  <a:lnTo>
+                    <a:pt x="3954852" y="2960914"/>
+                  </a:lnTo>
+                  <a:lnTo>
+                    <a:pt x="4032486" y="2966903"/>
+                  </a:lnTo>
+                  <a:lnTo>
+                    <a:pt x="4110120" y="2972839"/>
+                  </a:lnTo>
+                  <a:lnTo>
+                    <a:pt x="4187754" y="2978725"/>
+                  </a:lnTo>
+                  <a:lnTo>
+                    <a:pt x="4265388" y="2984559"/>
+                  </a:lnTo>
+                  <a:lnTo>
+                    <a:pt x="4343022" y="2990343"/>
+                  </a:lnTo>
+                  <a:lnTo>
+                    <a:pt x="4420656" y="2996077"/>
+                  </a:lnTo>
+                  <a:lnTo>
+                    <a:pt x="4498290" y="3001761"/>
+                  </a:lnTo>
+                  <a:lnTo>
+                    <a:pt x="4575924" y="3007396"/>
+                  </a:lnTo>
+                  <a:lnTo>
+                    <a:pt x="4653558" y="3012982"/>
+                  </a:lnTo>
+                  <a:lnTo>
+                    <a:pt x="4731192" y="3018520"/>
+                  </a:lnTo>
+                  <a:lnTo>
+                    <a:pt x="4808827" y="3024010"/>
+                  </a:lnTo>
+                  <a:lnTo>
+                    <a:pt x="4886461" y="3029452"/>
+                  </a:lnTo>
+                  <a:lnTo>
+                    <a:pt x="4964095" y="3034847"/>
+                  </a:lnTo>
+                  <a:lnTo>
+                    <a:pt x="5041729" y="3040196"/>
+                  </a:lnTo>
+                  <a:lnTo>
+                    <a:pt x="5119363" y="3045498"/>
+                  </a:lnTo>
+                  <a:lnTo>
+                    <a:pt x="5196997" y="3050754"/>
+                  </a:lnTo>
+                  <a:lnTo>
+                    <a:pt x="5274631" y="3055965"/>
+                  </a:lnTo>
+                  <a:lnTo>
+                    <a:pt x="5352265" y="3061131"/>
+                  </a:lnTo>
+                  <a:lnTo>
+                    <a:pt x="5429899" y="3066252"/>
+                  </a:lnTo>
+                  <a:lnTo>
+                    <a:pt x="5507533" y="3071329"/>
+                  </a:lnTo>
+                  <a:lnTo>
+                    <a:pt x="5585167" y="3076361"/>
+                  </a:lnTo>
+                  <a:lnTo>
+                    <a:pt x="5662801" y="3081350"/>
+                  </a:lnTo>
+                  <a:lnTo>
+                    <a:pt x="5740435" y="3086296"/>
+                  </a:lnTo>
+                  <a:lnTo>
+                    <a:pt x="5818069" y="3091199"/>
+                  </a:lnTo>
+                  <a:lnTo>
+                    <a:pt x="5895703" y="3096060"/>
                   </a:lnTo>
                 </a:path>
               </a:pathLst>
@@ -3814,297 +3808,297 @@
           </p:nvSpPr>
           <p:spPr>
             <a:xfrm>
-              <a:off x="817517" y="4283473"/>
-              <a:ext cx="7370972" cy="1220812"/>
+              <a:off x="817517" y="4278437"/>
+              <a:ext cx="7370972" cy="1227142"/>
             </a:xfrm>
             <a:custGeom>
               <a:avLst/>
               <a:pathLst>
-                <a:path w="7370972" h="1220812">
+                <a:path w="7370972" h="1227142">
                   <a:moveTo>
-                    <a:pt x="7370972" y="1220812"/>
+                    <a:pt x="7370972" y="1227142"/>
                   </a:moveTo>
                   <a:lnTo>
-                    <a:pt x="7293338" y="1218143"/>
-                  </a:lnTo>
-                  <a:lnTo>
-                    <a:pt x="7215704" y="1215314"/>
-                  </a:lnTo>
-                  <a:lnTo>
-                    <a:pt x="7138070" y="1212318"/>
-                  </a:lnTo>
-                  <a:lnTo>
-                    <a:pt x="7060436" y="1209144"/>
-                  </a:lnTo>
-                  <a:lnTo>
-                    <a:pt x="6982802" y="1205780"/>
-                  </a:lnTo>
-                  <a:lnTo>
-                    <a:pt x="6905168" y="1202217"/>
-                  </a:lnTo>
-                  <a:lnTo>
-                    <a:pt x="6827534" y="1198443"/>
-                  </a:lnTo>
-                  <a:lnTo>
-                    <a:pt x="6749900" y="1194444"/>
-                  </a:lnTo>
-                  <a:lnTo>
-                    <a:pt x="6672266" y="1190207"/>
-                  </a:lnTo>
-                  <a:lnTo>
-                    <a:pt x="6594632" y="1185718"/>
-                  </a:lnTo>
-                  <a:lnTo>
-                    <a:pt x="6516998" y="1180963"/>
-                  </a:lnTo>
-                  <a:lnTo>
-                    <a:pt x="6439364" y="1175925"/>
-                  </a:lnTo>
-                  <a:lnTo>
-                    <a:pt x="6361730" y="1170588"/>
-                  </a:lnTo>
-                  <a:lnTo>
-                    <a:pt x="6284096" y="1164934"/>
-                  </a:lnTo>
-                  <a:lnTo>
-                    <a:pt x="6206462" y="1158943"/>
-                  </a:lnTo>
-                  <a:lnTo>
-                    <a:pt x="6128827" y="1152596"/>
-                  </a:lnTo>
-                  <a:lnTo>
-                    <a:pt x="6051193" y="1145873"/>
-                  </a:lnTo>
-                  <a:lnTo>
-                    <a:pt x="5973559" y="1138750"/>
-                  </a:lnTo>
-                  <a:lnTo>
-                    <a:pt x="5895925" y="1131203"/>
-                  </a:lnTo>
-                  <a:lnTo>
-                    <a:pt x="5818291" y="1123208"/>
-                  </a:lnTo>
-                  <a:lnTo>
-                    <a:pt x="5740657" y="1114738"/>
-                  </a:lnTo>
-                  <a:lnTo>
-                    <a:pt x="5663023" y="1105764"/>
-                  </a:lnTo>
-                  <a:lnTo>
-                    <a:pt x="5585389" y="1096257"/>
-                  </a:lnTo>
-                  <a:lnTo>
-                    <a:pt x="5507755" y="1086185"/>
-                  </a:lnTo>
-                  <a:lnTo>
-                    <a:pt x="5430121" y="1075514"/>
-                  </a:lnTo>
-                  <a:lnTo>
-                    <a:pt x="5352487" y="1064210"/>
-                  </a:lnTo>
-                  <a:lnTo>
-                    <a:pt x="5274853" y="1052233"/>
-                  </a:lnTo>
-                  <a:lnTo>
-                    <a:pt x="5197219" y="1039545"/>
-                  </a:lnTo>
-                  <a:lnTo>
-                    <a:pt x="5119585" y="1026103"/>
-                  </a:lnTo>
-                  <a:lnTo>
-                    <a:pt x="5041951" y="1011862"/>
-                  </a:lnTo>
-                  <a:lnTo>
-                    <a:pt x="4964317" y="996774"/>
-                  </a:lnTo>
-                  <a:lnTo>
-                    <a:pt x="4886683" y="980790"/>
-                  </a:lnTo>
-                  <a:lnTo>
-                    <a:pt x="4809049" y="963856"/>
-                  </a:lnTo>
-                  <a:lnTo>
-                    <a:pt x="4731415" y="945915"/>
-                  </a:lnTo>
-                  <a:lnTo>
-                    <a:pt x="4653781" y="926909"/>
-                  </a:lnTo>
-                  <a:lnTo>
-                    <a:pt x="4576147" y="906773"/>
-                  </a:lnTo>
-                  <a:lnTo>
-                    <a:pt x="4498513" y="885440"/>
-                  </a:lnTo>
-                  <a:lnTo>
-                    <a:pt x="4420879" y="862839"/>
-                  </a:lnTo>
-                  <a:lnTo>
-                    <a:pt x="4343244" y="838895"/>
-                  </a:lnTo>
-                  <a:lnTo>
-                    <a:pt x="4265610" y="813528"/>
-                  </a:lnTo>
-                  <a:lnTo>
-                    <a:pt x="4187976" y="786654"/>
-                  </a:lnTo>
-                  <a:lnTo>
-                    <a:pt x="4110342" y="758182"/>
-                  </a:lnTo>
-                  <a:lnTo>
-                    <a:pt x="4032708" y="728019"/>
-                  </a:lnTo>
-                  <a:lnTo>
-                    <a:pt x="3955074" y="696063"/>
-                  </a:lnTo>
-                  <a:lnTo>
-                    <a:pt x="3877440" y="662207"/>
-                  </a:lnTo>
-                  <a:lnTo>
-                    <a:pt x="3799806" y="626340"/>
-                  </a:lnTo>
-                  <a:lnTo>
-                    <a:pt x="3722172" y="588341"/>
-                  </a:lnTo>
-                  <a:lnTo>
-                    <a:pt x="3644538" y="548084"/>
-                  </a:lnTo>
-                  <a:lnTo>
-                    <a:pt x="3566904" y="505434"/>
-                  </a:lnTo>
-                  <a:lnTo>
-                    <a:pt x="3489270" y="460250"/>
-                  </a:lnTo>
-                  <a:lnTo>
-                    <a:pt x="3411636" y="412380"/>
-                  </a:lnTo>
-                  <a:lnTo>
-                    <a:pt x="3334002" y="391015"/>
-                  </a:lnTo>
-                  <a:lnTo>
-                    <a:pt x="3256368" y="383457"/>
-                  </a:lnTo>
-                  <a:lnTo>
-                    <a:pt x="3178734" y="375833"/>
-                  </a:lnTo>
-                  <a:lnTo>
-                    <a:pt x="3101100" y="368143"/>
-                  </a:lnTo>
-                  <a:lnTo>
-                    <a:pt x="3023466" y="360387"/>
-                  </a:lnTo>
-                  <a:lnTo>
-                    <a:pt x="2945832" y="352563"/>
-                  </a:lnTo>
-                  <a:lnTo>
-                    <a:pt x="2868198" y="344672"/>
-                  </a:lnTo>
-                  <a:lnTo>
-                    <a:pt x="2790564" y="336713"/>
-                  </a:lnTo>
-                  <a:lnTo>
-                    <a:pt x="2712930" y="328685"/>
-                  </a:lnTo>
-                  <a:lnTo>
-                    <a:pt x="2635295" y="320588"/>
-                  </a:lnTo>
-                  <a:lnTo>
-                    <a:pt x="2557661" y="312421"/>
-                  </a:lnTo>
-                  <a:lnTo>
-                    <a:pt x="2480027" y="304183"/>
-                  </a:lnTo>
-                  <a:lnTo>
-                    <a:pt x="2402393" y="295874"/>
-                  </a:lnTo>
-                  <a:lnTo>
-                    <a:pt x="2324759" y="287494"/>
-                  </a:lnTo>
-                  <a:lnTo>
-                    <a:pt x="2247125" y="279040"/>
-                  </a:lnTo>
-                  <a:lnTo>
-                    <a:pt x="2169491" y="270514"/>
-                  </a:lnTo>
-                  <a:lnTo>
-                    <a:pt x="2091857" y="261914"/>
-                  </a:lnTo>
-                  <a:lnTo>
-                    <a:pt x="2014223" y="253240"/>
-                  </a:lnTo>
-                  <a:lnTo>
-                    <a:pt x="1936589" y="244491"/>
-                  </a:lnTo>
-                  <a:lnTo>
-                    <a:pt x="1858955" y="235666"/>
-                  </a:lnTo>
-                  <a:lnTo>
-                    <a:pt x="1781321" y="226765"/>
-                  </a:lnTo>
-                  <a:lnTo>
-                    <a:pt x="1703687" y="217787"/>
-                  </a:lnTo>
-                  <a:lnTo>
-                    <a:pt x="1626053" y="208731"/>
-                  </a:lnTo>
-                  <a:lnTo>
-                    <a:pt x="1548419" y="199598"/>
-                  </a:lnTo>
-                  <a:lnTo>
-                    <a:pt x="1470785" y="190385"/>
-                  </a:lnTo>
-                  <a:lnTo>
-                    <a:pt x="1393151" y="181093"/>
-                  </a:lnTo>
-                  <a:lnTo>
-                    <a:pt x="1315517" y="171720"/>
-                  </a:lnTo>
-                  <a:lnTo>
-                    <a:pt x="1237883" y="162266"/>
-                  </a:lnTo>
-                  <a:lnTo>
-                    <a:pt x="1160249" y="152731"/>
-                  </a:lnTo>
-                  <a:lnTo>
-                    <a:pt x="1082615" y="143113"/>
-                  </a:lnTo>
-                  <a:lnTo>
-                    <a:pt x="1004981" y="133413"/>
-                  </a:lnTo>
-                  <a:lnTo>
-                    <a:pt x="927346" y="123628"/>
-                  </a:lnTo>
-                  <a:lnTo>
-                    <a:pt x="849712" y="113759"/>
-                  </a:lnTo>
-                  <a:lnTo>
-                    <a:pt x="772078" y="103804"/>
-                  </a:lnTo>
-                  <a:lnTo>
-                    <a:pt x="694444" y="93764"/>
-                  </a:lnTo>
-                  <a:lnTo>
-                    <a:pt x="616810" y="83637"/>
-                  </a:lnTo>
-                  <a:lnTo>
-                    <a:pt x="539176" y="73422"/>
-                  </a:lnTo>
-                  <a:lnTo>
-                    <a:pt x="461542" y="63119"/>
-                  </a:lnTo>
-                  <a:lnTo>
-                    <a:pt x="383908" y="52727"/>
-                  </a:lnTo>
-                  <a:lnTo>
-                    <a:pt x="306274" y="42245"/>
-                  </a:lnTo>
-                  <a:lnTo>
-                    <a:pt x="228640" y="31673"/>
-                  </a:lnTo>
-                  <a:lnTo>
-                    <a:pt x="151006" y="21009"/>
-                  </a:lnTo>
-                  <a:lnTo>
-                    <a:pt x="73372" y="10253"/>
+                    <a:pt x="7293338" y="1224522"/>
+                  </a:lnTo>
+                  <a:lnTo>
+                    <a:pt x="7215704" y="1221746"/>
+                  </a:lnTo>
+                  <a:lnTo>
+                    <a:pt x="7138070" y="1218803"/>
+                  </a:lnTo>
+                  <a:lnTo>
+                    <a:pt x="7060436" y="1215683"/>
+                  </a:lnTo>
+                  <a:lnTo>
+                    <a:pt x="6982802" y="1212377"/>
+                  </a:lnTo>
+                  <a:lnTo>
+                    <a:pt x="6905168" y="1208871"/>
+                  </a:lnTo>
+                  <a:lnTo>
+                    <a:pt x="6827534" y="1205155"/>
+                  </a:lnTo>
+                  <a:lnTo>
+                    <a:pt x="6749900" y="1201216"/>
+                  </a:lnTo>
+                  <a:lnTo>
+                    <a:pt x="6672266" y="1197041"/>
+                  </a:lnTo>
+                  <a:lnTo>
+                    <a:pt x="6594632" y="1192614"/>
+                  </a:lnTo>
+                  <a:lnTo>
+                    <a:pt x="6516998" y="1187923"/>
+                  </a:lnTo>
+                  <a:lnTo>
+                    <a:pt x="6439364" y="1182949"/>
+                  </a:lnTo>
+                  <a:lnTo>
+                    <a:pt x="6361730" y="1177677"/>
+                  </a:lnTo>
+                  <a:lnTo>
+                    <a:pt x="6284096" y="1172088"/>
+                  </a:lnTo>
+                  <a:lnTo>
+                    <a:pt x="6206462" y="1166164"/>
+                  </a:lnTo>
+                  <a:lnTo>
+                    <a:pt x="6128827" y="1159885"/>
+                  </a:lnTo>
+                  <a:lnTo>
+                    <a:pt x="6051193" y="1153228"/>
+                  </a:lnTo>
+                  <a:lnTo>
+                    <a:pt x="5973559" y="1146171"/>
+                  </a:lnTo>
+                  <a:lnTo>
+                    <a:pt x="5895925" y="1138691"/>
+                  </a:lnTo>
+                  <a:lnTo>
+                    <a:pt x="5818291" y="1130762"/>
+                  </a:lnTo>
+                  <a:lnTo>
+                    <a:pt x="5740657" y="1122357"/>
+                  </a:lnTo>
+                  <a:lnTo>
+                    <a:pt x="5663023" y="1113448"/>
+                  </a:lnTo>
+                  <a:lnTo>
+                    <a:pt x="5585389" y="1104003"/>
+                  </a:lnTo>
+                  <a:lnTo>
+                    <a:pt x="5507755" y="1093992"/>
+                  </a:lnTo>
+                  <a:lnTo>
+                    <a:pt x="5430121" y="1083380"/>
+                  </a:lnTo>
+                  <a:lnTo>
+                    <a:pt x="5352487" y="1072130"/>
+                  </a:lnTo>
+                  <a:lnTo>
+                    <a:pt x="5274853" y="1060205"/>
+                  </a:lnTo>
+                  <a:lnTo>
+                    <a:pt x="5197219" y="1047564"/>
+                  </a:lnTo>
+                  <a:lnTo>
+                    <a:pt x="5119585" y="1034165"/>
+                  </a:lnTo>
+                  <a:lnTo>
+                    <a:pt x="5041951" y="1019961"/>
+                  </a:lnTo>
+                  <a:lnTo>
+                    <a:pt x="4964317" y="1004904"/>
+                  </a:lnTo>
+                  <a:lnTo>
+                    <a:pt x="4886683" y="988943"/>
+                  </a:lnTo>
+                  <a:lnTo>
+                    <a:pt x="4809049" y="972025"/>
+                  </a:lnTo>
+                  <a:lnTo>
+                    <a:pt x="4731415" y="954090"/>
+                  </a:lnTo>
+                  <a:lnTo>
+                    <a:pt x="4653781" y="935079"/>
+                  </a:lnTo>
+                  <a:lnTo>
+                    <a:pt x="4576147" y="914927"/>
+                  </a:lnTo>
+                  <a:lnTo>
+                    <a:pt x="4498513" y="893564"/>
+                  </a:lnTo>
+                  <a:lnTo>
+                    <a:pt x="4420879" y="870920"/>
+                  </a:lnTo>
+                  <a:lnTo>
+                    <a:pt x="4343244" y="846916"/>
+                  </a:lnTo>
+                  <a:lnTo>
+                    <a:pt x="4265610" y="821470"/>
+                  </a:lnTo>
+                  <a:lnTo>
+                    <a:pt x="4187976" y="794498"/>
+                  </a:lnTo>
+                  <a:lnTo>
+                    <a:pt x="4110342" y="765906"/>
+                  </a:lnTo>
+                  <a:lnTo>
+                    <a:pt x="4032708" y="735597"/>
+                  </a:lnTo>
+                  <a:lnTo>
+                    <a:pt x="3955074" y="703470"/>
+                  </a:lnTo>
+                  <a:lnTo>
+                    <a:pt x="3877440" y="669413"/>
+                  </a:lnTo>
+                  <a:lnTo>
+                    <a:pt x="3799806" y="633312"/>
+                  </a:lnTo>
+                  <a:lnTo>
+                    <a:pt x="3722172" y="595044"/>
+                  </a:lnTo>
+                  <a:lnTo>
+                    <a:pt x="3644538" y="554478"/>
+                  </a:lnTo>
+                  <a:lnTo>
+                    <a:pt x="3566904" y="511477"/>
+                  </a:lnTo>
+                  <a:lnTo>
+                    <a:pt x="3489270" y="465894"/>
+                  </a:lnTo>
+                  <a:lnTo>
+                    <a:pt x="3411636" y="417576"/>
+                  </a:lnTo>
+                  <a:lnTo>
+                    <a:pt x="3334002" y="395997"/>
+                  </a:lnTo>
+                  <a:lnTo>
+                    <a:pt x="3256368" y="388358"/>
+                  </a:lnTo>
+                  <a:lnTo>
+                    <a:pt x="3178734" y="380652"/>
+                  </a:lnTo>
+                  <a:lnTo>
+                    <a:pt x="3101100" y="372879"/>
+                  </a:lnTo>
+                  <a:lnTo>
+                    <a:pt x="3023466" y="365037"/>
+                  </a:lnTo>
+                  <a:lnTo>
+                    <a:pt x="2945832" y="357127"/>
+                  </a:lnTo>
+                  <a:lnTo>
+                    <a:pt x="2868198" y="349149"/>
+                  </a:lnTo>
+                  <a:lnTo>
+                    <a:pt x="2790564" y="341100"/>
+                  </a:lnTo>
+                  <a:lnTo>
+                    <a:pt x="2712930" y="332981"/>
+                  </a:lnTo>
+                  <a:lnTo>
+                    <a:pt x="2635295" y="324791"/>
+                  </a:lnTo>
+                  <a:lnTo>
+                    <a:pt x="2557661" y="316530"/>
+                  </a:lnTo>
+                  <a:lnTo>
+                    <a:pt x="2480027" y="308197"/>
+                  </a:lnTo>
+                  <a:lnTo>
+                    <a:pt x="2402393" y="299791"/>
+                  </a:lnTo>
+                  <a:lnTo>
+                    <a:pt x="2324759" y="291311"/>
+                  </a:lnTo>
+                  <a:lnTo>
+                    <a:pt x="2247125" y="282757"/>
+                  </a:lnTo>
+                  <a:lnTo>
+                    <a:pt x="2169491" y="274129"/>
+                  </a:lnTo>
+                  <a:lnTo>
+                    <a:pt x="2091857" y="265425"/>
+                  </a:lnTo>
+                  <a:lnTo>
+                    <a:pt x="2014223" y="256646"/>
+                  </a:lnTo>
+                  <a:lnTo>
+                    <a:pt x="1936589" y="247789"/>
+                  </a:lnTo>
+                  <a:lnTo>
+                    <a:pt x="1858955" y="238855"/>
+                  </a:lnTo>
+                  <a:lnTo>
+                    <a:pt x="1781321" y="229844"/>
+                  </a:lnTo>
+                  <a:lnTo>
+                    <a:pt x="1703687" y="220753"/>
+                  </a:lnTo>
+                  <a:lnTo>
+                    <a:pt x="1626053" y="211583"/>
+                  </a:lnTo>
+                  <a:lnTo>
+                    <a:pt x="1548419" y="202334"/>
+                  </a:lnTo>
+                  <a:lnTo>
+                    <a:pt x="1470785" y="193003"/>
+                  </a:lnTo>
+                  <a:lnTo>
+                    <a:pt x="1393151" y="183591"/>
+                  </a:lnTo>
+                  <a:lnTo>
+                    <a:pt x="1315517" y="174096"/>
+                  </a:lnTo>
+                  <a:lnTo>
+                    <a:pt x="1237883" y="164519"/>
+                  </a:lnTo>
+                  <a:lnTo>
+                    <a:pt x="1160249" y="154858"/>
+                  </a:lnTo>
+                  <a:lnTo>
+                    <a:pt x="1082615" y="145113"/>
+                  </a:lnTo>
+                  <a:lnTo>
+                    <a:pt x="1004981" y="135282"/>
+                  </a:lnTo>
+                  <a:lnTo>
+                    <a:pt x="927346" y="125366"/>
+                  </a:lnTo>
+                  <a:lnTo>
+                    <a:pt x="849712" y="115363"/>
+                  </a:lnTo>
+                  <a:lnTo>
+                    <a:pt x="772078" y="105273"/>
+                  </a:lnTo>
+                  <a:lnTo>
+                    <a:pt x="694444" y="95095"/>
+                  </a:lnTo>
+                  <a:lnTo>
+                    <a:pt x="616810" y="84828"/>
+                  </a:lnTo>
+                  <a:lnTo>
+                    <a:pt x="539176" y="74471"/>
+                  </a:lnTo>
+                  <a:lnTo>
+                    <a:pt x="461542" y="64023"/>
+                  </a:lnTo>
+                  <a:lnTo>
+                    <a:pt x="383908" y="53485"/>
+                  </a:lnTo>
+                  <a:lnTo>
+                    <a:pt x="306274" y="42854"/>
+                  </a:lnTo>
+                  <a:lnTo>
+                    <a:pt x="228640" y="32131"/>
+                  </a:lnTo>
+                  <a:lnTo>
+                    <a:pt x="151006" y="21314"/>
+                  </a:lnTo>
+                  <a:lnTo>
+                    <a:pt x="73372" y="10402"/>
                   </a:lnTo>
                   <a:lnTo>
                     <a:pt x="0" y="0"/>
@@ -4127,300 +4121,300 @@
           </p:nvSpPr>
           <p:spPr>
             <a:xfrm>
-              <a:off x="844915" y="1896563"/>
-              <a:ext cx="7343574" cy="3494152"/>
+              <a:off x="877891" y="1896563"/>
+              <a:ext cx="7310598" cy="3496815"/>
             </a:xfrm>
             <a:custGeom>
               <a:avLst/>
               <a:pathLst>
-                <a:path w="7343574" h="3494152">
+                <a:path w="7310598" h="3496815">
                   <a:moveTo>
                     <a:pt x="0" y="0"/>
                   </a:moveTo>
                   <a:lnTo>
-                    <a:pt x="45974" y="71518"/>
-                  </a:lnTo>
-                  <a:lnTo>
-                    <a:pt x="123608" y="188346"/>
-                  </a:lnTo>
-                  <a:lnTo>
-                    <a:pt x="201242" y="301363"/>
-                  </a:lnTo>
-                  <a:lnTo>
-                    <a:pt x="278876" y="410693"/>
-                  </a:lnTo>
-                  <a:lnTo>
-                    <a:pt x="356510" y="516456"/>
-                  </a:lnTo>
-                  <a:lnTo>
-                    <a:pt x="434144" y="618769"/>
-                  </a:lnTo>
-                  <a:lnTo>
-                    <a:pt x="511778" y="717745"/>
-                  </a:lnTo>
-                  <a:lnTo>
-                    <a:pt x="589412" y="813491"/>
-                  </a:lnTo>
-                  <a:lnTo>
-                    <a:pt x="667046" y="906114"/>
-                  </a:lnTo>
-                  <a:lnTo>
-                    <a:pt x="744680" y="995715"/>
-                  </a:lnTo>
-                  <a:lnTo>
-                    <a:pt x="822314" y="1082392"/>
-                  </a:lnTo>
-                  <a:lnTo>
-                    <a:pt x="899948" y="1166243"/>
-                  </a:lnTo>
-                  <a:lnTo>
-                    <a:pt x="977583" y="1247357"/>
-                  </a:lnTo>
-                  <a:lnTo>
-                    <a:pt x="1055217" y="1325826"/>
-                  </a:lnTo>
-                  <a:lnTo>
-                    <a:pt x="1132851" y="1401735"/>
-                  </a:lnTo>
-                  <a:lnTo>
-                    <a:pt x="1210485" y="1475167"/>
-                  </a:lnTo>
-                  <a:lnTo>
-                    <a:pt x="1288119" y="1546203"/>
-                  </a:lnTo>
-                  <a:lnTo>
-                    <a:pt x="1365753" y="1614922"/>
-                  </a:lnTo>
-                  <a:lnTo>
-                    <a:pt x="1443387" y="1681400"/>
-                  </a:lnTo>
-                  <a:lnTo>
-                    <a:pt x="1521021" y="1745708"/>
-                  </a:lnTo>
-                  <a:lnTo>
-                    <a:pt x="1598655" y="1807919"/>
-                  </a:lnTo>
-                  <a:lnTo>
-                    <a:pt x="1676289" y="1868100"/>
-                  </a:lnTo>
-                  <a:lnTo>
-                    <a:pt x="1753923" y="1926318"/>
-                  </a:lnTo>
-                  <a:lnTo>
-                    <a:pt x="1831557" y="1982636"/>
-                  </a:lnTo>
-                  <a:lnTo>
-                    <a:pt x="1909191" y="2037118"/>
-                  </a:lnTo>
-                  <a:lnTo>
-                    <a:pt x="1986825" y="2089821"/>
-                  </a:lnTo>
-                  <a:lnTo>
-                    <a:pt x="2064459" y="2140806"/>
-                  </a:lnTo>
-                  <a:lnTo>
-                    <a:pt x="2142093" y="2190127"/>
-                  </a:lnTo>
-                  <a:lnTo>
-                    <a:pt x="2219727" y="2237839"/>
-                  </a:lnTo>
-                  <a:lnTo>
-                    <a:pt x="2297361" y="2283995"/>
-                  </a:lnTo>
-                  <a:lnTo>
-                    <a:pt x="2374995" y="2328645"/>
-                  </a:lnTo>
-                  <a:lnTo>
-                    <a:pt x="2452629" y="2371838"/>
-                  </a:lnTo>
-                  <a:lnTo>
-                    <a:pt x="2530263" y="2413622"/>
-                  </a:lnTo>
-                  <a:lnTo>
-                    <a:pt x="2607897" y="2454043"/>
-                  </a:lnTo>
-                  <a:lnTo>
-                    <a:pt x="2685532" y="2493146"/>
-                  </a:lnTo>
-                  <a:lnTo>
-                    <a:pt x="2763166" y="2530972"/>
-                  </a:lnTo>
-                  <a:lnTo>
-                    <a:pt x="2840800" y="2567565"/>
-                  </a:lnTo>
-                  <a:lnTo>
-                    <a:pt x="2918434" y="2602964"/>
-                  </a:lnTo>
-                  <a:lnTo>
-                    <a:pt x="2996068" y="2637208"/>
-                  </a:lnTo>
-                  <a:lnTo>
-                    <a:pt x="3073702" y="2670335"/>
-                  </a:lnTo>
-                  <a:lnTo>
-                    <a:pt x="3151336" y="2702381"/>
-                  </a:lnTo>
-                  <a:lnTo>
-                    <a:pt x="3228970" y="2733382"/>
-                  </a:lnTo>
-                  <a:lnTo>
-                    <a:pt x="3306604" y="2763371"/>
-                  </a:lnTo>
-                  <a:lnTo>
-                    <a:pt x="3384238" y="2792382"/>
-                  </a:lnTo>
-                  <a:lnTo>
-                    <a:pt x="3461872" y="2820447"/>
-                  </a:lnTo>
-                  <a:lnTo>
-                    <a:pt x="3539506" y="2847596"/>
-                  </a:lnTo>
-                  <a:lnTo>
-                    <a:pt x="3617140" y="2873859"/>
-                  </a:lnTo>
-                  <a:lnTo>
-                    <a:pt x="3694774" y="2899266"/>
-                  </a:lnTo>
-                  <a:lnTo>
-                    <a:pt x="3772408" y="2923844"/>
-                  </a:lnTo>
-                  <a:lnTo>
-                    <a:pt x="3850042" y="2947619"/>
-                  </a:lnTo>
-                  <a:lnTo>
-                    <a:pt x="3927676" y="2970620"/>
-                  </a:lnTo>
-                  <a:lnTo>
-                    <a:pt x="4005310" y="2992870"/>
-                  </a:lnTo>
-                  <a:lnTo>
-                    <a:pt x="4082944" y="3014394"/>
-                  </a:lnTo>
-                  <a:lnTo>
-                    <a:pt x="4160578" y="3035216"/>
-                  </a:lnTo>
-                  <a:lnTo>
-                    <a:pt x="4238212" y="3055358"/>
-                  </a:lnTo>
-                  <a:lnTo>
-                    <a:pt x="4315846" y="3074844"/>
-                  </a:lnTo>
-                  <a:lnTo>
-                    <a:pt x="4393481" y="3093693"/>
-                  </a:lnTo>
-                  <a:lnTo>
-                    <a:pt x="4471115" y="3111928"/>
-                  </a:lnTo>
-                  <a:lnTo>
-                    <a:pt x="4548749" y="3129568"/>
-                  </a:lnTo>
-                  <a:lnTo>
-                    <a:pt x="4626383" y="3146633"/>
-                  </a:lnTo>
-                  <a:lnTo>
-                    <a:pt x="4704017" y="3163140"/>
-                  </a:lnTo>
-                  <a:lnTo>
-                    <a:pt x="4781651" y="3179110"/>
-                  </a:lnTo>
-                  <a:lnTo>
-                    <a:pt x="4859285" y="3194558"/>
-                  </a:lnTo>
-                  <a:lnTo>
-                    <a:pt x="4936919" y="3209502"/>
-                  </a:lnTo>
-                  <a:lnTo>
-                    <a:pt x="5014553" y="3223959"/>
-                  </a:lnTo>
-                  <a:lnTo>
-                    <a:pt x="5092187" y="3237944"/>
-                  </a:lnTo>
-                  <a:lnTo>
-                    <a:pt x="5169821" y="3251473"/>
-                  </a:lnTo>
-                  <a:lnTo>
-                    <a:pt x="5247455" y="3264560"/>
-                  </a:lnTo>
-                  <a:lnTo>
-                    <a:pt x="5325089" y="3277221"/>
-                  </a:lnTo>
-                  <a:lnTo>
-                    <a:pt x="5402723" y="3289468"/>
-                  </a:lnTo>
-                  <a:lnTo>
-                    <a:pt x="5480357" y="3301316"/>
-                  </a:lnTo>
-                  <a:lnTo>
-                    <a:pt x="5557991" y="3312778"/>
-                  </a:lnTo>
-                  <a:lnTo>
-                    <a:pt x="5635625" y="3323865"/>
-                  </a:lnTo>
-                  <a:lnTo>
-                    <a:pt x="5713259" y="3334591"/>
-                  </a:lnTo>
-                  <a:lnTo>
-                    <a:pt x="5790893" y="3344967"/>
-                  </a:lnTo>
-                  <a:lnTo>
-                    <a:pt x="5868527" y="3355005"/>
-                  </a:lnTo>
-                  <a:lnTo>
-                    <a:pt x="5946161" y="3364715"/>
-                  </a:lnTo>
-                  <a:lnTo>
-                    <a:pt x="6023795" y="3374108"/>
-                  </a:lnTo>
-                  <a:lnTo>
-                    <a:pt x="6101430" y="3383195"/>
-                  </a:lnTo>
-                  <a:lnTo>
-                    <a:pt x="6179064" y="3391985"/>
-                  </a:lnTo>
-                  <a:lnTo>
-                    <a:pt x="6256698" y="3400488"/>
-                  </a:lnTo>
-                  <a:lnTo>
-                    <a:pt x="6334332" y="3408715"/>
-                  </a:lnTo>
-                  <a:lnTo>
-                    <a:pt x="6411966" y="3416672"/>
-                  </a:lnTo>
-                  <a:lnTo>
-                    <a:pt x="6489600" y="3424371"/>
-                  </a:lnTo>
-                  <a:lnTo>
-                    <a:pt x="6567234" y="3431818"/>
-                  </a:lnTo>
-                  <a:lnTo>
-                    <a:pt x="6644868" y="3439022"/>
-                  </a:lnTo>
-                  <a:lnTo>
-                    <a:pt x="6722502" y="3445991"/>
-                  </a:lnTo>
-                  <a:lnTo>
-                    <a:pt x="6800136" y="3452732"/>
-                  </a:lnTo>
-                  <a:lnTo>
-                    <a:pt x="6877770" y="3459254"/>
-                  </a:lnTo>
-                  <a:lnTo>
-                    <a:pt x="6955404" y="3465563"/>
-                  </a:lnTo>
-                  <a:lnTo>
-                    <a:pt x="7033038" y="3471666"/>
-                  </a:lnTo>
-                  <a:lnTo>
-                    <a:pt x="7110672" y="3477570"/>
-                  </a:lnTo>
-                  <a:lnTo>
-                    <a:pt x="7188306" y="3483282"/>
-                  </a:lnTo>
-                  <a:lnTo>
-                    <a:pt x="7265940" y="3488807"/>
-                  </a:lnTo>
-                  <a:lnTo>
-                    <a:pt x="7343574" y="3494152"/>
+                    <a:pt x="12998" y="20715"/>
+                  </a:lnTo>
+                  <a:lnTo>
+                    <a:pt x="90632" y="140360"/>
+                  </a:lnTo>
+                  <a:lnTo>
+                    <a:pt x="168266" y="256064"/>
+                  </a:lnTo>
+                  <a:lnTo>
+                    <a:pt x="245900" y="367956"/>
+                  </a:lnTo>
+                  <a:lnTo>
+                    <a:pt x="323534" y="476163"/>
+                  </a:lnTo>
+                  <a:lnTo>
+                    <a:pt x="401168" y="580804"/>
+                  </a:lnTo>
+                  <a:lnTo>
+                    <a:pt x="478802" y="681999"/>
+                  </a:lnTo>
+                  <a:lnTo>
+                    <a:pt x="556436" y="779860"/>
+                  </a:lnTo>
+                  <a:lnTo>
+                    <a:pt x="634070" y="874497"/>
+                  </a:lnTo>
+                  <a:lnTo>
+                    <a:pt x="711704" y="966016"/>
+                  </a:lnTo>
+                  <a:lnTo>
+                    <a:pt x="789339" y="1054521"/>
+                  </a:lnTo>
+                  <a:lnTo>
+                    <a:pt x="866973" y="1140110"/>
+                  </a:lnTo>
+                  <a:lnTo>
+                    <a:pt x="944607" y="1222879"/>
+                  </a:lnTo>
+                  <a:lnTo>
+                    <a:pt x="1022241" y="1302922"/>
+                  </a:lnTo>
+                  <a:lnTo>
+                    <a:pt x="1099875" y="1380328"/>
+                  </a:lnTo>
+                  <a:lnTo>
+                    <a:pt x="1177509" y="1455184"/>
+                  </a:lnTo>
+                  <a:lnTo>
+                    <a:pt x="1255143" y="1527575"/>
+                  </a:lnTo>
+                  <a:lnTo>
+                    <a:pt x="1332777" y="1597580"/>
+                  </a:lnTo>
+                  <a:lnTo>
+                    <a:pt x="1410411" y="1665279"/>
+                  </a:lnTo>
+                  <a:lnTo>
+                    <a:pt x="1488045" y="1730748"/>
+                  </a:lnTo>
+                  <a:lnTo>
+                    <a:pt x="1565679" y="1794061"/>
+                  </a:lnTo>
+                  <a:lnTo>
+                    <a:pt x="1643313" y="1855287"/>
+                  </a:lnTo>
+                  <a:lnTo>
+                    <a:pt x="1720947" y="1914497"/>
+                  </a:lnTo>
+                  <a:lnTo>
+                    <a:pt x="1798581" y="1971756"/>
+                  </a:lnTo>
+                  <a:lnTo>
+                    <a:pt x="1876215" y="2027129"/>
+                  </a:lnTo>
+                  <a:lnTo>
+                    <a:pt x="1953849" y="2080678"/>
+                  </a:lnTo>
+                  <a:lnTo>
+                    <a:pt x="2031483" y="2132462"/>
+                  </a:lnTo>
+                  <a:lnTo>
+                    <a:pt x="2109117" y="2182541"/>
+                  </a:lnTo>
+                  <a:lnTo>
+                    <a:pt x="2186751" y="2230970"/>
+                  </a:lnTo>
+                  <a:lnTo>
+                    <a:pt x="2264385" y="2277804"/>
+                  </a:lnTo>
+                  <a:lnTo>
+                    <a:pt x="2342019" y="2323095"/>
+                  </a:lnTo>
+                  <a:lnTo>
+                    <a:pt x="2419653" y="2366894"/>
+                  </a:lnTo>
+                  <a:lnTo>
+                    <a:pt x="2497287" y="2409250"/>
+                  </a:lnTo>
+                  <a:lnTo>
+                    <a:pt x="2574922" y="2450210"/>
+                  </a:lnTo>
+                  <a:lnTo>
+                    <a:pt x="2652556" y="2489822"/>
+                  </a:lnTo>
+                  <a:lnTo>
+                    <a:pt x="2730190" y="2528128"/>
+                  </a:lnTo>
+                  <a:lnTo>
+                    <a:pt x="2807824" y="2565173"/>
+                  </a:lnTo>
+                  <a:lnTo>
+                    <a:pt x="2885458" y="2600997"/>
+                  </a:lnTo>
+                  <a:lnTo>
+                    <a:pt x="2963092" y="2635641"/>
+                  </a:lnTo>
+                  <a:lnTo>
+                    <a:pt x="3040726" y="2669144"/>
+                  </a:lnTo>
+                  <a:lnTo>
+                    <a:pt x="3118360" y="2701543"/>
+                  </a:lnTo>
+                  <a:lnTo>
+                    <a:pt x="3195994" y="2732874"/>
+                  </a:lnTo>
+                  <a:lnTo>
+                    <a:pt x="3273628" y="2763174"/>
+                  </a:lnTo>
+                  <a:lnTo>
+                    <a:pt x="3351262" y="2792476"/>
+                  </a:lnTo>
+                  <a:lnTo>
+                    <a:pt x="3428896" y="2820812"/>
+                  </a:lnTo>
+                  <a:lnTo>
+                    <a:pt x="3506530" y="2848215"/>
+                  </a:lnTo>
+                  <a:lnTo>
+                    <a:pt x="3584164" y="2874715"/>
+                  </a:lnTo>
+                  <a:lnTo>
+                    <a:pt x="3661798" y="2900342"/>
+                  </a:lnTo>
+                  <a:lnTo>
+                    <a:pt x="3739432" y="2925124"/>
+                  </a:lnTo>
+                  <a:lnTo>
+                    <a:pt x="3817066" y="2949091"/>
+                  </a:lnTo>
+                  <a:lnTo>
+                    <a:pt x="3894700" y="2972268"/>
+                  </a:lnTo>
+                  <a:lnTo>
+                    <a:pt x="3972334" y="2994681"/>
+                  </a:lnTo>
+                  <a:lnTo>
+                    <a:pt x="4049968" y="3016356"/>
+                  </a:lnTo>
+                  <a:lnTo>
+                    <a:pt x="4127602" y="3037317"/>
+                  </a:lnTo>
+                  <a:lnTo>
+                    <a:pt x="4205236" y="3057588"/>
+                  </a:lnTo>
+                  <a:lnTo>
+                    <a:pt x="4282871" y="3077190"/>
+                  </a:lnTo>
+                  <a:lnTo>
+                    <a:pt x="4360505" y="3096147"/>
+                  </a:lnTo>
+                  <a:lnTo>
+                    <a:pt x="4438139" y="3114480"/>
+                  </a:lnTo>
+                  <a:lnTo>
+                    <a:pt x="4515773" y="3132208"/>
+                  </a:lnTo>
+                  <a:lnTo>
+                    <a:pt x="4593407" y="3149353"/>
+                  </a:lnTo>
+                  <a:lnTo>
+                    <a:pt x="4671041" y="3165932"/>
+                  </a:lnTo>
+                  <a:lnTo>
+                    <a:pt x="4748675" y="3181966"/>
+                  </a:lnTo>
+                  <a:lnTo>
+                    <a:pt x="4826309" y="3197471"/>
+                  </a:lnTo>
+                  <a:lnTo>
+                    <a:pt x="4903943" y="3212466"/>
+                  </a:lnTo>
+                  <a:lnTo>
+                    <a:pt x="4981577" y="3226967"/>
+                  </a:lnTo>
+                  <a:lnTo>
+                    <a:pt x="5059211" y="3240989"/>
+                  </a:lnTo>
+                  <a:lnTo>
+                    <a:pt x="5136845" y="3254550"/>
+                  </a:lnTo>
+                  <a:lnTo>
+                    <a:pt x="5214479" y="3267665"/>
+                  </a:lnTo>
+                  <a:lnTo>
+                    <a:pt x="5292113" y="3280347"/>
+                  </a:lnTo>
+                  <a:lnTo>
+                    <a:pt x="5369747" y="3292611"/>
+                  </a:lnTo>
+                  <a:lnTo>
+                    <a:pt x="5447381" y="3304472"/>
+                  </a:lnTo>
+                  <a:lnTo>
+                    <a:pt x="5525015" y="3315941"/>
+                  </a:lnTo>
+                  <a:lnTo>
+                    <a:pt x="5602649" y="3327033"/>
+                  </a:lnTo>
+                  <a:lnTo>
+                    <a:pt x="5680283" y="3337760"/>
+                  </a:lnTo>
+                  <a:lnTo>
+                    <a:pt x="5757917" y="3348133"/>
+                  </a:lnTo>
+                  <a:lnTo>
+                    <a:pt x="5835551" y="3358164"/>
+                  </a:lnTo>
+                  <a:lnTo>
+                    <a:pt x="5913185" y="3367865"/>
+                  </a:lnTo>
+                  <a:lnTo>
+                    <a:pt x="5990820" y="3377246"/>
+                  </a:lnTo>
+                  <a:lnTo>
+                    <a:pt x="6068454" y="3386319"/>
+                  </a:lnTo>
+                  <a:lnTo>
+                    <a:pt x="6146088" y="3395092"/>
+                  </a:lnTo>
+                  <a:lnTo>
+                    <a:pt x="6223722" y="3403577"/>
+                  </a:lnTo>
+                  <a:lnTo>
+                    <a:pt x="6301356" y="3411782"/>
+                  </a:lnTo>
+                  <a:lnTo>
+                    <a:pt x="6378990" y="3419716"/>
+                  </a:lnTo>
+                  <a:lnTo>
+                    <a:pt x="6456624" y="3427389"/>
+                  </a:lnTo>
+                  <a:lnTo>
+                    <a:pt x="6534258" y="3434810"/>
+                  </a:lnTo>
+                  <a:lnTo>
+                    <a:pt x="6611892" y="3441986"/>
+                  </a:lnTo>
+                  <a:lnTo>
+                    <a:pt x="6689526" y="3448925"/>
+                  </a:lnTo>
+                  <a:lnTo>
+                    <a:pt x="6767160" y="3455637"/>
+                  </a:lnTo>
+                  <a:lnTo>
+                    <a:pt x="6844794" y="3462126"/>
+                  </a:lnTo>
+                  <a:lnTo>
+                    <a:pt x="6922428" y="3468403"/>
+                  </a:lnTo>
+                  <a:lnTo>
+                    <a:pt x="7000062" y="3474472"/>
+                  </a:lnTo>
+                  <a:lnTo>
+                    <a:pt x="7077696" y="3480341"/>
+                  </a:lnTo>
+                  <a:lnTo>
+                    <a:pt x="7155330" y="3486017"/>
+                  </a:lnTo>
+                  <a:lnTo>
+                    <a:pt x="7232964" y="3491507"/>
+                  </a:lnTo>
+                  <a:lnTo>
+                    <a:pt x="7310598" y="3496815"/>
                   </a:lnTo>
                 </a:path>
               </a:pathLst>

--- a/docs/plots/carbo/jx_carbo_linsubhr_ratio_hosp7.pptx
+++ b/docs/plots/carbo/jx_carbo_linsubhr_ratio_hosp7.pptx
@@ -3031,7 +3031,7 @@
                     <a:pt x="1936589" y="1069703"/>
                   </a:lnTo>
                   <a:lnTo>
-                    <a:pt x="2014223" y="1215983"/>
+                    <a:pt x="2014223" y="1215982"/>
                   </a:lnTo>
                   <a:lnTo>
                     <a:pt x="2091857" y="1353978"/>
@@ -3043,7 +3043,7 @@
                     <a:pt x="2247125" y="1606966"/>
                   </a:lnTo>
                   <a:lnTo>
-                    <a:pt x="2324759" y="1722819"/>
+                    <a:pt x="2324759" y="1722818"/>
                   </a:lnTo>
                   <a:lnTo>
                     <a:pt x="2402393" y="1832110"/>
@@ -3581,7 +3581,7 @@
                     <a:pt x="461320" y="1069703"/>
                   </a:lnTo>
                   <a:lnTo>
-                    <a:pt x="538954" y="1215983"/>
+                    <a:pt x="538954" y="1215982"/>
                   </a:lnTo>
                   <a:lnTo>
                     <a:pt x="616588" y="1353978"/>
@@ -3593,7 +3593,7 @@
                     <a:pt x="771856" y="1606966"/>
                   </a:lnTo>
                   <a:lnTo>
-                    <a:pt x="849490" y="1722819"/>
+                    <a:pt x="849490" y="1722818"/>
                   </a:lnTo>
                   <a:lnTo>
                     <a:pt x="927124" y="1832110"/>
@@ -3611,7 +3611,7 @@
                     <a:pt x="1237660" y="2210789"/>
                   </a:lnTo>
                   <a:lnTo>
-                    <a:pt x="1315295" y="2292445"/>
+                    <a:pt x="1315294" y="2292445"/>
                   </a:lnTo>
                   <a:lnTo>
                     <a:pt x="1392929" y="2369477"/>
@@ -3746,7 +3746,7 @@
                     <a:pt x="4731192" y="3018520"/>
                   </a:lnTo>
                   <a:lnTo>
-                    <a:pt x="4808827" y="3024010"/>
+                    <a:pt x="4808826" y="3024010"/>
                   </a:lnTo>
                   <a:lnTo>
                     <a:pt x="4886461" y="3029452"/>
@@ -3873,10 +3873,10 @@
                     <a:pt x="5973559" y="1146171"/>
                   </a:lnTo>
                   <a:lnTo>
-                    <a:pt x="5895925" y="1138691"/>
-                  </a:lnTo>
-                  <a:lnTo>
-                    <a:pt x="5818291" y="1130762"/>
+                    <a:pt x="5895925" y="1138692"/>
+                  </a:lnTo>
+                  <a:lnTo>
+                    <a:pt x="5818291" y="1130763"/>
                   </a:lnTo>
                   <a:lnTo>
                     <a:pt x="5740657" y="1122357"/>
@@ -4132,7 +4132,7 @@
                     <a:pt x="0" y="0"/>
                   </a:moveTo>
                   <a:lnTo>
-                    <a:pt x="12998" y="20715"/>
+                    <a:pt x="12998" y="20714"/>
                   </a:lnTo>
                   <a:lnTo>
                     <a:pt x="90632" y="140360"/>
@@ -4144,7 +4144,7 @@
                     <a:pt x="245900" y="367956"/>
                   </a:lnTo>
                   <a:lnTo>
-                    <a:pt x="323534" y="476163"/>
+                    <a:pt x="323534" y="476162"/>
                   </a:lnTo>
                   <a:lnTo>
                     <a:pt x="401168" y="580804"/>
@@ -4162,10 +4162,10 @@
                     <a:pt x="711704" y="966016"/>
                   </a:lnTo>
                   <a:lnTo>
-                    <a:pt x="789339" y="1054521"/>
-                  </a:lnTo>
-                  <a:lnTo>
-                    <a:pt x="866973" y="1140110"/>
+                    <a:pt x="789338" y="1054521"/>
+                  </a:lnTo>
+                  <a:lnTo>
+                    <a:pt x="866972" y="1140110"/>
                   </a:lnTo>
                   <a:lnTo>
                     <a:pt x="944607" y="1222879"/>
@@ -4231,7 +4231,7 @@
                     <a:pt x="2497287" y="2409250"/>
                   </a:lnTo>
                   <a:lnTo>
-                    <a:pt x="2574922" y="2450210"/>
+                    <a:pt x="2574921" y="2450210"/>
                   </a:lnTo>
                   <a:lnTo>
                     <a:pt x="2652556" y="2489822"/>
@@ -4297,7 +4297,7 @@
                     <a:pt x="4205236" y="3057588"/>
                   </a:lnTo>
                   <a:lnTo>
-                    <a:pt x="4282871" y="3077190"/>
+                    <a:pt x="4282870" y="3077190"/>
                   </a:lnTo>
                   <a:lnTo>
                     <a:pt x="4360505" y="3096147"/>
@@ -4363,7 +4363,7 @@
                     <a:pt x="5913185" y="3367865"/>
                   </a:lnTo>
                   <a:lnTo>
-                    <a:pt x="5990820" y="3377246"/>
+                    <a:pt x="5990819" y="3377246"/>
                   </a:lnTo>
                   <a:lnTo>
                     <a:pt x="6068454" y="3386319"/>
@@ -4390,7 +4390,7 @@
                     <a:pt x="6611892" y="3441986"/>
                   </a:lnTo>
                   <a:lnTo>
-                    <a:pt x="6689526" y="3448925"/>
+                    <a:pt x="6689526" y="3448926"/>
                   </a:lnTo>
                   <a:lnTo>
                     <a:pt x="6767160" y="3455637"/>

--- a/docs/plots/carbo/jx_carbo_linsubhr_ratio_hosp7.pptx
+++ b/docs/plots/carbo/jx_carbo_linsubhr_ratio_hosp7.pptx
@@ -2271,7 +2271,7 @@
           </p:nvSpPr>
           <p:spPr>
             <a:xfrm>
-              <a:off x="817517" y="5114368"/>
+              <a:off x="817517" y="5142518"/>
               <a:ext cx="7799693" cy="0"/>
             </a:xfrm>
             <a:custGeom>
@@ -2314,7 +2314,7 @@
           </p:nvSpPr>
           <p:spPr>
             <a:xfrm>
-              <a:off x="817517" y="4244691"/>
+              <a:off x="817517" y="4313054"/>
               <a:ext cx="7799693" cy="0"/>
             </a:xfrm>
             <a:custGeom>
@@ -2357,7 +2357,7 @@
           </p:nvSpPr>
           <p:spPr>
             <a:xfrm>
-              <a:off x="817517" y="3375014"/>
+              <a:off x="817517" y="3483591"/>
               <a:ext cx="7799693" cy="0"/>
             </a:xfrm>
             <a:custGeom>
@@ -2400,7 +2400,7 @@
           </p:nvSpPr>
           <p:spPr>
             <a:xfrm>
-              <a:off x="817517" y="2505337"/>
+              <a:off x="817517" y="2654127"/>
               <a:ext cx="7799693" cy="0"/>
             </a:xfrm>
             <a:custGeom>
@@ -2443,15 +2443,15 @@
           </p:nvSpPr>
           <p:spPr>
             <a:xfrm>
-              <a:off x="1615213" y="1896563"/>
-              <a:ext cx="0" cy="3826579"/>
+              <a:off x="1615213" y="2073503"/>
+              <a:ext cx="0" cy="3649639"/>
             </a:xfrm>
             <a:custGeom>
               <a:avLst/>
               <a:pathLst>
-                <a:path w="0" h="3826579">
+                <a:path w="0" h="3649639">
                   <a:moveTo>
-                    <a:pt x="0" y="3826579"/>
+                    <a:pt x="0" y="3649639"/>
                   </a:moveTo>
                   <a:lnTo>
                     <a:pt x="0" y="0"/>
@@ -2486,15 +2486,15 @@
           </p:nvSpPr>
           <p:spPr>
             <a:xfrm>
-              <a:off x="3387871" y="1896563"/>
-              <a:ext cx="0" cy="3826579"/>
+              <a:off x="3387871" y="2073503"/>
+              <a:ext cx="0" cy="3649639"/>
             </a:xfrm>
             <a:custGeom>
               <a:avLst/>
               <a:pathLst>
-                <a:path w="0" h="3826579">
+                <a:path w="0" h="3649639">
                   <a:moveTo>
-                    <a:pt x="0" y="3826579"/>
+                    <a:pt x="0" y="3649639"/>
                   </a:moveTo>
                   <a:lnTo>
                     <a:pt x="0" y="0"/>
@@ -2529,15 +2529,15 @@
           </p:nvSpPr>
           <p:spPr>
             <a:xfrm>
-              <a:off x="5160528" y="1896563"/>
-              <a:ext cx="0" cy="3826579"/>
+              <a:off x="5160528" y="2073503"/>
+              <a:ext cx="0" cy="3649639"/>
             </a:xfrm>
             <a:custGeom>
               <a:avLst/>
               <a:pathLst>
-                <a:path w="0" h="3826579">
+                <a:path w="0" h="3649639">
                   <a:moveTo>
-                    <a:pt x="0" y="3826579"/>
+                    <a:pt x="0" y="3649639"/>
                   </a:moveTo>
                   <a:lnTo>
                     <a:pt x="0" y="0"/>
@@ -2572,15 +2572,15 @@
           </p:nvSpPr>
           <p:spPr>
             <a:xfrm>
-              <a:off x="6933186" y="1896563"/>
-              <a:ext cx="0" cy="3826579"/>
+              <a:off x="6933186" y="2073503"/>
+              <a:ext cx="0" cy="3649639"/>
             </a:xfrm>
             <a:custGeom>
               <a:avLst/>
               <a:pathLst>
-                <a:path w="0" h="3826579">
+                <a:path w="0" h="3649639">
                   <a:moveTo>
-                    <a:pt x="0" y="3826579"/>
+                    <a:pt x="0" y="3649639"/>
                   </a:moveTo>
                   <a:lnTo>
                     <a:pt x="0" y="0"/>
@@ -2615,7 +2615,7 @@
           </p:nvSpPr>
           <p:spPr>
             <a:xfrm>
-              <a:off x="817517" y="5549207"/>
+              <a:off x="817517" y="5557249"/>
               <a:ext cx="7799693" cy="0"/>
             </a:xfrm>
             <a:custGeom>
@@ -2658,7 +2658,7 @@
           </p:nvSpPr>
           <p:spPr>
             <a:xfrm>
-              <a:off x="817517" y="4679530"/>
+              <a:off x="817517" y="4727786"/>
               <a:ext cx="7799693" cy="0"/>
             </a:xfrm>
             <a:custGeom>
@@ -2701,7 +2701,7 @@
           </p:nvSpPr>
           <p:spPr>
             <a:xfrm>
-              <a:off x="817517" y="3809853"/>
+              <a:off x="817517" y="3898322"/>
               <a:ext cx="7799693" cy="0"/>
             </a:xfrm>
             <a:custGeom>
@@ -2744,7 +2744,7 @@
           </p:nvSpPr>
           <p:spPr>
             <a:xfrm>
-              <a:off x="817517" y="2940175"/>
+              <a:off x="817517" y="3068859"/>
               <a:ext cx="7799693" cy="0"/>
             </a:xfrm>
             <a:custGeom>
@@ -2787,7 +2787,7 @@
           </p:nvSpPr>
           <p:spPr>
             <a:xfrm>
-              <a:off x="817517" y="2070498"/>
+              <a:off x="817517" y="2239395"/>
               <a:ext cx="7799693" cy="0"/>
             </a:xfrm>
             <a:custGeom>
@@ -2830,15 +2830,15 @@
           </p:nvSpPr>
           <p:spPr>
             <a:xfrm>
-              <a:off x="2501542" y="1896563"/>
-              <a:ext cx="0" cy="3826579"/>
+              <a:off x="2501542" y="2073503"/>
+              <a:ext cx="0" cy="3649639"/>
             </a:xfrm>
             <a:custGeom>
               <a:avLst/>
               <a:pathLst>
-                <a:path w="0" h="3826579">
+                <a:path w="0" h="3649639">
                   <a:moveTo>
-                    <a:pt x="0" y="3826579"/>
+                    <a:pt x="0" y="3649639"/>
                   </a:moveTo>
                   <a:lnTo>
                     <a:pt x="0" y="0"/>
@@ -2873,15 +2873,15 @@
           </p:nvSpPr>
           <p:spPr>
             <a:xfrm>
-              <a:off x="4274200" y="1896563"/>
-              <a:ext cx="0" cy="3826579"/>
+              <a:off x="4274200" y="2073503"/>
+              <a:ext cx="0" cy="3649639"/>
             </a:xfrm>
             <a:custGeom>
               <a:avLst/>
               <a:pathLst>
-                <a:path w="0" h="3826579">
+                <a:path w="0" h="3649639">
                   <a:moveTo>
-                    <a:pt x="0" y="3826579"/>
+                    <a:pt x="0" y="3649639"/>
                   </a:moveTo>
                   <a:lnTo>
                     <a:pt x="0" y="0"/>
@@ -2916,15 +2916,15 @@
           </p:nvSpPr>
           <p:spPr>
             <a:xfrm>
-              <a:off x="6046857" y="1896563"/>
-              <a:ext cx="0" cy="3826579"/>
+              <a:off x="6046857" y="2073503"/>
+              <a:ext cx="0" cy="3649639"/>
             </a:xfrm>
             <a:custGeom>
               <a:avLst/>
               <a:pathLst>
-                <a:path w="0" h="3826579">
+                <a:path w="0" h="3649639">
                   <a:moveTo>
-                    <a:pt x="0" y="3826579"/>
+                    <a:pt x="0" y="3649639"/>
                   </a:moveTo>
                   <a:lnTo>
                     <a:pt x="0" y="0"/>
@@ -2959,15 +2959,15 @@
           </p:nvSpPr>
           <p:spPr>
             <a:xfrm>
-              <a:off x="7819515" y="1896563"/>
-              <a:ext cx="0" cy="3826579"/>
+              <a:off x="7819515" y="2073503"/>
+              <a:ext cx="0" cy="3649639"/>
             </a:xfrm>
             <a:custGeom>
               <a:avLst/>
               <a:pathLst>
-                <a:path w="0" h="3826579">
+                <a:path w="0" h="3649639">
                   <a:moveTo>
-                    <a:pt x="0" y="3826579"/>
+                    <a:pt x="0" y="3649639"/>
                   </a:moveTo>
                   <a:lnTo>
                     <a:pt x="0" y="0"/>
@@ -3002,531 +3002,531 @@
           </p:nvSpPr>
           <p:spPr>
             <a:xfrm>
-              <a:off x="817517" y="1896563"/>
-              <a:ext cx="7370972" cy="3609015"/>
+              <a:off x="817517" y="2073503"/>
+              <a:ext cx="7370972" cy="3442136"/>
             </a:xfrm>
             <a:custGeom>
               <a:avLst/>
               <a:pathLst>
-                <a:path w="7370972" h="3609015">
+                <a:path w="7370972" h="3442136">
                   <a:moveTo>
                     <a:pt x="1475269" y="0"/>
                   </a:moveTo>
                   <a:lnTo>
-                    <a:pt x="1548419" y="195552"/>
-                  </a:lnTo>
-                  <a:lnTo>
-                    <a:pt x="1626053" y="391337"/>
-                  </a:lnTo>
-                  <a:lnTo>
-                    <a:pt x="1703687" y="576035"/>
-                  </a:lnTo>
-                  <a:lnTo>
-                    <a:pt x="1781321" y="750272"/>
-                  </a:lnTo>
-                  <a:lnTo>
-                    <a:pt x="1858955" y="914642"/>
-                  </a:lnTo>
-                  <a:lnTo>
-                    <a:pt x="1936589" y="1069703"/>
-                  </a:lnTo>
-                  <a:lnTo>
-                    <a:pt x="2014223" y="1215982"/>
-                  </a:lnTo>
-                  <a:lnTo>
-                    <a:pt x="2091857" y="1353978"/>
-                  </a:lnTo>
-                  <a:lnTo>
-                    <a:pt x="2169491" y="1484158"/>
-                  </a:lnTo>
-                  <a:lnTo>
-                    <a:pt x="2247125" y="1606966"/>
-                  </a:lnTo>
-                  <a:lnTo>
-                    <a:pt x="2324759" y="1722818"/>
-                  </a:lnTo>
-                  <a:lnTo>
-                    <a:pt x="2402393" y="1832110"/>
-                  </a:lnTo>
-                  <a:lnTo>
-                    <a:pt x="2480027" y="1935212"/>
-                  </a:lnTo>
-                  <a:lnTo>
-                    <a:pt x="2557661" y="2032476"/>
-                  </a:lnTo>
-                  <a:lnTo>
-                    <a:pt x="2635295" y="2124230"/>
-                  </a:lnTo>
-                  <a:lnTo>
-                    <a:pt x="2712930" y="2210789"/>
-                  </a:lnTo>
-                  <a:lnTo>
-                    <a:pt x="2790564" y="2292445"/>
-                  </a:lnTo>
-                  <a:lnTo>
-                    <a:pt x="2868198" y="2369477"/>
-                  </a:lnTo>
-                  <a:lnTo>
-                    <a:pt x="2945832" y="2442147"/>
-                  </a:lnTo>
-                  <a:lnTo>
-                    <a:pt x="3023466" y="2510701"/>
-                  </a:lnTo>
-                  <a:lnTo>
-                    <a:pt x="3101100" y="2575372"/>
-                  </a:lnTo>
-                  <a:lnTo>
-                    <a:pt x="3178734" y="2636381"/>
-                  </a:lnTo>
-                  <a:lnTo>
-                    <a:pt x="3256368" y="2693935"/>
-                  </a:lnTo>
-                  <a:lnTo>
-                    <a:pt x="3334002" y="2748230"/>
-                  </a:lnTo>
-                  <a:lnTo>
-                    <a:pt x="3411636" y="2785445"/>
-                  </a:lnTo>
-                  <a:lnTo>
-                    <a:pt x="3489270" y="2792952"/>
-                  </a:lnTo>
-                  <a:lnTo>
-                    <a:pt x="3566904" y="2800395"/>
-                  </a:lnTo>
-                  <a:lnTo>
-                    <a:pt x="3644538" y="2807773"/>
-                  </a:lnTo>
-                  <a:lnTo>
-                    <a:pt x="3722172" y="2815088"/>
-                  </a:lnTo>
-                  <a:lnTo>
-                    <a:pt x="3799806" y="2822339"/>
-                  </a:lnTo>
-                  <a:lnTo>
-                    <a:pt x="3877440" y="2829527"/>
-                  </a:lnTo>
-                  <a:lnTo>
-                    <a:pt x="3955074" y="2836653"/>
-                  </a:lnTo>
-                  <a:lnTo>
-                    <a:pt x="4032708" y="2843718"/>
-                  </a:lnTo>
-                  <a:lnTo>
-                    <a:pt x="4110342" y="2850721"/>
-                  </a:lnTo>
-                  <a:lnTo>
-                    <a:pt x="4187976" y="2857663"/>
-                  </a:lnTo>
-                  <a:lnTo>
-                    <a:pt x="4265610" y="2864546"/>
-                  </a:lnTo>
-                  <a:lnTo>
-                    <a:pt x="4343244" y="2871369"/>
-                  </a:lnTo>
-                  <a:lnTo>
-                    <a:pt x="4420879" y="2878133"/>
-                  </a:lnTo>
-                  <a:lnTo>
-                    <a:pt x="4498513" y="2884838"/>
-                  </a:lnTo>
-                  <a:lnTo>
-                    <a:pt x="4576147" y="2891485"/>
-                  </a:lnTo>
-                  <a:lnTo>
-                    <a:pt x="4653781" y="2898075"/>
-                  </a:lnTo>
-                  <a:lnTo>
-                    <a:pt x="4731415" y="2904607"/>
-                  </a:lnTo>
-                  <a:lnTo>
-                    <a:pt x="4809049" y="2911083"/>
-                  </a:lnTo>
-                  <a:lnTo>
-                    <a:pt x="4886683" y="2917503"/>
-                  </a:lnTo>
-                  <a:lnTo>
-                    <a:pt x="4964317" y="2923868"/>
-                  </a:lnTo>
-                  <a:lnTo>
-                    <a:pt x="5041951" y="2930177"/>
-                  </a:lnTo>
-                  <a:lnTo>
-                    <a:pt x="5119585" y="2936432"/>
-                  </a:lnTo>
-                  <a:lnTo>
-                    <a:pt x="5197219" y="2942632"/>
-                  </a:lnTo>
-                  <a:lnTo>
-                    <a:pt x="5274853" y="2948779"/>
-                  </a:lnTo>
-                  <a:lnTo>
-                    <a:pt x="5352487" y="2954873"/>
-                  </a:lnTo>
-                  <a:lnTo>
-                    <a:pt x="5430121" y="2960914"/>
-                  </a:lnTo>
-                  <a:lnTo>
-                    <a:pt x="5507755" y="2966903"/>
-                  </a:lnTo>
-                  <a:lnTo>
-                    <a:pt x="5585389" y="2972839"/>
-                  </a:lnTo>
-                  <a:lnTo>
-                    <a:pt x="5663023" y="2978725"/>
-                  </a:lnTo>
-                  <a:lnTo>
-                    <a:pt x="5740657" y="2984559"/>
-                  </a:lnTo>
-                  <a:lnTo>
-                    <a:pt x="5818291" y="2990343"/>
-                  </a:lnTo>
-                  <a:lnTo>
-                    <a:pt x="5895925" y="2996077"/>
-                  </a:lnTo>
-                  <a:lnTo>
-                    <a:pt x="5973559" y="3001761"/>
-                  </a:lnTo>
-                  <a:lnTo>
-                    <a:pt x="6051193" y="3007396"/>
-                  </a:lnTo>
-                  <a:lnTo>
-                    <a:pt x="6128827" y="3012982"/>
-                  </a:lnTo>
-                  <a:lnTo>
-                    <a:pt x="6206462" y="3018520"/>
-                  </a:lnTo>
-                  <a:lnTo>
-                    <a:pt x="6284096" y="3024010"/>
-                  </a:lnTo>
-                  <a:lnTo>
-                    <a:pt x="6361730" y="3029452"/>
-                  </a:lnTo>
-                  <a:lnTo>
-                    <a:pt x="6439364" y="3034847"/>
-                  </a:lnTo>
-                  <a:lnTo>
-                    <a:pt x="6516998" y="3040196"/>
-                  </a:lnTo>
-                  <a:lnTo>
-                    <a:pt x="6594632" y="3045498"/>
-                  </a:lnTo>
-                  <a:lnTo>
-                    <a:pt x="6672266" y="3050754"/>
-                  </a:lnTo>
-                  <a:lnTo>
-                    <a:pt x="6749900" y="3055965"/>
-                  </a:lnTo>
-                  <a:lnTo>
-                    <a:pt x="6827534" y="3061131"/>
-                  </a:lnTo>
-                  <a:lnTo>
-                    <a:pt x="6905168" y="3066252"/>
-                  </a:lnTo>
-                  <a:lnTo>
-                    <a:pt x="6982802" y="3071329"/>
-                  </a:lnTo>
-                  <a:lnTo>
-                    <a:pt x="7060436" y="3076361"/>
-                  </a:lnTo>
-                  <a:lnTo>
-                    <a:pt x="7138070" y="3081350"/>
-                  </a:lnTo>
-                  <a:lnTo>
-                    <a:pt x="7215704" y="3086296"/>
-                  </a:lnTo>
-                  <a:lnTo>
-                    <a:pt x="7293338" y="3091199"/>
-                  </a:lnTo>
-                  <a:lnTo>
-                    <a:pt x="7370972" y="3096060"/>
-                  </a:lnTo>
-                  <a:lnTo>
-                    <a:pt x="7370972" y="3609015"/>
-                  </a:lnTo>
-                  <a:lnTo>
-                    <a:pt x="7293338" y="3606396"/>
-                  </a:lnTo>
-                  <a:lnTo>
-                    <a:pt x="7215704" y="3603620"/>
-                  </a:lnTo>
-                  <a:lnTo>
-                    <a:pt x="7138070" y="3600677"/>
-                  </a:lnTo>
-                  <a:lnTo>
-                    <a:pt x="7060436" y="3597557"/>
-                  </a:lnTo>
-                  <a:lnTo>
-                    <a:pt x="6982802" y="3594250"/>
-                  </a:lnTo>
-                  <a:lnTo>
-                    <a:pt x="6905168" y="3590745"/>
-                  </a:lnTo>
-                  <a:lnTo>
-                    <a:pt x="6827534" y="3587029"/>
-                  </a:lnTo>
-                  <a:lnTo>
-                    <a:pt x="6749900" y="3583090"/>
-                  </a:lnTo>
-                  <a:lnTo>
-                    <a:pt x="6672266" y="3578914"/>
-                  </a:lnTo>
-                  <a:lnTo>
-                    <a:pt x="6594632" y="3574488"/>
-                  </a:lnTo>
-                  <a:lnTo>
-                    <a:pt x="6516998" y="3569796"/>
-                  </a:lnTo>
-                  <a:lnTo>
-                    <a:pt x="6439364" y="3564823"/>
-                  </a:lnTo>
-                  <a:lnTo>
-                    <a:pt x="6361730" y="3559551"/>
-                  </a:lnTo>
-                  <a:lnTo>
-                    <a:pt x="6284096" y="3553962"/>
-                  </a:lnTo>
-                  <a:lnTo>
-                    <a:pt x="6206462" y="3548038"/>
-                  </a:lnTo>
-                  <a:lnTo>
-                    <a:pt x="6128827" y="3541758"/>
-                  </a:lnTo>
-                  <a:lnTo>
-                    <a:pt x="6051193" y="3535102"/>
-                  </a:lnTo>
-                  <a:lnTo>
-                    <a:pt x="5973559" y="3528045"/>
-                  </a:lnTo>
-                  <a:lnTo>
-                    <a:pt x="5895925" y="3520565"/>
-                  </a:lnTo>
-                  <a:lnTo>
-                    <a:pt x="5818291" y="3512636"/>
-                  </a:lnTo>
-                  <a:lnTo>
-                    <a:pt x="5740657" y="3504231"/>
-                  </a:lnTo>
-                  <a:lnTo>
-                    <a:pt x="5663023" y="3495322"/>
-                  </a:lnTo>
-                  <a:lnTo>
-                    <a:pt x="5585389" y="3485877"/>
-                  </a:lnTo>
-                  <a:lnTo>
-                    <a:pt x="5507755" y="3475866"/>
-                  </a:lnTo>
-                  <a:lnTo>
-                    <a:pt x="5430121" y="3465253"/>
-                  </a:lnTo>
-                  <a:lnTo>
-                    <a:pt x="5352487" y="3454004"/>
-                  </a:lnTo>
-                  <a:lnTo>
-                    <a:pt x="5274853" y="3442079"/>
-                  </a:lnTo>
-                  <a:lnTo>
-                    <a:pt x="5197219" y="3429438"/>
-                  </a:lnTo>
-                  <a:lnTo>
-                    <a:pt x="5119585" y="3416039"/>
-                  </a:lnTo>
-                  <a:lnTo>
-                    <a:pt x="5041951" y="3401835"/>
-                  </a:lnTo>
-                  <a:lnTo>
-                    <a:pt x="4964317" y="3386778"/>
-                  </a:lnTo>
-                  <a:lnTo>
-                    <a:pt x="4886683" y="3370817"/>
-                  </a:lnTo>
-                  <a:lnTo>
-                    <a:pt x="4809049" y="3353899"/>
-                  </a:lnTo>
-                  <a:lnTo>
-                    <a:pt x="4731415" y="3335964"/>
-                  </a:lnTo>
-                  <a:lnTo>
-                    <a:pt x="4653781" y="3316953"/>
-                  </a:lnTo>
-                  <a:lnTo>
-                    <a:pt x="4576147" y="3296800"/>
-                  </a:lnTo>
-                  <a:lnTo>
-                    <a:pt x="4498513" y="3275438"/>
-                  </a:lnTo>
-                  <a:lnTo>
-                    <a:pt x="4420879" y="3252794"/>
-                  </a:lnTo>
-                  <a:lnTo>
-                    <a:pt x="4343244" y="3228789"/>
-                  </a:lnTo>
-                  <a:lnTo>
-                    <a:pt x="4265610" y="3203344"/>
-                  </a:lnTo>
-                  <a:lnTo>
-                    <a:pt x="4187976" y="3176372"/>
-                  </a:lnTo>
-                  <a:lnTo>
-                    <a:pt x="4110342" y="3147780"/>
-                  </a:lnTo>
-                  <a:lnTo>
-                    <a:pt x="4032708" y="3117471"/>
-                  </a:lnTo>
-                  <a:lnTo>
-                    <a:pt x="3955074" y="3085344"/>
-                  </a:lnTo>
-                  <a:lnTo>
-                    <a:pt x="3877440" y="3051287"/>
-                  </a:lnTo>
-                  <a:lnTo>
-                    <a:pt x="3799806" y="3015186"/>
-                  </a:lnTo>
-                  <a:lnTo>
-                    <a:pt x="3722172" y="2976917"/>
-                  </a:lnTo>
-                  <a:lnTo>
-                    <a:pt x="3644538" y="2936352"/>
-                  </a:lnTo>
-                  <a:lnTo>
-                    <a:pt x="3566904" y="2893351"/>
-                  </a:lnTo>
-                  <a:lnTo>
-                    <a:pt x="3489270" y="2847768"/>
-                  </a:lnTo>
-                  <a:lnTo>
-                    <a:pt x="3411636" y="2799449"/>
-                  </a:lnTo>
-                  <a:lnTo>
-                    <a:pt x="3334002" y="2777871"/>
-                  </a:lnTo>
-                  <a:lnTo>
-                    <a:pt x="3256368" y="2770232"/>
-                  </a:lnTo>
-                  <a:lnTo>
-                    <a:pt x="3178734" y="2762526"/>
-                  </a:lnTo>
-                  <a:lnTo>
-                    <a:pt x="3101100" y="2754752"/>
-                  </a:lnTo>
-                  <a:lnTo>
-                    <a:pt x="3023466" y="2746911"/>
-                  </a:lnTo>
-                  <a:lnTo>
-                    <a:pt x="2945832" y="2739001"/>
-                  </a:lnTo>
-                  <a:lnTo>
-                    <a:pt x="2868198" y="2731022"/>
-                  </a:lnTo>
-                  <a:lnTo>
-                    <a:pt x="2790564" y="2722974"/>
-                  </a:lnTo>
-                  <a:lnTo>
-                    <a:pt x="2712930" y="2714855"/>
-                  </a:lnTo>
-                  <a:lnTo>
-                    <a:pt x="2635295" y="2706665"/>
-                  </a:lnTo>
-                  <a:lnTo>
-                    <a:pt x="2557661" y="2698404"/>
-                  </a:lnTo>
-                  <a:lnTo>
-                    <a:pt x="2480027" y="2690071"/>
-                  </a:lnTo>
-                  <a:lnTo>
-                    <a:pt x="2402393" y="2681664"/>
-                  </a:lnTo>
-                  <a:lnTo>
-                    <a:pt x="2324759" y="2673185"/>
-                  </a:lnTo>
-                  <a:lnTo>
-                    <a:pt x="2247125" y="2664631"/>
-                  </a:lnTo>
-                  <a:lnTo>
-                    <a:pt x="2169491" y="2656003"/>
-                  </a:lnTo>
-                  <a:lnTo>
-                    <a:pt x="2091857" y="2647299"/>
-                  </a:lnTo>
-                  <a:lnTo>
-                    <a:pt x="2014223" y="2638519"/>
-                  </a:lnTo>
-                  <a:lnTo>
-                    <a:pt x="1936589" y="2629663"/>
-                  </a:lnTo>
-                  <a:lnTo>
-                    <a:pt x="1858955" y="2620729"/>
-                  </a:lnTo>
-                  <a:lnTo>
-                    <a:pt x="1781321" y="2611718"/>
-                  </a:lnTo>
-                  <a:lnTo>
-                    <a:pt x="1703687" y="2602627"/>
-                  </a:lnTo>
-                  <a:lnTo>
-                    <a:pt x="1626053" y="2593457"/>
-                  </a:lnTo>
-                  <a:lnTo>
-                    <a:pt x="1548419" y="2584207"/>
-                  </a:lnTo>
-                  <a:lnTo>
-                    <a:pt x="1470785" y="2574877"/>
-                  </a:lnTo>
-                  <a:lnTo>
-                    <a:pt x="1393151" y="2565465"/>
-                  </a:lnTo>
-                  <a:lnTo>
-                    <a:pt x="1315517" y="2555970"/>
-                  </a:lnTo>
-                  <a:lnTo>
-                    <a:pt x="1237883" y="2546393"/>
-                  </a:lnTo>
-                  <a:lnTo>
-                    <a:pt x="1160249" y="2536732"/>
-                  </a:lnTo>
-                  <a:lnTo>
-                    <a:pt x="1082615" y="2526987"/>
-                  </a:lnTo>
-                  <a:lnTo>
-                    <a:pt x="1004981" y="2517156"/>
-                  </a:lnTo>
-                  <a:lnTo>
-                    <a:pt x="927346" y="2507240"/>
-                  </a:lnTo>
-                  <a:lnTo>
-                    <a:pt x="849712" y="2497237"/>
-                  </a:lnTo>
-                  <a:lnTo>
-                    <a:pt x="772078" y="2487147"/>
-                  </a:lnTo>
-                  <a:lnTo>
-                    <a:pt x="694444" y="2476969"/>
-                  </a:lnTo>
-                  <a:lnTo>
-                    <a:pt x="616810" y="2466701"/>
-                  </a:lnTo>
-                  <a:lnTo>
-                    <a:pt x="539176" y="2456345"/>
-                  </a:lnTo>
-                  <a:lnTo>
-                    <a:pt x="461542" y="2445897"/>
-                  </a:lnTo>
-                  <a:lnTo>
-                    <a:pt x="383908" y="2435359"/>
-                  </a:lnTo>
-                  <a:lnTo>
-                    <a:pt x="306274" y="2424728"/>
-                  </a:lnTo>
-                  <a:lnTo>
-                    <a:pt x="228640" y="2414005"/>
-                  </a:lnTo>
-                  <a:lnTo>
-                    <a:pt x="151006" y="2403188"/>
-                  </a:lnTo>
-                  <a:lnTo>
-                    <a:pt x="73372" y="2392276"/>
-                  </a:lnTo>
-                  <a:lnTo>
-                    <a:pt x="0" y="2381873"/>
+                    <a:pt x="1548419" y="186510"/>
+                  </a:lnTo>
+                  <a:lnTo>
+                    <a:pt x="1626053" y="373242"/>
+                  </a:lnTo>
+                  <a:lnTo>
+                    <a:pt x="1703687" y="549399"/>
+                  </a:lnTo>
+                  <a:lnTo>
+                    <a:pt x="1781321" y="715580"/>
+                  </a:lnTo>
+                  <a:lnTo>
+                    <a:pt x="1858955" y="872349"/>
+                  </a:lnTo>
+                  <a:lnTo>
+                    <a:pt x="1936589" y="1020240"/>
+                  </a:lnTo>
+                  <a:lnTo>
+                    <a:pt x="2014223" y="1159756"/>
+                  </a:lnTo>
+                  <a:lnTo>
+                    <a:pt x="2091857" y="1291370"/>
+                  </a:lnTo>
+                  <a:lnTo>
+                    <a:pt x="2169491" y="1415531"/>
+                  </a:lnTo>
+                  <a:lnTo>
+                    <a:pt x="2247125" y="1532660"/>
+                  </a:lnTo>
+                  <a:lnTo>
+                    <a:pt x="2324759" y="1643156"/>
+                  </a:lnTo>
+                  <a:lnTo>
+                    <a:pt x="2402393" y="1747394"/>
+                  </a:lnTo>
+                  <a:lnTo>
+                    <a:pt x="2480027" y="1845729"/>
+                  </a:lnTo>
+                  <a:lnTo>
+                    <a:pt x="2557661" y="1938495"/>
+                  </a:lnTo>
+                  <a:lnTo>
+                    <a:pt x="2635295" y="2026007"/>
+                  </a:lnTo>
+                  <a:lnTo>
+                    <a:pt x="2712930" y="2108563"/>
+                  </a:lnTo>
+                  <a:lnTo>
+                    <a:pt x="2790564" y="2186444"/>
+                  </a:lnTo>
+                  <a:lnTo>
+                    <a:pt x="2868198" y="2259914"/>
+                  </a:lnTo>
+                  <a:lnTo>
+                    <a:pt x="2945832" y="2329223"/>
+                  </a:lnTo>
+                  <a:lnTo>
+                    <a:pt x="3023466" y="2394607"/>
+                  </a:lnTo>
+                  <a:lnTo>
+                    <a:pt x="3101100" y="2456288"/>
+                  </a:lnTo>
+                  <a:lnTo>
+                    <a:pt x="3178734" y="2514476"/>
+                  </a:lnTo>
+                  <a:lnTo>
+                    <a:pt x="3256368" y="2569369"/>
+                  </a:lnTo>
+                  <a:lnTo>
+                    <a:pt x="3334002" y="2621153"/>
+                  </a:lnTo>
+                  <a:lnTo>
+                    <a:pt x="3411636" y="2656647"/>
+                  </a:lnTo>
+                  <a:lnTo>
+                    <a:pt x="3489270" y="2663807"/>
+                  </a:lnTo>
+                  <a:lnTo>
+                    <a:pt x="3566904" y="2670906"/>
+                  </a:lnTo>
+                  <a:lnTo>
+                    <a:pt x="3644538" y="2677943"/>
+                  </a:lnTo>
+                  <a:lnTo>
+                    <a:pt x="3722172" y="2684919"/>
+                  </a:lnTo>
+                  <a:lnTo>
+                    <a:pt x="3799806" y="2691835"/>
+                  </a:lnTo>
+                  <a:lnTo>
+                    <a:pt x="3877440" y="2698691"/>
+                  </a:lnTo>
+                  <a:lnTo>
+                    <a:pt x="3955074" y="2705487"/>
+                  </a:lnTo>
+                  <a:lnTo>
+                    <a:pt x="4032708" y="2712225"/>
+                  </a:lnTo>
+                  <a:lnTo>
+                    <a:pt x="4110342" y="2718905"/>
+                  </a:lnTo>
+                  <a:lnTo>
+                    <a:pt x="4187976" y="2725526"/>
+                  </a:lnTo>
+                  <a:lnTo>
+                    <a:pt x="4265610" y="2732090"/>
+                  </a:lnTo>
+                  <a:lnTo>
+                    <a:pt x="4343244" y="2738598"/>
+                  </a:lnTo>
+                  <a:lnTo>
+                    <a:pt x="4420879" y="2745049"/>
+                  </a:lnTo>
+                  <a:lnTo>
+                    <a:pt x="4498513" y="2751444"/>
+                  </a:lnTo>
+                  <a:lnTo>
+                    <a:pt x="4576147" y="2757784"/>
+                  </a:lnTo>
+                  <a:lnTo>
+                    <a:pt x="4653781" y="2764069"/>
+                  </a:lnTo>
+                  <a:lnTo>
+                    <a:pt x="4731415" y="2770299"/>
+                  </a:lnTo>
+                  <a:lnTo>
+                    <a:pt x="4809049" y="2776476"/>
+                  </a:lnTo>
+                  <a:lnTo>
+                    <a:pt x="4886683" y="2782599"/>
+                  </a:lnTo>
+                  <a:lnTo>
+                    <a:pt x="4964317" y="2788669"/>
+                  </a:lnTo>
+                  <a:lnTo>
+                    <a:pt x="5041951" y="2794687"/>
+                  </a:lnTo>
+                  <a:lnTo>
+                    <a:pt x="5119585" y="2800652"/>
+                  </a:lnTo>
+                  <a:lnTo>
+                    <a:pt x="5197219" y="2806566"/>
+                  </a:lnTo>
+                  <a:lnTo>
+                    <a:pt x="5274853" y="2812429"/>
+                  </a:lnTo>
+                  <a:lnTo>
+                    <a:pt x="5352487" y="2818241"/>
+                  </a:lnTo>
+                  <a:lnTo>
+                    <a:pt x="5430121" y="2824002"/>
+                  </a:lnTo>
+                  <a:lnTo>
+                    <a:pt x="5507755" y="2829714"/>
+                  </a:lnTo>
+                  <a:lnTo>
+                    <a:pt x="5585389" y="2835376"/>
+                  </a:lnTo>
+                  <a:lnTo>
+                    <a:pt x="5663023" y="2840989"/>
+                  </a:lnTo>
+                  <a:lnTo>
+                    <a:pt x="5740657" y="2846554"/>
+                  </a:lnTo>
+                  <a:lnTo>
+                    <a:pt x="5818291" y="2852071"/>
+                  </a:lnTo>
+                  <a:lnTo>
+                    <a:pt x="5895925" y="2857539"/>
+                  </a:lnTo>
+                  <a:lnTo>
+                    <a:pt x="5973559" y="2862961"/>
+                  </a:lnTo>
+                  <a:lnTo>
+                    <a:pt x="6051193" y="2868335"/>
+                  </a:lnTo>
+                  <a:lnTo>
+                    <a:pt x="6128827" y="2873663"/>
+                  </a:lnTo>
+                  <a:lnTo>
+                    <a:pt x="6206462" y="2878945"/>
+                  </a:lnTo>
+                  <a:lnTo>
+                    <a:pt x="6284096" y="2884181"/>
+                  </a:lnTo>
+                  <a:lnTo>
+                    <a:pt x="6361730" y="2889371"/>
+                  </a:lnTo>
+                  <a:lnTo>
+                    <a:pt x="6439364" y="2894517"/>
+                  </a:lnTo>
+                  <a:lnTo>
+                    <a:pt x="6516998" y="2899618"/>
+                  </a:lnTo>
+                  <a:lnTo>
+                    <a:pt x="6594632" y="2904675"/>
+                  </a:lnTo>
+                  <a:lnTo>
+                    <a:pt x="6672266" y="2909689"/>
+                  </a:lnTo>
+                  <a:lnTo>
+                    <a:pt x="6749900" y="2914659"/>
+                  </a:lnTo>
+                  <a:lnTo>
+                    <a:pt x="6827534" y="2919585"/>
+                  </a:lnTo>
+                  <a:lnTo>
+                    <a:pt x="6905168" y="2924470"/>
+                  </a:lnTo>
+                  <a:lnTo>
+                    <a:pt x="6982802" y="2929311"/>
+                  </a:lnTo>
+                  <a:lnTo>
+                    <a:pt x="7060436" y="2934111"/>
+                  </a:lnTo>
+                  <a:lnTo>
+                    <a:pt x="7138070" y="2938870"/>
+                  </a:lnTo>
+                  <a:lnTo>
+                    <a:pt x="7215704" y="2943587"/>
+                  </a:lnTo>
+                  <a:lnTo>
+                    <a:pt x="7293338" y="2948263"/>
+                  </a:lnTo>
+                  <a:lnTo>
+                    <a:pt x="7370972" y="2952899"/>
+                  </a:lnTo>
+                  <a:lnTo>
+                    <a:pt x="7370972" y="3442136"/>
+                  </a:lnTo>
+                  <a:lnTo>
+                    <a:pt x="7293338" y="3439638"/>
+                  </a:lnTo>
+                  <a:lnTo>
+                    <a:pt x="7215704" y="3436990"/>
+                  </a:lnTo>
+                  <a:lnTo>
+                    <a:pt x="7138070" y="3434183"/>
+                  </a:lnTo>
+                  <a:lnTo>
+                    <a:pt x="7060436" y="3431208"/>
+                  </a:lnTo>
+                  <a:lnTo>
+                    <a:pt x="6982802" y="3428054"/>
+                  </a:lnTo>
+                  <a:lnTo>
+                    <a:pt x="6905168" y="3424710"/>
+                  </a:lnTo>
+                  <a:lnTo>
+                    <a:pt x="6827534" y="3421166"/>
+                  </a:lnTo>
+                  <a:lnTo>
+                    <a:pt x="6749900" y="3417409"/>
+                  </a:lnTo>
+                  <a:lnTo>
+                    <a:pt x="6672266" y="3413427"/>
+                  </a:lnTo>
+                  <a:lnTo>
+                    <a:pt x="6594632" y="3409205"/>
+                  </a:lnTo>
+                  <a:lnTo>
+                    <a:pt x="6516998" y="3404730"/>
+                  </a:lnTo>
+                  <a:lnTo>
+                    <a:pt x="6439364" y="3399987"/>
+                  </a:lnTo>
+                  <a:lnTo>
+                    <a:pt x="6361730" y="3394959"/>
+                  </a:lnTo>
+                  <a:lnTo>
+                    <a:pt x="6284096" y="3389628"/>
+                  </a:lnTo>
+                  <a:lnTo>
+                    <a:pt x="6206462" y="3383978"/>
+                  </a:lnTo>
+                  <a:lnTo>
+                    <a:pt x="6128827" y="3377989"/>
+                  </a:lnTo>
+                  <a:lnTo>
+                    <a:pt x="6051193" y="3371640"/>
+                  </a:lnTo>
+                  <a:lnTo>
+                    <a:pt x="5973559" y="3364910"/>
+                  </a:lnTo>
+                  <a:lnTo>
+                    <a:pt x="5895925" y="3357776"/>
+                  </a:lnTo>
+                  <a:lnTo>
+                    <a:pt x="5818291" y="3350213"/>
+                  </a:lnTo>
+                  <a:lnTo>
+                    <a:pt x="5740657" y="3342197"/>
+                  </a:lnTo>
+                  <a:lnTo>
+                    <a:pt x="5663023" y="3333699"/>
+                  </a:lnTo>
+                  <a:lnTo>
+                    <a:pt x="5585389" y="3324692"/>
+                  </a:lnTo>
+                  <a:lnTo>
+                    <a:pt x="5507755" y="3315143"/>
+                  </a:lnTo>
+                  <a:lnTo>
+                    <a:pt x="5430121" y="3305021"/>
+                  </a:lnTo>
+                  <a:lnTo>
+                    <a:pt x="5352487" y="3294292"/>
+                  </a:lnTo>
+                  <a:lnTo>
+                    <a:pt x="5274853" y="3282919"/>
+                  </a:lnTo>
+                  <a:lnTo>
+                    <a:pt x="5197219" y="3270862"/>
+                  </a:lnTo>
+                  <a:lnTo>
+                    <a:pt x="5119585" y="3258082"/>
+                  </a:lnTo>
+                  <a:lnTo>
+                    <a:pt x="5041951" y="3244535"/>
+                  </a:lnTo>
+                  <a:lnTo>
+                    <a:pt x="4964317" y="3230175"/>
+                  </a:lnTo>
+                  <a:lnTo>
+                    <a:pt x="4886683" y="3214952"/>
+                  </a:lnTo>
+                  <a:lnTo>
+                    <a:pt x="4809049" y="3198815"/>
+                  </a:lnTo>
+                  <a:lnTo>
+                    <a:pt x="4731415" y="3181710"/>
+                  </a:lnTo>
+                  <a:lnTo>
+                    <a:pt x="4653781" y="3163578"/>
+                  </a:lnTo>
+                  <a:lnTo>
+                    <a:pt x="4576147" y="3144358"/>
+                  </a:lnTo>
+                  <a:lnTo>
+                    <a:pt x="4498513" y="3123983"/>
+                  </a:lnTo>
+                  <a:lnTo>
+                    <a:pt x="4420879" y="3102386"/>
+                  </a:lnTo>
+                  <a:lnTo>
+                    <a:pt x="4343244" y="3079491"/>
+                  </a:lnTo>
+                  <a:lnTo>
+                    <a:pt x="4265610" y="3055223"/>
+                  </a:lnTo>
+                  <a:lnTo>
+                    <a:pt x="4187976" y="3029497"/>
+                  </a:lnTo>
+                  <a:lnTo>
+                    <a:pt x="4110342" y="3002228"/>
+                  </a:lnTo>
+                  <a:lnTo>
+                    <a:pt x="4032708" y="2973321"/>
+                  </a:lnTo>
+                  <a:lnTo>
+                    <a:pt x="3955074" y="2942678"/>
+                  </a:lnTo>
+                  <a:lnTo>
+                    <a:pt x="3877440" y="2910197"/>
+                  </a:lnTo>
+                  <a:lnTo>
+                    <a:pt x="3799806" y="2875765"/>
+                  </a:lnTo>
+                  <a:lnTo>
+                    <a:pt x="3722172" y="2839266"/>
+                  </a:lnTo>
+                  <a:lnTo>
+                    <a:pt x="3644538" y="2800576"/>
+                  </a:lnTo>
+                  <a:lnTo>
+                    <a:pt x="3566904" y="2759563"/>
+                  </a:lnTo>
+                  <a:lnTo>
+                    <a:pt x="3489270" y="2716089"/>
+                  </a:lnTo>
+                  <a:lnTo>
+                    <a:pt x="3411636" y="2670004"/>
+                  </a:lnTo>
+                  <a:lnTo>
+                    <a:pt x="3334002" y="2649424"/>
+                  </a:lnTo>
+                  <a:lnTo>
+                    <a:pt x="3256368" y="2642137"/>
+                  </a:lnTo>
+                  <a:lnTo>
+                    <a:pt x="3178734" y="2634788"/>
+                  </a:lnTo>
+                  <a:lnTo>
+                    <a:pt x="3101100" y="2627374"/>
+                  </a:lnTo>
+                  <a:lnTo>
+                    <a:pt x="3023466" y="2619895"/>
+                  </a:lnTo>
+                  <a:lnTo>
+                    <a:pt x="2945832" y="2612351"/>
+                  </a:lnTo>
+                  <a:lnTo>
+                    <a:pt x="2868198" y="2604741"/>
+                  </a:lnTo>
+                  <a:lnTo>
+                    <a:pt x="2790564" y="2597065"/>
+                  </a:lnTo>
+                  <a:lnTo>
+                    <a:pt x="2712930" y="2589321"/>
+                  </a:lnTo>
+                  <a:lnTo>
+                    <a:pt x="2635295" y="2581510"/>
+                  </a:lnTo>
+                  <a:lnTo>
+                    <a:pt x="2557661" y="2573631"/>
+                  </a:lnTo>
+                  <a:lnTo>
+                    <a:pt x="2480027" y="2565683"/>
+                  </a:lnTo>
+                  <a:lnTo>
+                    <a:pt x="2402393" y="2557665"/>
+                  </a:lnTo>
+                  <a:lnTo>
+                    <a:pt x="2324759" y="2549578"/>
+                  </a:lnTo>
+                  <a:lnTo>
+                    <a:pt x="2247125" y="2541420"/>
+                  </a:lnTo>
+                  <a:lnTo>
+                    <a:pt x="2169491" y="2533190"/>
+                  </a:lnTo>
+                  <a:lnTo>
+                    <a:pt x="2091857" y="2524889"/>
+                  </a:lnTo>
+                  <a:lnTo>
+                    <a:pt x="2014223" y="2516515"/>
+                  </a:lnTo>
+                  <a:lnTo>
+                    <a:pt x="1936589" y="2508068"/>
+                  </a:lnTo>
+                  <a:lnTo>
+                    <a:pt x="1858955" y="2499548"/>
+                  </a:lnTo>
+                  <a:lnTo>
+                    <a:pt x="1781321" y="2490953"/>
+                  </a:lnTo>
+                  <a:lnTo>
+                    <a:pt x="1703687" y="2482283"/>
+                  </a:lnTo>
+                  <a:lnTo>
+                    <a:pt x="1626053" y="2473537"/>
+                  </a:lnTo>
+                  <a:lnTo>
+                    <a:pt x="1548419" y="2464715"/>
+                  </a:lnTo>
+                  <a:lnTo>
+                    <a:pt x="1470785" y="2455815"/>
+                  </a:lnTo>
+                  <a:lnTo>
+                    <a:pt x="1393151" y="2446838"/>
+                  </a:lnTo>
+                  <a:lnTo>
+                    <a:pt x="1315517" y="2437783"/>
+                  </a:lnTo>
+                  <a:lnTo>
+                    <a:pt x="1237883" y="2428649"/>
+                  </a:lnTo>
+                  <a:lnTo>
+                    <a:pt x="1160249" y="2419434"/>
+                  </a:lnTo>
+                  <a:lnTo>
+                    <a:pt x="1082615" y="2410140"/>
+                  </a:lnTo>
+                  <a:lnTo>
+                    <a:pt x="1004981" y="2400764"/>
+                  </a:lnTo>
+                  <a:lnTo>
+                    <a:pt x="927346" y="2391306"/>
+                  </a:lnTo>
+                  <a:lnTo>
+                    <a:pt x="849712" y="2381766"/>
+                  </a:lnTo>
+                  <a:lnTo>
+                    <a:pt x="772078" y="2372142"/>
+                  </a:lnTo>
+                  <a:lnTo>
+                    <a:pt x="694444" y="2362435"/>
+                  </a:lnTo>
+                  <a:lnTo>
+                    <a:pt x="616810" y="2352642"/>
+                  </a:lnTo>
+                  <a:lnTo>
+                    <a:pt x="539176" y="2342764"/>
+                  </a:lnTo>
+                  <a:lnTo>
+                    <a:pt x="461542" y="2332800"/>
+                  </a:lnTo>
+                  <a:lnTo>
+                    <a:pt x="383908" y="2322749"/>
+                  </a:lnTo>
+                  <a:lnTo>
+                    <a:pt x="306274" y="2312610"/>
+                  </a:lnTo>
+                  <a:lnTo>
+                    <a:pt x="228640" y="2302382"/>
+                  </a:lnTo>
+                  <a:lnTo>
+                    <a:pt x="151006" y="2292065"/>
+                  </a:lnTo>
+                  <a:lnTo>
+                    <a:pt x="73372" y="2281658"/>
+                  </a:lnTo>
+                  <a:lnTo>
+                    <a:pt x="0" y="2271736"/>
                   </a:lnTo>
                   <a:close/>
                 </a:path>
@@ -3552,243 +3552,243 @@
           </p:nvSpPr>
           <p:spPr>
             <a:xfrm>
-              <a:off x="2292786" y="1896563"/>
-              <a:ext cx="5895703" cy="3096060"/>
+              <a:off x="2292786" y="2073503"/>
+              <a:ext cx="5895703" cy="2952899"/>
             </a:xfrm>
             <a:custGeom>
               <a:avLst/>
               <a:pathLst>
-                <a:path w="5895703" h="3096060">
+                <a:path w="5895703" h="2952899">
                   <a:moveTo>
                     <a:pt x="0" y="0"/>
                   </a:moveTo>
                   <a:lnTo>
-                    <a:pt x="73150" y="195552"/>
-                  </a:lnTo>
-                  <a:lnTo>
-                    <a:pt x="150784" y="391337"/>
-                  </a:lnTo>
-                  <a:lnTo>
-                    <a:pt x="228418" y="576035"/>
-                  </a:lnTo>
-                  <a:lnTo>
-                    <a:pt x="306052" y="750272"/>
-                  </a:lnTo>
-                  <a:lnTo>
-                    <a:pt x="383686" y="914642"/>
-                  </a:lnTo>
-                  <a:lnTo>
-                    <a:pt x="461320" y="1069703"/>
-                  </a:lnTo>
-                  <a:lnTo>
-                    <a:pt x="538954" y="1215982"/>
-                  </a:lnTo>
-                  <a:lnTo>
-                    <a:pt x="616588" y="1353978"/>
-                  </a:lnTo>
-                  <a:lnTo>
-                    <a:pt x="694222" y="1484158"/>
-                  </a:lnTo>
-                  <a:lnTo>
-                    <a:pt x="771856" y="1606966"/>
-                  </a:lnTo>
-                  <a:lnTo>
-                    <a:pt x="849490" y="1722818"/>
-                  </a:lnTo>
-                  <a:lnTo>
-                    <a:pt x="927124" y="1832110"/>
-                  </a:lnTo>
-                  <a:lnTo>
-                    <a:pt x="1004758" y="1935212"/>
-                  </a:lnTo>
-                  <a:lnTo>
-                    <a:pt x="1082392" y="2032476"/>
-                  </a:lnTo>
-                  <a:lnTo>
-                    <a:pt x="1160026" y="2124230"/>
-                  </a:lnTo>
-                  <a:lnTo>
-                    <a:pt x="1237660" y="2210789"/>
-                  </a:lnTo>
-                  <a:lnTo>
-                    <a:pt x="1315294" y="2292445"/>
-                  </a:lnTo>
-                  <a:lnTo>
-                    <a:pt x="1392929" y="2369477"/>
-                  </a:lnTo>
-                  <a:lnTo>
-                    <a:pt x="1470563" y="2442147"/>
-                  </a:lnTo>
-                  <a:lnTo>
-                    <a:pt x="1548197" y="2510701"/>
-                  </a:lnTo>
-                  <a:lnTo>
-                    <a:pt x="1625831" y="2575372"/>
-                  </a:lnTo>
-                  <a:lnTo>
-                    <a:pt x="1703465" y="2636381"/>
-                  </a:lnTo>
-                  <a:lnTo>
-                    <a:pt x="1781099" y="2693935"/>
-                  </a:lnTo>
-                  <a:lnTo>
-                    <a:pt x="1858733" y="2748230"/>
-                  </a:lnTo>
-                  <a:lnTo>
-                    <a:pt x="1936367" y="2785445"/>
-                  </a:lnTo>
-                  <a:lnTo>
-                    <a:pt x="2014001" y="2792952"/>
-                  </a:lnTo>
-                  <a:lnTo>
-                    <a:pt x="2091635" y="2800395"/>
-                  </a:lnTo>
-                  <a:lnTo>
-                    <a:pt x="2169269" y="2807773"/>
-                  </a:lnTo>
-                  <a:lnTo>
-                    <a:pt x="2246903" y="2815088"/>
-                  </a:lnTo>
-                  <a:lnTo>
-                    <a:pt x="2324537" y="2822339"/>
-                  </a:lnTo>
-                  <a:lnTo>
-                    <a:pt x="2402171" y="2829527"/>
-                  </a:lnTo>
-                  <a:lnTo>
-                    <a:pt x="2479805" y="2836653"/>
-                  </a:lnTo>
-                  <a:lnTo>
-                    <a:pt x="2557439" y="2843718"/>
-                  </a:lnTo>
-                  <a:lnTo>
-                    <a:pt x="2635073" y="2850721"/>
-                  </a:lnTo>
-                  <a:lnTo>
-                    <a:pt x="2712707" y="2857663"/>
-                  </a:lnTo>
-                  <a:lnTo>
-                    <a:pt x="2790341" y="2864546"/>
-                  </a:lnTo>
-                  <a:lnTo>
-                    <a:pt x="2867975" y="2871369"/>
-                  </a:lnTo>
-                  <a:lnTo>
-                    <a:pt x="2945609" y="2878133"/>
-                  </a:lnTo>
-                  <a:lnTo>
-                    <a:pt x="3023243" y="2884838"/>
-                  </a:lnTo>
-                  <a:lnTo>
-                    <a:pt x="3100878" y="2891485"/>
-                  </a:lnTo>
-                  <a:lnTo>
-                    <a:pt x="3178512" y="2898075"/>
-                  </a:lnTo>
-                  <a:lnTo>
-                    <a:pt x="3256146" y="2904607"/>
-                  </a:lnTo>
-                  <a:lnTo>
-                    <a:pt x="3333780" y="2911083"/>
-                  </a:lnTo>
-                  <a:lnTo>
-                    <a:pt x="3411414" y="2917503"/>
-                  </a:lnTo>
-                  <a:lnTo>
-                    <a:pt x="3489048" y="2923868"/>
-                  </a:lnTo>
-                  <a:lnTo>
-                    <a:pt x="3566682" y="2930177"/>
-                  </a:lnTo>
-                  <a:lnTo>
-                    <a:pt x="3644316" y="2936432"/>
-                  </a:lnTo>
-                  <a:lnTo>
-                    <a:pt x="3721950" y="2942632"/>
-                  </a:lnTo>
-                  <a:lnTo>
-                    <a:pt x="3799584" y="2948779"/>
-                  </a:lnTo>
-                  <a:lnTo>
-                    <a:pt x="3877218" y="2954873"/>
-                  </a:lnTo>
-                  <a:lnTo>
-                    <a:pt x="3954852" y="2960914"/>
-                  </a:lnTo>
-                  <a:lnTo>
-                    <a:pt x="4032486" y="2966903"/>
-                  </a:lnTo>
-                  <a:lnTo>
-                    <a:pt x="4110120" y="2972839"/>
-                  </a:lnTo>
-                  <a:lnTo>
-                    <a:pt x="4187754" y="2978725"/>
-                  </a:lnTo>
-                  <a:lnTo>
-                    <a:pt x="4265388" y="2984559"/>
-                  </a:lnTo>
-                  <a:lnTo>
-                    <a:pt x="4343022" y="2990343"/>
-                  </a:lnTo>
-                  <a:lnTo>
-                    <a:pt x="4420656" y="2996077"/>
-                  </a:lnTo>
-                  <a:lnTo>
-                    <a:pt x="4498290" y="3001761"/>
-                  </a:lnTo>
-                  <a:lnTo>
-                    <a:pt x="4575924" y="3007396"/>
-                  </a:lnTo>
-                  <a:lnTo>
-                    <a:pt x="4653558" y="3012982"/>
-                  </a:lnTo>
-                  <a:lnTo>
-                    <a:pt x="4731192" y="3018520"/>
-                  </a:lnTo>
-                  <a:lnTo>
-                    <a:pt x="4808826" y="3024010"/>
-                  </a:lnTo>
-                  <a:lnTo>
-                    <a:pt x="4886461" y="3029452"/>
-                  </a:lnTo>
-                  <a:lnTo>
-                    <a:pt x="4964095" y="3034847"/>
-                  </a:lnTo>
-                  <a:lnTo>
-                    <a:pt x="5041729" y="3040196"/>
-                  </a:lnTo>
-                  <a:lnTo>
-                    <a:pt x="5119363" y="3045498"/>
-                  </a:lnTo>
-                  <a:lnTo>
-                    <a:pt x="5196997" y="3050754"/>
-                  </a:lnTo>
-                  <a:lnTo>
-                    <a:pt x="5274631" y="3055965"/>
-                  </a:lnTo>
-                  <a:lnTo>
-                    <a:pt x="5352265" y="3061131"/>
-                  </a:lnTo>
-                  <a:lnTo>
-                    <a:pt x="5429899" y="3066252"/>
-                  </a:lnTo>
-                  <a:lnTo>
-                    <a:pt x="5507533" y="3071329"/>
-                  </a:lnTo>
-                  <a:lnTo>
-                    <a:pt x="5585167" y="3076361"/>
-                  </a:lnTo>
-                  <a:lnTo>
-                    <a:pt x="5662801" y="3081350"/>
-                  </a:lnTo>
-                  <a:lnTo>
-                    <a:pt x="5740435" y="3086296"/>
-                  </a:lnTo>
-                  <a:lnTo>
-                    <a:pt x="5818069" y="3091199"/>
-                  </a:lnTo>
-                  <a:lnTo>
-                    <a:pt x="5895703" y="3096060"/>
+                    <a:pt x="73150" y="186510"/>
+                  </a:lnTo>
+                  <a:lnTo>
+                    <a:pt x="150784" y="373242"/>
+                  </a:lnTo>
+                  <a:lnTo>
+                    <a:pt x="228418" y="549399"/>
+                  </a:lnTo>
+                  <a:lnTo>
+                    <a:pt x="306052" y="715580"/>
+                  </a:lnTo>
+                  <a:lnTo>
+                    <a:pt x="383686" y="872349"/>
+                  </a:lnTo>
+                  <a:lnTo>
+                    <a:pt x="461320" y="1020240"/>
+                  </a:lnTo>
+                  <a:lnTo>
+                    <a:pt x="538954" y="1159756"/>
+                  </a:lnTo>
+                  <a:lnTo>
+                    <a:pt x="616588" y="1291370"/>
+                  </a:lnTo>
+                  <a:lnTo>
+                    <a:pt x="694222" y="1415531"/>
+                  </a:lnTo>
+                  <a:lnTo>
+                    <a:pt x="771856" y="1532660"/>
+                  </a:lnTo>
+                  <a:lnTo>
+                    <a:pt x="849490" y="1643156"/>
+                  </a:lnTo>
+                  <a:lnTo>
+                    <a:pt x="927124" y="1747394"/>
+                  </a:lnTo>
+                  <a:lnTo>
+                    <a:pt x="1004758" y="1845729"/>
+                  </a:lnTo>
+                  <a:lnTo>
+                    <a:pt x="1082392" y="1938495"/>
+                  </a:lnTo>
+                  <a:lnTo>
+                    <a:pt x="1160026" y="2026007"/>
+                  </a:lnTo>
+                  <a:lnTo>
+                    <a:pt x="1237660" y="2108563"/>
+                  </a:lnTo>
+                  <a:lnTo>
+                    <a:pt x="1315294" y="2186444"/>
+                  </a:lnTo>
+                  <a:lnTo>
+                    <a:pt x="1392929" y="2259914"/>
+                  </a:lnTo>
+                  <a:lnTo>
+                    <a:pt x="1470563" y="2329223"/>
+                  </a:lnTo>
+                  <a:lnTo>
+                    <a:pt x="1548197" y="2394607"/>
+                  </a:lnTo>
+                  <a:lnTo>
+                    <a:pt x="1625831" y="2456288"/>
+                  </a:lnTo>
+                  <a:lnTo>
+                    <a:pt x="1703465" y="2514476"/>
+                  </a:lnTo>
+                  <a:lnTo>
+                    <a:pt x="1781099" y="2569369"/>
+                  </a:lnTo>
+                  <a:lnTo>
+                    <a:pt x="1858733" y="2621153"/>
+                  </a:lnTo>
+                  <a:lnTo>
+                    <a:pt x="1936367" y="2656647"/>
+                  </a:lnTo>
+                  <a:lnTo>
+                    <a:pt x="2014001" y="2663807"/>
+                  </a:lnTo>
+                  <a:lnTo>
+                    <a:pt x="2091635" y="2670906"/>
+                  </a:lnTo>
+                  <a:lnTo>
+                    <a:pt x="2169269" y="2677943"/>
+                  </a:lnTo>
+                  <a:lnTo>
+                    <a:pt x="2246903" y="2684919"/>
+                  </a:lnTo>
+                  <a:lnTo>
+                    <a:pt x="2324537" y="2691835"/>
+                  </a:lnTo>
+                  <a:lnTo>
+                    <a:pt x="2402171" y="2698691"/>
+                  </a:lnTo>
+                  <a:lnTo>
+                    <a:pt x="2479805" y="2705487"/>
+                  </a:lnTo>
+                  <a:lnTo>
+                    <a:pt x="2557439" y="2712225"/>
+                  </a:lnTo>
+                  <a:lnTo>
+                    <a:pt x="2635073" y="2718905"/>
+                  </a:lnTo>
+                  <a:lnTo>
+                    <a:pt x="2712707" y="2725526"/>
+                  </a:lnTo>
+                  <a:lnTo>
+                    <a:pt x="2790341" y="2732090"/>
+                  </a:lnTo>
+                  <a:lnTo>
+                    <a:pt x="2867975" y="2738598"/>
+                  </a:lnTo>
+                  <a:lnTo>
+                    <a:pt x="2945609" y="2745049"/>
+                  </a:lnTo>
+                  <a:lnTo>
+                    <a:pt x="3023243" y="2751444"/>
+                  </a:lnTo>
+                  <a:lnTo>
+                    <a:pt x="3100878" y="2757784"/>
+                  </a:lnTo>
+                  <a:lnTo>
+                    <a:pt x="3178512" y="2764069"/>
+                  </a:lnTo>
+                  <a:lnTo>
+                    <a:pt x="3256146" y="2770299"/>
+                  </a:lnTo>
+                  <a:lnTo>
+                    <a:pt x="3333780" y="2776476"/>
+                  </a:lnTo>
+                  <a:lnTo>
+                    <a:pt x="3411414" y="2782599"/>
+                  </a:lnTo>
+                  <a:lnTo>
+                    <a:pt x="3489048" y="2788669"/>
+                  </a:lnTo>
+                  <a:lnTo>
+                    <a:pt x="3566682" y="2794687"/>
+                  </a:lnTo>
+                  <a:lnTo>
+                    <a:pt x="3644316" y="2800652"/>
+                  </a:lnTo>
+                  <a:lnTo>
+                    <a:pt x="3721950" y="2806566"/>
+                  </a:lnTo>
+                  <a:lnTo>
+                    <a:pt x="3799584" y="2812429"/>
+                  </a:lnTo>
+                  <a:lnTo>
+                    <a:pt x="3877218" y="2818241"/>
+                  </a:lnTo>
+                  <a:lnTo>
+                    <a:pt x="3954852" y="2824002"/>
+                  </a:lnTo>
+                  <a:lnTo>
+                    <a:pt x="4032486" y="2829714"/>
+                  </a:lnTo>
+                  <a:lnTo>
+                    <a:pt x="4110120" y="2835376"/>
+                  </a:lnTo>
+                  <a:lnTo>
+                    <a:pt x="4187754" y="2840989"/>
+                  </a:lnTo>
+                  <a:lnTo>
+                    <a:pt x="4265388" y="2846554"/>
+                  </a:lnTo>
+                  <a:lnTo>
+                    <a:pt x="4343022" y="2852071"/>
+                  </a:lnTo>
+                  <a:lnTo>
+                    <a:pt x="4420656" y="2857539"/>
+                  </a:lnTo>
+                  <a:lnTo>
+                    <a:pt x="4498290" y="2862961"/>
+                  </a:lnTo>
+                  <a:lnTo>
+                    <a:pt x="4575924" y="2868335"/>
+                  </a:lnTo>
+                  <a:lnTo>
+                    <a:pt x="4653558" y="2873663"/>
+                  </a:lnTo>
+                  <a:lnTo>
+                    <a:pt x="4731192" y="2878945"/>
+                  </a:lnTo>
+                  <a:lnTo>
+                    <a:pt x="4808826" y="2884181"/>
+                  </a:lnTo>
+                  <a:lnTo>
+                    <a:pt x="4886461" y="2889371"/>
+                  </a:lnTo>
+                  <a:lnTo>
+                    <a:pt x="4964095" y="2894517"/>
+                  </a:lnTo>
+                  <a:lnTo>
+                    <a:pt x="5041729" y="2899618"/>
+                  </a:lnTo>
+                  <a:lnTo>
+                    <a:pt x="5119363" y="2904675"/>
+                  </a:lnTo>
+                  <a:lnTo>
+                    <a:pt x="5196997" y="2909689"/>
+                  </a:lnTo>
+                  <a:lnTo>
+                    <a:pt x="5274631" y="2914659"/>
+                  </a:lnTo>
+                  <a:lnTo>
+                    <a:pt x="5352265" y="2919585"/>
+                  </a:lnTo>
+                  <a:lnTo>
+                    <a:pt x="5429899" y="2924470"/>
+                  </a:lnTo>
+                  <a:lnTo>
+                    <a:pt x="5507533" y="2929311"/>
+                  </a:lnTo>
+                  <a:lnTo>
+                    <a:pt x="5585167" y="2934111"/>
+                  </a:lnTo>
+                  <a:lnTo>
+                    <a:pt x="5662801" y="2938870"/>
+                  </a:lnTo>
+                  <a:lnTo>
+                    <a:pt x="5740435" y="2943587"/>
+                  </a:lnTo>
+                  <a:lnTo>
+                    <a:pt x="5818069" y="2948263"/>
+                  </a:lnTo>
+                  <a:lnTo>
+                    <a:pt x="5895703" y="2952899"/>
                   </a:lnTo>
                 </a:path>
               </a:pathLst>
@@ -3808,297 +3808,297 @@
           </p:nvSpPr>
           <p:spPr>
             <a:xfrm>
-              <a:off x="817517" y="4278437"/>
-              <a:ext cx="7370972" cy="1227142"/>
+              <a:off x="817517" y="4345239"/>
+              <a:ext cx="7370972" cy="1170399"/>
             </a:xfrm>
             <a:custGeom>
               <a:avLst/>
               <a:pathLst>
-                <a:path w="7370972" h="1227142">
+                <a:path w="7370972" h="1170399">
                   <a:moveTo>
-                    <a:pt x="7370972" y="1227142"/>
+                    <a:pt x="7370972" y="1170399"/>
                   </a:moveTo>
                   <a:lnTo>
-                    <a:pt x="7293338" y="1224522"/>
-                  </a:lnTo>
-                  <a:lnTo>
-                    <a:pt x="7215704" y="1221746"/>
-                  </a:lnTo>
-                  <a:lnTo>
-                    <a:pt x="7138070" y="1218803"/>
-                  </a:lnTo>
-                  <a:lnTo>
-                    <a:pt x="7060436" y="1215683"/>
-                  </a:lnTo>
-                  <a:lnTo>
-                    <a:pt x="6982802" y="1212377"/>
-                  </a:lnTo>
-                  <a:lnTo>
-                    <a:pt x="6905168" y="1208871"/>
-                  </a:lnTo>
-                  <a:lnTo>
-                    <a:pt x="6827534" y="1205155"/>
-                  </a:lnTo>
-                  <a:lnTo>
-                    <a:pt x="6749900" y="1201216"/>
-                  </a:lnTo>
-                  <a:lnTo>
-                    <a:pt x="6672266" y="1197041"/>
-                  </a:lnTo>
-                  <a:lnTo>
-                    <a:pt x="6594632" y="1192614"/>
-                  </a:lnTo>
-                  <a:lnTo>
-                    <a:pt x="6516998" y="1187923"/>
-                  </a:lnTo>
-                  <a:lnTo>
-                    <a:pt x="6439364" y="1182949"/>
-                  </a:lnTo>
-                  <a:lnTo>
-                    <a:pt x="6361730" y="1177677"/>
-                  </a:lnTo>
-                  <a:lnTo>
-                    <a:pt x="6284096" y="1172088"/>
-                  </a:lnTo>
-                  <a:lnTo>
-                    <a:pt x="6206462" y="1166164"/>
-                  </a:lnTo>
-                  <a:lnTo>
-                    <a:pt x="6128827" y="1159885"/>
-                  </a:lnTo>
-                  <a:lnTo>
-                    <a:pt x="6051193" y="1153228"/>
-                  </a:lnTo>
-                  <a:lnTo>
-                    <a:pt x="5973559" y="1146171"/>
-                  </a:lnTo>
-                  <a:lnTo>
-                    <a:pt x="5895925" y="1138692"/>
-                  </a:lnTo>
-                  <a:lnTo>
-                    <a:pt x="5818291" y="1130763"/>
-                  </a:lnTo>
-                  <a:lnTo>
-                    <a:pt x="5740657" y="1122357"/>
-                  </a:lnTo>
-                  <a:lnTo>
-                    <a:pt x="5663023" y="1113448"/>
-                  </a:lnTo>
-                  <a:lnTo>
-                    <a:pt x="5585389" y="1104003"/>
-                  </a:lnTo>
-                  <a:lnTo>
-                    <a:pt x="5507755" y="1093992"/>
-                  </a:lnTo>
-                  <a:lnTo>
-                    <a:pt x="5430121" y="1083380"/>
-                  </a:lnTo>
-                  <a:lnTo>
-                    <a:pt x="5352487" y="1072130"/>
-                  </a:lnTo>
-                  <a:lnTo>
-                    <a:pt x="5274853" y="1060205"/>
-                  </a:lnTo>
-                  <a:lnTo>
-                    <a:pt x="5197219" y="1047564"/>
-                  </a:lnTo>
-                  <a:lnTo>
-                    <a:pt x="5119585" y="1034165"/>
-                  </a:lnTo>
-                  <a:lnTo>
-                    <a:pt x="5041951" y="1019961"/>
-                  </a:lnTo>
-                  <a:lnTo>
-                    <a:pt x="4964317" y="1004904"/>
-                  </a:lnTo>
-                  <a:lnTo>
-                    <a:pt x="4886683" y="988943"/>
-                  </a:lnTo>
-                  <a:lnTo>
-                    <a:pt x="4809049" y="972025"/>
-                  </a:lnTo>
-                  <a:lnTo>
-                    <a:pt x="4731415" y="954090"/>
-                  </a:lnTo>
-                  <a:lnTo>
-                    <a:pt x="4653781" y="935079"/>
-                  </a:lnTo>
-                  <a:lnTo>
-                    <a:pt x="4576147" y="914927"/>
-                  </a:lnTo>
-                  <a:lnTo>
-                    <a:pt x="4498513" y="893564"/>
-                  </a:lnTo>
-                  <a:lnTo>
-                    <a:pt x="4420879" y="870920"/>
-                  </a:lnTo>
-                  <a:lnTo>
-                    <a:pt x="4343244" y="846916"/>
-                  </a:lnTo>
-                  <a:lnTo>
-                    <a:pt x="4265610" y="821470"/>
-                  </a:lnTo>
-                  <a:lnTo>
-                    <a:pt x="4187976" y="794498"/>
-                  </a:lnTo>
-                  <a:lnTo>
-                    <a:pt x="4110342" y="765906"/>
-                  </a:lnTo>
-                  <a:lnTo>
-                    <a:pt x="4032708" y="735597"/>
-                  </a:lnTo>
-                  <a:lnTo>
-                    <a:pt x="3955074" y="703470"/>
-                  </a:lnTo>
-                  <a:lnTo>
-                    <a:pt x="3877440" y="669413"/>
-                  </a:lnTo>
-                  <a:lnTo>
-                    <a:pt x="3799806" y="633312"/>
-                  </a:lnTo>
-                  <a:lnTo>
-                    <a:pt x="3722172" y="595044"/>
-                  </a:lnTo>
-                  <a:lnTo>
-                    <a:pt x="3644538" y="554478"/>
-                  </a:lnTo>
-                  <a:lnTo>
-                    <a:pt x="3566904" y="511477"/>
-                  </a:lnTo>
-                  <a:lnTo>
-                    <a:pt x="3489270" y="465894"/>
-                  </a:lnTo>
-                  <a:lnTo>
-                    <a:pt x="3411636" y="417576"/>
-                  </a:lnTo>
-                  <a:lnTo>
-                    <a:pt x="3334002" y="395997"/>
-                  </a:lnTo>
-                  <a:lnTo>
-                    <a:pt x="3256368" y="388358"/>
-                  </a:lnTo>
-                  <a:lnTo>
-                    <a:pt x="3178734" y="380652"/>
-                  </a:lnTo>
-                  <a:lnTo>
-                    <a:pt x="3101100" y="372879"/>
-                  </a:lnTo>
-                  <a:lnTo>
-                    <a:pt x="3023466" y="365037"/>
-                  </a:lnTo>
-                  <a:lnTo>
-                    <a:pt x="2945832" y="357127"/>
-                  </a:lnTo>
-                  <a:lnTo>
-                    <a:pt x="2868198" y="349149"/>
-                  </a:lnTo>
-                  <a:lnTo>
-                    <a:pt x="2790564" y="341100"/>
-                  </a:lnTo>
-                  <a:lnTo>
-                    <a:pt x="2712930" y="332981"/>
-                  </a:lnTo>
-                  <a:lnTo>
-                    <a:pt x="2635295" y="324791"/>
-                  </a:lnTo>
-                  <a:lnTo>
-                    <a:pt x="2557661" y="316530"/>
-                  </a:lnTo>
-                  <a:lnTo>
-                    <a:pt x="2480027" y="308197"/>
-                  </a:lnTo>
-                  <a:lnTo>
-                    <a:pt x="2402393" y="299791"/>
-                  </a:lnTo>
-                  <a:lnTo>
-                    <a:pt x="2324759" y="291311"/>
-                  </a:lnTo>
-                  <a:lnTo>
-                    <a:pt x="2247125" y="282757"/>
-                  </a:lnTo>
-                  <a:lnTo>
-                    <a:pt x="2169491" y="274129"/>
-                  </a:lnTo>
-                  <a:lnTo>
-                    <a:pt x="2091857" y="265425"/>
-                  </a:lnTo>
-                  <a:lnTo>
-                    <a:pt x="2014223" y="256646"/>
-                  </a:lnTo>
-                  <a:lnTo>
-                    <a:pt x="1936589" y="247789"/>
-                  </a:lnTo>
-                  <a:lnTo>
-                    <a:pt x="1858955" y="238855"/>
-                  </a:lnTo>
-                  <a:lnTo>
-                    <a:pt x="1781321" y="229844"/>
-                  </a:lnTo>
-                  <a:lnTo>
-                    <a:pt x="1703687" y="220753"/>
-                  </a:lnTo>
-                  <a:lnTo>
-                    <a:pt x="1626053" y="211583"/>
-                  </a:lnTo>
-                  <a:lnTo>
-                    <a:pt x="1548419" y="202334"/>
-                  </a:lnTo>
-                  <a:lnTo>
-                    <a:pt x="1470785" y="193003"/>
-                  </a:lnTo>
-                  <a:lnTo>
-                    <a:pt x="1393151" y="183591"/>
-                  </a:lnTo>
-                  <a:lnTo>
-                    <a:pt x="1315517" y="174096"/>
-                  </a:lnTo>
-                  <a:lnTo>
-                    <a:pt x="1237883" y="164519"/>
-                  </a:lnTo>
-                  <a:lnTo>
-                    <a:pt x="1160249" y="154858"/>
-                  </a:lnTo>
-                  <a:lnTo>
-                    <a:pt x="1082615" y="145113"/>
-                  </a:lnTo>
-                  <a:lnTo>
-                    <a:pt x="1004981" y="135282"/>
-                  </a:lnTo>
-                  <a:lnTo>
-                    <a:pt x="927346" y="125366"/>
-                  </a:lnTo>
-                  <a:lnTo>
-                    <a:pt x="849712" y="115363"/>
-                  </a:lnTo>
-                  <a:lnTo>
-                    <a:pt x="772078" y="105273"/>
-                  </a:lnTo>
-                  <a:lnTo>
-                    <a:pt x="694444" y="95095"/>
-                  </a:lnTo>
-                  <a:lnTo>
-                    <a:pt x="616810" y="84828"/>
-                  </a:lnTo>
-                  <a:lnTo>
-                    <a:pt x="539176" y="74471"/>
-                  </a:lnTo>
-                  <a:lnTo>
-                    <a:pt x="461542" y="64023"/>
-                  </a:lnTo>
-                  <a:lnTo>
-                    <a:pt x="383908" y="53485"/>
-                  </a:lnTo>
-                  <a:lnTo>
-                    <a:pt x="306274" y="42854"/>
-                  </a:lnTo>
-                  <a:lnTo>
-                    <a:pt x="228640" y="32131"/>
-                  </a:lnTo>
-                  <a:lnTo>
-                    <a:pt x="151006" y="21314"/>
-                  </a:lnTo>
-                  <a:lnTo>
-                    <a:pt x="73372" y="10402"/>
+                    <a:pt x="7293338" y="1167901"/>
+                  </a:lnTo>
+                  <a:lnTo>
+                    <a:pt x="7215704" y="1165253"/>
+                  </a:lnTo>
+                  <a:lnTo>
+                    <a:pt x="7138070" y="1162446"/>
+                  </a:lnTo>
+                  <a:lnTo>
+                    <a:pt x="7060436" y="1159471"/>
+                  </a:lnTo>
+                  <a:lnTo>
+                    <a:pt x="6982802" y="1156317"/>
+                  </a:lnTo>
+                  <a:lnTo>
+                    <a:pt x="6905168" y="1152973"/>
+                  </a:lnTo>
+                  <a:lnTo>
+                    <a:pt x="6827534" y="1149429"/>
+                  </a:lnTo>
+                  <a:lnTo>
+                    <a:pt x="6749900" y="1145672"/>
+                  </a:lnTo>
+                  <a:lnTo>
+                    <a:pt x="6672266" y="1141690"/>
+                  </a:lnTo>
+                  <a:lnTo>
+                    <a:pt x="6594632" y="1137468"/>
+                  </a:lnTo>
+                  <a:lnTo>
+                    <a:pt x="6516998" y="1132993"/>
+                  </a:lnTo>
+                  <a:lnTo>
+                    <a:pt x="6439364" y="1128250"/>
+                  </a:lnTo>
+                  <a:lnTo>
+                    <a:pt x="6361730" y="1123222"/>
+                  </a:lnTo>
+                  <a:lnTo>
+                    <a:pt x="6284096" y="1117891"/>
+                  </a:lnTo>
+                  <a:lnTo>
+                    <a:pt x="6206462" y="1112241"/>
+                  </a:lnTo>
+                  <a:lnTo>
+                    <a:pt x="6128827" y="1106252"/>
+                  </a:lnTo>
+                  <a:lnTo>
+                    <a:pt x="6051193" y="1099903"/>
+                  </a:lnTo>
+                  <a:lnTo>
+                    <a:pt x="5973559" y="1093173"/>
+                  </a:lnTo>
+                  <a:lnTo>
+                    <a:pt x="5895925" y="1086039"/>
+                  </a:lnTo>
+                  <a:lnTo>
+                    <a:pt x="5818291" y="1078476"/>
+                  </a:lnTo>
+                  <a:lnTo>
+                    <a:pt x="5740657" y="1070460"/>
+                  </a:lnTo>
+                  <a:lnTo>
+                    <a:pt x="5663023" y="1061962"/>
+                  </a:lnTo>
+                  <a:lnTo>
+                    <a:pt x="5585389" y="1052955"/>
+                  </a:lnTo>
+                  <a:lnTo>
+                    <a:pt x="5507755" y="1043406"/>
+                  </a:lnTo>
+                  <a:lnTo>
+                    <a:pt x="5430121" y="1033285"/>
+                  </a:lnTo>
+                  <a:lnTo>
+                    <a:pt x="5352487" y="1022555"/>
+                  </a:lnTo>
+                  <a:lnTo>
+                    <a:pt x="5274853" y="1011182"/>
+                  </a:lnTo>
+                  <a:lnTo>
+                    <a:pt x="5197219" y="999125"/>
+                  </a:lnTo>
+                  <a:lnTo>
+                    <a:pt x="5119585" y="986345"/>
+                  </a:lnTo>
+                  <a:lnTo>
+                    <a:pt x="5041951" y="972798"/>
+                  </a:lnTo>
+                  <a:lnTo>
+                    <a:pt x="4964317" y="958438"/>
+                  </a:lnTo>
+                  <a:lnTo>
+                    <a:pt x="4886683" y="943215"/>
+                  </a:lnTo>
+                  <a:lnTo>
+                    <a:pt x="4809049" y="927079"/>
+                  </a:lnTo>
+                  <a:lnTo>
+                    <a:pt x="4731415" y="909973"/>
+                  </a:lnTo>
+                  <a:lnTo>
+                    <a:pt x="4653781" y="891841"/>
+                  </a:lnTo>
+                  <a:lnTo>
+                    <a:pt x="4576147" y="872621"/>
+                  </a:lnTo>
+                  <a:lnTo>
+                    <a:pt x="4498513" y="852246"/>
+                  </a:lnTo>
+                  <a:lnTo>
+                    <a:pt x="4420879" y="830649"/>
+                  </a:lnTo>
+                  <a:lnTo>
+                    <a:pt x="4343244" y="807754"/>
+                  </a:lnTo>
+                  <a:lnTo>
+                    <a:pt x="4265610" y="783486"/>
+                  </a:lnTo>
+                  <a:lnTo>
+                    <a:pt x="4187976" y="757760"/>
+                  </a:lnTo>
+                  <a:lnTo>
+                    <a:pt x="4110342" y="730491"/>
+                  </a:lnTo>
+                  <a:lnTo>
+                    <a:pt x="4032708" y="701584"/>
+                  </a:lnTo>
+                  <a:lnTo>
+                    <a:pt x="3955074" y="670941"/>
+                  </a:lnTo>
+                  <a:lnTo>
+                    <a:pt x="3877440" y="638460"/>
+                  </a:lnTo>
+                  <a:lnTo>
+                    <a:pt x="3799806" y="604028"/>
+                  </a:lnTo>
+                  <a:lnTo>
+                    <a:pt x="3722172" y="567529"/>
+                  </a:lnTo>
+                  <a:lnTo>
+                    <a:pt x="3644538" y="528839"/>
+                  </a:lnTo>
+                  <a:lnTo>
+                    <a:pt x="3566904" y="487826"/>
+                  </a:lnTo>
+                  <a:lnTo>
+                    <a:pt x="3489270" y="444352"/>
+                  </a:lnTo>
+                  <a:lnTo>
+                    <a:pt x="3411636" y="398267"/>
+                  </a:lnTo>
+                  <a:lnTo>
+                    <a:pt x="3334002" y="377687"/>
+                  </a:lnTo>
+                  <a:lnTo>
+                    <a:pt x="3256368" y="370401"/>
+                  </a:lnTo>
+                  <a:lnTo>
+                    <a:pt x="3178734" y="363051"/>
+                  </a:lnTo>
+                  <a:lnTo>
+                    <a:pt x="3101100" y="355637"/>
+                  </a:lnTo>
+                  <a:lnTo>
+                    <a:pt x="3023466" y="348158"/>
+                  </a:lnTo>
+                  <a:lnTo>
+                    <a:pt x="2945832" y="340614"/>
+                  </a:lnTo>
+                  <a:lnTo>
+                    <a:pt x="2868198" y="333004"/>
+                  </a:lnTo>
+                  <a:lnTo>
+                    <a:pt x="2790564" y="325328"/>
+                  </a:lnTo>
+                  <a:lnTo>
+                    <a:pt x="2712930" y="317584"/>
+                  </a:lnTo>
+                  <a:lnTo>
+                    <a:pt x="2635295" y="309773"/>
+                  </a:lnTo>
+                  <a:lnTo>
+                    <a:pt x="2557661" y="301894"/>
+                  </a:lnTo>
+                  <a:lnTo>
+                    <a:pt x="2480027" y="293946"/>
+                  </a:lnTo>
+                  <a:lnTo>
+                    <a:pt x="2402393" y="285928"/>
+                  </a:lnTo>
+                  <a:lnTo>
+                    <a:pt x="2324759" y="277841"/>
+                  </a:lnTo>
+                  <a:lnTo>
+                    <a:pt x="2247125" y="269683"/>
+                  </a:lnTo>
+                  <a:lnTo>
+                    <a:pt x="2169491" y="261453"/>
+                  </a:lnTo>
+                  <a:lnTo>
+                    <a:pt x="2091857" y="253152"/>
+                  </a:lnTo>
+                  <a:lnTo>
+                    <a:pt x="2014223" y="244778"/>
+                  </a:lnTo>
+                  <a:lnTo>
+                    <a:pt x="1936589" y="236331"/>
+                  </a:lnTo>
+                  <a:lnTo>
+                    <a:pt x="1858955" y="227811"/>
+                  </a:lnTo>
+                  <a:lnTo>
+                    <a:pt x="1781321" y="219216"/>
+                  </a:lnTo>
+                  <a:lnTo>
+                    <a:pt x="1703687" y="210546"/>
+                  </a:lnTo>
+                  <a:lnTo>
+                    <a:pt x="1626053" y="201800"/>
+                  </a:lnTo>
+                  <a:lnTo>
+                    <a:pt x="1548419" y="192978"/>
+                  </a:lnTo>
+                  <a:lnTo>
+                    <a:pt x="1470785" y="184078"/>
+                  </a:lnTo>
+                  <a:lnTo>
+                    <a:pt x="1393151" y="175101"/>
+                  </a:lnTo>
+                  <a:lnTo>
+                    <a:pt x="1315517" y="166046"/>
+                  </a:lnTo>
+                  <a:lnTo>
+                    <a:pt x="1237883" y="156912"/>
+                  </a:lnTo>
+                  <a:lnTo>
+                    <a:pt x="1160249" y="147697"/>
+                  </a:lnTo>
+                  <a:lnTo>
+                    <a:pt x="1082615" y="138403"/>
+                  </a:lnTo>
+                  <a:lnTo>
+                    <a:pt x="1004981" y="129027"/>
+                  </a:lnTo>
+                  <a:lnTo>
+                    <a:pt x="927346" y="119569"/>
+                  </a:lnTo>
+                  <a:lnTo>
+                    <a:pt x="849712" y="110029"/>
+                  </a:lnTo>
+                  <a:lnTo>
+                    <a:pt x="772078" y="100405"/>
+                  </a:lnTo>
+                  <a:lnTo>
+                    <a:pt x="694444" y="90698"/>
+                  </a:lnTo>
+                  <a:lnTo>
+                    <a:pt x="616810" y="80905"/>
+                  </a:lnTo>
+                  <a:lnTo>
+                    <a:pt x="539176" y="71027"/>
+                  </a:lnTo>
+                  <a:lnTo>
+                    <a:pt x="461542" y="61063"/>
+                  </a:lnTo>
+                  <a:lnTo>
+                    <a:pt x="383908" y="51012"/>
+                  </a:lnTo>
+                  <a:lnTo>
+                    <a:pt x="306274" y="40873"/>
+                  </a:lnTo>
+                  <a:lnTo>
+                    <a:pt x="228640" y="30645"/>
+                  </a:lnTo>
+                  <a:lnTo>
+                    <a:pt x="151006" y="20328"/>
+                  </a:lnTo>
+                  <a:lnTo>
+                    <a:pt x="73372" y="9921"/>
                   </a:lnTo>
                   <a:lnTo>
                     <a:pt x="0" y="0"/>
@@ -4121,300 +4121,300 @@
           </p:nvSpPr>
           <p:spPr>
             <a:xfrm>
-              <a:off x="877891" y="1896563"/>
-              <a:ext cx="7310598" cy="3496815"/>
+              <a:off x="877891" y="2073503"/>
+              <a:ext cx="7310598" cy="3335123"/>
             </a:xfrm>
             <a:custGeom>
               <a:avLst/>
               <a:pathLst>
-                <a:path w="7310598" h="3496815">
+                <a:path w="7310598" h="3335123">
                   <a:moveTo>
                     <a:pt x="0" y="0"/>
                   </a:moveTo>
                   <a:lnTo>
-                    <a:pt x="12998" y="20714"/>
-                  </a:lnTo>
-                  <a:lnTo>
-                    <a:pt x="90632" y="140360"/>
-                  </a:lnTo>
-                  <a:lnTo>
-                    <a:pt x="168266" y="256064"/>
-                  </a:lnTo>
-                  <a:lnTo>
-                    <a:pt x="245900" y="367956"/>
-                  </a:lnTo>
-                  <a:lnTo>
-                    <a:pt x="323534" y="476162"/>
-                  </a:lnTo>
-                  <a:lnTo>
-                    <a:pt x="401168" y="580804"/>
-                  </a:lnTo>
-                  <a:lnTo>
-                    <a:pt x="478802" y="681999"/>
-                  </a:lnTo>
-                  <a:lnTo>
-                    <a:pt x="556436" y="779860"/>
-                  </a:lnTo>
-                  <a:lnTo>
-                    <a:pt x="634070" y="874497"/>
-                  </a:lnTo>
-                  <a:lnTo>
-                    <a:pt x="711704" y="966016"/>
-                  </a:lnTo>
-                  <a:lnTo>
-                    <a:pt x="789338" y="1054521"/>
-                  </a:lnTo>
-                  <a:lnTo>
-                    <a:pt x="866972" y="1140110"/>
-                  </a:lnTo>
-                  <a:lnTo>
-                    <a:pt x="944607" y="1222879"/>
-                  </a:lnTo>
-                  <a:lnTo>
-                    <a:pt x="1022241" y="1302922"/>
-                  </a:lnTo>
-                  <a:lnTo>
-                    <a:pt x="1099875" y="1380328"/>
-                  </a:lnTo>
-                  <a:lnTo>
-                    <a:pt x="1177509" y="1455184"/>
-                  </a:lnTo>
-                  <a:lnTo>
-                    <a:pt x="1255143" y="1527575"/>
-                  </a:lnTo>
-                  <a:lnTo>
-                    <a:pt x="1332777" y="1597580"/>
-                  </a:lnTo>
-                  <a:lnTo>
-                    <a:pt x="1410411" y="1665279"/>
-                  </a:lnTo>
-                  <a:lnTo>
-                    <a:pt x="1488045" y="1730748"/>
-                  </a:lnTo>
-                  <a:lnTo>
-                    <a:pt x="1565679" y="1794061"/>
-                  </a:lnTo>
-                  <a:lnTo>
-                    <a:pt x="1643313" y="1855287"/>
-                  </a:lnTo>
-                  <a:lnTo>
-                    <a:pt x="1720947" y="1914497"/>
-                  </a:lnTo>
-                  <a:lnTo>
-                    <a:pt x="1798581" y="1971756"/>
-                  </a:lnTo>
-                  <a:lnTo>
-                    <a:pt x="1876215" y="2027129"/>
-                  </a:lnTo>
-                  <a:lnTo>
-                    <a:pt x="1953849" y="2080678"/>
-                  </a:lnTo>
-                  <a:lnTo>
-                    <a:pt x="2031483" y="2132462"/>
-                  </a:lnTo>
-                  <a:lnTo>
-                    <a:pt x="2109117" y="2182541"/>
-                  </a:lnTo>
-                  <a:lnTo>
-                    <a:pt x="2186751" y="2230970"/>
-                  </a:lnTo>
-                  <a:lnTo>
-                    <a:pt x="2264385" y="2277804"/>
-                  </a:lnTo>
-                  <a:lnTo>
-                    <a:pt x="2342019" y="2323095"/>
-                  </a:lnTo>
-                  <a:lnTo>
-                    <a:pt x="2419653" y="2366894"/>
-                  </a:lnTo>
-                  <a:lnTo>
-                    <a:pt x="2497287" y="2409250"/>
-                  </a:lnTo>
-                  <a:lnTo>
-                    <a:pt x="2574921" y="2450210"/>
-                  </a:lnTo>
-                  <a:lnTo>
-                    <a:pt x="2652556" y="2489822"/>
-                  </a:lnTo>
-                  <a:lnTo>
-                    <a:pt x="2730190" y="2528128"/>
-                  </a:lnTo>
-                  <a:lnTo>
-                    <a:pt x="2807824" y="2565173"/>
-                  </a:lnTo>
-                  <a:lnTo>
-                    <a:pt x="2885458" y="2600997"/>
-                  </a:lnTo>
-                  <a:lnTo>
-                    <a:pt x="2963092" y="2635641"/>
-                  </a:lnTo>
-                  <a:lnTo>
-                    <a:pt x="3040726" y="2669144"/>
-                  </a:lnTo>
-                  <a:lnTo>
-                    <a:pt x="3118360" y="2701543"/>
-                  </a:lnTo>
-                  <a:lnTo>
-                    <a:pt x="3195994" y="2732874"/>
-                  </a:lnTo>
-                  <a:lnTo>
-                    <a:pt x="3273628" y="2763174"/>
-                  </a:lnTo>
-                  <a:lnTo>
-                    <a:pt x="3351262" y="2792476"/>
-                  </a:lnTo>
-                  <a:lnTo>
-                    <a:pt x="3428896" y="2820812"/>
-                  </a:lnTo>
-                  <a:lnTo>
-                    <a:pt x="3506530" y="2848215"/>
-                  </a:lnTo>
-                  <a:lnTo>
-                    <a:pt x="3584164" y="2874715"/>
-                  </a:lnTo>
-                  <a:lnTo>
-                    <a:pt x="3661798" y="2900342"/>
-                  </a:lnTo>
-                  <a:lnTo>
-                    <a:pt x="3739432" y="2925124"/>
-                  </a:lnTo>
-                  <a:lnTo>
-                    <a:pt x="3817066" y="2949091"/>
-                  </a:lnTo>
-                  <a:lnTo>
-                    <a:pt x="3894700" y="2972268"/>
-                  </a:lnTo>
-                  <a:lnTo>
-                    <a:pt x="3972334" y="2994681"/>
-                  </a:lnTo>
-                  <a:lnTo>
-                    <a:pt x="4049968" y="3016356"/>
-                  </a:lnTo>
-                  <a:lnTo>
-                    <a:pt x="4127602" y="3037317"/>
-                  </a:lnTo>
-                  <a:lnTo>
-                    <a:pt x="4205236" y="3057588"/>
-                  </a:lnTo>
-                  <a:lnTo>
-                    <a:pt x="4282870" y="3077190"/>
-                  </a:lnTo>
-                  <a:lnTo>
-                    <a:pt x="4360505" y="3096147"/>
-                  </a:lnTo>
-                  <a:lnTo>
-                    <a:pt x="4438139" y="3114480"/>
-                  </a:lnTo>
-                  <a:lnTo>
-                    <a:pt x="4515773" y="3132208"/>
-                  </a:lnTo>
-                  <a:lnTo>
-                    <a:pt x="4593407" y="3149353"/>
-                  </a:lnTo>
-                  <a:lnTo>
-                    <a:pt x="4671041" y="3165932"/>
-                  </a:lnTo>
-                  <a:lnTo>
-                    <a:pt x="4748675" y="3181966"/>
-                  </a:lnTo>
-                  <a:lnTo>
-                    <a:pt x="4826309" y="3197471"/>
-                  </a:lnTo>
-                  <a:lnTo>
-                    <a:pt x="4903943" y="3212466"/>
-                  </a:lnTo>
-                  <a:lnTo>
-                    <a:pt x="4981577" y="3226967"/>
-                  </a:lnTo>
-                  <a:lnTo>
-                    <a:pt x="5059211" y="3240989"/>
-                  </a:lnTo>
-                  <a:lnTo>
-                    <a:pt x="5136845" y="3254550"/>
-                  </a:lnTo>
-                  <a:lnTo>
-                    <a:pt x="5214479" y="3267665"/>
-                  </a:lnTo>
-                  <a:lnTo>
-                    <a:pt x="5292113" y="3280347"/>
-                  </a:lnTo>
-                  <a:lnTo>
-                    <a:pt x="5369747" y="3292611"/>
-                  </a:lnTo>
-                  <a:lnTo>
-                    <a:pt x="5447381" y="3304472"/>
-                  </a:lnTo>
-                  <a:lnTo>
-                    <a:pt x="5525015" y="3315941"/>
-                  </a:lnTo>
-                  <a:lnTo>
-                    <a:pt x="5602649" y="3327033"/>
-                  </a:lnTo>
-                  <a:lnTo>
-                    <a:pt x="5680283" y="3337760"/>
-                  </a:lnTo>
-                  <a:lnTo>
-                    <a:pt x="5757917" y="3348133"/>
-                  </a:lnTo>
-                  <a:lnTo>
-                    <a:pt x="5835551" y="3358164"/>
-                  </a:lnTo>
-                  <a:lnTo>
-                    <a:pt x="5913185" y="3367865"/>
-                  </a:lnTo>
-                  <a:lnTo>
-                    <a:pt x="5990819" y="3377246"/>
-                  </a:lnTo>
-                  <a:lnTo>
-                    <a:pt x="6068454" y="3386319"/>
-                  </a:lnTo>
-                  <a:lnTo>
-                    <a:pt x="6146088" y="3395092"/>
-                  </a:lnTo>
-                  <a:lnTo>
-                    <a:pt x="6223722" y="3403577"/>
-                  </a:lnTo>
-                  <a:lnTo>
-                    <a:pt x="6301356" y="3411782"/>
-                  </a:lnTo>
-                  <a:lnTo>
-                    <a:pt x="6378990" y="3419716"/>
-                  </a:lnTo>
-                  <a:lnTo>
-                    <a:pt x="6456624" y="3427389"/>
-                  </a:lnTo>
-                  <a:lnTo>
-                    <a:pt x="6534258" y="3434810"/>
-                  </a:lnTo>
-                  <a:lnTo>
-                    <a:pt x="6611892" y="3441986"/>
-                  </a:lnTo>
-                  <a:lnTo>
-                    <a:pt x="6689526" y="3448926"/>
-                  </a:lnTo>
-                  <a:lnTo>
-                    <a:pt x="6767160" y="3455637"/>
-                  </a:lnTo>
-                  <a:lnTo>
-                    <a:pt x="6844794" y="3462126"/>
-                  </a:lnTo>
-                  <a:lnTo>
-                    <a:pt x="6922428" y="3468403"/>
-                  </a:lnTo>
-                  <a:lnTo>
-                    <a:pt x="7000062" y="3474472"/>
-                  </a:lnTo>
-                  <a:lnTo>
-                    <a:pt x="7077696" y="3480341"/>
-                  </a:lnTo>
-                  <a:lnTo>
-                    <a:pt x="7155330" y="3486017"/>
-                  </a:lnTo>
-                  <a:lnTo>
-                    <a:pt x="7232964" y="3491507"/>
-                  </a:lnTo>
-                  <a:lnTo>
-                    <a:pt x="7310598" y="3496815"/>
+                    <a:pt x="12998" y="19757"/>
+                  </a:lnTo>
+                  <a:lnTo>
+                    <a:pt x="90632" y="133870"/>
+                  </a:lnTo>
+                  <a:lnTo>
+                    <a:pt x="168266" y="244223"/>
+                  </a:lnTo>
+                  <a:lnTo>
+                    <a:pt x="245900" y="350942"/>
+                  </a:lnTo>
+                  <a:lnTo>
+                    <a:pt x="323534" y="454145"/>
+                  </a:lnTo>
+                  <a:lnTo>
+                    <a:pt x="401168" y="553948"/>
+                  </a:lnTo>
+                  <a:lnTo>
+                    <a:pt x="478802" y="650463"/>
+                  </a:lnTo>
+                  <a:lnTo>
+                    <a:pt x="556436" y="743799"/>
+                  </a:lnTo>
+                  <a:lnTo>
+                    <a:pt x="634070" y="834060"/>
+                  </a:lnTo>
+                  <a:lnTo>
+                    <a:pt x="711704" y="921348"/>
+                  </a:lnTo>
+                  <a:lnTo>
+                    <a:pt x="789338" y="1005760"/>
+                  </a:lnTo>
+                  <a:lnTo>
+                    <a:pt x="866972" y="1087392"/>
+                  </a:lnTo>
+                  <a:lnTo>
+                    <a:pt x="944607" y="1166334"/>
+                  </a:lnTo>
+                  <a:lnTo>
+                    <a:pt x="1022241" y="1242676"/>
+                  </a:lnTo>
+                  <a:lnTo>
+                    <a:pt x="1099875" y="1316502"/>
+                  </a:lnTo>
+                  <a:lnTo>
+                    <a:pt x="1177509" y="1387897"/>
+                  </a:lnTo>
+                  <a:lnTo>
+                    <a:pt x="1255143" y="1456940"/>
+                  </a:lnTo>
+                  <a:lnTo>
+                    <a:pt x="1332777" y="1523708"/>
+                  </a:lnTo>
+                  <a:lnTo>
+                    <a:pt x="1410411" y="1588277"/>
+                  </a:lnTo>
+                  <a:lnTo>
+                    <a:pt x="1488045" y="1650719"/>
+                  </a:lnTo>
+                  <a:lnTo>
+                    <a:pt x="1565679" y="1711104"/>
+                  </a:lnTo>
+                  <a:lnTo>
+                    <a:pt x="1643313" y="1769499"/>
+                  </a:lnTo>
+                  <a:lnTo>
+                    <a:pt x="1720947" y="1825971"/>
+                  </a:lnTo>
+                  <a:lnTo>
+                    <a:pt x="1798581" y="1880583"/>
+                  </a:lnTo>
+                  <a:lnTo>
+                    <a:pt x="1876215" y="1933395"/>
+                  </a:lnTo>
+                  <a:lnTo>
+                    <a:pt x="1953849" y="1984468"/>
+                  </a:lnTo>
+                  <a:lnTo>
+                    <a:pt x="2031483" y="2033858"/>
+                  </a:lnTo>
+                  <a:lnTo>
+                    <a:pt x="2109117" y="2081621"/>
+                  </a:lnTo>
+                  <a:lnTo>
+                    <a:pt x="2186751" y="2127811"/>
+                  </a:lnTo>
+                  <a:lnTo>
+                    <a:pt x="2264385" y="2172479"/>
+                  </a:lnTo>
+                  <a:lnTo>
+                    <a:pt x="2342019" y="2215676"/>
+                  </a:lnTo>
+                  <a:lnTo>
+                    <a:pt x="2419653" y="2257449"/>
+                  </a:lnTo>
+                  <a:lnTo>
+                    <a:pt x="2497287" y="2297847"/>
+                  </a:lnTo>
+                  <a:lnTo>
+                    <a:pt x="2574921" y="2336914"/>
+                  </a:lnTo>
+                  <a:lnTo>
+                    <a:pt x="2652556" y="2374693"/>
+                  </a:lnTo>
+                  <a:lnTo>
+                    <a:pt x="2730190" y="2411228"/>
+                  </a:lnTo>
+                  <a:lnTo>
+                    <a:pt x="2807824" y="2446560"/>
+                  </a:lnTo>
+                  <a:lnTo>
+                    <a:pt x="2885458" y="2480728"/>
+                  </a:lnTo>
+                  <a:lnTo>
+                    <a:pt x="2963092" y="2513770"/>
+                  </a:lnTo>
+                  <a:lnTo>
+                    <a:pt x="3040726" y="2545723"/>
+                  </a:lnTo>
+                  <a:lnTo>
+                    <a:pt x="3118360" y="2576624"/>
+                  </a:lnTo>
+                  <a:lnTo>
+                    <a:pt x="3195994" y="2606507"/>
+                  </a:lnTo>
+                  <a:lnTo>
+                    <a:pt x="3273628" y="2635406"/>
+                  </a:lnTo>
+                  <a:lnTo>
+                    <a:pt x="3351262" y="2663353"/>
+                  </a:lnTo>
+                  <a:lnTo>
+                    <a:pt x="3428896" y="2690378"/>
+                  </a:lnTo>
+                  <a:lnTo>
+                    <a:pt x="3506530" y="2716514"/>
+                  </a:lnTo>
+                  <a:lnTo>
+                    <a:pt x="3584164" y="2741789"/>
+                  </a:lnTo>
+                  <a:lnTo>
+                    <a:pt x="3661798" y="2766231"/>
+                  </a:lnTo>
+                  <a:lnTo>
+                    <a:pt x="3739432" y="2789868"/>
+                  </a:lnTo>
+                  <a:lnTo>
+                    <a:pt x="3817066" y="2812726"/>
+                  </a:lnTo>
+                  <a:lnTo>
+                    <a:pt x="3894700" y="2834831"/>
+                  </a:lnTo>
+                  <a:lnTo>
+                    <a:pt x="3972334" y="2856208"/>
+                  </a:lnTo>
+                  <a:lnTo>
+                    <a:pt x="4049968" y="2876881"/>
+                  </a:lnTo>
+                  <a:lnTo>
+                    <a:pt x="4127602" y="2896873"/>
+                  </a:lnTo>
+                  <a:lnTo>
+                    <a:pt x="4205236" y="2916206"/>
+                  </a:lnTo>
+                  <a:lnTo>
+                    <a:pt x="4282870" y="2934902"/>
+                  </a:lnTo>
+                  <a:lnTo>
+                    <a:pt x="4360505" y="2952982"/>
+                  </a:lnTo>
+                  <a:lnTo>
+                    <a:pt x="4438139" y="2970467"/>
+                  </a:lnTo>
+                  <a:lnTo>
+                    <a:pt x="4515773" y="2987376"/>
+                  </a:lnTo>
+                  <a:lnTo>
+                    <a:pt x="4593407" y="3003728"/>
+                  </a:lnTo>
+                  <a:lnTo>
+                    <a:pt x="4671041" y="3019541"/>
+                  </a:lnTo>
+                  <a:lnTo>
+                    <a:pt x="4748675" y="3034833"/>
+                  </a:lnTo>
+                  <a:lnTo>
+                    <a:pt x="4826309" y="3049621"/>
+                  </a:lnTo>
+                  <a:lnTo>
+                    <a:pt x="4903943" y="3063923"/>
+                  </a:lnTo>
+                  <a:lnTo>
+                    <a:pt x="4981577" y="3077753"/>
+                  </a:lnTo>
+                  <a:lnTo>
+                    <a:pt x="5059211" y="3091127"/>
+                  </a:lnTo>
+                  <a:lnTo>
+                    <a:pt x="5136845" y="3104061"/>
+                  </a:lnTo>
+                  <a:lnTo>
+                    <a:pt x="5214479" y="3116569"/>
+                  </a:lnTo>
+                  <a:lnTo>
+                    <a:pt x="5292113" y="3128665"/>
+                  </a:lnTo>
+                  <a:lnTo>
+                    <a:pt x="5369747" y="3140362"/>
+                  </a:lnTo>
+                  <a:lnTo>
+                    <a:pt x="5447381" y="3151674"/>
+                  </a:lnTo>
+                  <a:lnTo>
+                    <a:pt x="5525015" y="3162613"/>
+                  </a:lnTo>
+                  <a:lnTo>
+                    <a:pt x="5602649" y="3173192"/>
+                  </a:lnTo>
+                  <a:lnTo>
+                    <a:pt x="5680283" y="3183423"/>
+                  </a:lnTo>
+                  <a:lnTo>
+                    <a:pt x="5757917" y="3193316"/>
+                  </a:lnTo>
+                  <a:lnTo>
+                    <a:pt x="5835551" y="3202884"/>
+                  </a:lnTo>
+                  <a:lnTo>
+                    <a:pt x="5913185" y="3212136"/>
+                  </a:lnTo>
+                  <a:lnTo>
+                    <a:pt x="5990819" y="3221084"/>
+                  </a:lnTo>
+                  <a:lnTo>
+                    <a:pt x="6068454" y="3229737"/>
+                  </a:lnTo>
+                  <a:lnTo>
+                    <a:pt x="6146088" y="3238104"/>
+                  </a:lnTo>
+                  <a:lnTo>
+                    <a:pt x="6223722" y="3246196"/>
+                  </a:lnTo>
+                  <a:lnTo>
+                    <a:pt x="6301356" y="3254022"/>
+                  </a:lnTo>
+                  <a:lnTo>
+                    <a:pt x="6378990" y="3261590"/>
+                  </a:lnTo>
+                  <a:lnTo>
+                    <a:pt x="6456624" y="3268908"/>
+                  </a:lnTo>
+                  <a:lnTo>
+                    <a:pt x="6534258" y="3275986"/>
+                  </a:lnTo>
+                  <a:lnTo>
+                    <a:pt x="6611892" y="3282830"/>
+                  </a:lnTo>
+                  <a:lnTo>
+                    <a:pt x="6689526" y="3289448"/>
+                  </a:lnTo>
+                  <a:lnTo>
+                    <a:pt x="6767160" y="3295849"/>
+                  </a:lnTo>
+                  <a:lnTo>
+                    <a:pt x="6844794" y="3302039"/>
+                  </a:lnTo>
+                  <a:lnTo>
+                    <a:pt x="6922428" y="3308025"/>
+                  </a:lnTo>
+                  <a:lnTo>
+                    <a:pt x="7000062" y="3313814"/>
+                  </a:lnTo>
+                  <a:lnTo>
+                    <a:pt x="7077696" y="3319412"/>
+                  </a:lnTo>
+                  <a:lnTo>
+                    <a:pt x="7155330" y="3324825"/>
+                  </a:lnTo>
+                  <a:lnTo>
+                    <a:pt x="7232964" y="3330061"/>
+                  </a:lnTo>
+                  <a:lnTo>
+                    <a:pt x="7310598" y="3335123"/>
                   </a:lnTo>
                 </a:path>
               </a:pathLst>
@@ -4443,7 +4443,7 @@
           </p:nvSpPr>
           <p:spPr>
             <a:xfrm>
-              <a:off x="817517" y="4679530"/>
+              <a:off x="817517" y="4727786"/>
               <a:ext cx="7799693" cy="0"/>
             </a:xfrm>
             <a:custGeom>
@@ -4486,15 +4486,15 @@
           </p:nvSpPr>
           <p:spPr>
             <a:xfrm>
-              <a:off x="4203673" y="1896563"/>
-              <a:ext cx="0" cy="3826579"/>
+              <a:off x="4203673" y="2073503"/>
+              <a:ext cx="0" cy="3649639"/>
             </a:xfrm>
             <a:custGeom>
               <a:avLst/>
               <a:pathLst>
-                <a:path w="0" h="3826579">
+                <a:path w="0" h="3649639">
                   <a:moveTo>
-                    <a:pt x="0" y="3826579"/>
+                    <a:pt x="0" y="3649639"/>
                   </a:moveTo>
                   <a:lnTo>
                     <a:pt x="0" y="0"/>
@@ -4529,7 +4529,7 @@
           </p:nvSpPr>
           <p:spPr>
             <a:xfrm>
-              <a:off x="692708" y="5509156"/>
+              <a:off x="692708" y="5517199"/>
               <a:ext cx="62179" cy="80101"/>
             </a:xfrm>
             <a:prstGeom prst="rect">
@@ -4575,7 +4575,7 @@
           </p:nvSpPr>
           <p:spPr>
             <a:xfrm>
-              <a:off x="692708" y="4639479"/>
+              <a:off x="692708" y="4687735"/>
               <a:ext cx="62179" cy="80101"/>
             </a:xfrm>
             <a:prstGeom prst="rect">
@@ -4621,7 +4621,7 @@
           </p:nvSpPr>
           <p:spPr>
             <a:xfrm>
-              <a:off x="692708" y="3769802"/>
+              <a:off x="692708" y="3858272"/>
               <a:ext cx="62179" cy="80101"/>
             </a:xfrm>
             <a:prstGeom prst="rect">
@@ -4667,7 +4667,7 @@
           </p:nvSpPr>
           <p:spPr>
             <a:xfrm>
-              <a:off x="692708" y="2900125"/>
+              <a:off x="692708" y="3028808"/>
               <a:ext cx="62179" cy="80101"/>
             </a:xfrm>
             <a:prstGeom prst="rect">
@@ -4713,7 +4713,7 @@
           </p:nvSpPr>
           <p:spPr>
             <a:xfrm>
-              <a:off x="692708" y="2030448"/>
+              <a:off x="692708" y="2199345"/>
               <a:ext cx="62179" cy="80101"/>
             </a:xfrm>
             <a:prstGeom prst="rect">
@@ -4989,7 +4989,7 @@
           </p:nvSpPr>
           <p:spPr>
             <a:xfrm rot="-5400000">
-              <a:off x="68446" y="3759743"/>
+              <a:off x="68446" y="3848213"/>
               <a:ext cx="1016904" cy="100218"/>
             </a:xfrm>
             <a:prstGeom prst="rect">
@@ -5030,6 +5030,52 @@
         <p:sp>
           <p:nvSpPr>
             <p:cNvPr id="38" name="tx38"/>
+            <p:cNvSpPr/>
+            <p:nvPr/>
+          </p:nvSpPr>
+          <p:spPr>
+            <a:xfrm>
+              <a:off x="817517" y="1896563"/>
+              <a:ext cx="4166463" cy="82021"/>
+            </a:xfrm>
+            <a:prstGeom prst="rect">
+              <a:avLst/>
+            </a:prstGeom>
+            <a:noFill/>
+          </p:spPr>
+          <p:txBody>
+            <a:bodyPr lIns="0" rIns="0" tIns="0" bIns="0" anchorCtr="1" anchor="ctr" wrap="none"/>
+            <a:lstStyle/>
+            <a:p>
+              <a:pPr algn="l" marL="0" marR="0" indent="0">
+                <a:lnSpc>
+                  <a:spcPts val="900"/>
+                </a:lnSpc>
+                <a:spcBef>
+                  <a:spcPts val="0"/>
+                </a:spcBef>
+                <a:spcAft>
+                  <a:spcPts val="0"/>
+                </a:spcAft>
+              </a:pPr>
+              <a:r>
+                <a:rPr sz="900">
+                  <a:solidFill>
+                    <a:srgbClr val="404040">
+                      <a:alpha val="100000"/>
+                    </a:srgbClr>
+                  </a:solidFill>
+                  <a:latin typeface="Helvetica"/>
+                  <a:cs typeface="Helvetica"/>
+                </a:rPr>
+                <a:t>subHR = 0.68 (95% CI 0.51-0.91), p = 0.008   (per 0.1-unit increase in eGFR ratio)</a:t>
+              </a:r>
+            </a:p>
+          </p:txBody>
+        </p:sp>
+        <p:sp>
+          <p:nvSpPr>
+            <p:cNvPr id="39" name="tx39"/>
             <p:cNvSpPr/>
             <p:nvPr/>
           </p:nvSpPr>

--- a/docs/plots/carbo/jx_carbo_linsubhr_ratio_hosp7.pptx
+++ b/docs/plots/carbo/jx_carbo_linsubhr_ratio_hosp7.pptx
@@ -2271,26 +2271,26 @@
           </p:nvSpPr>
           <p:spPr>
             <a:xfrm>
-              <a:off x="817517" y="5142518"/>
-              <a:ext cx="7799693" cy="0"/>
+              <a:off x="915645" y="5071743"/>
+              <a:ext cx="7682587" cy="0"/>
             </a:xfrm>
             <a:custGeom>
               <a:avLst/>
               <a:pathLst>
-                <a:path w="7799693" h="0">
+                <a:path w="7682587" h="0">
                   <a:moveTo>
                     <a:pt x="0" y="0"/>
                   </a:moveTo>
                   <a:lnTo>
-                    <a:pt x="7799693" y="0"/>
-                  </a:lnTo>
-                  <a:lnTo>
-                    <a:pt x="7799693" y="0"/>
+                    <a:pt x="7682587" y="0"/>
+                  </a:lnTo>
+                  <a:lnTo>
+                    <a:pt x="7682587" y="0"/>
                   </a:lnTo>
                 </a:path>
               </a:pathLst>
             </a:custGeom>
-            <a:ln w="6775" cap="flat">
+            <a:ln w="8623" cap="flat">
               <a:solidFill>
                 <a:srgbClr val="EBEBEB">
                   <a:alpha val="100000"/>
@@ -2314,26 +2314,26 @@
           </p:nvSpPr>
           <p:spPr>
             <a:xfrm>
-              <a:off x="817517" y="4313054"/>
-              <a:ext cx="7799693" cy="0"/>
+              <a:off x="915645" y="4298074"/>
+              <a:ext cx="7682587" cy="0"/>
             </a:xfrm>
             <a:custGeom>
               <a:avLst/>
               <a:pathLst>
-                <a:path w="7799693" h="0">
+                <a:path w="7682587" h="0">
                   <a:moveTo>
                     <a:pt x="0" y="0"/>
                   </a:moveTo>
                   <a:lnTo>
-                    <a:pt x="7799693" y="0"/>
-                  </a:lnTo>
-                  <a:lnTo>
-                    <a:pt x="7799693" y="0"/>
+                    <a:pt x="7682587" y="0"/>
+                  </a:lnTo>
+                  <a:lnTo>
+                    <a:pt x="7682587" y="0"/>
                   </a:lnTo>
                 </a:path>
               </a:pathLst>
             </a:custGeom>
-            <a:ln w="6775" cap="flat">
+            <a:ln w="8623" cap="flat">
               <a:solidFill>
                 <a:srgbClr val="EBEBEB">
                   <a:alpha val="100000"/>
@@ -2357,26 +2357,26 @@
           </p:nvSpPr>
           <p:spPr>
             <a:xfrm>
-              <a:off x="817517" y="3483591"/>
-              <a:ext cx="7799693" cy="0"/>
+              <a:off x="915645" y="3524405"/>
+              <a:ext cx="7682587" cy="0"/>
             </a:xfrm>
             <a:custGeom>
               <a:avLst/>
               <a:pathLst>
-                <a:path w="7799693" h="0">
+                <a:path w="7682587" h="0">
                   <a:moveTo>
                     <a:pt x="0" y="0"/>
                   </a:moveTo>
                   <a:lnTo>
-                    <a:pt x="7799693" y="0"/>
-                  </a:lnTo>
-                  <a:lnTo>
-                    <a:pt x="7799693" y="0"/>
+                    <a:pt x="7682587" y="0"/>
+                  </a:lnTo>
+                  <a:lnTo>
+                    <a:pt x="7682587" y="0"/>
                   </a:lnTo>
                 </a:path>
               </a:pathLst>
             </a:custGeom>
-            <a:ln w="6775" cap="flat">
+            <a:ln w="8623" cap="flat">
               <a:solidFill>
                 <a:srgbClr val="EBEBEB">
                   <a:alpha val="100000"/>
@@ -2400,26 +2400,26 @@
           </p:nvSpPr>
           <p:spPr>
             <a:xfrm>
-              <a:off x="817517" y="2654127"/>
-              <a:ext cx="7799693" cy="0"/>
+              <a:off x="915645" y="2750737"/>
+              <a:ext cx="7682587" cy="0"/>
             </a:xfrm>
             <a:custGeom>
               <a:avLst/>
               <a:pathLst>
-                <a:path w="7799693" h="0">
+                <a:path w="7682587" h="0">
                   <a:moveTo>
                     <a:pt x="0" y="0"/>
                   </a:moveTo>
                   <a:lnTo>
-                    <a:pt x="7799693" y="0"/>
-                  </a:lnTo>
-                  <a:lnTo>
-                    <a:pt x="7799693" y="0"/>
+                    <a:pt x="7682587" y="0"/>
+                  </a:lnTo>
+                  <a:lnTo>
+                    <a:pt x="7682587" y="0"/>
                   </a:lnTo>
                 </a:path>
               </a:pathLst>
             </a:custGeom>
-            <a:ln w="6775" cap="flat">
+            <a:ln w="8623" cap="flat">
               <a:solidFill>
                 <a:srgbClr val="EBEBEB">
                   <a:alpha val="100000"/>
@@ -2443,15 +2443,15 @@
           </p:nvSpPr>
           <p:spPr>
             <a:xfrm>
-              <a:off x="1615213" y="2073503"/>
-              <a:ext cx="0" cy="3649639"/>
+              <a:off x="1701364" y="2209169"/>
+              <a:ext cx="0" cy="3404141"/>
             </a:xfrm>
             <a:custGeom>
               <a:avLst/>
               <a:pathLst>
-                <a:path w="0" h="3649639">
+                <a:path w="0" h="3404141">
                   <a:moveTo>
-                    <a:pt x="0" y="3649639"/>
+                    <a:pt x="0" y="3404141"/>
                   </a:moveTo>
                   <a:lnTo>
                     <a:pt x="0" y="0"/>
@@ -2462,7 +2462,7 @@
                 </a:path>
               </a:pathLst>
             </a:custGeom>
-            <a:ln w="6775" cap="flat">
+            <a:ln w="8623" cap="flat">
               <a:solidFill>
                 <a:srgbClr val="EBEBEB">
                   <a:alpha val="100000"/>
@@ -2486,15 +2486,15 @@
           </p:nvSpPr>
           <p:spPr>
             <a:xfrm>
-              <a:off x="3387871" y="2073503"/>
-              <a:ext cx="0" cy="3649639"/>
+              <a:off x="3447406" y="2209169"/>
+              <a:ext cx="0" cy="3404141"/>
             </a:xfrm>
             <a:custGeom>
               <a:avLst/>
               <a:pathLst>
-                <a:path w="0" h="3649639">
+                <a:path w="0" h="3404141">
                   <a:moveTo>
-                    <a:pt x="0" y="3649639"/>
+                    <a:pt x="0" y="3404141"/>
                   </a:moveTo>
                   <a:lnTo>
                     <a:pt x="0" y="0"/>
@@ -2505,7 +2505,7 @@
                 </a:path>
               </a:pathLst>
             </a:custGeom>
-            <a:ln w="6775" cap="flat">
+            <a:ln w="8623" cap="flat">
               <a:solidFill>
                 <a:srgbClr val="EBEBEB">
                   <a:alpha val="100000"/>
@@ -2529,15 +2529,15 @@
           </p:nvSpPr>
           <p:spPr>
             <a:xfrm>
-              <a:off x="5160528" y="2073503"/>
-              <a:ext cx="0" cy="3649639"/>
+              <a:off x="5193449" y="2209169"/>
+              <a:ext cx="0" cy="3404141"/>
             </a:xfrm>
             <a:custGeom>
               <a:avLst/>
               <a:pathLst>
-                <a:path w="0" h="3649639">
+                <a:path w="0" h="3404141">
                   <a:moveTo>
-                    <a:pt x="0" y="3649639"/>
+                    <a:pt x="0" y="3404141"/>
                   </a:moveTo>
                   <a:lnTo>
                     <a:pt x="0" y="0"/>
@@ -2548,7 +2548,7 @@
                 </a:path>
               </a:pathLst>
             </a:custGeom>
-            <a:ln w="6775" cap="flat">
+            <a:ln w="8623" cap="flat">
               <a:solidFill>
                 <a:srgbClr val="EBEBEB">
                   <a:alpha val="100000"/>
@@ -2572,15 +2572,15 @@
           </p:nvSpPr>
           <p:spPr>
             <a:xfrm>
-              <a:off x="6933186" y="2073503"/>
-              <a:ext cx="0" cy="3649639"/>
+              <a:off x="6939491" y="2209169"/>
+              <a:ext cx="0" cy="3404141"/>
             </a:xfrm>
             <a:custGeom>
               <a:avLst/>
               <a:pathLst>
-                <a:path w="0" h="3649639">
+                <a:path w="0" h="3404141">
                   <a:moveTo>
-                    <a:pt x="0" y="3649639"/>
+                    <a:pt x="0" y="3404141"/>
                   </a:moveTo>
                   <a:lnTo>
                     <a:pt x="0" y="0"/>
@@ -2591,7 +2591,7 @@
                 </a:path>
               </a:pathLst>
             </a:custGeom>
-            <a:ln w="6775" cap="flat">
+            <a:ln w="8623" cap="flat">
               <a:solidFill>
                 <a:srgbClr val="EBEBEB">
                   <a:alpha val="100000"/>
@@ -2615,26 +2615,26 @@
           </p:nvSpPr>
           <p:spPr>
             <a:xfrm>
-              <a:off x="817517" y="5557249"/>
-              <a:ext cx="7799693" cy="0"/>
+              <a:off x="915645" y="5458577"/>
+              <a:ext cx="7682587" cy="0"/>
             </a:xfrm>
             <a:custGeom>
               <a:avLst/>
               <a:pathLst>
-                <a:path w="7799693" h="0">
+                <a:path w="7682587" h="0">
                   <a:moveTo>
                     <a:pt x="0" y="0"/>
                   </a:moveTo>
                   <a:lnTo>
-                    <a:pt x="7799693" y="0"/>
-                  </a:lnTo>
-                  <a:lnTo>
-                    <a:pt x="7799693" y="0"/>
+                    <a:pt x="7682587" y="0"/>
+                  </a:lnTo>
+                  <a:lnTo>
+                    <a:pt x="7682587" y="0"/>
                   </a:lnTo>
                 </a:path>
               </a:pathLst>
             </a:custGeom>
-            <a:ln w="13550" cap="flat">
+            <a:ln w="17246" cap="flat">
               <a:solidFill>
                 <a:srgbClr val="EBEBEB">
                   <a:alpha val="100000"/>
@@ -2658,26 +2658,26 @@
           </p:nvSpPr>
           <p:spPr>
             <a:xfrm>
-              <a:off x="817517" y="4727786"/>
-              <a:ext cx="7799693" cy="0"/>
+              <a:off x="915645" y="4684908"/>
+              <a:ext cx="7682587" cy="0"/>
             </a:xfrm>
             <a:custGeom>
               <a:avLst/>
               <a:pathLst>
-                <a:path w="7799693" h="0">
+                <a:path w="7682587" h="0">
                   <a:moveTo>
                     <a:pt x="0" y="0"/>
                   </a:moveTo>
                   <a:lnTo>
-                    <a:pt x="7799693" y="0"/>
-                  </a:lnTo>
-                  <a:lnTo>
-                    <a:pt x="7799693" y="0"/>
+                    <a:pt x="7682587" y="0"/>
+                  </a:lnTo>
+                  <a:lnTo>
+                    <a:pt x="7682587" y="0"/>
                   </a:lnTo>
                 </a:path>
               </a:pathLst>
             </a:custGeom>
-            <a:ln w="13550" cap="flat">
+            <a:ln w="17246" cap="flat">
               <a:solidFill>
                 <a:srgbClr val="EBEBEB">
                   <a:alpha val="100000"/>
@@ -2701,26 +2701,26 @@
           </p:nvSpPr>
           <p:spPr>
             <a:xfrm>
-              <a:off x="817517" y="3898322"/>
-              <a:ext cx="7799693" cy="0"/>
+              <a:off x="915645" y="3911240"/>
+              <a:ext cx="7682587" cy="0"/>
             </a:xfrm>
             <a:custGeom>
               <a:avLst/>
               <a:pathLst>
-                <a:path w="7799693" h="0">
+                <a:path w="7682587" h="0">
                   <a:moveTo>
                     <a:pt x="0" y="0"/>
                   </a:moveTo>
                   <a:lnTo>
-                    <a:pt x="7799693" y="0"/>
-                  </a:lnTo>
-                  <a:lnTo>
-                    <a:pt x="7799693" y="0"/>
+                    <a:pt x="7682587" y="0"/>
+                  </a:lnTo>
+                  <a:lnTo>
+                    <a:pt x="7682587" y="0"/>
                   </a:lnTo>
                 </a:path>
               </a:pathLst>
             </a:custGeom>
-            <a:ln w="13550" cap="flat">
+            <a:ln w="17246" cap="flat">
               <a:solidFill>
                 <a:srgbClr val="EBEBEB">
                   <a:alpha val="100000"/>
@@ -2744,26 +2744,26 @@
           </p:nvSpPr>
           <p:spPr>
             <a:xfrm>
-              <a:off x="817517" y="3068859"/>
-              <a:ext cx="7799693" cy="0"/>
+              <a:off x="915645" y="3137571"/>
+              <a:ext cx="7682587" cy="0"/>
             </a:xfrm>
             <a:custGeom>
               <a:avLst/>
               <a:pathLst>
-                <a:path w="7799693" h="0">
+                <a:path w="7682587" h="0">
                   <a:moveTo>
                     <a:pt x="0" y="0"/>
                   </a:moveTo>
                   <a:lnTo>
-                    <a:pt x="7799693" y="0"/>
-                  </a:lnTo>
-                  <a:lnTo>
-                    <a:pt x="7799693" y="0"/>
+                    <a:pt x="7682587" y="0"/>
+                  </a:lnTo>
+                  <a:lnTo>
+                    <a:pt x="7682587" y="0"/>
                   </a:lnTo>
                 </a:path>
               </a:pathLst>
             </a:custGeom>
-            <a:ln w="13550" cap="flat">
+            <a:ln w="17246" cap="flat">
               <a:solidFill>
                 <a:srgbClr val="EBEBEB">
                   <a:alpha val="100000"/>
@@ -2787,26 +2787,26 @@
           </p:nvSpPr>
           <p:spPr>
             <a:xfrm>
-              <a:off x="817517" y="2239395"/>
-              <a:ext cx="7799693" cy="0"/>
+              <a:off x="915645" y="2363903"/>
+              <a:ext cx="7682587" cy="0"/>
             </a:xfrm>
             <a:custGeom>
               <a:avLst/>
               <a:pathLst>
-                <a:path w="7799693" h="0">
+                <a:path w="7682587" h="0">
                   <a:moveTo>
                     <a:pt x="0" y="0"/>
                   </a:moveTo>
                   <a:lnTo>
-                    <a:pt x="7799693" y="0"/>
-                  </a:lnTo>
-                  <a:lnTo>
-                    <a:pt x="7799693" y="0"/>
+                    <a:pt x="7682587" y="0"/>
+                  </a:lnTo>
+                  <a:lnTo>
+                    <a:pt x="7682587" y="0"/>
                   </a:lnTo>
                 </a:path>
               </a:pathLst>
             </a:custGeom>
-            <a:ln w="13550" cap="flat">
+            <a:ln w="17246" cap="flat">
               <a:solidFill>
                 <a:srgbClr val="EBEBEB">
                   <a:alpha val="100000"/>
@@ -2830,15 +2830,15 @@
           </p:nvSpPr>
           <p:spPr>
             <a:xfrm>
-              <a:off x="2501542" y="2073503"/>
-              <a:ext cx="0" cy="3649639"/>
+              <a:off x="2574385" y="2209169"/>
+              <a:ext cx="0" cy="3404141"/>
             </a:xfrm>
             <a:custGeom>
               <a:avLst/>
               <a:pathLst>
-                <a:path w="0" h="3649639">
+                <a:path w="0" h="3404141">
                   <a:moveTo>
-                    <a:pt x="0" y="3649639"/>
+                    <a:pt x="0" y="3404141"/>
                   </a:moveTo>
                   <a:lnTo>
                     <a:pt x="0" y="0"/>
@@ -2849,7 +2849,7 @@
                 </a:path>
               </a:pathLst>
             </a:custGeom>
-            <a:ln w="13550" cap="flat">
+            <a:ln w="17246" cap="flat">
               <a:solidFill>
                 <a:srgbClr val="EBEBEB">
                   <a:alpha val="100000"/>
@@ -2873,15 +2873,15 @@
           </p:nvSpPr>
           <p:spPr>
             <a:xfrm>
-              <a:off x="4274200" y="2073503"/>
-              <a:ext cx="0" cy="3649639"/>
+              <a:off x="4320427" y="2209169"/>
+              <a:ext cx="0" cy="3404141"/>
             </a:xfrm>
             <a:custGeom>
               <a:avLst/>
               <a:pathLst>
-                <a:path w="0" h="3649639">
+                <a:path w="0" h="3404141">
                   <a:moveTo>
-                    <a:pt x="0" y="3649639"/>
+                    <a:pt x="0" y="3404141"/>
                   </a:moveTo>
                   <a:lnTo>
                     <a:pt x="0" y="0"/>
@@ -2892,7 +2892,7 @@
                 </a:path>
               </a:pathLst>
             </a:custGeom>
-            <a:ln w="13550" cap="flat">
+            <a:ln w="17246" cap="flat">
               <a:solidFill>
                 <a:srgbClr val="EBEBEB">
                   <a:alpha val="100000"/>
@@ -2916,15 +2916,15 @@
           </p:nvSpPr>
           <p:spPr>
             <a:xfrm>
-              <a:off x="6046857" y="2073503"/>
-              <a:ext cx="0" cy="3649639"/>
+              <a:off x="6066470" y="2209169"/>
+              <a:ext cx="0" cy="3404141"/>
             </a:xfrm>
             <a:custGeom>
               <a:avLst/>
               <a:pathLst>
-                <a:path w="0" h="3649639">
+                <a:path w="0" h="3404141">
                   <a:moveTo>
-                    <a:pt x="0" y="3649639"/>
+                    <a:pt x="0" y="3404141"/>
                   </a:moveTo>
                   <a:lnTo>
                     <a:pt x="0" y="0"/>
@@ -2935,7 +2935,7 @@
                 </a:path>
               </a:pathLst>
             </a:custGeom>
-            <a:ln w="13550" cap="flat">
+            <a:ln w="17246" cap="flat">
               <a:solidFill>
                 <a:srgbClr val="EBEBEB">
                   <a:alpha val="100000"/>
@@ -2959,15 +2959,15 @@
           </p:nvSpPr>
           <p:spPr>
             <a:xfrm>
-              <a:off x="7819515" y="2073503"/>
-              <a:ext cx="0" cy="3649639"/>
+              <a:off x="7812512" y="2209169"/>
+              <a:ext cx="0" cy="3404141"/>
             </a:xfrm>
             <a:custGeom>
               <a:avLst/>
               <a:pathLst>
-                <a:path w="0" h="3649639">
+                <a:path w="0" h="3404141">
                   <a:moveTo>
-                    <a:pt x="0" y="3649639"/>
+                    <a:pt x="0" y="3404141"/>
                   </a:moveTo>
                   <a:lnTo>
                     <a:pt x="0" y="0"/>
@@ -2978,7 +2978,7 @@
                 </a:path>
               </a:pathLst>
             </a:custGeom>
-            <a:ln w="13550" cap="flat">
+            <a:ln w="17246" cap="flat">
               <a:solidFill>
                 <a:srgbClr val="EBEBEB">
                   <a:alpha val="100000"/>
@@ -3002,531 +3002,531 @@
           </p:nvSpPr>
           <p:spPr>
             <a:xfrm>
-              <a:off x="817517" y="2073503"/>
-              <a:ext cx="7370972" cy="3442136"/>
+              <a:off x="915645" y="2209169"/>
+              <a:ext cx="7260303" cy="3210596"/>
             </a:xfrm>
             <a:custGeom>
               <a:avLst/>
               <a:pathLst>
-                <a:path w="7370972" h="3442136">
+                <a:path w="7260303" h="3210596">
                   <a:moveTo>
-                    <a:pt x="1475269" y="0"/>
+                    <a:pt x="1453119" y="0"/>
                   </a:moveTo>
                   <a:lnTo>
-                    <a:pt x="1548419" y="186510"/>
-                  </a:lnTo>
-                  <a:lnTo>
-                    <a:pt x="1626053" y="373242"/>
-                  </a:lnTo>
-                  <a:lnTo>
-                    <a:pt x="1703687" y="549399"/>
-                  </a:lnTo>
-                  <a:lnTo>
-                    <a:pt x="1781321" y="715580"/>
-                  </a:lnTo>
-                  <a:lnTo>
-                    <a:pt x="1858955" y="872349"/>
-                  </a:lnTo>
-                  <a:lnTo>
-                    <a:pt x="1936589" y="1020240"/>
-                  </a:lnTo>
-                  <a:lnTo>
-                    <a:pt x="2014223" y="1159756"/>
-                  </a:lnTo>
-                  <a:lnTo>
-                    <a:pt x="2091857" y="1291370"/>
-                  </a:lnTo>
-                  <a:lnTo>
-                    <a:pt x="2169491" y="1415531"/>
-                  </a:lnTo>
-                  <a:lnTo>
-                    <a:pt x="2247125" y="1532660"/>
-                  </a:lnTo>
-                  <a:lnTo>
-                    <a:pt x="2324759" y="1643156"/>
-                  </a:lnTo>
-                  <a:lnTo>
-                    <a:pt x="2402393" y="1747394"/>
-                  </a:lnTo>
-                  <a:lnTo>
-                    <a:pt x="2480027" y="1845729"/>
-                  </a:lnTo>
-                  <a:lnTo>
-                    <a:pt x="2557661" y="1938495"/>
-                  </a:lnTo>
-                  <a:lnTo>
-                    <a:pt x="2635295" y="2026007"/>
-                  </a:lnTo>
-                  <a:lnTo>
-                    <a:pt x="2712930" y="2108563"/>
-                  </a:lnTo>
-                  <a:lnTo>
-                    <a:pt x="2790564" y="2186444"/>
-                  </a:lnTo>
-                  <a:lnTo>
-                    <a:pt x="2868198" y="2259914"/>
-                  </a:lnTo>
-                  <a:lnTo>
-                    <a:pt x="2945832" y="2329223"/>
-                  </a:lnTo>
-                  <a:lnTo>
-                    <a:pt x="3023466" y="2394607"/>
-                  </a:lnTo>
-                  <a:lnTo>
-                    <a:pt x="3101100" y="2456288"/>
-                  </a:lnTo>
-                  <a:lnTo>
-                    <a:pt x="3178734" y="2514476"/>
-                  </a:lnTo>
-                  <a:lnTo>
-                    <a:pt x="3256368" y="2569369"/>
-                  </a:lnTo>
-                  <a:lnTo>
-                    <a:pt x="3334002" y="2621153"/>
-                  </a:lnTo>
-                  <a:lnTo>
-                    <a:pt x="3411636" y="2656647"/>
-                  </a:lnTo>
-                  <a:lnTo>
-                    <a:pt x="3489270" y="2663807"/>
-                  </a:lnTo>
-                  <a:lnTo>
-                    <a:pt x="3566904" y="2670906"/>
-                  </a:lnTo>
-                  <a:lnTo>
-                    <a:pt x="3644538" y="2677943"/>
-                  </a:lnTo>
-                  <a:lnTo>
-                    <a:pt x="3722172" y="2684919"/>
-                  </a:lnTo>
-                  <a:lnTo>
-                    <a:pt x="3799806" y="2691835"/>
-                  </a:lnTo>
-                  <a:lnTo>
-                    <a:pt x="3877440" y="2698691"/>
-                  </a:lnTo>
-                  <a:lnTo>
-                    <a:pt x="3955074" y="2705487"/>
-                  </a:lnTo>
-                  <a:lnTo>
-                    <a:pt x="4032708" y="2712225"/>
-                  </a:lnTo>
-                  <a:lnTo>
-                    <a:pt x="4110342" y="2718905"/>
-                  </a:lnTo>
-                  <a:lnTo>
-                    <a:pt x="4187976" y="2725526"/>
-                  </a:lnTo>
-                  <a:lnTo>
-                    <a:pt x="4265610" y="2732090"/>
-                  </a:lnTo>
-                  <a:lnTo>
-                    <a:pt x="4343244" y="2738598"/>
-                  </a:lnTo>
-                  <a:lnTo>
-                    <a:pt x="4420879" y="2745049"/>
-                  </a:lnTo>
-                  <a:lnTo>
-                    <a:pt x="4498513" y="2751444"/>
-                  </a:lnTo>
-                  <a:lnTo>
-                    <a:pt x="4576147" y="2757784"/>
-                  </a:lnTo>
-                  <a:lnTo>
-                    <a:pt x="4653781" y="2764069"/>
-                  </a:lnTo>
-                  <a:lnTo>
-                    <a:pt x="4731415" y="2770299"/>
-                  </a:lnTo>
-                  <a:lnTo>
-                    <a:pt x="4809049" y="2776476"/>
-                  </a:lnTo>
-                  <a:lnTo>
-                    <a:pt x="4886683" y="2782599"/>
-                  </a:lnTo>
-                  <a:lnTo>
-                    <a:pt x="4964317" y="2788669"/>
-                  </a:lnTo>
-                  <a:lnTo>
-                    <a:pt x="5041951" y="2794687"/>
-                  </a:lnTo>
-                  <a:lnTo>
-                    <a:pt x="5119585" y="2800652"/>
-                  </a:lnTo>
-                  <a:lnTo>
-                    <a:pt x="5197219" y="2806566"/>
-                  </a:lnTo>
-                  <a:lnTo>
-                    <a:pt x="5274853" y="2812429"/>
-                  </a:lnTo>
-                  <a:lnTo>
-                    <a:pt x="5352487" y="2818241"/>
-                  </a:lnTo>
-                  <a:lnTo>
-                    <a:pt x="5430121" y="2824002"/>
-                  </a:lnTo>
-                  <a:lnTo>
-                    <a:pt x="5507755" y="2829714"/>
-                  </a:lnTo>
-                  <a:lnTo>
-                    <a:pt x="5585389" y="2835376"/>
-                  </a:lnTo>
-                  <a:lnTo>
-                    <a:pt x="5663023" y="2840989"/>
-                  </a:lnTo>
-                  <a:lnTo>
-                    <a:pt x="5740657" y="2846554"/>
-                  </a:lnTo>
-                  <a:lnTo>
-                    <a:pt x="5818291" y="2852071"/>
-                  </a:lnTo>
-                  <a:lnTo>
-                    <a:pt x="5895925" y="2857539"/>
-                  </a:lnTo>
-                  <a:lnTo>
-                    <a:pt x="5973559" y="2862961"/>
-                  </a:lnTo>
-                  <a:lnTo>
-                    <a:pt x="6051193" y="2868335"/>
-                  </a:lnTo>
-                  <a:lnTo>
-                    <a:pt x="6128827" y="2873663"/>
-                  </a:lnTo>
-                  <a:lnTo>
-                    <a:pt x="6206462" y="2878945"/>
-                  </a:lnTo>
-                  <a:lnTo>
-                    <a:pt x="6284096" y="2884181"/>
-                  </a:lnTo>
-                  <a:lnTo>
-                    <a:pt x="6361730" y="2889371"/>
-                  </a:lnTo>
-                  <a:lnTo>
-                    <a:pt x="6439364" y="2894517"/>
-                  </a:lnTo>
-                  <a:lnTo>
-                    <a:pt x="6516998" y="2899618"/>
-                  </a:lnTo>
-                  <a:lnTo>
-                    <a:pt x="6594632" y="2904675"/>
-                  </a:lnTo>
-                  <a:lnTo>
-                    <a:pt x="6672266" y="2909689"/>
-                  </a:lnTo>
-                  <a:lnTo>
-                    <a:pt x="6749900" y="2914659"/>
-                  </a:lnTo>
-                  <a:lnTo>
-                    <a:pt x="6827534" y="2919585"/>
-                  </a:lnTo>
-                  <a:lnTo>
-                    <a:pt x="6905168" y="2924470"/>
-                  </a:lnTo>
-                  <a:lnTo>
-                    <a:pt x="6982802" y="2929311"/>
-                  </a:lnTo>
-                  <a:lnTo>
-                    <a:pt x="7060436" y="2934111"/>
-                  </a:lnTo>
-                  <a:lnTo>
-                    <a:pt x="7138070" y="2938870"/>
-                  </a:lnTo>
-                  <a:lnTo>
-                    <a:pt x="7215704" y="2943587"/>
-                  </a:lnTo>
-                  <a:lnTo>
-                    <a:pt x="7293338" y="2948263"/>
-                  </a:lnTo>
-                  <a:lnTo>
-                    <a:pt x="7370972" y="2952899"/>
-                  </a:lnTo>
-                  <a:lnTo>
-                    <a:pt x="7370972" y="3442136"/>
-                  </a:lnTo>
-                  <a:lnTo>
-                    <a:pt x="7293338" y="3439638"/>
-                  </a:lnTo>
-                  <a:lnTo>
-                    <a:pt x="7215704" y="3436990"/>
-                  </a:lnTo>
-                  <a:lnTo>
-                    <a:pt x="7138070" y="3434183"/>
-                  </a:lnTo>
-                  <a:lnTo>
-                    <a:pt x="7060436" y="3431208"/>
-                  </a:lnTo>
-                  <a:lnTo>
-                    <a:pt x="6982802" y="3428054"/>
-                  </a:lnTo>
-                  <a:lnTo>
-                    <a:pt x="6905168" y="3424710"/>
-                  </a:lnTo>
-                  <a:lnTo>
-                    <a:pt x="6827534" y="3421166"/>
-                  </a:lnTo>
-                  <a:lnTo>
-                    <a:pt x="6749900" y="3417409"/>
-                  </a:lnTo>
-                  <a:lnTo>
-                    <a:pt x="6672266" y="3413427"/>
-                  </a:lnTo>
-                  <a:lnTo>
-                    <a:pt x="6594632" y="3409205"/>
-                  </a:lnTo>
-                  <a:lnTo>
-                    <a:pt x="6516998" y="3404730"/>
-                  </a:lnTo>
-                  <a:lnTo>
-                    <a:pt x="6439364" y="3399987"/>
-                  </a:lnTo>
-                  <a:lnTo>
-                    <a:pt x="6361730" y="3394959"/>
-                  </a:lnTo>
-                  <a:lnTo>
-                    <a:pt x="6284096" y="3389628"/>
-                  </a:lnTo>
-                  <a:lnTo>
-                    <a:pt x="6206462" y="3383978"/>
-                  </a:lnTo>
-                  <a:lnTo>
-                    <a:pt x="6128827" y="3377989"/>
-                  </a:lnTo>
-                  <a:lnTo>
-                    <a:pt x="6051193" y="3371640"/>
-                  </a:lnTo>
-                  <a:lnTo>
-                    <a:pt x="5973559" y="3364910"/>
-                  </a:lnTo>
-                  <a:lnTo>
-                    <a:pt x="5895925" y="3357776"/>
-                  </a:lnTo>
-                  <a:lnTo>
-                    <a:pt x="5818291" y="3350213"/>
-                  </a:lnTo>
-                  <a:lnTo>
-                    <a:pt x="5740657" y="3342197"/>
-                  </a:lnTo>
-                  <a:lnTo>
-                    <a:pt x="5663023" y="3333699"/>
-                  </a:lnTo>
-                  <a:lnTo>
-                    <a:pt x="5585389" y="3324692"/>
-                  </a:lnTo>
-                  <a:lnTo>
-                    <a:pt x="5507755" y="3315143"/>
-                  </a:lnTo>
-                  <a:lnTo>
-                    <a:pt x="5430121" y="3305021"/>
-                  </a:lnTo>
-                  <a:lnTo>
-                    <a:pt x="5352487" y="3294292"/>
-                  </a:lnTo>
-                  <a:lnTo>
-                    <a:pt x="5274853" y="3282919"/>
-                  </a:lnTo>
-                  <a:lnTo>
-                    <a:pt x="5197219" y="3270862"/>
-                  </a:lnTo>
-                  <a:lnTo>
-                    <a:pt x="5119585" y="3258082"/>
-                  </a:lnTo>
-                  <a:lnTo>
-                    <a:pt x="5041951" y="3244535"/>
-                  </a:lnTo>
-                  <a:lnTo>
-                    <a:pt x="4964317" y="3230175"/>
-                  </a:lnTo>
-                  <a:lnTo>
-                    <a:pt x="4886683" y="3214952"/>
-                  </a:lnTo>
-                  <a:lnTo>
-                    <a:pt x="4809049" y="3198815"/>
-                  </a:lnTo>
-                  <a:lnTo>
-                    <a:pt x="4731415" y="3181710"/>
-                  </a:lnTo>
-                  <a:lnTo>
-                    <a:pt x="4653781" y="3163578"/>
-                  </a:lnTo>
-                  <a:lnTo>
-                    <a:pt x="4576147" y="3144358"/>
-                  </a:lnTo>
-                  <a:lnTo>
-                    <a:pt x="4498513" y="3123983"/>
-                  </a:lnTo>
-                  <a:lnTo>
-                    <a:pt x="4420879" y="3102386"/>
-                  </a:lnTo>
-                  <a:lnTo>
-                    <a:pt x="4343244" y="3079491"/>
-                  </a:lnTo>
-                  <a:lnTo>
-                    <a:pt x="4265610" y="3055223"/>
-                  </a:lnTo>
-                  <a:lnTo>
-                    <a:pt x="4187976" y="3029497"/>
-                  </a:lnTo>
-                  <a:lnTo>
-                    <a:pt x="4110342" y="3002228"/>
-                  </a:lnTo>
-                  <a:lnTo>
-                    <a:pt x="4032708" y="2973321"/>
-                  </a:lnTo>
-                  <a:lnTo>
-                    <a:pt x="3955074" y="2942678"/>
-                  </a:lnTo>
-                  <a:lnTo>
-                    <a:pt x="3877440" y="2910197"/>
-                  </a:lnTo>
-                  <a:lnTo>
-                    <a:pt x="3799806" y="2875765"/>
-                  </a:lnTo>
-                  <a:lnTo>
-                    <a:pt x="3722172" y="2839266"/>
-                  </a:lnTo>
-                  <a:lnTo>
-                    <a:pt x="3644538" y="2800576"/>
-                  </a:lnTo>
-                  <a:lnTo>
-                    <a:pt x="3566904" y="2759563"/>
-                  </a:lnTo>
-                  <a:lnTo>
-                    <a:pt x="3489270" y="2716089"/>
-                  </a:lnTo>
-                  <a:lnTo>
-                    <a:pt x="3411636" y="2670004"/>
-                  </a:lnTo>
-                  <a:lnTo>
-                    <a:pt x="3334002" y="2649424"/>
-                  </a:lnTo>
-                  <a:lnTo>
-                    <a:pt x="3256368" y="2642137"/>
-                  </a:lnTo>
-                  <a:lnTo>
-                    <a:pt x="3178734" y="2634788"/>
-                  </a:lnTo>
-                  <a:lnTo>
-                    <a:pt x="3101100" y="2627374"/>
-                  </a:lnTo>
-                  <a:lnTo>
-                    <a:pt x="3023466" y="2619895"/>
-                  </a:lnTo>
-                  <a:lnTo>
-                    <a:pt x="2945832" y="2612351"/>
-                  </a:lnTo>
-                  <a:lnTo>
-                    <a:pt x="2868198" y="2604741"/>
-                  </a:lnTo>
-                  <a:lnTo>
-                    <a:pt x="2790564" y="2597065"/>
-                  </a:lnTo>
-                  <a:lnTo>
-                    <a:pt x="2712930" y="2589321"/>
-                  </a:lnTo>
-                  <a:lnTo>
-                    <a:pt x="2635295" y="2581510"/>
-                  </a:lnTo>
-                  <a:lnTo>
-                    <a:pt x="2557661" y="2573631"/>
-                  </a:lnTo>
-                  <a:lnTo>
-                    <a:pt x="2480027" y="2565683"/>
-                  </a:lnTo>
-                  <a:lnTo>
-                    <a:pt x="2402393" y="2557665"/>
-                  </a:lnTo>
-                  <a:lnTo>
-                    <a:pt x="2324759" y="2549578"/>
-                  </a:lnTo>
-                  <a:lnTo>
-                    <a:pt x="2247125" y="2541420"/>
-                  </a:lnTo>
-                  <a:lnTo>
-                    <a:pt x="2169491" y="2533190"/>
-                  </a:lnTo>
-                  <a:lnTo>
-                    <a:pt x="2091857" y="2524889"/>
-                  </a:lnTo>
-                  <a:lnTo>
-                    <a:pt x="2014223" y="2516515"/>
-                  </a:lnTo>
-                  <a:lnTo>
-                    <a:pt x="1936589" y="2508068"/>
-                  </a:lnTo>
-                  <a:lnTo>
-                    <a:pt x="1858955" y="2499548"/>
-                  </a:lnTo>
-                  <a:lnTo>
-                    <a:pt x="1781321" y="2490953"/>
-                  </a:lnTo>
-                  <a:lnTo>
-                    <a:pt x="1703687" y="2482283"/>
-                  </a:lnTo>
-                  <a:lnTo>
-                    <a:pt x="1626053" y="2473537"/>
-                  </a:lnTo>
-                  <a:lnTo>
-                    <a:pt x="1548419" y="2464715"/>
-                  </a:lnTo>
-                  <a:lnTo>
-                    <a:pt x="1470785" y="2455815"/>
-                  </a:lnTo>
-                  <a:lnTo>
-                    <a:pt x="1393151" y="2446838"/>
-                  </a:lnTo>
-                  <a:lnTo>
-                    <a:pt x="1315517" y="2437783"/>
-                  </a:lnTo>
-                  <a:lnTo>
-                    <a:pt x="1237883" y="2428649"/>
-                  </a:lnTo>
-                  <a:lnTo>
-                    <a:pt x="1160249" y="2419434"/>
-                  </a:lnTo>
-                  <a:lnTo>
-                    <a:pt x="1082615" y="2410140"/>
-                  </a:lnTo>
-                  <a:lnTo>
-                    <a:pt x="1004981" y="2400764"/>
-                  </a:lnTo>
-                  <a:lnTo>
-                    <a:pt x="927346" y="2391306"/>
-                  </a:lnTo>
-                  <a:lnTo>
-                    <a:pt x="849712" y="2381766"/>
-                  </a:lnTo>
-                  <a:lnTo>
-                    <a:pt x="772078" y="2372142"/>
-                  </a:lnTo>
-                  <a:lnTo>
-                    <a:pt x="694444" y="2362435"/>
-                  </a:lnTo>
-                  <a:lnTo>
-                    <a:pt x="616810" y="2352642"/>
-                  </a:lnTo>
-                  <a:lnTo>
-                    <a:pt x="539176" y="2342764"/>
-                  </a:lnTo>
-                  <a:lnTo>
-                    <a:pt x="461542" y="2332800"/>
-                  </a:lnTo>
-                  <a:lnTo>
-                    <a:pt x="383908" y="2322749"/>
-                  </a:lnTo>
-                  <a:lnTo>
-                    <a:pt x="306274" y="2312610"/>
-                  </a:lnTo>
-                  <a:lnTo>
-                    <a:pt x="228640" y="2302382"/>
-                  </a:lnTo>
-                  <a:lnTo>
-                    <a:pt x="151006" y="2292065"/>
-                  </a:lnTo>
-                  <a:lnTo>
-                    <a:pt x="73372" y="2281658"/>
-                  </a:lnTo>
-                  <a:lnTo>
-                    <a:pt x="0" y="2271736"/>
+                    <a:pt x="1525171" y="173964"/>
+                  </a:lnTo>
+                  <a:lnTo>
+                    <a:pt x="1601639" y="348135"/>
+                  </a:lnTo>
+                  <a:lnTo>
+                    <a:pt x="1678107" y="512443"/>
+                  </a:lnTo>
+                  <a:lnTo>
+                    <a:pt x="1754576" y="667445"/>
+                  </a:lnTo>
+                  <a:lnTo>
+                    <a:pt x="1831044" y="813669"/>
+                  </a:lnTo>
+                  <a:lnTo>
+                    <a:pt x="1907513" y="951612"/>
+                  </a:lnTo>
+                  <a:lnTo>
+                    <a:pt x="1983981" y="1081743"/>
+                  </a:lnTo>
+                  <a:lnTo>
+                    <a:pt x="2060450" y="1204505"/>
+                  </a:lnTo>
+                  <a:lnTo>
+                    <a:pt x="2136918" y="1320313"/>
+                  </a:lnTo>
+                  <a:lnTo>
+                    <a:pt x="2213386" y="1429564"/>
+                  </a:lnTo>
+                  <a:lnTo>
+                    <a:pt x="2289855" y="1532627"/>
+                  </a:lnTo>
+                  <a:lnTo>
+                    <a:pt x="2366323" y="1629853"/>
+                  </a:lnTo>
+                  <a:lnTo>
+                    <a:pt x="2442792" y="1721573"/>
+                  </a:lnTo>
+                  <a:lnTo>
+                    <a:pt x="2519260" y="1808099"/>
+                  </a:lnTo>
+                  <a:lnTo>
+                    <a:pt x="2595729" y="1889725"/>
+                  </a:lnTo>
+                  <a:lnTo>
+                    <a:pt x="2672197" y="1966728"/>
+                  </a:lnTo>
+                  <a:lnTo>
+                    <a:pt x="2748666" y="2039370"/>
+                  </a:lnTo>
+                  <a:lnTo>
+                    <a:pt x="2825134" y="2107898"/>
+                  </a:lnTo>
+                  <a:lnTo>
+                    <a:pt x="2901602" y="2172545"/>
+                  </a:lnTo>
+                  <a:lnTo>
+                    <a:pt x="2978071" y="2233531"/>
+                  </a:lnTo>
+                  <a:lnTo>
+                    <a:pt x="3054539" y="2291063"/>
+                  </a:lnTo>
+                  <a:lnTo>
+                    <a:pt x="3131008" y="2345337"/>
+                  </a:lnTo>
+                  <a:lnTo>
+                    <a:pt x="3207476" y="2396537"/>
+                  </a:lnTo>
+                  <a:lnTo>
+                    <a:pt x="3283945" y="2444837"/>
+                  </a:lnTo>
+                  <a:lnTo>
+                    <a:pt x="3360413" y="2477944"/>
+                  </a:lnTo>
+                  <a:lnTo>
+                    <a:pt x="3436881" y="2484623"/>
+                  </a:lnTo>
+                  <a:lnTo>
+                    <a:pt x="3513350" y="2491244"/>
+                  </a:lnTo>
+                  <a:lnTo>
+                    <a:pt x="3589818" y="2497808"/>
+                  </a:lnTo>
+                  <a:lnTo>
+                    <a:pt x="3666287" y="2504314"/>
+                  </a:lnTo>
+                  <a:lnTo>
+                    <a:pt x="3742755" y="2510765"/>
+                  </a:lnTo>
+                  <a:lnTo>
+                    <a:pt x="3819224" y="2517160"/>
+                  </a:lnTo>
+                  <a:lnTo>
+                    <a:pt x="3895692" y="2523499"/>
+                  </a:lnTo>
+                  <a:lnTo>
+                    <a:pt x="3972160" y="2529784"/>
+                  </a:lnTo>
+                  <a:lnTo>
+                    <a:pt x="4048629" y="2536014"/>
+                  </a:lnTo>
+                  <a:lnTo>
+                    <a:pt x="4125097" y="2542190"/>
+                  </a:lnTo>
+                  <a:lnTo>
+                    <a:pt x="4201566" y="2548313"/>
+                  </a:lnTo>
+                  <a:lnTo>
+                    <a:pt x="4278034" y="2554382"/>
+                  </a:lnTo>
+                  <a:lnTo>
+                    <a:pt x="4354503" y="2560399"/>
+                  </a:lnTo>
+                  <a:lnTo>
+                    <a:pt x="4430971" y="2566364"/>
+                  </a:lnTo>
+                  <a:lnTo>
+                    <a:pt x="4507439" y="2572278"/>
+                  </a:lnTo>
+                  <a:lnTo>
+                    <a:pt x="4583908" y="2578140"/>
+                  </a:lnTo>
+                  <a:lnTo>
+                    <a:pt x="4660376" y="2583952"/>
+                  </a:lnTo>
+                  <a:lnTo>
+                    <a:pt x="4736845" y="2589713"/>
+                  </a:lnTo>
+                  <a:lnTo>
+                    <a:pt x="4813313" y="2595424"/>
+                  </a:lnTo>
+                  <a:lnTo>
+                    <a:pt x="4889782" y="2601086"/>
+                  </a:lnTo>
+                  <a:lnTo>
+                    <a:pt x="4966250" y="2606699"/>
+                  </a:lnTo>
+                  <a:lnTo>
+                    <a:pt x="5042719" y="2612263"/>
+                  </a:lnTo>
+                  <a:lnTo>
+                    <a:pt x="5119187" y="2617779"/>
+                  </a:lnTo>
+                  <a:lnTo>
+                    <a:pt x="5195655" y="2623247"/>
+                  </a:lnTo>
+                  <a:lnTo>
+                    <a:pt x="5272124" y="2628668"/>
+                  </a:lnTo>
+                  <a:lnTo>
+                    <a:pt x="5348592" y="2634042"/>
+                  </a:lnTo>
+                  <a:lnTo>
+                    <a:pt x="5425061" y="2639370"/>
+                  </a:lnTo>
+                  <a:lnTo>
+                    <a:pt x="5501529" y="2644651"/>
+                  </a:lnTo>
+                  <a:lnTo>
+                    <a:pt x="5577998" y="2649887"/>
+                  </a:lnTo>
+                  <a:lnTo>
+                    <a:pt x="5654466" y="2655077"/>
+                  </a:lnTo>
+                  <a:lnTo>
+                    <a:pt x="5730934" y="2660222"/>
+                  </a:lnTo>
+                  <a:lnTo>
+                    <a:pt x="5807403" y="2665323"/>
+                  </a:lnTo>
+                  <a:lnTo>
+                    <a:pt x="5883871" y="2670380"/>
+                  </a:lnTo>
+                  <a:lnTo>
+                    <a:pt x="5960340" y="2675393"/>
+                  </a:lnTo>
+                  <a:lnTo>
+                    <a:pt x="6036808" y="2680362"/>
+                  </a:lnTo>
+                  <a:lnTo>
+                    <a:pt x="6113277" y="2685289"/>
+                  </a:lnTo>
+                  <a:lnTo>
+                    <a:pt x="6189745" y="2690172"/>
+                  </a:lnTo>
+                  <a:lnTo>
+                    <a:pt x="6266213" y="2695014"/>
+                  </a:lnTo>
+                  <a:lnTo>
+                    <a:pt x="6342682" y="2699814"/>
+                  </a:lnTo>
+                  <a:lnTo>
+                    <a:pt x="6419150" y="2704572"/>
+                  </a:lnTo>
+                  <a:lnTo>
+                    <a:pt x="6495619" y="2709289"/>
+                  </a:lnTo>
+                  <a:lnTo>
+                    <a:pt x="6572087" y="2713965"/>
+                  </a:lnTo>
+                  <a:lnTo>
+                    <a:pt x="6648556" y="2718600"/>
+                  </a:lnTo>
+                  <a:lnTo>
+                    <a:pt x="6725024" y="2723196"/>
+                  </a:lnTo>
+                  <a:lnTo>
+                    <a:pt x="6801492" y="2727751"/>
+                  </a:lnTo>
+                  <a:lnTo>
+                    <a:pt x="6877961" y="2732267"/>
+                  </a:lnTo>
+                  <a:lnTo>
+                    <a:pt x="6954429" y="2736745"/>
+                  </a:lnTo>
+                  <a:lnTo>
+                    <a:pt x="7030898" y="2741183"/>
+                  </a:lnTo>
+                  <a:lnTo>
+                    <a:pt x="7107366" y="2745583"/>
+                  </a:lnTo>
+                  <a:lnTo>
+                    <a:pt x="7183835" y="2749945"/>
+                  </a:lnTo>
+                  <a:lnTo>
+                    <a:pt x="7260303" y="2754269"/>
+                  </a:lnTo>
+                  <a:lnTo>
+                    <a:pt x="7260303" y="3210596"/>
+                  </a:lnTo>
+                  <a:lnTo>
+                    <a:pt x="7183835" y="3208266"/>
+                  </a:lnTo>
+                  <a:lnTo>
+                    <a:pt x="7107366" y="3205796"/>
+                  </a:lnTo>
+                  <a:lnTo>
+                    <a:pt x="7030898" y="3203178"/>
+                  </a:lnTo>
+                  <a:lnTo>
+                    <a:pt x="6954429" y="3200403"/>
+                  </a:lnTo>
+                  <a:lnTo>
+                    <a:pt x="6877961" y="3197461"/>
+                  </a:lnTo>
+                  <a:lnTo>
+                    <a:pt x="6801492" y="3194342"/>
+                  </a:lnTo>
+                  <a:lnTo>
+                    <a:pt x="6725024" y="3191037"/>
+                  </a:lnTo>
+                  <a:lnTo>
+                    <a:pt x="6648556" y="3187533"/>
+                  </a:lnTo>
+                  <a:lnTo>
+                    <a:pt x="6572087" y="3183818"/>
+                  </a:lnTo>
+                  <a:lnTo>
+                    <a:pt x="6495619" y="3179881"/>
+                  </a:lnTo>
+                  <a:lnTo>
+                    <a:pt x="6419150" y="3175707"/>
+                  </a:lnTo>
+                  <a:lnTo>
+                    <a:pt x="6342682" y="3171282"/>
+                  </a:lnTo>
+                  <a:lnTo>
+                    <a:pt x="6266213" y="3166592"/>
+                  </a:lnTo>
+                  <a:lnTo>
+                    <a:pt x="6189745" y="3161620"/>
+                  </a:lnTo>
+                  <a:lnTo>
+                    <a:pt x="6113277" y="3156350"/>
+                  </a:lnTo>
+                  <a:lnTo>
+                    <a:pt x="6036808" y="3150764"/>
+                  </a:lnTo>
+                  <a:lnTo>
+                    <a:pt x="5960340" y="3144842"/>
+                  </a:lnTo>
+                  <a:lnTo>
+                    <a:pt x="5883871" y="3138565"/>
+                  </a:lnTo>
+                  <a:lnTo>
+                    <a:pt x="5807403" y="3131910"/>
+                  </a:lnTo>
+                  <a:lnTo>
+                    <a:pt x="5730934" y="3124857"/>
+                  </a:lnTo>
+                  <a:lnTo>
+                    <a:pt x="5654466" y="3117380"/>
+                  </a:lnTo>
+                  <a:lnTo>
+                    <a:pt x="5577998" y="3109454"/>
+                  </a:lnTo>
+                  <a:lnTo>
+                    <a:pt x="5501529" y="3101052"/>
+                  </a:lnTo>
+                  <a:lnTo>
+                    <a:pt x="5425061" y="3092146"/>
+                  </a:lnTo>
+                  <a:lnTo>
+                    <a:pt x="5348592" y="3082705"/>
+                  </a:lnTo>
+                  <a:lnTo>
+                    <a:pt x="5272124" y="3072697"/>
+                  </a:lnTo>
+                  <a:lnTo>
+                    <a:pt x="5195655" y="3062089"/>
+                  </a:lnTo>
+                  <a:lnTo>
+                    <a:pt x="5119187" y="3050843"/>
+                  </a:lnTo>
+                  <a:lnTo>
+                    <a:pt x="5042719" y="3038923"/>
+                  </a:lnTo>
+                  <a:lnTo>
+                    <a:pt x="4966250" y="3026287"/>
+                  </a:lnTo>
+                  <a:lnTo>
+                    <a:pt x="4889782" y="3012893"/>
+                  </a:lnTo>
+                  <a:lnTo>
+                    <a:pt x="4813313" y="2998694"/>
+                  </a:lnTo>
+                  <a:lnTo>
+                    <a:pt x="4736845" y="2983643"/>
+                  </a:lnTo>
+                  <a:lnTo>
+                    <a:pt x="4660376" y="2967688"/>
+                  </a:lnTo>
+                  <a:lnTo>
+                    <a:pt x="4583908" y="2950776"/>
+                  </a:lnTo>
+                  <a:lnTo>
+                    <a:pt x="4507439" y="2932848"/>
+                  </a:lnTo>
+                  <a:lnTo>
+                    <a:pt x="4430971" y="2913844"/>
+                  </a:lnTo>
+                  <a:lnTo>
+                    <a:pt x="4354503" y="2893699"/>
+                  </a:lnTo>
+                  <a:lnTo>
+                    <a:pt x="4278034" y="2872345"/>
+                  </a:lnTo>
+                  <a:lnTo>
+                    <a:pt x="4201566" y="2849709"/>
+                  </a:lnTo>
+                  <a:lnTo>
+                    <a:pt x="4125097" y="2825714"/>
+                  </a:lnTo>
+                  <a:lnTo>
+                    <a:pt x="4048629" y="2800279"/>
+                  </a:lnTo>
+                  <a:lnTo>
+                    <a:pt x="3972160" y="2773316"/>
+                  </a:lnTo>
+                  <a:lnTo>
+                    <a:pt x="3895692" y="2744735"/>
+                  </a:lnTo>
+                  <a:lnTo>
+                    <a:pt x="3819224" y="2714438"/>
+                  </a:lnTo>
+                  <a:lnTo>
+                    <a:pt x="3742755" y="2682323"/>
+                  </a:lnTo>
+                  <a:lnTo>
+                    <a:pt x="3666287" y="2648279"/>
+                  </a:lnTo>
+                  <a:lnTo>
+                    <a:pt x="3589818" y="2612191"/>
+                  </a:lnTo>
+                  <a:lnTo>
+                    <a:pt x="3513350" y="2573938"/>
+                  </a:lnTo>
+                  <a:lnTo>
+                    <a:pt x="3436881" y="2533387"/>
+                  </a:lnTo>
+                  <a:lnTo>
+                    <a:pt x="3360413" y="2490403"/>
+                  </a:lnTo>
+                  <a:lnTo>
+                    <a:pt x="3283945" y="2471207"/>
+                  </a:lnTo>
+                  <a:lnTo>
+                    <a:pt x="3207476" y="2464411"/>
+                  </a:lnTo>
+                  <a:lnTo>
+                    <a:pt x="3131008" y="2457555"/>
+                  </a:lnTo>
+                  <a:lnTo>
+                    <a:pt x="3054539" y="2450640"/>
+                  </a:lnTo>
+                  <a:lnTo>
+                    <a:pt x="2978071" y="2443664"/>
+                  </a:lnTo>
+                  <a:lnTo>
+                    <a:pt x="2901602" y="2436628"/>
+                  </a:lnTo>
+                  <a:lnTo>
+                    <a:pt x="2825134" y="2429530"/>
+                  </a:lnTo>
+                  <a:lnTo>
+                    <a:pt x="2748666" y="2422370"/>
+                  </a:lnTo>
+                  <a:lnTo>
+                    <a:pt x="2672197" y="2415147"/>
+                  </a:lnTo>
+                  <a:lnTo>
+                    <a:pt x="2595729" y="2407861"/>
+                  </a:lnTo>
+                  <a:lnTo>
+                    <a:pt x="2519260" y="2400512"/>
+                  </a:lnTo>
+                  <a:lnTo>
+                    <a:pt x="2442792" y="2393099"/>
+                  </a:lnTo>
+                  <a:lnTo>
+                    <a:pt x="2366323" y="2385620"/>
+                  </a:lnTo>
+                  <a:lnTo>
+                    <a:pt x="2289855" y="2378077"/>
+                  </a:lnTo>
+                  <a:lnTo>
+                    <a:pt x="2213386" y="2370468"/>
+                  </a:lnTo>
+                  <a:lnTo>
+                    <a:pt x="2136918" y="2362792"/>
+                  </a:lnTo>
+                  <a:lnTo>
+                    <a:pt x="2060450" y="2355049"/>
+                  </a:lnTo>
+                  <a:lnTo>
+                    <a:pt x="1983981" y="2347239"/>
+                  </a:lnTo>
+                  <a:lnTo>
+                    <a:pt x="1907513" y="2339360"/>
+                  </a:lnTo>
+                  <a:lnTo>
+                    <a:pt x="1831044" y="2331412"/>
+                  </a:lnTo>
+                  <a:lnTo>
+                    <a:pt x="1754576" y="2323395"/>
+                  </a:lnTo>
+                  <a:lnTo>
+                    <a:pt x="1678107" y="2315309"/>
+                  </a:lnTo>
+                  <a:lnTo>
+                    <a:pt x="1601639" y="2307151"/>
+                  </a:lnTo>
+                  <a:lnTo>
+                    <a:pt x="1525171" y="2298922"/>
+                  </a:lnTo>
+                  <a:lnTo>
+                    <a:pt x="1448702" y="2290622"/>
+                  </a:lnTo>
+                  <a:lnTo>
+                    <a:pt x="1372234" y="2282249"/>
+                  </a:lnTo>
+                  <a:lnTo>
+                    <a:pt x="1295765" y="2273802"/>
+                  </a:lnTo>
+                  <a:lnTo>
+                    <a:pt x="1219297" y="2265282"/>
+                  </a:lnTo>
+                  <a:lnTo>
+                    <a:pt x="1142828" y="2256688"/>
+                  </a:lnTo>
+                  <a:lnTo>
+                    <a:pt x="1066360" y="2248018"/>
+                  </a:lnTo>
+                  <a:lnTo>
+                    <a:pt x="989892" y="2239273"/>
+                  </a:lnTo>
+                  <a:lnTo>
+                    <a:pt x="913423" y="2230452"/>
+                  </a:lnTo>
+                  <a:lnTo>
+                    <a:pt x="836955" y="2221553"/>
+                  </a:lnTo>
+                  <a:lnTo>
+                    <a:pt x="760486" y="2212577"/>
+                  </a:lnTo>
+                  <a:lnTo>
+                    <a:pt x="684018" y="2203522"/>
+                  </a:lnTo>
+                  <a:lnTo>
+                    <a:pt x="607549" y="2194388"/>
+                  </a:lnTo>
+                  <a:lnTo>
+                    <a:pt x="531081" y="2185175"/>
+                  </a:lnTo>
+                  <a:lnTo>
+                    <a:pt x="454613" y="2175881"/>
+                  </a:lnTo>
+                  <a:lnTo>
+                    <a:pt x="378144" y="2166506"/>
+                  </a:lnTo>
+                  <a:lnTo>
+                    <a:pt x="301676" y="2157049"/>
+                  </a:lnTo>
+                  <a:lnTo>
+                    <a:pt x="225207" y="2147509"/>
+                  </a:lnTo>
+                  <a:lnTo>
+                    <a:pt x="148739" y="2137886"/>
+                  </a:lnTo>
+                  <a:lnTo>
+                    <a:pt x="72270" y="2128179"/>
+                  </a:lnTo>
+                  <a:lnTo>
+                    <a:pt x="0" y="2118925"/>
                   </a:lnTo>
                   <a:close/>
                 </a:path>
@@ -3552,243 +3552,243 @@
           </p:nvSpPr>
           <p:spPr>
             <a:xfrm>
-              <a:off x="2292786" y="2073503"/>
-              <a:ext cx="5895703" cy="2952899"/>
+              <a:off x="2368764" y="2209169"/>
+              <a:ext cx="5807184" cy="2754269"/>
             </a:xfrm>
             <a:custGeom>
               <a:avLst/>
               <a:pathLst>
-                <a:path w="5895703" h="2952899">
+                <a:path w="5807184" h="2754269">
                   <a:moveTo>
                     <a:pt x="0" y="0"/>
                   </a:moveTo>
                   <a:lnTo>
-                    <a:pt x="73150" y="186510"/>
-                  </a:lnTo>
-                  <a:lnTo>
-                    <a:pt x="150784" y="373242"/>
-                  </a:lnTo>
-                  <a:lnTo>
-                    <a:pt x="228418" y="549399"/>
-                  </a:lnTo>
-                  <a:lnTo>
-                    <a:pt x="306052" y="715580"/>
-                  </a:lnTo>
-                  <a:lnTo>
-                    <a:pt x="383686" y="872349"/>
-                  </a:lnTo>
-                  <a:lnTo>
-                    <a:pt x="461320" y="1020240"/>
-                  </a:lnTo>
-                  <a:lnTo>
-                    <a:pt x="538954" y="1159756"/>
-                  </a:lnTo>
-                  <a:lnTo>
-                    <a:pt x="616588" y="1291370"/>
-                  </a:lnTo>
-                  <a:lnTo>
-                    <a:pt x="694222" y="1415531"/>
-                  </a:lnTo>
-                  <a:lnTo>
-                    <a:pt x="771856" y="1532660"/>
-                  </a:lnTo>
-                  <a:lnTo>
-                    <a:pt x="849490" y="1643156"/>
-                  </a:lnTo>
-                  <a:lnTo>
-                    <a:pt x="927124" y="1747394"/>
-                  </a:lnTo>
-                  <a:lnTo>
-                    <a:pt x="1004758" y="1845729"/>
-                  </a:lnTo>
-                  <a:lnTo>
-                    <a:pt x="1082392" y="1938495"/>
-                  </a:lnTo>
-                  <a:lnTo>
-                    <a:pt x="1160026" y="2026007"/>
-                  </a:lnTo>
-                  <a:lnTo>
-                    <a:pt x="1237660" y="2108563"/>
-                  </a:lnTo>
-                  <a:lnTo>
-                    <a:pt x="1315294" y="2186444"/>
-                  </a:lnTo>
-                  <a:lnTo>
-                    <a:pt x="1392929" y="2259914"/>
-                  </a:lnTo>
-                  <a:lnTo>
-                    <a:pt x="1470563" y="2329223"/>
-                  </a:lnTo>
-                  <a:lnTo>
-                    <a:pt x="1548197" y="2394607"/>
-                  </a:lnTo>
-                  <a:lnTo>
-                    <a:pt x="1625831" y="2456288"/>
-                  </a:lnTo>
-                  <a:lnTo>
-                    <a:pt x="1703465" y="2514476"/>
-                  </a:lnTo>
-                  <a:lnTo>
-                    <a:pt x="1781099" y="2569369"/>
-                  </a:lnTo>
-                  <a:lnTo>
-                    <a:pt x="1858733" y="2621153"/>
-                  </a:lnTo>
-                  <a:lnTo>
-                    <a:pt x="1936367" y="2656647"/>
-                  </a:lnTo>
-                  <a:lnTo>
-                    <a:pt x="2014001" y="2663807"/>
-                  </a:lnTo>
-                  <a:lnTo>
-                    <a:pt x="2091635" y="2670906"/>
-                  </a:lnTo>
-                  <a:lnTo>
-                    <a:pt x="2169269" y="2677943"/>
-                  </a:lnTo>
-                  <a:lnTo>
-                    <a:pt x="2246903" y="2684919"/>
-                  </a:lnTo>
-                  <a:lnTo>
-                    <a:pt x="2324537" y="2691835"/>
-                  </a:lnTo>
-                  <a:lnTo>
-                    <a:pt x="2402171" y="2698691"/>
-                  </a:lnTo>
-                  <a:lnTo>
-                    <a:pt x="2479805" y="2705487"/>
-                  </a:lnTo>
-                  <a:lnTo>
-                    <a:pt x="2557439" y="2712225"/>
-                  </a:lnTo>
-                  <a:lnTo>
-                    <a:pt x="2635073" y="2718905"/>
-                  </a:lnTo>
-                  <a:lnTo>
-                    <a:pt x="2712707" y="2725526"/>
-                  </a:lnTo>
-                  <a:lnTo>
-                    <a:pt x="2790341" y="2732090"/>
-                  </a:lnTo>
-                  <a:lnTo>
-                    <a:pt x="2867975" y="2738598"/>
-                  </a:lnTo>
-                  <a:lnTo>
-                    <a:pt x="2945609" y="2745049"/>
-                  </a:lnTo>
-                  <a:lnTo>
-                    <a:pt x="3023243" y="2751444"/>
-                  </a:lnTo>
-                  <a:lnTo>
-                    <a:pt x="3100878" y="2757784"/>
-                  </a:lnTo>
-                  <a:lnTo>
-                    <a:pt x="3178512" y="2764069"/>
-                  </a:lnTo>
-                  <a:lnTo>
-                    <a:pt x="3256146" y="2770299"/>
-                  </a:lnTo>
-                  <a:lnTo>
-                    <a:pt x="3333780" y="2776476"/>
-                  </a:lnTo>
-                  <a:lnTo>
-                    <a:pt x="3411414" y="2782599"/>
-                  </a:lnTo>
-                  <a:lnTo>
-                    <a:pt x="3489048" y="2788669"/>
-                  </a:lnTo>
-                  <a:lnTo>
-                    <a:pt x="3566682" y="2794687"/>
-                  </a:lnTo>
-                  <a:lnTo>
-                    <a:pt x="3644316" y="2800652"/>
-                  </a:lnTo>
-                  <a:lnTo>
-                    <a:pt x="3721950" y="2806566"/>
-                  </a:lnTo>
-                  <a:lnTo>
-                    <a:pt x="3799584" y="2812429"/>
-                  </a:lnTo>
-                  <a:lnTo>
-                    <a:pt x="3877218" y="2818241"/>
-                  </a:lnTo>
-                  <a:lnTo>
-                    <a:pt x="3954852" y="2824002"/>
-                  </a:lnTo>
-                  <a:lnTo>
-                    <a:pt x="4032486" y="2829714"/>
-                  </a:lnTo>
-                  <a:lnTo>
-                    <a:pt x="4110120" y="2835376"/>
-                  </a:lnTo>
-                  <a:lnTo>
-                    <a:pt x="4187754" y="2840989"/>
-                  </a:lnTo>
-                  <a:lnTo>
-                    <a:pt x="4265388" y="2846554"/>
-                  </a:lnTo>
-                  <a:lnTo>
-                    <a:pt x="4343022" y="2852071"/>
-                  </a:lnTo>
-                  <a:lnTo>
-                    <a:pt x="4420656" y="2857539"/>
-                  </a:lnTo>
-                  <a:lnTo>
-                    <a:pt x="4498290" y="2862961"/>
-                  </a:lnTo>
-                  <a:lnTo>
-                    <a:pt x="4575924" y="2868335"/>
-                  </a:lnTo>
-                  <a:lnTo>
-                    <a:pt x="4653558" y="2873663"/>
-                  </a:lnTo>
-                  <a:lnTo>
-                    <a:pt x="4731192" y="2878945"/>
-                  </a:lnTo>
-                  <a:lnTo>
-                    <a:pt x="4808826" y="2884181"/>
-                  </a:lnTo>
-                  <a:lnTo>
-                    <a:pt x="4886461" y="2889371"/>
-                  </a:lnTo>
-                  <a:lnTo>
-                    <a:pt x="4964095" y="2894517"/>
-                  </a:lnTo>
-                  <a:lnTo>
-                    <a:pt x="5041729" y="2899618"/>
-                  </a:lnTo>
-                  <a:lnTo>
-                    <a:pt x="5119363" y="2904675"/>
-                  </a:lnTo>
-                  <a:lnTo>
-                    <a:pt x="5196997" y="2909689"/>
-                  </a:lnTo>
-                  <a:lnTo>
-                    <a:pt x="5274631" y="2914659"/>
-                  </a:lnTo>
-                  <a:lnTo>
-                    <a:pt x="5352265" y="2919585"/>
-                  </a:lnTo>
-                  <a:lnTo>
-                    <a:pt x="5429899" y="2924470"/>
-                  </a:lnTo>
-                  <a:lnTo>
-                    <a:pt x="5507533" y="2929311"/>
-                  </a:lnTo>
-                  <a:lnTo>
-                    <a:pt x="5585167" y="2934111"/>
-                  </a:lnTo>
-                  <a:lnTo>
-                    <a:pt x="5662801" y="2938870"/>
-                  </a:lnTo>
-                  <a:lnTo>
-                    <a:pt x="5740435" y="2943587"/>
-                  </a:lnTo>
-                  <a:lnTo>
-                    <a:pt x="5818069" y="2948263"/>
-                  </a:lnTo>
-                  <a:lnTo>
-                    <a:pt x="5895703" y="2952899"/>
+                    <a:pt x="72051" y="173964"/>
+                  </a:lnTo>
+                  <a:lnTo>
+                    <a:pt x="148520" y="348135"/>
+                  </a:lnTo>
+                  <a:lnTo>
+                    <a:pt x="224988" y="512443"/>
+                  </a:lnTo>
+                  <a:lnTo>
+                    <a:pt x="301457" y="667445"/>
+                  </a:lnTo>
+                  <a:lnTo>
+                    <a:pt x="377925" y="813669"/>
+                  </a:lnTo>
+                  <a:lnTo>
+                    <a:pt x="454394" y="951612"/>
+                  </a:lnTo>
+                  <a:lnTo>
+                    <a:pt x="530862" y="1081743"/>
+                  </a:lnTo>
+                  <a:lnTo>
+                    <a:pt x="607330" y="1204505"/>
+                  </a:lnTo>
+                  <a:lnTo>
+                    <a:pt x="683799" y="1320313"/>
+                  </a:lnTo>
+                  <a:lnTo>
+                    <a:pt x="760267" y="1429564"/>
+                  </a:lnTo>
+                  <a:lnTo>
+                    <a:pt x="836736" y="1532627"/>
+                  </a:lnTo>
+                  <a:lnTo>
+                    <a:pt x="913204" y="1629853"/>
+                  </a:lnTo>
+                  <a:lnTo>
+                    <a:pt x="989673" y="1721573"/>
+                  </a:lnTo>
+                  <a:lnTo>
+                    <a:pt x="1066141" y="1808099"/>
+                  </a:lnTo>
+                  <a:lnTo>
+                    <a:pt x="1142610" y="1889725"/>
+                  </a:lnTo>
+                  <a:lnTo>
+                    <a:pt x="1219078" y="1966728"/>
+                  </a:lnTo>
+                  <a:lnTo>
+                    <a:pt x="1295546" y="2039370"/>
+                  </a:lnTo>
+                  <a:lnTo>
+                    <a:pt x="1372015" y="2107898"/>
+                  </a:lnTo>
+                  <a:lnTo>
+                    <a:pt x="1448483" y="2172545"/>
+                  </a:lnTo>
+                  <a:lnTo>
+                    <a:pt x="1524952" y="2233531"/>
+                  </a:lnTo>
+                  <a:lnTo>
+                    <a:pt x="1601420" y="2291063"/>
+                  </a:lnTo>
+                  <a:lnTo>
+                    <a:pt x="1677889" y="2345337"/>
+                  </a:lnTo>
+                  <a:lnTo>
+                    <a:pt x="1754357" y="2396537"/>
+                  </a:lnTo>
+                  <a:lnTo>
+                    <a:pt x="1830825" y="2444837"/>
+                  </a:lnTo>
+                  <a:lnTo>
+                    <a:pt x="1907294" y="2477944"/>
+                  </a:lnTo>
+                  <a:lnTo>
+                    <a:pt x="1983762" y="2484623"/>
+                  </a:lnTo>
+                  <a:lnTo>
+                    <a:pt x="2060231" y="2491244"/>
+                  </a:lnTo>
+                  <a:lnTo>
+                    <a:pt x="2136699" y="2497808"/>
+                  </a:lnTo>
+                  <a:lnTo>
+                    <a:pt x="2213168" y="2504314"/>
+                  </a:lnTo>
+                  <a:lnTo>
+                    <a:pt x="2289636" y="2510765"/>
+                  </a:lnTo>
+                  <a:lnTo>
+                    <a:pt x="2366104" y="2517160"/>
+                  </a:lnTo>
+                  <a:lnTo>
+                    <a:pt x="2442573" y="2523499"/>
+                  </a:lnTo>
+                  <a:lnTo>
+                    <a:pt x="2519041" y="2529784"/>
+                  </a:lnTo>
+                  <a:lnTo>
+                    <a:pt x="2595510" y="2536014"/>
+                  </a:lnTo>
+                  <a:lnTo>
+                    <a:pt x="2671978" y="2542190"/>
+                  </a:lnTo>
+                  <a:lnTo>
+                    <a:pt x="2748447" y="2548313"/>
+                  </a:lnTo>
+                  <a:lnTo>
+                    <a:pt x="2824915" y="2554382"/>
+                  </a:lnTo>
+                  <a:lnTo>
+                    <a:pt x="2901383" y="2560399"/>
+                  </a:lnTo>
+                  <a:lnTo>
+                    <a:pt x="2977852" y="2566364"/>
+                  </a:lnTo>
+                  <a:lnTo>
+                    <a:pt x="3054320" y="2572278"/>
+                  </a:lnTo>
+                  <a:lnTo>
+                    <a:pt x="3130789" y="2578140"/>
+                  </a:lnTo>
+                  <a:lnTo>
+                    <a:pt x="3207257" y="2583952"/>
+                  </a:lnTo>
+                  <a:lnTo>
+                    <a:pt x="3283726" y="2589713"/>
+                  </a:lnTo>
+                  <a:lnTo>
+                    <a:pt x="3360194" y="2595424"/>
+                  </a:lnTo>
+                  <a:lnTo>
+                    <a:pt x="3436663" y="2601086"/>
+                  </a:lnTo>
+                  <a:lnTo>
+                    <a:pt x="3513131" y="2606699"/>
+                  </a:lnTo>
+                  <a:lnTo>
+                    <a:pt x="3589599" y="2612263"/>
+                  </a:lnTo>
+                  <a:lnTo>
+                    <a:pt x="3666068" y="2617779"/>
+                  </a:lnTo>
+                  <a:lnTo>
+                    <a:pt x="3742536" y="2623247"/>
+                  </a:lnTo>
+                  <a:lnTo>
+                    <a:pt x="3819005" y="2628668"/>
+                  </a:lnTo>
+                  <a:lnTo>
+                    <a:pt x="3895473" y="2634042"/>
+                  </a:lnTo>
+                  <a:lnTo>
+                    <a:pt x="3971942" y="2639370"/>
+                  </a:lnTo>
+                  <a:lnTo>
+                    <a:pt x="4048410" y="2644651"/>
+                  </a:lnTo>
+                  <a:lnTo>
+                    <a:pt x="4124878" y="2649887"/>
+                  </a:lnTo>
+                  <a:lnTo>
+                    <a:pt x="4201347" y="2655077"/>
+                  </a:lnTo>
+                  <a:lnTo>
+                    <a:pt x="4277815" y="2660222"/>
+                  </a:lnTo>
+                  <a:lnTo>
+                    <a:pt x="4354284" y="2665323"/>
+                  </a:lnTo>
+                  <a:lnTo>
+                    <a:pt x="4430752" y="2670380"/>
+                  </a:lnTo>
+                  <a:lnTo>
+                    <a:pt x="4507221" y="2675393"/>
+                  </a:lnTo>
+                  <a:lnTo>
+                    <a:pt x="4583689" y="2680362"/>
+                  </a:lnTo>
+                  <a:lnTo>
+                    <a:pt x="4660157" y="2685289"/>
+                  </a:lnTo>
+                  <a:lnTo>
+                    <a:pt x="4736626" y="2690172"/>
+                  </a:lnTo>
+                  <a:lnTo>
+                    <a:pt x="4813094" y="2695014"/>
+                  </a:lnTo>
+                  <a:lnTo>
+                    <a:pt x="4889563" y="2699814"/>
+                  </a:lnTo>
+                  <a:lnTo>
+                    <a:pt x="4966031" y="2704572"/>
+                  </a:lnTo>
+                  <a:lnTo>
+                    <a:pt x="5042500" y="2709289"/>
+                  </a:lnTo>
+                  <a:lnTo>
+                    <a:pt x="5118968" y="2713965"/>
+                  </a:lnTo>
+                  <a:lnTo>
+                    <a:pt x="5195436" y="2718600"/>
+                  </a:lnTo>
+                  <a:lnTo>
+                    <a:pt x="5271905" y="2723196"/>
+                  </a:lnTo>
+                  <a:lnTo>
+                    <a:pt x="5348373" y="2727751"/>
+                  </a:lnTo>
+                  <a:lnTo>
+                    <a:pt x="5424842" y="2732267"/>
+                  </a:lnTo>
+                  <a:lnTo>
+                    <a:pt x="5501310" y="2736745"/>
+                  </a:lnTo>
+                  <a:lnTo>
+                    <a:pt x="5577779" y="2741183"/>
+                  </a:lnTo>
+                  <a:lnTo>
+                    <a:pt x="5654247" y="2745583"/>
+                  </a:lnTo>
+                  <a:lnTo>
+                    <a:pt x="5730716" y="2749945"/>
+                  </a:lnTo>
+                  <a:lnTo>
+                    <a:pt x="5807184" y="2754269"/>
                   </a:lnTo>
                 </a:path>
               </a:pathLst>
@@ -3808,297 +3808,297 @@
           </p:nvSpPr>
           <p:spPr>
             <a:xfrm>
-              <a:off x="817517" y="4345239"/>
-              <a:ext cx="7370972" cy="1170399"/>
+              <a:off x="915645" y="4328094"/>
+              <a:ext cx="7260303" cy="1091671"/>
             </a:xfrm>
             <a:custGeom>
               <a:avLst/>
               <a:pathLst>
-                <a:path w="7370972" h="1170399">
+                <a:path w="7260303" h="1091671">
                   <a:moveTo>
-                    <a:pt x="7370972" y="1170399"/>
+                    <a:pt x="7260303" y="1091671"/>
                   </a:moveTo>
                   <a:lnTo>
-                    <a:pt x="7293338" y="1167901"/>
-                  </a:lnTo>
-                  <a:lnTo>
-                    <a:pt x="7215704" y="1165253"/>
-                  </a:lnTo>
-                  <a:lnTo>
-                    <a:pt x="7138070" y="1162446"/>
-                  </a:lnTo>
-                  <a:lnTo>
-                    <a:pt x="7060436" y="1159471"/>
-                  </a:lnTo>
-                  <a:lnTo>
-                    <a:pt x="6982802" y="1156317"/>
-                  </a:lnTo>
-                  <a:lnTo>
-                    <a:pt x="6905168" y="1152973"/>
-                  </a:lnTo>
-                  <a:lnTo>
-                    <a:pt x="6827534" y="1149429"/>
-                  </a:lnTo>
-                  <a:lnTo>
-                    <a:pt x="6749900" y="1145672"/>
-                  </a:lnTo>
-                  <a:lnTo>
-                    <a:pt x="6672266" y="1141690"/>
-                  </a:lnTo>
-                  <a:lnTo>
-                    <a:pt x="6594632" y="1137468"/>
-                  </a:lnTo>
-                  <a:lnTo>
-                    <a:pt x="6516998" y="1132993"/>
-                  </a:lnTo>
-                  <a:lnTo>
-                    <a:pt x="6439364" y="1128250"/>
-                  </a:lnTo>
-                  <a:lnTo>
-                    <a:pt x="6361730" y="1123222"/>
-                  </a:lnTo>
-                  <a:lnTo>
-                    <a:pt x="6284096" y="1117891"/>
-                  </a:lnTo>
-                  <a:lnTo>
-                    <a:pt x="6206462" y="1112241"/>
-                  </a:lnTo>
-                  <a:lnTo>
-                    <a:pt x="6128827" y="1106252"/>
-                  </a:lnTo>
-                  <a:lnTo>
-                    <a:pt x="6051193" y="1099903"/>
-                  </a:lnTo>
-                  <a:lnTo>
-                    <a:pt x="5973559" y="1093173"/>
-                  </a:lnTo>
-                  <a:lnTo>
-                    <a:pt x="5895925" y="1086039"/>
-                  </a:lnTo>
-                  <a:lnTo>
-                    <a:pt x="5818291" y="1078476"/>
-                  </a:lnTo>
-                  <a:lnTo>
-                    <a:pt x="5740657" y="1070460"/>
-                  </a:lnTo>
-                  <a:lnTo>
-                    <a:pt x="5663023" y="1061962"/>
-                  </a:lnTo>
-                  <a:lnTo>
-                    <a:pt x="5585389" y="1052955"/>
-                  </a:lnTo>
-                  <a:lnTo>
-                    <a:pt x="5507755" y="1043406"/>
-                  </a:lnTo>
-                  <a:lnTo>
-                    <a:pt x="5430121" y="1033285"/>
-                  </a:lnTo>
-                  <a:lnTo>
-                    <a:pt x="5352487" y="1022555"/>
-                  </a:lnTo>
-                  <a:lnTo>
-                    <a:pt x="5274853" y="1011182"/>
-                  </a:lnTo>
-                  <a:lnTo>
-                    <a:pt x="5197219" y="999125"/>
-                  </a:lnTo>
-                  <a:lnTo>
-                    <a:pt x="5119585" y="986345"/>
-                  </a:lnTo>
-                  <a:lnTo>
-                    <a:pt x="5041951" y="972798"/>
-                  </a:lnTo>
-                  <a:lnTo>
-                    <a:pt x="4964317" y="958438"/>
-                  </a:lnTo>
-                  <a:lnTo>
-                    <a:pt x="4886683" y="943215"/>
-                  </a:lnTo>
-                  <a:lnTo>
-                    <a:pt x="4809049" y="927079"/>
-                  </a:lnTo>
-                  <a:lnTo>
-                    <a:pt x="4731415" y="909973"/>
-                  </a:lnTo>
-                  <a:lnTo>
-                    <a:pt x="4653781" y="891841"/>
-                  </a:lnTo>
-                  <a:lnTo>
-                    <a:pt x="4576147" y="872621"/>
-                  </a:lnTo>
-                  <a:lnTo>
-                    <a:pt x="4498513" y="852246"/>
-                  </a:lnTo>
-                  <a:lnTo>
-                    <a:pt x="4420879" y="830649"/>
-                  </a:lnTo>
-                  <a:lnTo>
-                    <a:pt x="4343244" y="807754"/>
-                  </a:lnTo>
-                  <a:lnTo>
-                    <a:pt x="4265610" y="783486"/>
-                  </a:lnTo>
-                  <a:lnTo>
-                    <a:pt x="4187976" y="757760"/>
-                  </a:lnTo>
-                  <a:lnTo>
-                    <a:pt x="4110342" y="730491"/>
-                  </a:lnTo>
-                  <a:lnTo>
-                    <a:pt x="4032708" y="701584"/>
-                  </a:lnTo>
-                  <a:lnTo>
-                    <a:pt x="3955074" y="670941"/>
-                  </a:lnTo>
-                  <a:lnTo>
-                    <a:pt x="3877440" y="638460"/>
-                  </a:lnTo>
-                  <a:lnTo>
-                    <a:pt x="3799806" y="604028"/>
-                  </a:lnTo>
-                  <a:lnTo>
-                    <a:pt x="3722172" y="567529"/>
-                  </a:lnTo>
-                  <a:lnTo>
-                    <a:pt x="3644538" y="528839"/>
-                  </a:lnTo>
-                  <a:lnTo>
-                    <a:pt x="3566904" y="487826"/>
-                  </a:lnTo>
-                  <a:lnTo>
-                    <a:pt x="3489270" y="444352"/>
-                  </a:lnTo>
-                  <a:lnTo>
-                    <a:pt x="3411636" y="398267"/>
-                  </a:lnTo>
-                  <a:lnTo>
-                    <a:pt x="3334002" y="377687"/>
-                  </a:lnTo>
-                  <a:lnTo>
-                    <a:pt x="3256368" y="370401"/>
-                  </a:lnTo>
-                  <a:lnTo>
-                    <a:pt x="3178734" y="363051"/>
-                  </a:lnTo>
-                  <a:lnTo>
-                    <a:pt x="3101100" y="355637"/>
-                  </a:lnTo>
-                  <a:lnTo>
-                    <a:pt x="3023466" y="348158"/>
-                  </a:lnTo>
-                  <a:lnTo>
-                    <a:pt x="2945832" y="340614"/>
-                  </a:lnTo>
-                  <a:lnTo>
-                    <a:pt x="2868198" y="333004"/>
-                  </a:lnTo>
-                  <a:lnTo>
-                    <a:pt x="2790564" y="325328"/>
-                  </a:lnTo>
-                  <a:lnTo>
-                    <a:pt x="2712930" y="317584"/>
-                  </a:lnTo>
-                  <a:lnTo>
-                    <a:pt x="2635295" y="309773"/>
-                  </a:lnTo>
-                  <a:lnTo>
-                    <a:pt x="2557661" y="301894"/>
-                  </a:lnTo>
-                  <a:lnTo>
-                    <a:pt x="2480027" y="293946"/>
-                  </a:lnTo>
-                  <a:lnTo>
-                    <a:pt x="2402393" y="285928"/>
-                  </a:lnTo>
-                  <a:lnTo>
-                    <a:pt x="2324759" y="277841"/>
-                  </a:lnTo>
-                  <a:lnTo>
-                    <a:pt x="2247125" y="269683"/>
-                  </a:lnTo>
-                  <a:lnTo>
-                    <a:pt x="2169491" y="261453"/>
-                  </a:lnTo>
-                  <a:lnTo>
-                    <a:pt x="2091857" y="253152"/>
-                  </a:lnTo>
-                  <a:lnTo>
-                    <a:pt x="2014223" y="244778"/>
-                  </a:lnTo>
-                  <a:lnTo>
-                    <a:pt x="1936589" y="236331"/>
-                  </a:lnTo>
-                  <a:lnTo>
-                    <a:pt x="1858955" y="227811"/>
-                  </a:lnTo>
-                  <a:lnTo>
-                    <a:pt x="1781321" y="219216"/>
-                  </a:lnTo>
-                  <a:lnTo>
-                    <a:pt x="1703687" y="210546"/>
-                  </a:lnTo>
-                  <a:lnTo>
-                    <a:pt x="1626053" y="201800"/>
-                  </a:lnTo>
-                  <a:lnTo>
-                    <a:pt x="1548419" y="192978"/>
-                  </a:lnTo>
-                  <a:lnTo>
-                    <a:pt x="1470785" y="184078"/>
-                  </a:lnTo>
-                  <a:lnTo>
-                    <a:pt x="1393151" y="175101"/>
-                  </a:lnTo>
-                  <a:lnTo>
-                    <a:pt x="1315517" y="166046"/>
-                  </a:lnTo>
-                  <a:lnTo>
-                    <a:pt x="1237883" y="156912"/>
-                  </a:lnTo>
-                  <a:lnTo>
-                    <a:pt x="1160249" y="147697"/>
-                  </a:lnTo>
-                  <a:lnTo>
-                    <a:pt x="1082615" y="138403"/>
-                  </a:lnTo>
-                  <a:lnTo>
-                    <a:pt x="1004981" y="129027"/>
-                  </a:lnTo>
-                  <a:lnTo>
-                    <a:pt x="927346" y="119569"/>
-                  </a:lnTo>
-                  <a:lnTo>
-                    <a:pt x="849712" y="110029"/>
-                  </a:lnTo>
-                  <a:lnTo>
-                    <a:pt x="772078" y="100405"/>
-                  </a:lnTo>
-                  <a:lnTo>
-                    <a:pt x="694444" y="90698"/>
-                  </a:lnTo>
-                  <a:lnTo>
-                    <a:pt x="616810" y="80905"/>
-                  </a:lnTo>
-                  <a:lnTo>
-                    <a:pt x="539176" y="71027"/>
-                  </a:lnTo>
-                  <a:lnTo>
-                    <a:pt x="461542" y="61063"/>
-                  </a:lnTo>
-                  <a:lnTo>
-                    <a:pt x="383908" y="51012"/>
-                  </a:lnTo>
-                  <a:lnTo>
-                    <a:pt x="306274" y="40873"/>
-                  </a:lnTo>
-                  <a:lnTo>
-                    <a:pt x="228640" y="30645"/>
-                  </a:lnTo>
-                  <a:lnTo>
-                    <a:pt x="151006" y="20328"/>
-                  </a:lnTo>
-                  <a:lnTo>
-                    <a:pt x="73372" y="9921"/>
+                    <a:pt x="7183835" y="1089341"/>
+                  </a:lnTo>
+                  <a:lnTo>
+                    <a:pt x="7107366" y="1086871"/>
+                  </a:lnTo>
+                  <a:lnTo>
+                    <a:pt x="7030898" y="1084253"/>
+                  </a:lnTo>
+                  <a:lnTo>
+                    <a:pt x="6954429" y="1081477"/>
+                  </a:lnTo>
+                  <a:lnTo>
+                    <a:pt x="6877961" y="1078535"/>
+                  </a:lnTo>
+                  <a:lnTo>
+                    <a:pt x="6801492" y="1075417"/>
+                  </a:lnTo>
+                  <a:lnTo>
+                    <a:pt x="6725024" y="1072111"/>
+                  </a:lnTo>
+                  <a:lnTo>
+                    <a:pt x="6648556" y="1068607"/>
+                  </a:lnTo>
+                  <a:lnTo>
+                    <a:pt x="6572087" y="1064893"/>
+                  </a:lnTo>
+                  <a:lnTo>
+                    <a:pt x="6495619" y="1060955"/>
+                  </a:lnTo>
+                  <a:lnTo>
+                    <a:pt x="6419150" y="1056781"/>
+                  </a:lnTo>
+                  <a:lnTo>
+                    <a:pt x="6342682" y="1052357"/>
+                  </a:lnTo>
+                  <a:lnTo>
+                    <a:pt x="6266213" y="1047667"/>
+                  </a:lnTo>
+                  <a:lnTo>
+                    <a:pt x="6189745" y="1042695"/>
+                  </a:lnTo>
+                  <a:lnTo>
+                    <a:pt x="6113277" y="1037425"/>
+                  </a:lnTo>
+                  <a:lnTo>
+                    <a:pt x="6036808" y="1031838"/>
+                  </a:lnTo>
+                  <a:lnTo>
+                    <a:pt x="5960340" y="1025917"/>
+                  </a:lnTo>
+                  <a:lnTo>
+                    <a:pt x="5883871" y="1019639"/>
+                  </a:lnTo>
+                  <a:lnTo>
+                    <a:pt x="5807403" y="1012985"/>
+                  </a:lnTo>
+                  <a:lnTo>
+                    <a:pt x="5730934" y="1005931"/>
+                  </a:lnTo>
+                  <a:lnTo>
+                    <a:pt x="5654466" y="998454"/>
+                  </a:lnTo>
+                  <a:lnTo>
+                    <a:pt x="5577998" y="990528"/>
+                  </a:lnTo>
+                  <a:lnTo>
+                    <a:pt x="5501529" y="982126"/>
+                  </a:lnTo>
+                  <a:lnTo>
+                    <a:pt x="5425061" y="973220"/>
+                  </a:lnTo>
+                  <a:lnTo>
+                    <a:pt x="5348592" y="963779"/>
+                  </a:lnTo>
+                  <a:lnTo>
+                    <a:pt x="5272124" y="953772"/>
+                  </a:lnTo>
+                  <a:lnTo>
+                    <a:pt x="5195655" y="943163"/>
+                  </a:lnTo>
+                  <a:lnTo>
+                    <a:pt x="5119187" y="931918"/>
+                  </a:lnTo>
+                  <a:lnTo>
+                    <a:pt x="5042719" y="919998"/>
+                  </a:lnTo>
+                  <a:lnTo>
+                    <a:pt x="4966250" y="907362"/>
+                  </a:lnTo>
+                  <a:lnTo>
+                    <a:pt x="4889782" y="893967"/>
+                  </a:lnTo>
+                  <a:lnTo>
+                    <a:pt x="4813313" y="879768"/>
+                  </a:lnTo>
+                  <a:lnTo>
+                    <a:pt x="4736845" y="864717"/>
+                  </a:lnTo>
+                  <a:lnTo>
+                    <a:pt x="4660376" y="848763"/>
+                  </a:lnTo>
+                  <a:lnTo>
+                    <a:pt x="4583908" y="831850"/>
+                  </a:lnTo>
+                  <a:lnTo>
+                    <a:pt x="4507439" y="813923"/>
+                  </a:lnTo>
+                  <a:lnTo>
+                    <a:pt x="4430971" y="794919"/>
+                  </a:lnTo>
+                  <a:lnTo>
+                    <a:pt x="4354503" y="774774"/>
+                  </a:lnTo>
+                  <a:lnTo>
+                    <a:pt x="4278034" y="753420"/>
+                  </a:lnTo>
+                  <a:lnTo>
+                    <a:pt x="4201566" y="730784"/>
+                  </a:lnTo>
+                  <a:lnTo>
+                    <a:pt x="4125097" y="706789"/>
+                  </a:lnTo>
+                  <a:lnTo>
+                    <a:pt x="4048629" y="681353"/>
+                  </a:lnTo>
+                  <a:lnTo>
+                    <a:pt x="3972160" y="654391"/>
+                  </a:lnTo>
+                  <a:lnTo>
+                    <a:pt x="3895692" y="625810"/>
+                  </a:lnTo>
+                  <a:lnTo>
+                    <a:pt x="3819224" y="595513"/>
+                  </a:lnTo>
+                  <a:lnTo>
+                    <a:pt x="3742755" y="563397"/>
+                  </a:lnTo>
+                  <a:lnTo>
+                    <a:pt x="3666287" y="529353"/>
+                  </a:lnTo>
+                  <a:lnTo>
+                    <a:pt x="3589818" y="493266"/>
+                  </a:lnTo>
+                  <a:lnTo>
+                    <a:pt x="3513350" y="455012"/>
+                  </a:lnTo>
+                  <a:lnTo>
+                    <a:pt x="3436881" y="414462"/>
+                  </a:lnTo>
+                  <a:lnTo>
+                    <a:pt x="3360413" y="371477"/>
+                  </a:lnTo>
+                  <a:lnTo>
+                    <a:pt x="3283945" y="352281"/>
+                  </a:lnTo>
+                  <a:lnTo>
+                    <a:pt x="3207476" y="345485"/>
+                  </a:lnTo>
+                  <a:lnTo>
+                    <a:pt x="3131008" y="338630"/>
+                  </a:lnTo>
+                  <a:lnTo>
+                    <a:pt x="3054539" y="331714"/>
+                  </a:lnTo>
+                  <a:lnTo>
+                    <a:pt x="2978071" y="324739"/>
+                  </a:lnTo>
+                  <a:lnTo>
+                    <a:pt x="2901602" y="317702"/>
+                  </a:lnTo>
+                  <a:lnTo>
+                    <a:pt x="2825134" y="310604"/>
+                  </a:lnTo>
+                  <a:lnTo>
+                    <a:pt x="2748666" y="303444"/>
+                  </a:lnTo>
+                  <a:lnTo>
+                    <a:pt x="2672197" y="296221"/>
+                  </a:lnTo>
+                  <a:lnTo>
+                    <a:pt x="2595729" y="288936"/>
+                  </a:lnTo>
+                  <a:lnTo>
+                    <a:pt x="2519260" y="281587"/>
+                  </a:lnTo>
+                  <a:lnTo>
+                    <a:pt x="2442792" y="274173"/>
+                  </a:lnTo>
+                  <a:lnTo>
+                    <a:pt x="2366323" y="266695"/>
+                  </a:lnTo>
+                  <a:lnTo>
+                    <a:pt x="2289855" y="259151"/>
+                  </a:lnTo>
+                  <a:lnTo>
+                    <a:pt x="2213386" y="251542"/>
+                  </a:lnTo>
+                  <a:lnTo>
+                    <a:pt x="2136918" y="243866"/>
+                  </a:lnTo>
+                  <a:lnTo>
+                    <a:pt x="2060450" y="236123"/>
+                  </a:lnTo>
+                  <a:lnTo>
+                    <a:pt x="1983981" y="228313"/>
+                  </a:lnTo>
+                  <a:lnTo>
+                    <a:pt x="1907513" y="220434"/>
+                  </a:lnTo>
+                  <a:lnTo>
+                    <a:pt x="1831044" y="212487"/>
+                  </a:lnTo>
+                  <a:lnTo>
+                    <a:pt x="1754576" y="204470"/>
+                  </a:lnTo>
+                  <a:lnTo>
+                    <a:pt x="1678107" y="196383"/>
+                  </a:lnTo>
+                  <a:lnTo>
+                    <a:pt x="1601639" y="188226"/>
+                  </a:lnTo>
+                  <a:lnTo>
+                    <a:pt x="1525171" y="179997"/>
+                  </a:lnTo>
+                  <a:lnTo>
+                    <a:pt x="1448702" y="171696"/>
+                  </a:lnTo>
+                  <a:lnTo>
+                    <a:pt x="1372234" y="163323"/>
+                  </a:lnTo>
+                  <a:lnTo>
+                    <a:pt x="1295765" y="154877"/>
+                  </a:lnTo>
+                  <a:lnTo>
+                    <a:pt x="1219297" y="146357"/>
+                  </a:lnTo>
+                  <a:lnTo>
+                    <a:pt x="1142828" y="137762"/>
+                  </a:lnTo>
+                  <a:lnTo>
+                    <a:pt x="1066360" y="129093"/>
+                  </a:lnTo>
+                  <a:lnTo>
+                    <a:pt x="989892" y="120348"/>
+                  </a:lnTo>
+                  <a:lnTo>
+                    <a:pt x="913423" y="111526"/>
+                  </a:lnTo>
+                  <a:lnTo>
+                    <a:pt x="836955" y="102628"/>
+                  </a:lnTo>
+                  <a:lnTo>
+                    <a:pt x="760486" y="93651"/>
+                  </a:lnTo>
+                  <a:lnTo>
+                    <a:pt x="684018" y="84597"/>
+                  </a:lnTo>
+                  <a:lnTo>
+                    <a:pt x="607549" y="75463"/>
+                  </a:lnTo>
+                  <a:lnTo>
+                    <a:pt x="531081" y="66249"/>
+                  </a:lnTo>
+                  <a:lnTo>
+                    <a:pt x="454613" y="56955"/>
+                  </a:lnTo>
+                  <a:lnTo>
+                    <a:pt x="378144" y="47580"/>
+                  </a:lnTo>
+                  <a:lnTo>
+                    <a:pt x="301676" y="38123"/>
+                  </a:lnTo>
+                  <a:lnTo>
+                    <a:pt x="225207" y="28584"/>
+                  </a:lnTo>
+                  <a:lnTo>
+                    <a:pt x="148739" y="18961"/>
+                  </a:lnTo>
+                  <a:lnTo>
+                    <a:pt x="72270" y="9254"/>
                   </a:lnTo>
                   <a:lnTo>
                     <a:pt x="0" y="0"/>
@@ -4121,300 +4121,300 @@
           </p:nvSpPr>
           <p:spPr>
             <a:xfrm>
-              <a:off x="877891" y="2073503"/>
-              <a:ext cx="7310598" cy="3335123"/>
+              <a:off x="975112" y="2209169"/>
+              <a:ext cx="7200836" cy="3110782"/>
             </a:xfrm>
             <a:custGeom>
               <a:avLst/>
               <a:pathLst>
-                <a:path w="7310598" h="3335123">
+                <a:path w="7200836" h="3110782">
                   <a:moveTo>
                     <a:pt x="0" y="0"/>
                   </a:moveTo>
                   <a:lnTo>
-                    <a:pt x="12998" y="19757"/>
-                  </a:lnTo>
-                  <a:lnTo>
-                    <a:pt x="90632" y="133870"/>
-                  </a:lnTo>
-                  <a:lnTo>
-                    <a:pt x="168266" y="244223"/>
-                  </a:lnTo>
-                  <a:lnTo>
-                    <a:pt x="245900" y="350942"/>
-                  </a:lnTo>
-                  <a:lnTo>
-                    <a:pt x="323534" y="454145"/>
-                  </a:lnTo>
-                  <a:lnTo>
-                    <a:pt x="401168" y="553948"/>
-                  </a:lnTo>
-                  <a:lnTo>
-                    <a:pt x="478802" y="650463"/>
-                  </a:lnTo>
-                  <a:lnTo>
-                    <a:pt x="556436" y="743799"/>
-                  </a:lnTo>
-                  <a:lnTo>
-                    <a:pt x="634070" y="834060"/>
-                  </a:lnTo>
-                  <a:lnTo>
-                    <a:pt x="711704" y="921348"/>
-                  </a:lnTo>
-                  <a:lnTo>
-                    <a:pt x="789338" y="1005760"/>
-                  </a:lnTo>
-                  <a:lnTo>
-                    <a:pt x="866972" y="1087392"/>
-                  </a:lnTo>
-                  <a:lnTo>
-                    <a:pt x="944607" y="1166334"/>
-                  </a:lnTo>
-                  <a:lnTo>
-                    <a:pt x="1022241" y="1242676"/>
-                  </a:lnTo>
-                  <a:lnTo>
-                    <a:pt x="1099875" y="1316502"/>
-                  </a:lnTo>
-                  <a:lnTo>
-                    <a:pt x="1177509" y="1387897"/>
-                  </a:lnTo>
-                  <a:lnTo>
-                    <a:pt x="1255143" y="1456940"/>
-                  </a:lnTo>
-                  <a:lnTo>
-                    <a:pt x="1332777" y="1523708"/>
-                  </a:lnTo>
-                  <a:lnTo>
-                    <a:pt x="1410411" y="1588277"/>
-                  </a:lnTo>
-                  <a:lnTo>
-                    <a:pt x="1488045" y="1650719"/>
-                  </a:lnTo>
-                  <a:lnTo>
-                    <a:pt x="1565679" y="1711104"/>
-                  </a:lnTo>
-                  <a:lnTo>
-                    <a:pt x="1643313" y="1769499"/>
-                  </a:lnTo>
-                  <a:lnTo>
-                    <a:pt x="1720947" y="1825971"/>
-                  </a:lnTo>
-                  <a:lnTo>
-                    <a:pt x="1798581" y="1880583"/>
-                  </a:lnTo>
-                  <a:lnTo>
-                    <a:pt x="1876215" y="1933395"/>
-                  </a:lnTo>
-                  <a:lnTo>
-                    <a:pt x="1953849" y="1984468"/>
-                  </a:lnTo>
-                  <a:lnTo>
-                    <a:pt x="2031483" y="2033858"/>
-                  </a:lnTo>
-                  <a:lnTo>
-                    <a:pt x="2109117" y="2081621"/>
-                  </a:lnTo>
-                  <a:lnTo>
-                    <a:pt x="2186751" y="2127811"/>
-                  </a:lnTo>
-                  <a:lnTo>
-                    <a:pt x="2264385" y="2172479"/>
-                  </a:lnTo>
-                  <a:lnTo>
-                    <a:pt x="2342019" y="2215676"/>
-                  </a:lnTo>
-                  <a:lnTo>
-                    <a:pt x="2419653" y="2257449"/>
-                  </a:lnTo>
-                  <a:lnTo>
-                    <a:pt x="2497287" y="2297847"/>
-                  </a:lnTo>
-                  <a:lnTo>
-                    <a:pt x="2574921" y="2336914"/>
-                  </a:lnTo>
-                  <a:lnTo>
-                    <a:pt x="2652556" y="2374693"/>
-                  </a:lnTo>
-                  <a:lnTo>
-                    <a:pt x="2730190" y="2411228"/>
-                  </a:lnTo>
-                  <a:lnTo>
-                    <a:pt x="2807824" y="2446560"/>
-                  </a:lnTo>
-                  <a:lnTo>
-                    <a:pt x="2885458" y="2480728"/>
-                  </a:lnTo>
-                  <a:lnTo>
-                    <a:pt x="2963092" y="2513770"/>
-                  </a:lnTo>
-                  <a:lnTo>
-                    <a:pt x="3040726" y="2545723"/>
-                  </a:lnTo>
-                  <a:lnTo>
-                    <a:pt x="3118360" y="2576624"/>
-                  </a:lnTo>
-                  <a:lnTo>
-                    <a:pt x="3195994" y="2606507"/>
-                  </a:lnTo>
-                  <a:lnTo>
-                    <a:pt x="3273628" y="2635406"/>
-                  </a:lnTo>
-                  <a:lnTo>
-                    <a:pt x="3351262" y="2663353"/>
-                  </a:lnTo>
-                  <a:lnTo>
-                    <a:pt x="3428896" y="2690378"/>
-                  </a:lnTo>
-                  <a:lnTo>
-                    <a:pt x="3506530" y="2716514"/>
-                  </a:lnTo>
-                  <a:lnTo>
-                    <a:pt x="3584164" y="2741789"/>
-                  </a:lnTo>
-                  <a:lnTo>
-                    <a:pt x="3661798" y="2766231"/>
-                  </a:lnTo>
-                  <a:lnTo>
-                    <a:pt x="3739432" y="2789868"/>
-                  </a:lnTo>
-                  <a:lnTo>
-                    <a:pt x="3817066" y="2812726"/>
-                  </a:lnTo>
-                  <a:lnTo>
-                    <a:pt x="3894700" y="2834831"/>
-                  </a:lnTo>
-                  <a:lnTo>
-                    <a:pt x="3972334" y="2856208"/>
-                  </a:lnTo>
-                  <a:lnTo>
-                    <a:pt x="4049968" y="2876881"/>
-                  </a:lnTo>
-                  <a:lnTo>
-                    <a:pt x="4127602" y="2896873"/>
-                  </a:lnTo>
-                  <a:lnTo>
-                    <a:pt x="4205236" y="2916206"/>
-                  </a:lnTo>
-                  <a:lnTo>
-                    <a:pt x="4282870" y="2934902"/>
-                  </a:lnTo>
-                  <a:lnTo>
-                    <a:pt x="4360505" y="2952982"/>
-                  </a:lnTo>
-                  <a:lnTo>
-                    <a:pt x="4438139" y="2970467"/>
-                  </a:lnTo>
-                  <a:lnTo>
-                    <a:pt x="4515773" y="2987376"/>
-                  </a:lnTo>
-                  <a:lnTo>
-                    <a:pt x="4593407" y="3003728"/>
-                  </a:lnTo>
-                  <a:lnTo>
-                    <a:pt x="4671041" y="3019541"/>
-                  </a:lnTo>
-                  <a:lnTo>
-                    <a:pt x="4748675" y="3034833"/>
-                  </a:lnTo>
-                  <a:lnTo>
-                    <a:pt x="4826309" y="3049621"/>
-                  </a:lnTo>
-                  <a:lnTo>
-                    <a:pt x="4903943" y="3063923"/>
-                  </a:lnTo>
-                  <a:lnTo>
-                    <a:pt x="4981577" y="3077753"/>
-                  </a:lnTo>
-                  <a:lnTo>
-                    <a:pt x="5059211" y="3091127"/>
-                  </a:lnTo>
-                  <a:lnTo>
-                    <a:pt x="5136845" y="3104061"/>
-                  </a:lnTo>
-                  <a:lnTo>
-                    <a:pt x="5214479" y="3116569"/>
-                  </a:lnTo>
-                  <a:lnTo>
-                    <a:pt x="5292113" y="3128665"/>
-                  </a:lnTo>
-                  <a:lnTo>
-                    <a:pt x="5369747" y="3140362"/>
-                  </a:lnTo>
-                  <a:lnTo>
-                    <a:pt x="5447381" y="3151674"/>
-                  </a:lnTo>
-                  <a:lnTo>
-                    <a:pt x="5525015" y="3162613"/>
-                  </a:lnTo>
-                  <a:lnTo>
-                    <a:pt x="5602649" y="3173192"/>
-                  </a:lnTo>
-                  <a:lnTo>
-                    <a:pt x="5680283" y="3183423"/>
-                  </a:lnTo>
-                  <a:lnTo>
-                    <a:pt x="5757917" y="3193316"/>
-                  </a:lnTo>
-                  <a:lnTo>
-                    <a:pt x="5835551" y="3202884"/>
-                  </a:lnTo>
-                  <a:lnTo>
-                    <a:pt x="5913185" y="3212136"/>
-                  </a:lnTo>
-                  <a:lnTo>
-                    <a:pt x="5990819" y="3221084"/>
-                  </a:lnTo>
-                  <a:lnTo>
-                    <a:pt x="6068454" y="3229737"/>
-                  </a:lnTo>
-                  <a:lnTo>
-                    <a:pt x="6146088" y="3238104"/>
-                  </a:lnTo>
-                  <a:lnTo>
-                    <a:pt x="6223722" y="3246196"/>
-                  </a:lnTo>
-                  <a:lnTo>
-                    <a:pt x="6301356" y="3254022"/>
-                  </a:lnTo>
-                  <a:lnTo>
-                    <a:pt x="6378990" y="3261590"/>
-                  </a:lnTo>
-                  <a:lnTo>
-                    <a:pt x="6456624" y="3268908"/>
-                  </a:lnTo>
-                  <a:lnTo>
-                    <a:pt x="6534258" y="3275986"/>
-                  </a:lnTo>
-                  <a:lnTo>
-                    <a:pt x="6611892" y="3282830"/>
-                  </a:lnTo>
-                  <a:lnTo>
-                    <a:pt x="6689526" y="3289448"/>
-                  </a:lnTo>
-                  <a:lnTo>
-                    <a:pt x="6767160" y="3295849"/>
-                  </a:lnTo>
-                  <a:lnTo>
-                    <a:pt x="6844794" y="3302039"/>
-                  </a:lnTo>
-                  <a:lnTo>
-                    <a:pt x="6922428" y="3308025"/>
-                  </a:lnTo>
-                  <a:lnTo>
-                    <a:pt x="7000062" y="3313814"/>
-                  </a:lnTo>
-                  <a:lnTo>
-                    <a:pt x="7077696" y="3319412"/>
-                  </a:lnTo>
-                  <a:lnTo>
-                    <a:pt x="7155330" y="3324825"/>
-                  </a:lnTo>
-                  <a:lnTo>
-                    <a:pt x="7232964" y="3330061"/>
-                  </a:lnTo>
-                  <a:lnTo>
-                    <a:pt x="7310598" y="3335123"/>
+                    <a:pt x="12803" y="18428"/>
+                  </a:lnTo>
+                  <a:lnTo>
+                    <a:pt x="89271" y="124865"/>
+                  </a:lnTo>
+                  <a:lnTo>
+                    <a:pt x="165740" y="227795"/>
+                  </a:lnTo>
+                  <a:lnTo>
+                    <a:pt x="242208" y="327335"/>
+                  </a:lnTo>
+                  <a:lnTo>
+                    <a:pt x="318677" y="423596"/>
+                  </a:lnTo>
+                  <a:lnTo>
+                    <a:pt x="395145" y="516686"/>
+                  </a:lnTo>
+                  <a:lnTo>
+                    <a:pt x="471613" y="606709"/>
+                  </a:lnTo>
+                  <a:lnTo>
+                    <a:pt x="548082" y="693767"/>
+                  </a:lnTo>
+                  <a:lnTo>
+                    <a:pt x="624550" y="777956"/>
+                  </a:lnTo>
+                  <a:lnTo>
+                    <a:pt x="701019" y="859372"/>
+                  </a:lnTo>
+                  <a:lnTo>
+                    <a:pt x="777487" y="938106"/>
+                  </a:lnTo>
+                  <a:lnTo>
+                    <a:pt x="853956" y="1014247"/>
+                  </a:lnTo>
+                  <a:lnTo>
+                    <a:pt x="930424" y="1087879"/>
+                  </a:lnTo>
+                  <a:lnTo>
+                    <a:pt x="1006892" y="1159085"/>
+                  </a:lnTo>
+                  <a:lnTo>
+                    <a:pt x="1083361" y="1227946"/>
+                  </a:lnTo>
+                  <a:lnTo>
+                    <a:pt x="1159829" y="1294538"/>
+                  </a:lnTo>
+                  <a:lnTo>
+                    <a:pt x="1236298" y="1358937"/>
+                  </a:lnTo>
+                  <a:lnTo>
+                    <a:pt x="1312766" y="1421214"/>
+                  </a:lnTo>
+                  <a:lnTo>
+                    <a:pt x="1389235" y="1481440"/>
+                  </a:lnTo>
+                  <a:lnTo>
+                    <a:pt x="1465703" y="1539681"/>
+                  </a:lnTo>
+                  <a:lnTo>
+                    <a:pt x="1542172" y="1596004"/>
+                  </a:lnTo>
+                  <a:lnTo>
+                    <a:pt x="1618640" y="1650472"/>
+                  </a:lnTo>
+                  <a:lnTo>
+                    <a:pt x="1695108" y="1703145"/>
+                  </a:lnTo>
+                  <a:lnTo>
+                    <a:pt x="1771577" y="1754083"/>
+                  </a:lnTo>
+                  <a:lnTo>
+                    <a:pt x="1848045" y="1803343"/>
+                  </a:lnTo>
+                  <a:lnTo>
+                    <a:pt x="1924514" y="1850980"/>
+                  </a:lnTo>
+                  <a:lnTo>
+                    <a:pt x="2000982" y="1897048"/>
+                  </a:lnTo>
+                  <a:lnTo>
+                    <a:pt x="2077451" y="1941598"/>
+                  </a:lnTo>
+                  <a:lnTo>
+                    <a:pt x="2153919" y="1984681"/>
+                  </a:lnTo>
+                  <a:lnTo>
+                    <a:pt x="2230387" y="2026344"/>
+                  </a:lnTo>
+                  <a:lnTo>
+                    <a:pt x="2306856" y="2066635"/>
+                  </a:lnTo>
+                  <a:lnTo>
+                    <a:pt x="2383324" y="2105599"/>
+                  </a:lnTo>
+                  <a:lnTo>
+                    <a:pt x="2459793" y="2143279"/>
+                  </a:lnTo>
+                  <a:lnTo>
+                    <a:pt x="2536261" y="2179718"/>
+                  </a:lnTo>
+                  <a:lnTo>
+                    <a:pt x="2612730" y="2214956"/>
+                  </a:lnTo>
+                  <a:lnTo>
+                    <a:pt x="2689198" y="2249034"/>
+                  </a:lnTo>
+                  <a:lnTo>
+                    <a:pt x="2765666" y="2281989"/>
+                  </a:lnTo>
+                  <a:lnTo>
+                    <a:pt x="2842135" y="2313858"/>
+                  </a:lnTo>
+                  <a:lnTo>
+                    <a:pt x="2918603" y="2344678"/>
+                  </a:lnTo>
+                  <a:lnTo>
+                    <a:pt x="2995072" y="2374482"/>
+                  </a:lnTo>
+                  <a:lnTo>
+                    <a:pt x="3071540" y="2403304"/>
+                  </a:lnTo>
+                  <a:lnTo>
+                    <a:pt x="3148009" y="2431177"/>
+                  </a:lnTo>
+                  <a:lnTo>
+                    <a:pt x="3224477" y="2458132"/>
+                  </a:lnTo>
+                  <a:lnTo>
+                    <a:pt x="3300945" y="2484199"/>
+                  </a:lnTo>
+                  <a:lnTo>
+                    <a:pt x="3377414" y="2509407"/>
+                  </a:lnTo>
+                  <a:lnTo>
+                    <a:pt x="3453882" y="2533784"/>
+                  </a:lnTo>
+                  <a:lnTo>
+                    <a:pt x="3530351" y="2557359"/>
+                  </a:lnTo>
+                  <a:lnTo>
+                    <a:pt x="3606819" y="2580157"/>
+                  </a:lnTo>
+                  <a:lnTo>
+                    <a:pt x="3683288" y="2602204"/>
+                  </a:lnTo>
+                  <a:lnTo>
+                    <a:pt x="3759756" y="2623524"/>
+                  </a:lnTo>
+                  <a:lnTo>
+                    <a:pt x="3836224" y="2644142"/>
+                  </a:lnTo>
+                  <a:lnTo>
+                    <a:pt x="3912693" y="2664081"/>
+                  </a:lnTo>
+                  <a:lnTo>
+                    <a:pt x="3989161" y="2683364"/>
+                  </a:lnTo>
+                  <a:lnTo>
+                    <a:pt x="4065630" y="2702011"/>
+                  </a:lnTo>
+                  <a:lnTo>
+                    <a:pt x="4142098" y="2720043"/>
+                  </a:lnTo>
+                  <a:lnTo>
+                    <a:pt x="4218567" y="2737482"/>
+                  </a:lnTo>
+                  <a:lnTo>
+                    <a:pt x="4295035" y="2754346"/>
+                  </a:lnTo>
+                  <a:lnTo>
+                    <a:pt x="4371504" y="2770655"/>
+                  </a:lnTo>
+                  <a:lnTo>
+                    <a:pt x="4447972" y="2786426"/>
+                  </a:lnTo>
+                  <a:lnTo>
+                    <a:pt x="4524440" y="2801678"/>
+                  </a:lnTo>
+                  <a:lnTo>
+                    <a:pt x="4600909" y="2816427"/>
+                  </a:lnTo>
+                  <a:lnTo>
+                    <a:pt x="4677377" y="2830691"/>
+                  </a:lnTo>
+                  <a:lnTo>
+                    <a:pt x="4753846" y="2844485"/>
+                  </a:lnTo>
+                  <a:lnTo>
+                    <a:pt x="4830314" y="2857824"/>
+                  </a:lnTo>
+                  <a:lnTo>
+                    <a:pt x="4906783" y="2870724"/>
+                  </a:lnTo>
+                  <a:lnTo>
+                    <a:pt x="4983251" y="2883198"/>
+                  </a:lnTo>
+                  <a:lnTo>
+                    <a:pt x="5059719" y="2895262"/>
+                  </a:lnTo>
+                  <a:lnTo>
+                    <a:pt x="5136188" y="2906929"/>
+                  </a:lnTo>
+                  <a:lnTo>
+                    <a:pt x="5212656" y="2918211"/>
+                  </a:lnTo>
+                  <a:lnTo>
+                    <a:pt x="5289125" y="2929122"/>
+                  </a:lnTo>
+                  <a:lnTo>
+                    <a:pt x="5365593" y="2939673"/>
+                  </a:lnTo>
+                  <a:lnTo>
+                    <a:pt x="5442062" y="2949876"/>
+                  </a:lnTo>
+                  <a:lnTo>
+                    <a:pt x="5518530" y="2959743"/>
+                  </a:lnTo>
+                  <a:lnTo>
+                    <a:pt x="5594998" y="2969286"/>
+                  </a:lnTo>
+                  <a:lnTo>
+                    <a:pt x="5671467" y="2978514"/>
+                  </a:lnTo>
+                  <a:lnTo>
+                    <a:pt x="5747935" y="2987438"/>
+                  </a:lnTo>
+                  <a:lnTo>
+                    <a:pt x="5824404" y="2996068"/>
+                  </a:lnTo>
+                  <a:lnTo>
+                    <a:pt x="5900872" y="3004413"/>
+                  </a:lnTo>
+                  <a:lnTo>
+                    <a:pt x="5977341" y="3012484"/>
+                  </a:lnTo>
+                  <a:lnTo>
+                    <a:pt x="6053809" y="3020289"/>
+                  </a:lnTo>
+                  <a:lnTo>
+                    <a:pt x="6130277" y="3027837"/>
+                  </a:lnTo>
+                  <a:lnTo>
+                    <a:pt x="6206746" y="3035136"/>
+                  </a:lnTo>
+                  <a:lnTo>
+                    <a:pt x="6283214" y="3042195"/>
+                  </a:lnTo>
+                  <a:lnTo>
+                    <a:pt x="6359683" y="3049021"/>
+                  </a:lnTo>
+                  <a:lnTo>
+                    <a:pt x="6436151" y="3055622"/>
+                  </a:lnTo>
+                  <a:lnTo>
+                    <a:pt x="6512620" y="3062006"/>
+                  </a:lnTo>
+                  <a:lnTo>
+                    <a:pt x="6589088" y="3068179"/>
+                  </a:lnTo>
+                  <a:lnTo>
+                    <a:pt x="6665557" y="3074149"/>
+                  </a:lnTo>
+                  <a:lnTo>
+                    <a:pt x="6742025" y="3079923"/>
+                  </a:lnTo>
+                  <a:lnTo>
+                    <a:pt x="6818493" y="3085506"/>
+                  </a:lnTo>
+                  <a:lnTo>
+                    <a:pt x="6894962" y="3090906"/>
+                  </a:lnTo>
+                  <a:lnTo>
+                    <a:pt x="6971430" y="3096127"/>
+                  </a:lnTo>
+                  <a:lnTo>
+                    <a:pt x="7047899" y="3101176"/>
+                  </a:lnTo>
+                  <a:lnTo>
+                    <a:pt x="7124367" y="3106060"/>
+                  </a:lnTo>
+                  <a:lnTo>
+                    <a:pt x="7200836" y="3110782"/>
                   </a:lnTo>
                 </a:path>
               </a:pathLst>
@@ -4443,21 +4443,21 @@
           </p:nvSpPr>
           <p:spPr>
             <a:xfrm>
-              <a:off x="817517" y="4727786"/>
-              <a:ext cx="7799693" cy="0"/>
+              <a:off x="915645" y="4684908"/>
+              <a:ext cx="7682587" cy="0"/>
             </a:xfrm>
             <a:custGeom>
               <a:avLst/>
               <a:pathLst>
-                <a:path w="7799693" h="0">
+                <a:path w="7682587" h="0">
                   <a:moveTo>
                     <a:pt x="0" y="0"/>
                   </a:moveTo>
                   <a:lnTo>
-                    <a:pt x="7799693" y="0"/>
-                  </a:lnTo>
-                  <a:lnTo>
-                    <a:pt x="7799693" y="0"/>
+                    <a:pt x="7682587" y="0"/>
+                  </a:lnTo>
+                  <a:lnTo>
+                    <a:pt x="7682587" y="0"/>
                   </a:lnTo>
                 </a:path>
               </a:pathLst>
@@ -4486,15 +4486,15 @@
           </p:nvSpPr>
           <p:spPr>
             <a:xfrm>
-              <a:off x="4203673" y="2073503"/>
-              <a:ext cx="0" cy="3649639"/>
+              <a:off x="4250960" y="2209169"/>
+              <a:ext cx="0" cy="3404141"/>
             </a:xfrm>
             <a:custGeom>
               <a:avLst/>
               <a:pathLst>
-                <a:path w="0" h="3649639">
+                <a:path w="0" h="3404141">
                   <a:moveTo>
-                    <a:pt x="0" y="3649639"/>
+                    <a:pt x="0" y="3404141"/>
                   </a:moveTo>
                   <a:lnTo>
                     <a:pt x="0" y="0"/>
@@ -4529,8 +4529,8 @@
           </p:nvSpPr>
           <p:spPr>
             <a:xfrm>
-              <a:off x="692708" y="5517199"/>
-              <a:ext cx="62179" cy="80101"/>
+              <a:off x="756929" y="5407599"/>
+              <a:ext cx="79004" cy="101955"/>
             </a:xfrm>
             <a:prstGeom prst="rect">
               <a:avLst/>
@@ -4543,7 +4543,7 @@
             <a:p>
               <a:pPr algn="l" marL="0" marR="0" indent="0">
                 <a:lnSpc>
-                  <a:spcPts val="880"/>
+                  <a:spcPts val="1120"/>
                 </a:lnSpc>
                 <a:spcBef>
                   <a:spcPts val="0"/>
@@ -4553,7 +4553,7 @@
                 </a:spcAft>
               </a:pPr>
               <a:r>
-                <a:rPr sz="880">
+                <a:rPr sz="1120">
                   <a:solidFill>
                     <a:srgbClr val="4D4D4D">
                       <a:alpha val="100000"/>
@@ -4575,8 +4575,8 @@
           </p:nvSpPr>
           <p:spPr>
             <a:xfrm>
-              <a:off x="692708" y="4687735"/>
-              <a:ext cx="62179" cy="80101"/>
+              <a:off x="756929" y="4633931"/>
+              <a:ext cx="79004" cy="101955"/>
             </a:xfrm>
             <a:prstGeom prst="rect">
               <a:avLst/>
@@ -4589,7 +4589,7 @@
             <a:p>
               <a:pPr algn="l" marL="0" marR="0" indent="0">
                 <a:lnSpc>
-                  <a:spcPts val="880"/>
+                  <a:spcPts val="1120"/>
                 </a:lnSpc>
                 <a:spcBef>
                   <a:spcPts val="0"/>
@@ -4599,7 +4599,7 @@
                 </a:spcAft>
               </a:pPr>
               <a:r>
-                <a:rPr sz="880">
+                <a:rPr sz="1120">
                   <a:solidFill>
                     <a:srgbClr val="4D4D4D">
                       <a:alpha val="100000"/>
@@ -4621,8 +4621,8 @@
           </p:nvSpPr>
           <p:spPr>
             <a:xfrm>
-              <a:off x="692708" y="3858272"/>
-              <a:ext cx="62179" cy="80101"/>
+              <a:off x="756929" y="3860262"/>
+              <a:ext cx="79004" cy="101955"/>
             </a:xfrm>
             <a:prstGeom prst="rect">
               <a:avLst/>
@@ -4635,7 +4635,7 @@
             <a:p>
               <a:pPr algn="l" marL="0" marR="0" indent="0">
                 <a:lnSpc>
-                  <a:spcPts val="880"/>
+                  <a:spcPts val="1120"/>
                 </a:lnSpc>
                 <a:spcBef>
                   <a:spcPts val="0"/>
@@ -4645,7 +4645,7 @@
                 </a:spcAft>
               </a:pPr>
               <a:r>
-                <a:rPr sz="880">
+                <a:rPr sz="1120">
                   <a:solidFill>
                     <a:srgbClr val="4D4D4D">
                       <a:alpha val="100000"/>
@@ -4667,8 +4667,8 @@
           </p:nvSpPr>
           <p:spPr>
             <a:xfrm>
-              <a:off x="692708" y="3028808"/>
-              <a:ext cx="62179" cy="80101"/>
+              <a:off x="756929" y="3086593"/>
+              <a:ext cx="79004" cy="101955"/>
             </a:xfrm>
             <a:prstGeom prst="rect">
               <a:avLst/>
@@ -4681,7 +4681,7 @@
             <a:p>
               <a:pPr algn="l" marL="0" marR="0" indent="0">
                 <a:lnSpc>
-                  <a:spcPts val="880"/>
+                  <a:spcPts val="1120"/>
                 </a:lnSpc>
                 <a:spcBef>
                   <a:spcPts val="0"/>
@@ -4691,7 +4691,7 @@
                 </a:spcAft>
               </a:pPr>
               <a:r>
-                <a:rPr sz="880">
+                <a:rPr sz="1120">
                   <a:solidFill>
                     <a:srgbClr val="4D4D4D">
                       <a:alpha val="100000"/>
@@ -4713,8 +4713,8 @@
           </p:nvSpPr>
           <p:spPr>
             <a:xfrm>
-              <a:off x="692708" y="2199345"/>
-              <a:ext cx="62179" cy="80101"/>
+              <a:off x="756929" y="2312925"/>
+              <a:ext cx="79004" cy="101955"/>
             </a:xfrm>
             <a:prstGeom prst="rect">
               <a:avLst/>
@@ -4727,7 +4727,7 @@
             <a:p>
               <a:pPr algn="l" marL="0" marR="0" indent="0">
                 <a:lnSpc>
-                  <a:spcPts val="880"/>
+                  <a:spcPts val="1120"/>
                 </a:lnSpc>
                 <a:spcBef>
                   <a:spcPts val="0"/>
@@ -4737,7 +4737,7 @@
                 </a:spcAft>
               </a:pPr>
               <a:r>
-                <a:rPr sz="880">
+                <a:rPr sz="1120">
                   <a:solidFill>
                     <a:srgbClr val="4D4D4D">
                       <a:alpha val="100000"/>
@@ -4759,8 +4759,8 @@
           </p:nvSpPr>
           <p:spPr>
             <a:xfrm>
-              <a:off x="2423864" y="5785772"/>
-              <a:ext cx="155356" cy="80101"/>
+              <a:off x="2475630" y="5693022"/>
+              <a:ext cx="197510" cy="101955"/>
             </a:xfrm>
             <a:prstGeom prst="rect">
               <a:avLst/>
@@ -4773,7 +4773,7 @@
             <a:p>
               <a:pPr algn="l" marL="0" marR="0" indent="0">
                 <a:lnSpc>
-                  <a:spcPts val="880"/>
+                  <a:spcPts val="1120"/>
                 </a:lnSpc>
                 <a:spcBef>
                   <a:spcPts val="0"/>
@@ -4783,7 +4783,7 @@
                 </a:spcAft>
               </a:pPr>
               <a:r>
-                <a:rPr sz="880">
+                <a:rPr sz="1120">
                   <a:solidFill>
                     <a:srgbClr val="4D4D4D">
                       <a:alpha val="100000"/>
@@ -4805,8 +4805,8 @@
           </p:nvSpPr>
           <p:spPr>
             <a:xfrm>
-              <a:off x="4196521" y="5785772"/>
-              <a:ext cx="155356" cy="80101"/>
+              <a:off x="4221672" y="5693022"/>
+              <a:ext cx="197510" cy="101955"/>
             </a:xfrm>
             <a:prstGeom prst="rect">
               <a:avLst/>
@@ -4819,7 +4819,7 @@
             <a:p>
               <a:pPr algn="l" marL="0" marR="0" indent="0">
                 <a:lnSpc>
-                  <a:spcPts val="880"/>
+                  <a:spcPts val="1120"/>
                 </a:lnSpc>
                 <a:spcBef>
                   <a:spcPts val="0"/>
@@ -4829,7 +4829,7 @@
                 </a:spcAft>
               </a:pPr>
               <a:r>
-                <a:rPr sz="880">
+                <a:rPr sz="1120">
                   <a:solidFill>
                     <a:srgbClr val="4D4D4D">
                       <a:alpha val="100000"/>
@@ -4851,8 +4851,8 @@
           </p:nvSpPr>
           <p:spPr>
             <a:xfrm>
-              <a:off x="5969179" y="5785772"/>
-              <a:ext cx="155356" cy="80101"/>
+              <a:off x="5967715" y="5693022"/>
+              <a:ext cx="197510" cy="101955"/>
             </a:xfrm>
             <a:prstGeom prst="rect">
               <a:avLst/>
@@ -4865,7 +4865,7 @@
             <a:p>
               <a:pPr algn="l" marL="0" marR="0" indent="0">
                 <a:lnSpc>
-                  <a:spcPts val="880"/>
+                  <a:spcPts val="1120"/>
                 </a:lnSpc>
                 <a:spcBef>
                   <a:spcPts val="0"/>
@@ -4875,7 +4875,7 @@
                 </a:spcAft>
               </a:pPr>
               <a:r>
-                <a:rPr sz="880">
+                <a:rPr sz="1120">
                   <a:solidFill>
                     <a:srgbClr val="4D4D4D">
                       <a:alpha val="100000"/>
@@ -4897,8 +4897,8 @@
           </p:nvSpPr>
           <p:spPr>
             <a:xfrm>
-              <a:off x="7741836" y="5785772"/>
-              <a:ext cx="155356" cy="80101"/>
+              <a:off x="7713757" y="5693022"/>
+              <a:ext cx="197510" cy="101955"/>
             </a:xfrm>
             <a:prstGeom prst="rect">
               <a:avLst/>
@@ -4911,7 +4911,7 @@
             <a:p>
               <a:pPr algn="l" marL="0" marR="0" indent="0">
                 <a:lnSpc>
-                  <a:spcPts val="880"/>
+                  <a:spcPts val="1120"/>
                 </a:lnSpc>
                 <a:spcBef>
                   <a:spcPts val="0"/>
@@ -4921,7 +4921,7 @@
                 </a:spcAft>
               </a:pPr>
               <a:r>
-                <a:rPr sz="880">
+                <a:rPr sz="1120">
                   <a:solidFill>
                     <a:srgbClr val="4D4D4D">
                       <a:alpha val="100000"/>
@@ -4943,8 +4943,8 @@
           </p:nvSpPr>
           <p:spPr>
             <a:xfrm>
-              <a:off x="3879271" y="5925448"/>
-              <a:ext cx="1676186" cy="100218"/>
+              <a:off x="3690153" y="5870717"/>
+              <a:ext cx="2133569" cy="127558"/>
             </a:xfrm>
             <a:prstGeom prst="rect">
               <a:avLst/>
@@ -4957,7 +4957,7 @@
             <a:p>
               <a:pPr algn="l" marL="0" marR="0" indent="0">
                 <a:lnSpc>
-                  <a:spcPts val="1100"/>
+                  <a:spcPts val="1400"/>
                 </a:lnSpc>
                 <a:spcBef>
                   <a:spcPts val="0"/>
@@ -4967,7 +4967,7 @@
                 </a:spcAft>
               </a:pPr>
               <a:r>
-                <a:rPr sz="1100">
+                <a:rPr sz="1400">
                   <a:solidFill>
                     <a:srgbClr val="000000">
                       <a:alpha val="100000"/>
@@ -4989,8 +4989,8 @@
           </p:nvSpPr>
           <p:spPr>
             <a:xfrm rot="-5400000">
-              <a:off x="68446" y="3848213"/>
-              <a:ext cx="1016904" cy="100218"/>
+              <a:off x="-37527" y="3847460"/>
+              <a:ext cx="1294150" cy="127558"/>
             </a:xfrm>
             <a:prstGeom prst="rect">
               <a:avLst/>
@@ -5003,7 +5003,7 @@
             <a:p>
               <a:pPr algn="l" marL="0" marR="0" indent="0">
                 <a:lnSpc>
-                  <a:spcPts val="1100"/>
+                  <a:spcPts val="1400"/>
                 </a:lnSpc>
                 <a:spcBef>
                   <a:spcPts val="0"/>
@@ -5013,7 +5013,7 @@
                 </a:spcAft>
               </a:pPr>
               <a:r>
-                <a:rPr sz="1100">
+                <a:rPr sz="1400">
                   <a:solidFill>
                     <a:srgbClr val="000000">
                       <a:alpha val="100000"/>
@@ -5035,8 +5035,8 @@
           </p:nvSpPr>
           <p:spPr>
             <a:xfrm>
-              <a:off x="817517" y="1896563"/>
-              <a:ext cx="4166463" cy="82021"/>
+              <a:off x="915645" y="1977589"/>
+              <a:ext cx="5556900" cy="109362"/>
             </a:xfrm>
             <a:prstGeom prst="rect">
               <a:avLst/>
@@ -5049,7 +5049,7 @@
             <a:p>
               <a:pPr algn="l" marL="0" marR="0" indent="0">
                 <a:lnSpc>
-                  <a:spcPts val="900"/>
+                  <a:spcPts val="1200"/>
                 </a:lnSpc>
                 <a:spcBef>
                   <a:spcPts val="0"/>
@@ -5059,7 +5059,7 @@
                 </a:spcAft>
               </a:pPr>
               <a:r>
-                <a:rPr sz="900">
+                <a:rPr sz="1200">
                   <a:solidFill>
                     <a:srgbClr val="404040">
                       <a:alpha val="100000"/>
@@ -5081,8 +5081,8 @@
           </p:nvSpPr>
           <p:spPr>
             <a:xfrm>
-              <a:off x="817517" y="1669789"/>
-              <a:ext cx="2197577" cy="120152"/>
+              <a:off x="915645" y="1688767"/>
+              <a:ext cx="2797515" cy="153070"/>
             </a:xfrm>
             <a:prstGeom prst="rect">
               <a:avLst/>
@@ -5095,7 +5095,7 @@
             <a:p>
               <a:pPr algn="l" marL="0" marR="0" indent="0">
                 <a:lnSpc>
-                  <a:spcPts val="1320"/>
+                  <a:spcPts val="1680"/>
                 </a:lnSpc>
                 <a:spcBef>
                   <a:spcPts val="0"/>
@@ -5105,7 +5105,7 @@
                 </a:spcAft>
               </a:pPr>
               <a:r>
-                <a:rPr sz="1320">
+                <a:rPr sz="1680">
                   <a:solidFill>
                     <a:srgbClr val="000000">
                       <a:alpha val="100000"/>
